--- a/data/V3_Beautified/Delegate_AI_V3_Investor_Pitch.pptx
+++ b/data/V3_Beautified/Delegate_AI_V3_Investor_Pitch.pptx
@@ -3154,8 +3154,8 @@
         </p:nvSpPr>
         <p:spPr>
           <a:xfrm>
-            <a:off x="8686800" y="6263640"/>
-            <a:ext cx="3200400" cy="228600"/>
+            <a:off x="731520" y="1828800"/>
+            <a:ext cx="10058400" cy="914400"/>
           </a:xfrm>
           <a:prstGeom prst="rect">
             <a:avLst/>
@@ -3168,41 +3168,6 @@
           </a:bodyPr>
           <a:lstStyle/>
           <a:p>
-            <a:pPr algn="r">
-              <a:defRPr sz="700">
-                <a:solidFill>
-                  <a:srgbClr val="4A4A6A"/>
-                </a:solidFill>
-              </a:defRPr>
-            </a:pPr>
-            <a:r>
-              <a:t>Layout: center_hero</a:t>
-            </a:r>
-          </a:p>
-        </p:txBody>
-      </p:sp>
-      <p:sp>
-        <p:nvSpPr>
-          <p:cNvPr id="4" name="TextBox 3"/>
-          <p:cNvSpPr txBox="1"/>
-          <p:nvPr/>
-        </p:nvSpPr>
-        <p:spPr>
-          <a:xfrm>
-            <a:off x="731520" y="1828800"/>
-            <a:ext cx="10058400" cy="914400"/>
-          </a:xfrm>
-          <a:prstGeom prst="rect">
-            <a:avLst/>
-          </a:prstGeom>
-          <a:noFill/>
-        </p:spPr>
-        <p:txBody>
-          <a:bodyPr wrap="square">
-            <a:spAutoFit/>
-          </a:bodyPr>
-          <a:lstStyle/>
-          <a:p>
             <a:pPr>
               <a:defRPr sz="3600" b="1">
                 <a:solidFill>
@@ -3212,14 +3177,14 @@
               </a:defRPr>
             </a:pPr>
             <a:r>
-              <a:t>Antigravity-AI - Investor Brief</a:t>
-            </a:r>
-          </a:p>
-        </p:txBody>
-      </p:sp>
-      <p:sp>
-        <p:nvSpPr>
-          <p:cNvPr id="5" name="TextBox 4"/>
+              <a:t>Antigravity-AI — Investor Brief</a:t>
+            </a:r>
+          </a:p>
+        </p:txBody>
+      </p:sp>
+      <p:sp>
+        <p:nvSpPr>
+          <p:cNvPr id="4" name="TextBox 3"/>
           <p:cNvSpPr txBox="1"/>
           <p:nvPr/>
         </p:nvSpPr>
@@ -3242,7 +3207,7 @@
             <a:pPr>
               <a:defRPr sz="1600">
                 <a:solidFill>
-                  <a:srgbClr val="64748B"/>
+                  <a:srgbClr val="94A3B8"/>
                 </a:solidFill>
                 <a:latin typeface="Roboto"/>
               </a:defRPr>
@@ -3255,14 +3220,14 @@
       </p:sp>
       <p:sp>
         <p:nvSpPr>
-          <p:cNvPr id="6" name="TextBox 5"/>
+          <p:cNvPr id="5" name="TextBox 4"/>
           <p:cNvSpPr txBox="1"/>
           <p:nvPr/>
         </p:nvSpPr>
         <p:spPr>
           <a:xfrm>
-            <a:off x="731520" y="3657600"/>
-            <a:ext cx="10058400" cy="457200"/>
+            <a:off x="731520" y="3840480"/>
+            <a:ext cx="10058400" cy="365760"/>
           </a:xfrm>
           <a:prstGeom prst="rect">
             <a:avLst/>
@@ -3278,7 +3243,7 @@
             <a:pPr>
               <a:defRPr sz="1200">
                 <a:solidFill>
-                  <a:srgbClr val="64748B"/>
+                  <a:srgbClr val="94A3B8"/>
                 </a:solidFill>
               </a:defRPr>
             </a:pPr>
@@ -3365,8 +3330,8 @@
         </p:nvSpPr>
         <p:spPr>
           <a:xfrm>
-            <a:off x="8686800" y="6263640"/>
-            <a:ext cx="3200400" cy="228600"/>
+            <a:off x="731520" y="457200"/>
+            <a:ext cx="10058400" cy="914400"/>
           </a:xfrm>
           <a:prstGeom prst="rect">
             <a:avLst/>
@@ -3379,29 +3344,365 @@
           </a:bodyPr>
           <a:lstStyle/>
           <a:p>
-            <a:pPr algn="r">
-              <a:defRPr sz="700">
-                <a:solidFill>
-                  <a:srgbClr val="4A4A6A"/>
-                </a:solidFill>
-              </a:defRPr>
-            </a:pPr>
-            <a:r>
-              <a:t>Layout: kpi_grid_top_bullets_bottom</a:t>
-            </a:r>
-          </a:p>
-        </p:txBody>
-      </p:sp>
-      <p:sp>
-        <p:nvSpPr>
-          <p:cNvPr id="4" name="TextBox 3"/>
+            <a:pPr>
+              <a:defRPr sz="2800" b="1">
+                <a:solidFill>
+                  <a:srgbClr val="FFFFFF"/>
+                </a:solidFill>
+                <a:latin typeface="Inter"/>
+              </a:defRPr>
+            </a:pPr>
+            <a:r>
+              <a:t>Executive Summary</a:t>
+            </a:r>
+          </a:p>
+        </p:txBody>
+      </p:sp>
+      <p:sp>
+        <p:nvSpPr>
+          <p:cNvPr id="4" name="Rounded Rectangle 3"/>
+          <p:cNvSpPr/>
+          <p:nvPr/>
+        </p:nvSpPr>
+        <p:spPr>
+          <a:xfrm>
+            <a:off x="731520" y="1463040"/>
+            <a:ext cx="1828800" cy="1097280"/>
+          </a:xfrm>
+          <a:prstGeom prst="roundRect">
+            <a:avLst/>
+          </a:prstGeom>
+          <a:solidFill>
+            <a:srgbClr val="1A1A2E"/>
+          </a:solidFill>
+          <a:ln w="25400">
+            <a:solidFill>
+              <a:srgbClr val="667EEA"/>
+            </a:solidFill>
+          </a:ln>
+        </p:spPr>
+        <p:style>
+          <a:lnRef idx="1">
+            <a:schemeClr val="accent1"/>
+          </a:lnRef>
+          <a:fillRef idx="3">
+            <a:schemeClr val="accent1"/>
+          </a:fillRef>
+          <a:effectRef idx="2">
+            <a:schemeClr val="accent1"/>
+          </a:effectRef>
+          <a:fontRef idx="minor">
+            <a:schemeClr val="lt1"/>
+          </a:fontRef>
+        </p:style>
+        <p:txBody>
+          <a:bodyPr rtlCol="0" anchor="ctr" wrap="square"/>
+          <a:lstStyle/>
+          <a:p>
+            <a:pPr algn="ctr">
+              <a:defRPr sz="2400" b="1">
+                <a:solidFill>
+                  <a:srgbClr val="667EEA"/>
+                </a:solidFill>
+                <a:latin typeface="Inter"/>
+              </a:defRPr>
+            </a:pPr>
+            <a:r>
+              <a:t>18</a:t>
+            </a:r>
+          </a:p>
+          <a:p>
+            <a:pPr algn="ctr">
+              <a:defRPr sz="900">
+                <a:solidFill>
+                  <a:srgbClr val="94A3B8"/>
+                </a:solidFill>
+              </a:defRPr>
+            </a:pPr>
+            <a:r>
+              <a:t>Agents</a:t>
+            </a:r>
+          </a:p>
+        </p:txBody>
+      </p:sp>
+      <p:sp>
+        <p:nvSpPr>
+          <p:cNvPr id="5" name="Rounded Rectangle 4"/>
+          <p:cNvSpPr/>
+          <p:nvPr/>
+        </p:nvSpPr>
+        <p:spPr>
+          <a:xfrm>
+            <a:off x="2926080" y="1463040"/>
+            <a:ext cx="1828800" cy="1097280"/>
+          </a:xfrm>
+          <a:prstGeom prst="roundRect">
+            <a:avLst/>
+          </a:prstGeom>
+          <a:solidFill>
+            <a:srgbClr val="1A1A2E"/>
+          </a:solidFill>
+          <a:ln w="25400">
+            <a:solidFill>
+              <a:srgbClr val="10B981"/>
+            </a:solidFill>
+          </a:ln>
+        </p:spPr>
+        <p:style>
+          <a:lnRef idx="1">
+            <a:schemeClr val="accent1"/>
+          </a:lnRef>
+          <a:fillRef idx="3">
+            <a:schemeClr val="accent1"/>
+          </a:fillRef>
+          <a:effectRef idx="2">
+            <a:schemeClr val="accent1"/>
+          </a:effectRef>
+          <a:fontRef idx="minor">
+            <a:schemeClr val="lt1"/>
+          </a:fontRef>
+        </p:style>
+        <p:txBody>
+          <a:bodyPr rtlCol="0" anchor="ctr" wrap="square"/>
+          <a:lstStyle/>
+          <a:p>
+            <a:pPr algn="ctr">
+              <a:defRPr sz="2400" b="1">
+                <a:solidFill>
+                  <a:srgbClr val="10B981"/>
+                </a:solidFill>
+                <a:latin typeface="Inter"/>
+              </a:defRPr>
+            </a:pPr>
+            <a:r>
+              <a:t>99.7%</a:t>
+            </a:r>
+          </a:p>
+          <a:p>
+            <a:pPr algn="ctr">
+              <a:defRPr sz="900">
+                <a:solidFill>
+                  <a:srgbClr val="94A3B8"/>
+                </a:solidFill>
+              </a:defRPr>
+            </a:pPr>
+            <a:r>
+              <a:t>Uptime</a:t>
+            </a:r>
+          </a:p>
+        </p:txBody>
+      </p:sp>
+      <p:sp>
+        <p:nvSpPr>
+          <p:cNvPr id="6" name="Rounded Rectangle 5"/>
+          <p:cNvSpPr/>
+          <p:nvPr/>
+        </p:nvSpPr>
+        <p:spPr>
+          <a:xfrm>
+            <a:off x="5120640" y="1463040"/>
+            <a:ext cx="1828800" cy="1097280"/>
+          </a:xfrm>
+          <a:prstGeom prst="roundRect">
+            <a:avLst/>
+          </a:prstGeom>
+          <a:solidFill>
+            <a:srgbClr val="1A1A2E"/>
+          </a:solidFill>
+          <a:ln w="25400">
+            <a:solidFill>
+              <a:srgbClr val="667EEA"/>
+            </a:solidFill>
+          </a:ln>
+        </p:spPr>
+        <p:style>
+          <a:lnRef idx="1">
+            <a:schemeClr val="accent1"/>
+          </a:lnRef>
+          <a:fillRef idx="3">
+            <a:schemeClr val="accent1"/>
+          </a:fillRef>
+          <a:effectRef idx="2">
+            <a:schemeClr val="accent1"/>
+          </a:effectRef>
+          <a:fontRef idx="minor">
+            <a:schemeClr val="lt1"/>
+          </a:fontRef>
+        </p:style>
+        <p:txBody>
+          <a:bodyPr rtlCol="0" anchor="ctr" wrap="square"/>
+          <a:lstStyle/>
+          <a:p>
+            <a:pPr algn="ctr">
+              <a:defRPr sz="2400" b="1">
+                <a:solidFill>
+                  <a:srgbClr val="667EEA"/>
+                </a:solidFill>
+                <a:latin typeface="Inter"/>
+              </a:defRPr>
+            </a:pPr>
+            <a:r>
+              <a:t>Month 2</a:t>
+            </a:r>
+          </a:p>
+          <a:p>
+            <a:pPr algn="ctr">
+              <a:defRPr sz="900">
+                <a:solidFill>
+                  <a:srgbClr val="94A3B8"/>
+                </a:solidFill>
+              </a:defRPr>
+            </a:pPr>
+            <a:r>
+              <a:t>Break-Even</a:t>
+            </a:r>
+          </a:p>
+        </p:txBody>
+      </p:sp>
+      <p:sp>
+        <p:nvSpPr>
+          <p:cNvPr id="7" name="Rounded Rectangle 6"/>
+          <p:cNvSpPr/>
+          <p:nvPr/>
+        </p:nvSpPr>
+        <p:spPr>
+          <a:xfrm>
+            <a:off x="7315200" y="1463040"/>
+            <a:ext cx="1828800" cy="1097280"/>
+          </a:xfrm>
+          <a:prstGeom prst="roundRect">
+            <a:avLst/>
+          </a:prstGeom>
+          <a:solidFill>
+            <a:srgbClr val="1A1A2E"/>
+          </a:solidFill>
+          <a:ln w="25400">
+            <a:solidFill>
+              <a:srgbClr val="10B981"/>
+            </a:solidFill>
+          </a:ln>
+        </p:spPr>
+        <p:style>
+          <a:lnRef idx="1">
+            <a:schemeClr val="accent1"/>
+          </a:lnRef>
+          <a:fillRef idx="3">
+            <a:schemeClr val="accent1"/>
+          </a:fillRef>
+          <a:effectRef idx="2">
+            <a:schemeClr val="accent1"/>
+          </a:effectRef>
+          <a:fontRef idx="minor">
+            <a:schemeClr val="lt1"/>
+          </a:fontRef>
+        </p:style>
+        <p:txBody>
+          <a:bodyPr rtlCol="0" anchor="ctr" wrap="square"/>
+          <a:lstStyle/>
+          <a:p>
+            <a:pPr algn="ctr">
+              <a:defRPr sz="2400" b="1">
+                <a:solidFill>
+                  <a:srgbClr val="10B981"/>
+                </a:solidFill>
+                <a:latin typeface="Inter"/>
+              </a:defRPr>
+            </a:pPr>
+            <a:r>
+              <a:t>340%</a:t>
+            </a:r>
+          </a:p>
+          <a:p>
+            <a:pPr algn="ctr">
+              <a:defRPr sz="900">
+                <a:solidFill>
+                  <a:srgbClr val="94A3B8"/>
+                </a:solidFill>
+              </a:defRPr>
+            </a:pPr>
+            <a:r>
+              <a:t>ROI (Y1)</a:t>
+            </a:r>
+          </a:p>
+        </p:txBody>
+      </p:sp>
+      <p:sp>
+        <p:nvSpPr>
+          <p:cNvPr id="8" name="Rounded Rectangle 7"/>
+          <p:cNvSpPr/>
+          <p:nvPr/>
+        </p:nvSpPr>
+        <p:spPr>
+          <a:xfrm>
+            <a:off x="9509760" y="1463040"/>
+            <a:ext cx="1828800" cy="1097280"/>
+          </a:xfrm>
+          <a:prstGeom prst="roundRect">
+            <a:avLst/>
+          </a:prstGeom>
+          <a:solidFill>
+            <a:srgbClr val="1A1A2E"/>
+          </a:solidFill>
+          <a:ln w="25400">
+            <a:solidFill>
+              <a:srgbClr val="EAB308"/>
+            </a:solidFill>
+          </a:ln>
+        </p:spPr>
+        <p:style>
+          <a:lnRef idx="1">
+            <a:schemeClr val="accent1"/>
+          </a:lnRef>
+          <a:fillRef idx="3">
+            <a:schemeClr val="accent1"/>
+          </a:fillRef>
+          <a:effectRef idx="2">
+            <a:schemeClr val="accent1"/>
+          </a:effectRef>
+          <a:fontRef idx="minor">
+            <a:schemeClr val="lt1"/>
+          </a:fontRef>
+        </p:style>
+        <p:txBody>
+          <a:bodyPr rtlCol="0" anchor="ctr" wrap="square"/>
+          <a:lstStyle/>
+          <a:p>
+            <a:pPr algn="ctr">
+              <a:defRPr sz="2400" b="1">
+                <a:solidFill>
+                  <a:srgbClr val="EAB308"/>
+                </a:solidFill>
+                <a:latin typeface="Inter"/>
+              </a:defRPr>
+            </a:pPr>
+            <a:r>
+              <a:t>50+</a:t>
+            </a:r>
+          </a:p>
+          <a:p>
+            <a:pPr algn="ctr">
+              <a:defRPr sz="900">
+                <a:solidFill>
+                  <a:srgbClr val="94A3B8"/>
+                </a:solidFill>
+              </a:defRPr>
+            </a:pPr>
+            <a:r>
+              <a:t>Signals/Day</a:t>
+            </a:r>
+          </a:p>
+        </p:txBody>
+      </p:sp>
+      <p:sp>
+        <p:nvSpPr>
+          <p:cNvPr id="9" name="TextBox 8"/>
           <p:cNvSpPr txBox="1"/>
           <p:nvPr/>
         </p:nvSpPr>
         <p:spPr>
           <a:xfrm>
-            <a:off x="731520" y="457200"/>
-            <a:ext cx="10058400" cy="914400"/>
+            <a:off x="731520" y="2926080"/>
+            <a:ext cx="10058400" cy="4389120"/>
           </a:xfrm>
           <a:prstGeom prst="rect">
             <a:avLst/>
@@ -3415,44 +3716,24 @@
           <a:lstStyle/>
           <a:p>
             <a:pPr>
-              <a:defRPr sz="2800" b="1">
-                <a:solidFill>
-                  <a:srgbClr val="FFFFFF"/>
-                </a:solidFill>
-                <a:latin typeface="Inter"/>
-              </a:defRPr>
-            </a:pPr>
-            <a:r>
-              <a:t>Executive Summary</a:t>
-            </a:r>
-          </a:p>
-        </p:txBody>
-      </p:sp>
-      <p:sp>
-        <p:nvSpPr>
-          <p:cNvPr id="5" name="TextBox 4"/>
-          <p:cNvSpPr txBox="1"/>
-          <p:nvPr/>
-        </p:nvSpPr>
-        <p:spPr>
-          <a:xfrm>
-            <a:off x="731520" y="1645920"/>
-            <a:ext cx="10058400" cy="4389120"/>
-          </a:xfrm>
-          <a:prstGeom prst="rect">
-            <a:avLst/>
-          </a:prstGeom>
-          <a:noFill/>
-        </p:spPr>
-        <p:txBody>
-          <a:bodyPr wrap="square">
-            <a:spAutoFit/>
-          </a:bodyPr>
-          <a:lstStyle/>
+              <a:spcAft>
+                <a:spcPts val="1000"/>
+              </a:spcAft>
+              <a:defRPr sz="1500">
+                <a:solidFill>
+                  <a:srgbClr val="C0C8E0"/>
+                </a:solidFill>
+                <a:latin typeface="Roboto"/>
+              </a:defRPr>
+            </a:pPr>
+            <a:r>
+              <a:t>    18-agent autonomous network managing trading, analysis &amp; ops</a:t>
+            </a:r>
+          </a:p>
           <a:p>
             <a:pPr>
               <a:spcAft>
-                <a:spcPts val="1200"/>
+                <a:spcPts val="1000"/>
               </a:spcAft>
               <a:defRPr sz="1500">
                 <a:solidFill>
@@ -3462,13 +3743,13 @@
               </a:defRPr>
             </a:pPr>
             <a:r>
-              <a:t>    18-agent autonomous AI network (V7 Router)</a:t>
+              <a:t>    Self-healing with Leitner 5-level error triage</a:t>
             </a:r>
           </a:p>
           <a:p>
             <a:pPr>
               <a:spcAft>
-                <a:spcPts val="1200"/>
+                <a:spcPts val="1000"/>
               </a:spcAft>
               <a:defRPr sz="1500">
                 <a:solidFill>
@@ -3478,55 +3759,7 @@
               </a:defRPr>
             </a:pPr>
             <a:r>
-              <a:t>    Processing 50+ actionable signals/day</a:t>
-            </a:r>
-          </a:p>
-          <a:p>
-            <a:pPr>
-              <a:spcAft>
-                <a:spcPts val="1200"/>
-              </a:spcAft>
-              <a:defRPr sz="1500">
-                <a:solidFill>
-                  <a:srgbClr val="C0C8E0"/>
-                </a:solidFill>
-                <a:latin typeface="Roboto"/>
-              </a:defRPr>
-            </a:pPr>
-            <a:r>
-              <a:t>    Self-healing infrastructure with 99.7% uptime target</a:t>
-            </a:r>
-          </a:p>
-          <a:p>
-            <a:pPr>
-              <a:spcAft>
-                <a:spcPts val="1200"/>
-              </a:spcAft>
-              <a:defRPr sz="1500">
-                <a:solidFill>
-                  <a:srgbClr val="C0C8E0"/>
-                </a:solidFill>
-                <a:latin typeface="Roboto"/>
-              </a:defRPr>
-            </a:pPr>
-            <a:r>
-              <a:t>    Break-even: Month 2</a:t>
-            </a:r>
-          </a:p>
-          <a:p>
-            <a:pPr>
-              <a:spcAft>
-                <a:spcPts val="1200"/>
-              </a:spcAft>
-              <a:defRPr sz="1500">
-                <a:solidFill>
-                  <a:srgbClr val="C0C8E0"/>
-                </a:solidFill>
-                <a:latin typeface="Roboto"/>
-              </a:defRPr>
-            </a:pPr>
-            <a:r>
-              <a:t>    Projected ROI: 340% Year 1</a:t>
+              <a:t>    EQ Engine adapts to operator stress in real-time</a:t>
             </a:r>
           </a:p>
         </p:txBody>
@@ -3608,8 +3841,8 @@
         </p:nvSpPr>
         <p:spPr>
           <a:xfrm>
-            <a:off x="8686800" y="6263640"/>
-            <a:ext cx="3200400" cy="228600"/>
+            <a:off x="731520" y="457200"/>
+            <a:ext cx="10058400" cy="914400"/>
           </a:xfrm>
           <a:prstGeom prst="rect">
             <a:avLst/>
@@ -3622,29 +3855,1305 @@
           </a:bodyPr>
           <a:lstStyle/>
           <a:p>
-            <a:pPr algn="r">
-              <a:defRPr sz="700">
-                <a:solidFill>
-                  <a:srgbClr val="4A4A6A"/>
-                </a:solidFill>
-              </a:defRPr>
-            </a:pPr>
-            <a:r>
-              <a:t>Layout: split_diagram_left_text_right</a:t>
-            </a:r>
-          </a:p>
-        </p:txBody>
-      </p:sp>
-      <p:sp>
-        <p:nvSpPr>
-          <p:cNvPr id="4" name="TextBox 3"/>
+            <a:pPr>
+              <a:defRPr sz="2800" b="1">
+                <a:solidFill>
+                  <a:srgbClr val="FFFFFF"/>
+                </a:solidFill>
+                <a:latin typeface="Inter"/>
+              </a:defRPr>
+            </a:pPr>
+            <a:r>
+              <a:t>Agent Network Architecture (V7)</a:t>
+            </a:r>
+          </a:p>
+        </p:txBody>
+      </p:sp>
+      <p:sp>
+        <p:nvSpPr>
+          <p:cNvPr id="4" name="Rounded Rectangle 3"/>
+          <p:cNvSpPr/>
+          <p:nvPr/>
+        </p:nvSpPr>
+        <p:spPr>
+          <a:xfrm>
+            <a:off x="274320" y="1645920"/>
+            <a:ext cx="1920240" cy="411480"/>
+          </a:xfrm>
+          <a:prstGeom prst="roundRect">
+            <a:avLst/>
+          </a:prstGeom>
+          <a:solidFill>
+            <a:srgbClr val="667EEA"/>
+          </a:solidFill>
+          <a:ln>
+            <a:noFill/>
+          </a:ln>
+        </p:spPr>
+        <p:style>
+          <a:lnRef idx="1">
+            <a:schemeClr val="accent1"/>
+          </a:lnRef>
+          <a:fillRef idx="3">
+            <a:schemeClr val="accent1"/>
+          </a:fillRef>
+          <a:effectRef idx="2">
+            <a:schemeClr val="accent1"/>
+          </a:effectRef>
+          <a:fontRef idx="minor">
+            <a:schemeClr val="lt1"/>
+          </a:fontRef>
+        </p:style>
+        <p:txBody>
+          <a:bodyPr rtlCol="0" anchor="ctr"/>
+          <a:lstStyle/>
+          <a:p>
+            <a:pPr algn="ctr">
+              <a:defRPr sz="1000" b="1">
+                <a:solidFill>
+                  <a:srgbClr val="FFFFFF"/>
+                </a:solidFill>
+              </a:defRPr>
+            </a:pPr>
+            <a:r>
+              <a:t>System Core</a:t>
+            </a:r>
+          </a:p>
+        </p:txBody>
+      </p:sp>
+      <p:sp>
+        <p:nvSpPr>
+          <p:cNvPr id="5" name="Rounded Rectangle 4"/>
+          <p:cNvSpPr/>
+          <p:nvPr/>
+        </p:nvSpPr>
+        <p:spPr>
+          <a:xfrm>
+            <a:off x="320040" y="2148840"/>
+            <a:ext cx="1828800" cy="384048"/>
+          </a:xfrm>
+          <a:prstGeom prst="roundRect">
+            <a:avLst/>
+          </a:prstGeom>
+          <a:solidFill>
+            <a:srgbClr val="1A1A2E"/>
+          </a:solidFill>
+          <a:ln w="12700">
+            <a:solidFill>
+              <a:srgbClr val="667EEA"/>
+            </a:solidFill>
+          </a:ln>
+        </p:spPr>
+        <p:style>
+          <a:lnRef idx="1">
+            <a:schemeClr val="accent1"/>
+          </a:lnRef>
+          <a:fillRef idx="3">
+            <a:schemeClr val="accent1"/>
+          </a:fillRef>
+          <a:effectRef idx="2">
+            <a:schemeClr val="accent1"/>
+          </a:effectRef>
+          <a:fontRef idx="minor">
+            <a:schemeClr val="lt1"/>
+          </a:fontRef>
+        </p:style>
+        <p:txBody>
+          <a:bodyPr rtlCol="0" anchor="ctr"/>
+          <a:lstStyle/>
+          <a:p>
+            <a:pPr algn="ctr">
+              <a:defRPr sz="900" b="1">
+                <a:solidFill>
+                  <a:srgbClr val="FFFFFF"/>
+                </a:solidFill>
+              </a:defRPr>
+            </a:pPr>
+            <a:r>
+              <a:t>CEO</a:t>
+            </a:r>
+          </a:p>
+        </p:txBody>
+      </p:sp>
+      <p:sp>
+        <p:nvSpPr>
+          <p:cNvPr id="6" name="Rounded Rectangle 5"/>
+          <p:cNvSpPr/>
+          <p:nvPr/>
+        </p:nvSpPr>
+        <p:spPr>
+          <a:xfrm>
+            <a:off x="320040" y="2651760"/>
+            <a:ext cx="1828800" cy="384048"/>
+          </a:xfrm>
+          <a:prstGeom prst="roundRect">
+            <a:avLst/>
+          </a:prstGeom>
+          <a:solidFill>
+            <a:srgbClr val="1A1A2E"/>
+          </a:solidFill>
+          <a:ln w="12700">
+            <a:solidFill>
+              <a:srgbClr val="667EEA"/>
+            </a:solidFill>
+          </a:ln>
+        </p:spPr>
+        <p:style>
+          <a:lnRef idx="1">
+            <a:schemeClr val="accent1"/>
+          </a:lnRef>
+          <a:fillRef idx="3">
+            <a:schemeClr val="accent1"/>
+          </a:fillRef>
+          <a:effectRef idx="2">
+            <a:schemeClr val="accent1"/>
+          </a:effectRef>
+          <a:fontRef idx="minor">
+            <a:schemeClr val="lt1"/>
+          </a:fontRef>
+        </p:style>
+        <p:txBody>
+          <a:bodyPr rtlCol="0" anchor="ctr"/>
+          <a:lstStyle/>
+          <a:p>
+            <a:pPr algn="ctr">
+              <a:defRPr sz="900" b="1">
+                <a:solidFill>
+                  <a:srgbClr val="FFFFFF"/>
+                </a:solidFill>
+              </a:defRPr>
+            </a:pPr>
+            <a:r>
+              <a:t>CFO</a:t>
+            </a:r>
+          </a:p>
+        </p:txBody>
+      </p:sp>
+      <p:sp>
+        <p:nvSpPr>
+          <p:cNvPr id="7" name="Rounded Rectangle 6"/>
+          <p:cNvSpPr/>
+          <p:nvPr/>
+        </p:nvSpPr>
+        <p:spPr>
+          <a:xfrm>
+            <a:off x="320040" y="3154680"/>
+            <a:ext cx="1828800" cy="384048"/>
+          </a:xfrm>
+          <a:prstGeom prst="roundRect">
+            <a:avLst/>
+          </a:prstGeom>
+          <a:solidFill>
+            <a:srgbClr val="1A1A2E"/>
+          </a:solidFill>
+          <a:ln w="12700">
+            <a:solidFill>
+              <a:srgbClr val="667EEA"/>
+            </a:solidFill>
+          </a:ln>
+        </p:spPr>
+        <p:style>
+          <a:lnRef idx="1">
+            <a:schemeClr val="accent1"/>
+          </a:lnRef>
+          <a:fillRef idx="3">
+            <a:schemeClr val="accent1"/>
+          </a:fillRef>
+          <a:effectRef idx="2">
+            <a:schemeClr val="accent1"/>
+          </a:effectRef>
+          <a:fontRef idx="minor">
+            <a:schemeClr val="lt1"/>
+          </a:fontRef>
+        </p:style>
+        <p:txBody>
+          <a:bodyPr rtlCol="0" anchor="ctr"/>
+          <a:lstStyle/>
+          <a:p>
+            <a:pPr algn="ctr">
+              <a:defRPr sz="900" b="1">
+                <a:solidFill>
+                  <a:srgbClr val="FFFFFF"/>
+                </a:solidFill>
+              </a:defRPr>
+            </a:pPr>
+            <a:r>
+              <a:t>CTO</a:t>
+            </a:r>
+          </a:p>
+        </p:txBody>
+      </p:sp>
+      <p:sp>
+        <p:nvSpPr>
+          <p:cNvPr id="8" name="Rounded Rectangle 7"/>
+          <p:cNvSpPr/>
+          <p:nvPr/>
+        </p:nvSpPr>
+        <p:spPr>
+          <a:xfrm>
+            <a:off x="320040" y="3657600"/>
+            <a:ext cx="1828800" cy="384048"/>
+          </a:xfrm>
+          <a:prstGeom prst="roundRect">
+            <a:avLst/>
+          </a:prstGeom>
+          <a:solidFill>
+            <a:srgbClr val="1A1A2E"/>
+          </a:solidFill>
+          <a:ln w="12700">
+            <a:solidFill>
+              <a:srgbClr val="667EEA"/>
+            </a:solidFill>
+          </a:ln>
+        </p:spPr>
+        <p:style>
+          <a:lnRef idx="1">
+            <a:schemeClr val="accent1"/>
+          </a:lnRef>
+          <a:fillRef idx="3">
+            <a:schemeClr val="accent1"/>
+          </a:fillRef>
+          <a:effectRef idx="2">
+            <a:schemeClr val="accent1"/>
+          </a:effectRef>
+          <a:fontRef idx="minor">
+            <a:schemeClr val="lt1"/>
+          </a:fontRef>
+        </p:style>
+        <p:txBody>
+          <a:bodyPr rtlCol="0" anchor="ctr"/>
+          <a:lstStyle/>
+          <a:p>
+            <a:pPr algn="ctr">
+              <a:defRPr sz="900" b="1">
+                <a:solidFill>
+                  <a:srgbClr val="FFFFFF"/>
+                </a:solidFill>
+              </a:defRPr>
+            </a:pPr>
+            <a:r>
+              <a:t>Aether</a:t>
+            </a:r>
+          </a:p>
+        </p:txBody>
+      </p:sp>
+      <p:sp>
+        <p:nvSpPr>
+          <p:cNvPr id="9" name="Rounded Rectangle 8"/>
+          <p:cNvSpPr/>
+          <p:nvPr/>
+        </p:nvSpPr>
+        <p:spPr>
+          <a:xfrm>
+            <a:off x="320040" y="4160520"/>
+            <a:ext cx="1828800" cy="384048"/>
+          </a:xfrm>
+          <a:prstGeom prst="roundRect">
+            <a:avLst/>
+          </a:prstGeom>
+          <a:solidFill>
+            <a:srgbClr val="1A1A2E"/>
+          </a:solidFill>
+          <a:ln w="12700">
+            <a:solidFill>
+              <a:srgbClr val="667EEA"/>
+            </a:solidFill>
+          </a:ln>
+        </p:spPr>
+        <p:style>
+          <a:lnRef idx="1">
+            <a:schemeClr val="accent1"/>
+          </a:lnRef>
+          <a:fillRef idx="3">
+            <a:schemeClr val="accent1"/>
+          </a:fillRef>
+          <a:effectRef idx="2">
+            <a:schemeClr val="accent1"/>
+          </a:effectRef>
+          <a:fontRef idx="minor">
+            <a:schemeClr val="lt1"/>
+          </a:fontRef>
+        </p:style>
+        <p:txBody>
+          <a:bodyPr rtlCol="0" anchor="ctr"/>
+          <a:lstStyle/>
+          <a:p>
+            <a:pPr algn="ctr">
+              <a:defRPr sz="900" b="1">
+                <a:solidFill>
+                  <a:srgbClr val="FFFFFF"/>
+                </a:solidFill>
+              </a:defRPr>
+            </a:pPr>
+            <a:r>
+              <a:t>Delegate AI</a:t>
+            </a:r>
+          </a:p>
+        </p:txBody>
+      </p:sp>
+      <p:sp>
+        <p:nvSpPr>
+          <p:cNvPr id="10" name="Rounded Rectangle 9"/>
+          <p:cNvSpPr/>
+          <p:nvPr/>
+        </p:nvSpPr>
+        <p:spPr>
+          <a:xfrm>
+            <a:off x="320040" y="4663440"/>
+            <a:ext cx="1828800" cy="384048"/>
+          </a:xfrm>
+          <a:prstGeom prst="roundRect">
+            <a:avLst/>
+          </a:prstGeom>
+          <a:solidFill>
+            <a:srgbClr val="1A1A2E"/>
+          </a:solidFill>
+          <a:ln w="12700">
+            <a:solidFill>
+              <a:srgbClr val="667EEA"/>
+            </a:solidFill>
+          </a:ln>
+        </p:spPr>
+        <p:style>
+          <a:lnRef idx="1">
+            <a:schemeClr val="accent1"/>
+          </a:lnRef>
+          <a:fillRef idx="3">
+            <a:schemeClr val="accent1"/>
+          </a:fillRef>
+          <a:effectRef idx="2">
+            <a:schemeClr val="accent1"/>
+          </a:effectRef>
+          <a:fontRef idx="minor">
+            <a:schemeClr val="lt1"/>
+          </a:fontRef>
+        </p:style>
+        <p:txBody>
+          <a:bodyPr rtlCol="0" anchor="ctr"/>
+          <a:lstStyle/>
+          <a:p>
+            <a:pPr algn="ctr">
+              <a:defRPr sz="900" b="1">
+                <a:solidFill>
+                  <a:srgbClr val="FFFFFF"/>
+                </a:solidFill>
+              </a:defRPr>
+            </a:pPr>
+            <a:r>
+              <a:t>EQ Engine</a:t>
+            </a:r>
+          </a:p>
+        </p:txBody>
+      </p:sp>
+      <p:sp>
+        <p:nvSpPr>
+          <p:cNvPr id="11" name="Rounded Rectangle 10"/>
+          <p:cNvSpPr/>
+          <p:nvPr/>
+        </p:nvSpPr>
+        <p:spPr>
+          <a:xfrm>
+            <a:off x="2377440" y="1645920"/>
+            <a:ext cx="1920240" cy="411480"/>
+          </a:xfrm>
+          <a:prstGeom prst="roundRect">
+            <a:avLst/>
+          </a:prstGeom>
+          <a:solidFill>
+            <a:srgbClr val="10B981"/>
+          </a:solidFill>
+          <a:ln>
+            <a:noFill/>
+          </a:ln>
+        </p:spPr>
+        <p:style>
+          <a:lnRef idx="1">
+            <a:schemeClr val="accent1"/>
+          </a:lnRef>
+          <a:fillRef idx="3">
+            <a:schemeClr val="accent1"/>
+          </a:fillRef>
+          <a:effectRef idx="2">
+            <a:schemeClr val="accent1"/>
+          </a:effectRef>
+          <a:fontRef idx="minor">
+            <a:schemeClr val="lt1"/>
+          </a:fontRef>
+        </p:style>
+        <p:txBody>
+          <a:bodyPr rtlCol="0" anchor="ctr"/>
+          <a:lstStyle/>
+          <a:p>
+            <a:pPr algn="ctr">
+              <a:defRPr sz="1000" b="1">
+                <a:solidFill>
+                  <a:srgbClr val="FFFFFF"/>
+                </a:solidFill>
+              </a:defRPr>
+            </a:pPr>
+            <a:r>
+              <a:t>Intelligence</a:t>
+            </a:r>
+          </a:p>
+        </p:txBody>
+      </p:sp>
+      <p:sp>
+        <p:nvSpPr>
+          <p:cNvPr id="12" name="Rounded Rectangle 11"/>
+          <p:cNvSpPr/>
+          <p:nvPr/>
+        </p:nvSpPr>
+        <p:spPr>
+          <a:xfrm>
+            <a:off x="2423160" y="2148840"/>
+            <a:ext cx="1828800" cy="384048"/>
+          </a:xfrm>
+          <a:prstGeom prst="roundRect">
+            <a:avLst/>
+          </a:prstGeom>
+          <a:solidFill>
+            <a:srgbClr val="1A1A2E"/>
+          </a:solidFill>
+          <a:ln w="12700">
+            <a:solidFill>
+              <a:srgbClr val="667EEA"/>
+            </a:solidFill>
+          </a:ln>
+        </p:spPr>
+        <p:style>
+          <a:lnRef idx="1">
+            <a:schemeClr val="accent1"/>
+          </a:lnRef>
+          <a:fillRef idx="3">
+            <a:schemeClr val="accent1"/>
+          </a:fillRef>
+          <a:effectRef idx="2">
+            <a:schemeClr val="accent1"/>
+          </a:effectRef>
+          <a:fontRef idx="minor">
+            <a:schemeClr val="lt1"/>
+          </a:fontRef>
+        </p:style>
+        <p:txBody>
+          <a:bodyPr rtlCol="0" anchor="ctr"/>
+          <a:lstStyle/>
+          <a:p>
+            <a:pPr algn="ctr">
+              <a:defRPr sz="900" b="1">
+                <a:solidFill>
+                  <a:srgbClr val="FFFFFF"/>
+                </a:solidFill>
+              </a:defRPr>
+            </a:pPr>
+            <a:r>
+              <a:t>GeoTalent</a:t>
+            </a:r>
+          </a:p>
+        </p:txBody>
+      </p:sp>
+      <p:sp>
+        <p:nvSpPr>
+          <p:cNvPr id="13" name="Rounded Rectangle 12"/>
+          <p:cNvSpPr/>
+          <p:nvPr/>
+        </p:nvSpPr>
+        <p:spPr>
+          <a:xfrm>
+            <a:off x="2423160" y="2651760"/>
+            <a:ext cx="1828800" cy="384048"/>
+          </a:xfrm>
+          <a:prstGeom prst="roundRect">
+            <a:avLst/>
+          </a:prstGeom>
+          <a:solidFill>
+            <a:srgbClr val="1A1A2E"/>
+          </a:solidFill>
+          <a:ln w="12700">
+            <a:solidFill>
+              <a:srgbClr val="667EEA"/>
+            </a:solidFill>
+          </a:ln>
+        </p:spPr>
+        <p:style>
+          <a:lnRef idx="1">
+            <a:schemeClr val="accent1"/>
+          </a:lnRef>
+          <a:fillRef idx="3">
+            <a:schemeClr val="accent1"/>
+          </a:fillRef>
+          <a:effectRef idx="2">
+            <a:schemeClr val="accent1"/>
+          </a:effectRef>
+          <a:fontRef idx="minor">
+            <a:schemeClr val="lt1"/>
+          </a:fontRef>
+        </p:style>
+        <p:txBody>
+          <a:bodyPr rtlCol="0" anchor="ctr"/>
+          <a:lstStyle/>
+          <a:p>
+            <a:pPr algn="ctr">
+              <a:defRPr sz="900" b="1">
+                <a:solidFill>
+                  <a:srgbClr val="FFFFFF"/>
+                </a:solidFill>
+              </a:defRPr>
+            </a:pPr>
+            <a:r>
+              <a:t>News Bureau</a:t>
+            </a:r>
+          </a:p>
+        </p:txBody>
+      </p:sp>
+      <p:sp>
+        <p:nvSpPr>
+          <p:cNvPr id="14" name="Rounded Rectangle 13"/>
+          <p:cNvSpPr/>
+          <p:nvPr/>
+        </p:nvSpPr>
+        <p:spPr>
+          <a:xfrm>
+            <a:off x="2423160" y="3154680"/>
+            <a:ext cx="1828800" cy="384048"/>
+          </a:xfrm>
+          <a:prstGeom prst="roundRect">
+            <a:avLst/>
+          </a:prstGeom>
+          <a:solidFill>
+            <a:srgbClr val="1A1A2E"/>
+          </a:solidFill>
+          <a:ln w="12700">
+            <a:solidFill>
+              <a:srgbClr val="667EEA"/>
+            </a:solidFill>
+          </a:ln>
+        </p:spPr>
+        <p:style>
+          <a:lnRef idx="1">
+            <a:schemeClr val="accent1"/>
+          </a:lnRef>
+          <a:fillRef idx="3">
+            <a:schemeClr val="accent1"/>
+          </a:fillRef>
+          <a:effectRef idx="2">
+            <a:schemeClr val="accent1"/>
+          </a:effectRef>
+          <a:fontRef idx="minor">
+            <a:schemeClr val="lt1"/>
+          </a:fontRef>
+        </p:style>
+        <p:txBody>
+          <a:bodyPr rtlCol="0" anchor="ctr"/>
+          <a:lstStyle/>
+          <a:p>
+            <a:pPr algn="ctr">
+              <a:defRPr sz="900" b="1">
+                <a:solidFill>
+                  <a:srgbClr val="FFFFFF"/>
+                </a:solidFill>
+              </a:defRPr>
+            </a:pPr>
+            <a:r>
+              <a:t>Deep Crawler</a:t>
+            </a:r>
+          </a:p>
+        </p:txBody>
+      </p:sp>
+      <p:sp>
+        <p:nvSpPr>
+          <p:cNvPr id="15" name="Rounded Rectangle 14"/>
+          <p:cNvSpPr/>
+          <p:nvPr/>
+        </p:nvSpPr>
+        <p:spPr>
+          <a:xfrm>
+            <a:off x="2423160" y="3657600"/>
+            <a:ext cx="1828800" cy="384048"/>
+          </a:xfrm>
+          <a:prstGeom prst="roundRect">
+            <a:avLst/>
+          </a:prstGeom>
+          <a:solidFill>
+            <a:srgbClr val="1A1A2E"/>
+          </a:solidFill>
+          <a:ln w="12700">
+            <a:solidFill>
+              <a:srgbClr val="667EEA"/>
+            </a:solidFill>
+          </a:ln>
+        </p:spPr>
+        <p:style>
+          <a:lnRef idx="1">
+            <a:schemeClr val="accent1"/>
+          </a:lnRef>
+          <a:fillRef idx="3">
+            <a:schemeClr val="accent1"/>
+          </a:fillRef>
+          <a:effectRef idx="2">
+            <a:schemeClr val="accent1"/>
+          </a:effectRef>
+          <a:fontRef idx="minor">
+            <a:schemeClr val="lt1"/>
+          </a:fontRef>
+        </p:style>
+        <p:txBody>
+          <a:bodyPr rtlCol="0" anchor="ctr"/>
+          <a:lstStyle/>
+          <a:p>
+            <a:pPr algn="ctr">
+              <a:defRPr sz="900" b="1">
+                <a:solidFill>
+                  <a:srgbClr val="FFFFFF"/>
+                </a:solidFill>
+              </a:defRPr>
+            </a:pPr>
+            <a:r>
+              <a:t>Researcher</a:t>
+            </a:r>
+          </a:p>
+        </p:txBody>
+      </p:sp>
+      <p:sp>
+        <p:nvSpPr>
+          <p:cNvPr id="16" name="Rounded Rectangle 15"/>
+          <p:cNvSpPr/>
+          <p:nvPr/>
+        </p:nvSpPr>
+        <p:spPr>
+          <a:xfrm>
+            <a:off x="4480560" y="1645920"/>
+            <a:ext cx="1920240" cy="411480"/>
+          </a:xfrm>
+          <a:prstGeom prst="roundRect">
+            <a:avLst/>
+          </a:prstGeom>
+          <a:solidFill>
+            <a:srgbClr val="F97316"/>
+          </a:solidFill>
+          <a:ln>
+            <a:noFill/>
+          </a:ln>
+        </p:spPr>
+        <p:style>
+          <a:lnRef idx="1">
+            <a:schemeClr val="accent1"/>
+          </a:lnRef>
+          <a:fillRef idx="3">
+            <a:schemeClr val="accent1"/>
+          </a:fillRef>
+          <a:effectRef idx="2">
+            <a:schemeClr val="accent1"/>
+          </a:effectRef>
+          <a:fontRef idx="minor">
+            <a:schemeClr val="lt1"/>
+          </a:fontRef>
+        </p:style>
+        <p:txBody>
+          <a:bodyPr rtlCol="0" anchor="ctr"/>
+          <a:lstStyle/>
+          <a:p>
+            <a:pPr algn="ctr">
+              <a:defRPr sz="1000" b="1">
+                <a:solidFill>
+                  <a:srgbClr val="FFFFFF"/>
+                </a:solidFill>
+              </a:defRPr>
+            </a:pPr>
+            <a:r>
+              <a:t>Quality Gate</a:t>
+            </a:r>
+          </a:p>
+        </p:txBody>
+      </p:sp>
+      <p:sp>
+        <p:nvSpPr>
+          <p:cNvPr id="17" name="Rounded Rectangle 16"/>
+          <p:cNvSpPr/>
+          <p:nvPr/>
+        </p:nvSpPr>
+        <p:spPr>
+          <a:xfrm>
+            <a:off x="4526280" y="2148840"/>
+            <a:ext cx="1828800" cy="384048"/>
+          </a:xfrm>
+          <a:prstGeom prst="roundRect">
+            <a:avLst/>
+          </a:prstGeom>
+          <a:solidFill>
+            <a:srgbClr val="1A1A2E"/>
+          </a:solidFill>
+          <a:ln w="12700">
+            <a:solidFill>
+              <a:srgbClr val="667EEA"/>
+            </a:solidFill>
+          </a:ln>
+        </p:spPr>
+        <p:style>
+          <a:lnRef idx="1">
+            <a:schemeClr val="accent1"/>
+          </a:lnRef>
+          <a:fillRef idx="3">
+            <a:schemeClr val="accent1"/>
+          </a:fillRef>
+          <a:effectRef idx="2">
+            <a:schemeClr val="accent1"/>
+          </a:effectRef>
+          <a:fontRef idx="minor">
+            <a:schemeClr val="lt1"/>
+          </a:fontRef>
+        </p:style>
+        <p:txBody>
+          <a:bodyPr rtlCol="0" anchor="ctr"/>
+          <a:lstStyle/>
+          <a:p>
+            <a:pPr algn="ctr">
+              <a:defRPr sz="900" b="1">
+                <a:solidFill>
+                  <a:srgbClr val="FFFFFF"/>
+                </a:solidFill>
+              </a:defRPr>
+            </a:pPr>
+            <a:r>
+              <a:t>Critic</a:t>
+            </a:r>
+          </a:p>
+        </p:txBody>
+      </p:sp>
+      <p:sp>
+        <p:nvSpPr>
+          <p:cNvPr id="18" name="Rounded Rectangle 17"/>
+          <p:cNvSpPr/>
+          <p:nvPr/>
+        </p:nvSpPr>
+        <p:spPr>
+          <a:xfrm>
+            <a:off x="4526280" y="2651760"/>
+            <a:ext cx="1828800" cy="384048"/>
+          </a:xfrm>
+          <a:prstGeom prst="roundRect">
+            <a:avLst/>
+          </a:prstGeom>
+          <a:solidFill>
+            <a:srgbClr val="1A1A2E"/>
+          </a:solidFill>
+          <a:ln w="12700">
+            <a:solidFill>
+              <a:srgbClr val="667EEA"/>
+            </a:solidFill>
+          </a:ln>
+        </p:spPr>
+        <p:style>
+          <a:lnRef idx="1">
+            <a:schemeClr val="accent1"/>
+          </a:lnRef>
+          <a:fillRef idx="3">
+            <a:schemeClr val="accent1"/>
+          </a:fillRef>
+          <a:effectRef idx="2">
+            <a:schemeClr val="accent1"/>
+          </a:effectRef>
+          <a:fontRef idx="minor">
+            <a:schemeClr val="lt1"/>
+          </a:fontRef>
+        </p:style>
+        <p:txBody>
+          <a:bodyPr rtlCol="0" anchor="ctr"/>
+          <a:lstStyle/>
+          <a:p>
+            <a:pPr algn="ctr">
+              <a:defRPr sz="900" b="1">
+                <a:solidFill>
+                  <a:srgbClr val="FFFFFF"/>
+                </a:solidFill>
+              </a:defRPr>
+            </a:pPr>
+            <a:r>
+              <a:t>Compliance</a:t>
+            </a:r>
+          </a:p>
+        </p:txBody>
+      </p:sp>
+      <p:sp>
+        <p:nvSpPr>
+          <p:cNvPr id="19" name="Rounded Rectangle 18"/>
+          <p:cNvSpPr/>
+          <p:nvPr/>
+        </p:nvSpPr>
+        <p:spPr>
+          <a:xfrm>
+            <a:off x="4526280" y="3154680"/>
+            <a:ext cx="1828800" cy="384048"/>
+          </a:xfrm>
+          <a:prstGeom prst="roundRect">
+            <a:avLst/>
+          </a:prstGeom>
+          <a:solidFill>
+            <a:srgbClr val="1A1A2E"/>
+          </a:solidFill>
+          <a:ln w="12700">
+            <a:solidFill>
+              <a:srgbClr val="667EEA"/>
+            </a:solidFill>
+          </a:ln>
+        </p:spPr>
+        <p:style>
+          <a:lnRef idx="1">
+            <a:schemeClr val="accent1"/>
+          </a:lnRef>
+          <a:fillRef idx="3">
+            <a:schemeClr val="accent1"/>
+          </a:fillRef>
+          <a:effectRef idx="2">
+            <a:schemeClr val="accent1"/>
+          </a:effectRef>
+          <a:fontRef idx="minor">
+            <a:schemeClr val="lt1"/>
+          </a:fontRef>
+        </p:style>
+        <p:txBody>
+          <a:bodyPr rtlCol="0" anchor="ctr"/>
+          <a:lstStyle/>
+          <a:p>
+            <a:pPr algn="ctr">
+              <a:defRPr sz="900" b="1">
+                <a:solidFill>
+                  <a:srgbClr val="FFFFFF"/>
+                </a:solidFill>
+              </a:defRPr>
+            </a:pPr>
+            <a:r>
+              <a:t>Librarian</a:t>
+            </a:r>
+          </a:p>
+        </p:txBody>
+      </p:sp>
+      <p:sp>
+        <p:nvSpPr>
+          <p:cNvPr id="20" name="Rounded Rectangle 19"/>
+          <p:cNvSpPr/>
+          <p:nvPr/>
+        </p:nvSpPr>
+        <p:spPr>
+          <a:xfrm>
+            <a:off x="6583680" y="1645920"/>
+            <a:ext cx="1920240" cy="411480"/>
+          </a:xfrm>
+          <a:prstGeom prst="roundRect">
+            <a:avLst/>
+          </a:prstGeom>
+          <a:solidFill>
+            <a:srgbClr val="764BA2"/>
+          </a:solidFill>
+          <a:ln>
+            <a:noFill/>
+          </a:ln>
+        </p:spPr>
+        <p:style>
+          <a:lnRef idx="1">
+            <a:schemeClr val="accent1"/>
+          </a:lnRef>
+          <a:fillRef idx="3">
+            <a:schemeClr val="accent1"/>
+          </a:fillRef>
+          <a:effectRef idx="2">
+            <a:schemeClr val="accent1"/>
+          </a:effectRef>
+          <a:fontRef idx="minor">
+            <a:schemeClr val="lt1"/>
+          </a:fontRef>
+        </p:style>
+        <p:txBody>
+          <a:bodyPr rtlCol="0" anchor="ctr"/>
+          <a:lstStyle/>
+          <a:p>
+            <a:pPr algn="ctr">
+              <a:defRPr sz="1000" b="1">
+                <a:solidFill>
+                  <a:srgbClr val="FFFFFF"/>
+                </a:solidFill>
+              </a:defRPr>
+            </a:pPr>
+            <a:r>
+              <a:t>Executive</a:t>
+            </a:r>
+          </a:p>
+        </p:txBody>
+      </p:sp>
+      <p:sp>
+        <p:nvSpPr>
+          <p:cNvPr id="21" name="Rounded Rectangle 20"/>
+          <p:cNvSpPr/>
+          <p:nvPr/>
+        </p:nvSpPr>
+        <p:spPr>
+          <a:xfrm>
+            <a:off x="6629400" y="2148840"/>
+            <a:ext cx="1828800" cy="384048"/>
+          </a:xfrm>
+          <a:prstGeom prst="roundRect">
+            <a:avLst/>
+          </a:prstGeom>
+          <a:solidFill>
+            <a:srgbClr val="1A1A2E"/>
+          </a:solidFill>
+          <a:ln w="12700">
+            <a:solidFill>
+              <a:srgbClr val="667EEA"/>
+            </a:solidFill>
+          </a:ln>
+        </p:spPr>
+        <p:style>
+          <a:lnRef idx="1">
+            <a:schemeClr val="accent1"/>
+          </a:lnRef>
+          <a:fillRef idx="3">
+            <a:schemeClr val="accent1"/>
+          </a:fillRef>
+          <a:effectRef idx="2">
+            <a:schemeClr val="accent1"/>
+          </a:effectRef>
+          <a:fontRef idx="minor">
+            <a:schemeClr val="lt1"/>
+          </a:fontRef>
+        </p:style>
+        <p:txBody>
+          <a:bodyPr rtlCol="0" anchor="ctr"/>
+          <a:lstStyle/>
+          <a:p>
+            <a:pPr algn="ctr">
+              <a:defRPr sz="900" b="1">
+                <a:solidFill>
+                  <a:srgbClr val="FFFFFF"/>
+                </a:solidFill>
+              </a:defRPr>
+            </a:pPr>
+            <a:r>
+              <a:t>Presentations</a:t>
+            </a:r>
+          </a:p>
+        </p:txBody>
+      </p:sp>
+      <p:sp>
+        <p:nvSpPr>
+          <p:cNvPr id="22" name="Rounded Rectangle 21"/>
+          <p:cNvSpPr/>
+          <p:nvPr/>
+        </p:nvSpPr>
+        <p:spPr>
+          <a:xfrm>
+            <a:off x="6629400" y="2651760"/>
+            <a:ext cx="1828800" cy="384048"/>
+          </a:xfrm>
+          <a:prstGeom prst="roundRect">
+            <a:avLst/>
+          </a:prstGeom>
+          <a:solidFill>
+            <a:srgbClr val="1A1A2E"/>
+          </a:solidFill>
+          <a:ln w="12700">
+            <a:solidFill>
+              <a:srgbClr val="667EEA"/>
+            </a:solidFill>
+          </a:ln>
+        </p:spPr>
+        <p:style>
+          <a:lnRef idx="1">
+            <a:schemeClr val="accent1"/>
+          </a:lnRef>
+          <a:fillRef idx="3">
+            <a:schemeClr val="accent1"/>
+          </a:fillRef>
+          <a:effectRef idx="2">
+            <a:schemeClr val="accent1"/>
+          </a:effectRef>
+          <a:fontRef idx="minor">
+            <a:schemeClr val="lt1"/>
+          </a:fontRef>
+        </p:style>
+        <p:txBody>
+          <a:bodyPr rtlCol="0" anchor="ctr"/>
+          <a:lstStyle/>
+          <a:p>
+            <a:pPr algn="ctr">
+              <a:defRPr sz="900" b="1">
+                <a:solidFill>
+                  <a:srgbClr val="FFFFFF"/>
+                </a:solidFill>
+              </a:defRPr>
+            </a:pPr>
+            <a:r>
+              <a:t>CX Strategist</a:t>
+            </a:r>
+          </a:p>
+        </p:txBody>
+      </p:sp>
+      <p:sp>
+        <p:nvSpPr>
+          <p:cNvPr id="23" name="Rounded Rectangle 22"/>
+          <p:cNvSpPr/>
+          <p:nvPr/>
+        </p:nvSpPr>
+        <p:spPr>
+          <a:xfrm>
+            <a:off x="6629400" y="3154680"/>
+            <a:ext cx="1828800" cy="384048"/>
+          </a:xfrm>
+          <a:prstGeom prst="roundRect">
+            <a:avLst/>
+          </a:prstGeom>
+          <a:solidFill>
+            <a:srgbClr val="1A1A2E"/>
+          </a:solidFill>
+          <a:ln w="12700">
+            <a:solidFill>
+              <a:srgbClr val="667EEA"/>
+            </a:solidFill>
+          </a:ln>
+        </p:spPr>
+        <p:style>
+          <a:lnRef idx="1">
+            <a:schemeClr val="accent1"/>
+          </a:lnRef>
+          <a:fillRef idx="3">
+            <a:schemeClr val="accent1"/>
+          </a:fillRef>
+          <a:effectRef idx="2">
+            <a:schemeClr val="accent1"/>
+          </a:effectRef>
+          <a:fontRef idx="minor">
+            <a:schemeClr val="lt1"/>
+          </a:fontRef>
+        </p:style>
+        <p:txBody>
+          <a:bodyPr rtlCol="0" anchor="ctr"/>
+          <a:lstStyle/>
+          <a:p>
+            <a:pPr algn="ctr">
+              <a:defRPr sz="900" b="1">
+                <a:solidFill>
+                  <a:srgbClr val="FFFFFF"/>
+                </a:solidFill>
+              </a:defRPr>
+            </a:pPr>
+            <a:r>
+              <a:t>CMO</a:t>
+            </a:r>
+          </a:p>
+        </p:txBody>
+      </p:sp>
+      <p:sp>
+        <p:nvSpPr>
+          <p:cNvPr id="24" name="Rounded Rectangle 23"/>
+          <p:cNvSpPr/>
+          <p:nvPr/>
+        </p:nvSpPr>
+        <p:spPr>
+          <a:xfrm>
+            <a:off x="8686800" y="1645920"/>
+            <a:ext cx="1920240" cy="411480"/>
+          </a:xfrm>
+          <a:prstGeom prst="roundRect">
+            <a:avLst/>
+          </a:prstGeom>
+          <a:solidFill>
+            <a:srgbClr val="EAB308"/>
+          </a:solidFill>
+          <a:ln>
+            <a:noFill/>
+          </a:ln>
+        </p:spPr>
+        <p:style>
+          <a:lnRef idx="1">
+            <a:schemeClr val="accent1"/>
+          </a:lnRef>
+          <a:fillRef idx="3">
+            <a:schemeClr val="accent1"/>
+          </a:fillRef>
+          <a:effectRef idx="2">
+            <a:schemeClr val="accent1"/>
+          </a:effectRef>
+          <a:fontRef idx="minor">
+            <a:schemeClr val="lt1"/>
+          </a:fontRef>
+        </p:style>
+        <p:txBody>
+          <a:bodyPr rtlCol="0" anchor="ctr"/>
+          <a:lstStyle/>
+          <a:p>
+            <a:pPr algn="ctr">
+              <a:defRPr sz="1000" b="1">
+                <a:solidFill>
+                  <a:srgbClr val="FFFFFF"/>
+                </a:solidFill>
+              </a:defRPr>
+            </a:pPr>
+            <a:r>
+              <a:t>Creative</a:t>
+            </a:r>
+          </a:p>
+        </p:txBody>
+      </p:sp>
+      <p:sp>
+        <p:nvSpPr>
+          <p:cNvPr id="25" name="Rounded Rectangle 24"/>
+          <p:cNvSpPr/>
+          <p:nvPr/>
+        </p:nvSpPr>
+        <p:spPr>
+          <a:xfrm>
+            <a:off x="8732520" y="2148840"/>
+            <a:ext cx="1828800" cy="384048"/>
+          </a:xfrm>
+          <a:prstGeom prst="roundRect">
+            <a:avLst/>
+          </a:prstGeom>
+          <a:solidFill>
+            <a:srgbClr val="1A1A2E"/>
+          </a:solidFill>
+          <a:ln w="12700">
+            <a:solidFill>
+              <a:srgbClr val="667EEA"/>
+            </a:solidFill>
+          </a:ln>
+        </p:spPr>
+        <p:style>
+          <a:lnRef idx="1">
+            <a:schemeClr val="accent1"/>
+          </a:lnRef>
+          <a:fillRef idx="3">
+            <a:schemeClr val="accent1"/>
+          </a:fillRef>
+          <a:effectRef idx="2">
+            <a:schemeClr val="accent1"/>
+          </a:effectRef>
+          <a:fontRef idx="minor">
+            <a:schemeClr val="lt1"/>
+          </a:fontRef>
+        </p:style>
+        <p:txBody>
+          <a:bodyPr rtlCol="0" anchor="ctr"/>
+          <a:lstStyle/>
+          <a:p>
+            <a:pPr algn="ctr">
+              <a:defRPr sz="900" b="1">
+                <a:solidFill>
+                  <a:srgbClr val="FFFFFF"/>
+                </a:solidFill>
+              </a:defRPr>
+            </a:pPr>
+            <a:r>
+              <a:t>Designer</a:t>
+            </a:r>
+          </a:p>
+        </p:txBody>
+      </p:sp>
+      <p:sp>
+        <p:nvSpPr>
+          <p:cNvPr id="26" name="Rounded Rectangle 25"/>
+          <p:cNvSpPr/>
+          <p:nvPr/>
+        </p:nvSpPr>
+        <p:spPr>
+          <a:xfrm>
+            <a:off x="8732520" y="2651760"/>
+            <a:ext cx="1828800" cy="384048"/>
+          </a:xfrm>
+          <a:prstGeom prst="roundRect">
+            <a:avLst/>
+          </a:prstGeom>
+          <a:solidFill>
+            <a:srgbClr val="1A1A2E"/>
+          </a:solidFill>
+          <a:ln w="12700">
+            <a:solidFill>
+              <a:srgbClr val="667EEA"/>
+            </a:solidFill>
+          </a:ln>
+        </p:spPr>
+        <p:style>
+          <a:lnRef idx="1">
+            <a:schemeClr val="accent1"/>
+          </a:lnRef>
+          <a:fillRef idx="3">
+            <a:schemeClr val="accent1"/>
+          </a:fillRef>
+          <a:effectRef idx="2">
+            <a:schemeClr val="accent1"/>
+          </a:effectRef>
+          <a:fontRef idx="minor">
+            <a:schemeClr val="lt1"/>
+          </a:fontRef>
+        </p:style>
+        <p:txBody>
+          <a:bodyPr rtlCol="0" anchor="ctr"/>
+          <a:lstStyle/>
+          <a:p>
+            <a:pPr algn="ctr">
+              <a:defRPr sz="900" b="1">
+                <a:solidFill>
+                  <a:srgbClr val="FFFFFF"/>
+                </a:solidFill>
+              </a:defRPr>
+            </a:pPr>
+            <a:r>
+              <a:t>Data Architect</a:t>
+            </a:r>
+          </a:p>
+        </p:txBody>
+      </p:sp>
+      <p:sp>
+        <p:nvSpPr>
+          <p:cNvPr id="27" name="Oval 26"/>
+          <p:cNvSpPr/>
+          <p:nvPr/>
+        </p:nvSpPr>
+        <p:spPr>
+          <a:xfrm>
+            <a:off x="457200" y="5760720"/>
+            <a:ext cx="137160" cy="137160"/>
+          </a:xfrm>
+          <a:prstGeom prst="ellipse">
+            <a:avLst/>
+          </a:prstGeom>
+          <a:solidFill>
+            <a:srgbClr val="667EEA"/>
+          </a:solidFill>
+          <a:ln>
+            <a:noFill/>
+          </a:ln>
+        </p:spPr>
+        <p:style>
+          <a:lnRef idx="1">
+            <a:schemeClr val="accent1"/>
+          </a:lnRef>
+          <a:fillRef idx="3">
+            <a:schemeClr val="accent1"/>
+          </a:fillRef>
+          <a:effectRef idx="2">
+            <a:schemeClr val="accent1"/>
+          </a:effectRef>
+          <a:fontRef idx="minor">
+            <a:schemeClr val="lt1"/>
+          </a:fontRef>
+        </p:style>
+        <p:txBody>
+          <a:bodyPr rtlCol="0" anchor="ctr"/>
+          <a:lstStyle/>
+          <a:p>
+            <a:pPr algn="ctr"/>
+          </a:p>
+        </p:txBody>
+      </p:sp>
+      <p:sp>
+        <p:nvSpPr>
+          <p:cNvPr id="28" name="TextBox 27"/>
           <p:cNvSpPr txBox="1"/>
           <p:nvPr/>
         </p:nvSpPr>
         <p:spPr>
           <a:xfrm>
-            <a:off x="731520" y="457200"/>
-            <a:ext cx="10058400" cy="914400"/>
+            <a:off x="640080" y="5742432"/>
+            <a:ext cx="1828800" cy="182880"/>
           </a:xfrm>
           <a:prstGeom prst="rect">
             <a:avLst/>
@@ -3652,35 +5161,77 @@
           <a:noFill/>
         </p:spPr>
         <p:txBody>
-          <a:bodyPr wrap="square">
+          <a:bodyPr wrap="none">
             <a:spAutoFit/>
           </a:bodyPr>
           <a:lstStyle/>
           <a:p>
             <a:pPr>
-              <a:defRPr sz="2800" b="1">
-                <a:solidFill>
-                  <a:srgbClr val="FFFFFF"/>
-                </a:solidFill>
-                <a:latin typeface="Inter"/>
-              </a:defRPr>
-            </a:pPr>
-            <a:r>
-              <a:t>Scalable Agent Architecture</a:t>
-            </a:r>
-          </a:p>
-        </p:txBody>
-      </p:sp>
-      <p:sp>
-        <p:nvSpPr>
-          <p:cNvPr id="5" name="TextBox 4"/>
+              <a:defRPr sz="800">
+                <a:solidFill>
+                  <a:srgbClr val="94A3B8"/>
+                </a:solidFill>
+              </a:defRPr>
+            </a:pPr>
+            <a:r>
+              <a:t>System Core (6)</a:t>
+            </a:r>
+          </a:p>
+        </p:txBody>
+      </p:sp>
+      <p:sp>
+        <p:nvSpPr>
+          <p:cNvPr id="29" name="Oval 28"/>
+          <p:cNvSpPr/>
+          <p:nvPr/>
+        </p:nvSpPr>
+        <p:spPr>
+          <a:xfrm>
+            <a:off x="2651760" y="5760720"/>
+            <a:ext cx="137160" cy="137160"/>
+          </a:xfrm>
+          <a:prstGeom prst="ellipse">
+            <a:avLst/>
+          </a:prstGeom>
+          <a:solidFill>
+            <a:srgbClr val="10B981"/>
+          </a:solidFill>
+          <a:ln>
+            <a:noFill/>
+          </a:ln>
+        </p:spPr>
+        <p:style>
+          <a:lnRef idx="1">
+            <a:schemeClr val="accent1"/>
+          </a:lnRef>
+          <a:fillRef idx="3">
+            <a:schemeClr val="accent1"/>
+          </a:fillRef>
+          <a:effectRef idx="2">
+            <a:schemeClr val="accent1"/>
+          </a:effectRef>
+          <a:fontRef idx="minor">
+            <a:schemeClr val="lt1"/>
+          </a:fontRef>
+        </p:style>
+        <p:txBody>
+          <a:bodyPr rtlCol="0" anchor="ctr"/>
+          <a:lstStyle/>
+          <a:p>
+            <a:pPr algn="ctr"/>
+          </a:p>
+        </p:txBody>
+      </p:sp>
+      <p:sp>
+        <p:nvSpPr>
+          <p:cNvPr id="30" name="TextBox 29"/>
           <p:cNvSpPr txBox="1"/>
           <p:nvPr/>
         </p:nvSpPr>
         <p:spPr>
           <a:xfrm>
-            <a:off x="731520" y="1645920"/>
-            <a:ext cx="10058400" cy="4389120"/>
+            <a:off x="2834640" y="5742432"/>
+            <a:ext cx="1828800" cy="182880"/>
           </a:xfrm>
           <a:prstGeom prst="rect">
             <a:avLst/>
@@ -3688,88 +5239,254 @@
           <a:noFill/>
         </p:spPr>
         <p:txBody>
-          <a:bodyPr wrap="square">
+          <a:bodyPr wrap="none">
             <a:spAutoFit/>
           </a:bodyPr>
           <a:lstStyle/>
           <a:p>
             <a:pPr>
-              <a:spcAft>
-                <a:spcPts val="1200"/>
-              </a:spcAft>
-              <a:defRPr sz="1500">
-                <a:solidFill>
-                  <a:srgbClr val="C0C8E0"/>
-                </a:solidFill>
-                <a:latin typeface="Roboto"/>
-              </a:defRPr>
-            </a:pPr>
-            <a:r>
-              <a:t>    V7 Agent Skills Router -&gt; 18 specialist agents</a:t>
-            </a:r>
-          </a:p>
+              <a:defRPr sz="800">
+                <a:solidFill>
+                  <a:srgbClr val="94A3B8"/>
+                </a:solidFill>
+              </a:defRPr>
+            </a:pPr>
+            <a:r>
+              <a:t>Intelligence (4)</a:t>
+            </a:r>
+          </a:p>
+        </p:txBody>
+      </p:sp>
+      <p:sp>
+        <p:nvSpPr>
+          <p:cNvPr id="31" name="Oval 30"/>
+          <p:cNvSpPr/>
+          <p:nvPr/>
+        </p:nvSpPr>
+        <p:spPr>
+          <a:xfrm>
+            <a:off x="4846320" y="5760720"/>
+            <a:ext cx="137160" cy="137160"/>
+          </a:xfrm>
+          <a:prstGeom prst="ellipse">
+            <a:avLst/>
+          </a:prstGeom>
+          <a:solidFill>
+            <a:srgbClr val="F97316"/>
+          </a:solidFill>
+          <a:ln>
+            <a:noFill/>
+          </a:ln>
+        </p:spPr>
+        <p:style>
+          <a:lnRef idx="1">
+            <a:schemeClr val="accent1"/>
+          </a:lnRef>
+          <a:fillRef idx="3">
+            <a:schemeClr val="accent1"/>
+          </a:fillRef>
+          <a:effectRef idx="2">
+            <a:schemeClr val="accent1"/>
+          </a:effectRef>
+          <a:fontRef idx="minor">
+            <a:schemeClr val="lt1"/>
+          </a:fontRef>
+        </p:style>
+        <p:txBody>
+          <a:bodyPr rtlCol="0" anchor="ctr"/>
+          <a:lstStyle/>
+          <a:p>
+            <a:pPr algn="ctr"/>
+          </a:p>
+        </p:txBody>
+      </p:sp>
+      <p:sp>
+        <p:nvSpPr>
+          <p:cNvPr id="32" name="TextBox 31"/>
+          <p:cNvSpPr txBox="1"/>
+          <p:nvPr/>
+        </p:nvSpPr>
+        <p:spPr>
+          <a:xfrm>
+            <a:off x="5029200" y="5742432"/>
+            <a:ext cx="1828800" cy="182880"/>
+          </a:xfrm>
+          <a:prstGeom prst="rect">
+            <a:avLst/>
+          </a:prstGeom>
+          <a:noFill/>
+        </p:spPr>
+        <p:txBody>
+          <a:bodyPr wrap="none">
+            <a:spAutoFit/>
+          </a:bodyPr>
+          <a:lstStyle/>
           <a:p>
             <a:pPr>
-              <a:spcAft>
-                <a:spcPts val="1200"/>
-              </a:spcAft>
-              <a:defRPr sz="1500">
-                <a:solidFill>
-                  <a:srgbClr val="C0C8E0"/>
-                </a:solidFill>
-                <a:latin typeface="Roboto"/>
-              </a:defRPr>
-            </a:pPr>
-            <a:r>
-              <a:t>    Delegate AI Orchestrator for performance-based routing</a:t>
-            </a:r>
-          </a:p>
+              <a:defRPr sz="800">
+                <a:solidFill>
+                  <a:srgbClr val="94A3B8"/>
+                </a:solidFill>
+              </a:defRPr>
+            </a:pPr>
+            <a:r>
+              <a:t>Quality Gate (3)</a:t>
+            </a:r>
+          </a:p>
+        </p:txBody>
+      </p:sp>
+      <p:sp>
+        <p:nvSpPr>
+          <p:cNvPr id="33" name="Oval 32"/>
+          <p:cNvSpPr/>
+          <p:nvPr/>
+        </p:nvSpPr>
+        <p:spPr>
+          <a:xfrm>
+            <a:off x="7040879" y="5760720"/>
+            <a:ext cx="137160" cy="137160"/>
+          </a:xfrm>
+          <a:prstGeom prst="ellipse">
+            <a:avLst/>
+          </a:prstGeom>
+          <a:solidFill>
+            <a:srgbClr val="764BA2"/>
+          </a:solidFill>
+          <a:ln>
+            <a:noFill/>
+          </a:ln>
+        </p:spPr>
+        <p:style>
+          <a:lnRef idx="1">
+            <a:schemeClr val="accent1"/>
+          </a:lnRef>
+          <a:fillRef idx="3">
+            <a:schemeClr val="accent1"/>
+          </a:fillRef>
+          <a:effectRef idx="2">
+            <a:schemeClr val="accent1"/>
+          </a:effectRef>
+          <a:fontRef idx="minor">
+            <a:schemeClr val="lt1"/>
+          </a:fontRef>
+        </p:style>
+        <p:txBody>
+          <a:bodyPr rtlCol="0" anchor="ctr"/>
+          <a:lstStyle/>
+          <a:p>
+            <a:pPr algn="ctr"/>
+          </a:p>
+        </p:txBody>
+      </p:sp>
+      <p:sp>
+        <p:nvSpPr>
+          <p:cNvPr id="34" name="TextBox 33"/>
+          <p:cNvSpPr txBox="1"/>
+          <p:nvPr/>
+        </p:nvSpPr>
+        <p:spPr>
+          <a:xfrm>
+            <a:off x="7223759" y="5742432"/>
+            <a:ext cx="1828800" cy="182880"/>
+          </a:xfrm>
+          <a:prstGeom prst="rect">
+            <a:avLst/>
+          </a:prstGeom>
+          <a:noFill/>
+        </p:spPr>
+        <p:txBody>
+          <a:bodyPr wrap="none">
+            <a:spAutoFit/>
+          </a:bodyPr>
+          <a:lstStyle/>
           <a:p>
             <a:pPr>
-              <a:spcAft>
-                <a:spcPts val="1200"/>
-              </a:spcAft>
-              <a:defRPr sz="1500">
-                <a:solidFill>
-                  <a:srgbClr val="C0C8E0"/>
-                </a:solidFill>
-                <a:latin typeface="Roboto"/>
-              </a:defRPr>
-            </a:pPr>
-            <a:r>
-              <a:t>    Leitner spaced-repetition error memory (5-level triage)</a:t>
-            </a:r>
-          </a:p>
+              <a:defRPr sz="800">
+                <a:solidFill>
+                  <a:srgbClr val="94A3B8"/>
+                </a:solidFill>
+              </a:defRPr>
+            </a:pPr>
+            <a:r>
+              <a:t>Executive (3)</a:t>
+            </a:r>
+          </a:p>
+        </p:txBody>
+      </p:sp>
+      <p:sp>
+        <p:nvSpPr>
+          <p:cNvPr id="35" name="Oval 34"/>
+          <p:cNvSpPr/>
+          <p:nvPr/>
+        </p:nvSpPr>
+        <p:spPr>
+          <a:xfrm>
+            <a:off x="9235440" y="5760720"/>
+            <a:ext cx="137160" cy="137160"/>
+          </a:xfrm>
+          <a:prstGeom prst="ellipse">
+            <a:avLst/>
+          </a:prstGeom>
+          <a:solidFill>
+            <a:srgbClr val="EAB308"/>
+          </a:solidFill>
+          <a:ln>
+            <a:noFill/>
+          </a:ln>
+        </p:spPr>
+        <p:style>
+          <a:lnRef idx="1">
+            <a:schemeClr val="accent1"/>
+          </a:lnRef>
+          <a:fillRef idx="3">
+            <a:schemeClr val="accent1"/>
+          </a:fillRef>
+          <a:effectRef idx="2">
+            <a:schemeClr val="accent1"/>
+          </a:effectRef>
+          <a:fontRef idx="minor">
+            <a:schemeClr val="lt1"/>
+          </a:fontRef>
+        </p:style>
+        <p:txBody>
+          <a:bodyPr rtlCol="0" anchor="ctr"/>
+          <a:lstStyle/>
+          <a:p>
+            <a:pPr algn="ctr"/>
+          </a:p>
+        </p:txBody>
+      </p:sp>
+      <p:sp>
+        <p:nvSpPr>
+          <p:cNvPr id="36" name="TextBox 35"/>
+          <p:cNvSpPr txBox="1"/>
+          <p:nvPr/>
+        </p:nvSpPr>
+        <p:spPr>
+          <a:xfrm>
+            <a:off x="9418319" y="5742432"/>
+            <a:ext cx="1828800" cy="182880"/>
+          </a:xfrm>
+          <a:prstGeom prst="rect">
+            <a:avLst/>
+          </a:prstGeom>
+          <a:noFill/>
+        </p:spPr>
+        <p:txBody>
+          <a:bodyPr wrap="none">
+            <a:spAutoFit/>
+          </a:bodyPr>
+          <a:lstStyle/>
           <a:p>
             <a:pPr>
-              <a:spcAft>
-                <a:spcPts val="1200"/>
-              </a:spcAft>
-              <a:defRPr sz="1500">
-                <a:solidFill>
-                  <a:srgbClr val="C0C8E0"/>
-                </a:solidFill>
-                <a:latin typeface="Roboto"/>
-              </a:defRPr>
-            </a:pPr>
-            <a:r>
-              <a:t>    DataValidationEngine: Signal Warnings on bad data</a:t>
-            </a:r>
-          </a:p>
-          <a:p>
-            <a:pPr>
-              <a:spcAft>
-                <a:spcPts val="1200"/>
-              </a:spcAft>
-              <a:defRPr sz="1500">
-                <a:solidFill>
-                  <a:srgbClr val="C0C8E0"/>
-                </a:solidFill>
-                <a:latin typeface="Roboto"/>
-              </a:defRPr>
-            </a:pPr>
-            <a:r>
-              <a:t>    News Bureau Chief: auto-triggered context refresh</a:t>
+              <a:defRPr sz="800">
+                <a:solidFill>
+                  <a:srgbClr val="94A3B8"/>
+                </a:solidFill>
+              </a:defRPr>
+            </a:pPr>
+            <a:r>
+              <a:t>Creative (2)</a:t>
             </a:r>
           </a:p>
         </p:txBody>
@@ -3851,8 +5568,8 @@
         </p:nvSpPr>
         <p:spPr>
           <a:xfrm>
-            <a:off x="8686800" y="6263640"/>
-            <a:ext cx="3200400" cy="228600"/>
+            <a:off x="731520" y="457200"/>
+            <a:ext cx="10058400" cy="914400"/>
           </a:xfrm>
           <a:prstGeom prst="rect">
             <a:avLst/>
@@ -3865,41 +5582,6 @@
           </a:bodyPr>
           <a:lstStyle/>
           <a:p>
-            <a:pPr algn="r">
-              <a:defRPr sz="700">
-                <a:solidFill>
-                  <a:srgbClr val="4A4A6A"/>
-                </a:solidFill>
-              </a:defRPr>
-            </a:pPr>
-            <a:r>
-              <a:t>Layout: full_canvas_diagram</a:t>
-            </a:r>
-          </a:p>
-        </p:txBody>
-      </p:sp>
-      <p:sp>
-        <p:nvSpPr>
-          <p:cNvPr id="4" name="TextBox 3"/>
-          <p:cNvSpPr txBox="1"/>
-          <p:nvPr/>
-        </p:nvSpPr>
-        <p:spPr>
-          <a:xfrm>
-            <a:off x="731520" y="457200"/>
-            <a:ext cx="10058400" cy="914400"/>
-          </a:xfrm>
-          <a:prstGeom prst="rect">
-            <a:avLst/>
-          </a:prstGeom>
-          <a:noFill/>
-        </p:spPr>
-        <p:txBody>
-          <a:bodyPr wrap="square">
-            <a:spAutoFit/>
-          </a:bodyPr>
-          <a:lstStyle/>
-          <a:p>
             <a:pPr>
               <a:defRPr sz="2800" b="1">
                 <a:solidFill>
@@ -3909,30 +5591,32 @@
               </a:defRPr>
             </a:pPr>
             <a:r>
-              <a:t>Agent Network Architecture (V7)</a:t>
-            </a:r>
-          </a:p>
-        </p:txBody>
-      </p:sp>
-      <p:sp>
-        <p:nvSpPr>
-          <p:cNvPr id="5" name="Rounded Rectangle 4"/>
+              <a:t>System Health — OmniDashboard Live</a:t>
+            </a:r>
+          </a:p>
+        </p:txBody>
+      </p:sp>
+      <p:sp>
+        <p:nvSpPr>
+          <p:cNvPr id="4" name="Rounded Rectangle 3"/>
           <p:cNvSpPr/>
           <p:nvPr/>
         </p:nvSpPr>
         <p:spPr>
           <a:xfrm>
-            <a:off x="274320" y="1645920"/>
-            <a:ext cx="1920240" cy="411480"/>
+            <a:off x="731520" y="1463040"/>
+            <a:ext cx="1828800" cy="1097280"/>
           </a:xfrm>
           <a:prstGeom prst="roundRect">
             <a:avLst/>
           </a:prstGeom>
           <a:solidFill>
-            <a:srgbClr val="667EEA"/>
-          </a:solidFill>
-          <a:ln>
-            <a:noFill/>
+            <a:srgbClr val="1A1A2E"/>
+          </a:solidFill>
+          <a:ln w="25400">
+            <a:solidFill>
+              <a:srgbClr val="10B981"/>
+            </a:solidFill>
           </a:ln>
         </p:spPr>
         <p:style>
@@ -3950,32 +5634,45 @@
           </a:fontRef>
         </p:style>
         <p:txBody>
-          <a:bodyPr rtlCol="0" anchor="ctr"/>
+          <a:bodyPr rtlCol="0" anchor="ctr" wrap="square"/>
           <a:lstStyle/>
           <a:p>
             <a:pPr algn="ctr">
-              <a:defRPr sz="1000" b="1">
-                <a:solidFill>
-                  <a:srgbClr val="FFFFFF"/>
-                </a:solidFill>
-              </a:defRPr>
-            </a:pPr>
-            <a:r>
-              <a:t>System Core</a:t>
-            </a:r>
-          </a:p>
-        </p:txBody>
-      </p:sp>
-      <p:sp>
-        <p:nvSpPr>
-          <p:cNvPr id="6" name="Rounded Rectangle 5"/>
+              <a:defRPr sz="2400" b="1">
+                <a:solidFill>
+                  <a:srgbClr val="10B981"/>
+                </a:solidFill>
+                <a:latin typeface="Inter"/>
+              </a:defRPr>
+            </a:pPr>
+            <a:r>
+              <a:t>16/18</a:t>
+            </a:r>
+          </a:p>
+          <a:p>
+            <a:pPr algn="ctr">
+              <a:defRPr sz="900">
+                <a:solidFill>
+                  <a:srgbClr val="94A3B8"/>
+                </a:solidFill>
+              </a:defRPr>
+            </a:pPr>
+            <a:r>
+              <a:t>Active Agents</a:t>
+            </a:r>
+          </a:p>
+        </p:txBody>
+      </p:sp>
+      <p:sp>
+        <p:nvSpPr>
+          <p:cNvPr id="5" name="Rounded Rectangle 4"/>
           <p:cNvSpPr/>
           <p:nvPr/>
         </p:nvSpPr>
         <p:spPr>
           <a:xfrm>
-            <a:off x="320040" y="2148840"/>
-            <a:ext cx="1828800" cy="384048"/>
+            <a:off x="2926080" y="1463040"/>
+            <a:ext cx="1828800" cy="1097280"/>
           </a:xfrm>
           <a:prstGeom prst="roundRect">
             <a:avLst/>
@@ -3983,7 +5680,7 @@
           <a:solidFill>
             <a:srgbClr val="1A1A2E"/>
           </a:solidFill>
-          <a:ln w="19050">
+          <a:ln w="25400">
             <a:solidFill>
               <a:srgbClr val="667EEA"/>
             </a:solidFill>
@@ -4004,32 +5701,45 @@
           </a:fontRef>
         </p:style>
         <p:txBody>
-          <a:bodyPr rtlCol="0" anchor="ctr"/>
+          <a:bodyPr rtlCol="0" anchor="ctr" wrap="square"/>
           <a:lstStyle/>
           <a:p>
             <a:pPr algn="ctr">
-              <a:defRPr sz="900" b="1">
-                <a:solidFill>
-                  <a:srgbClr val="E0E0E0"/>
-                </a:solidFill>
-              </a:defRPr>
-            </a:pPr>
-            <a:r>
-              <a:t>CEO</a:t>
-            </a:r>
-          </a:p>
-        </p:txBody>
-      </p:sp>
-      <p:sp>
-        <p:nvSpPr>
-          <p:cNvPr id="7" name="Rounded Rectangle 6"/>
+              <a:defRPr sz="2400" b="1">
+                <a:solidFill>
+                  <a:srgbClr val="667EEA"/>
+                </a:solidFill>
+                <a:latin typeface="Inter"/>
+              </a:defRPr>
+            </a:pPr>
+            <a:r>
+              <a:t>3.2/10</a:t>
+            </a:r>
+          </a:p>
+          <a:p>
+            <a:pPr algn="ctr">
+              <a:defRPr sz="900">
+                <a:solidFill>
+                  <a:srgbClr val="94A3B8"/>
+                </a:solidFill>
+              </a:defRPr>
+            </a:pPr>
+            <a:r>
+              <a:t>EQ Stress</a:t>
+            </a:r>
+          </a:p>
+        </p:txBody>
+      </p:sp>
+      <p:sp>
+        <p:nvSpPr>
+          <p:cNvPr id="6" name="Rounded Rectangle 5"/>
           <p:cNvSpPr/>
           <p:nvPr/>
         </p:nvSpPr>
         <p:spPr>
           <a:xfrm>
-            <a:off x="320040" y="2651760"/>
-            <a:ext cx="1828800" cy="384048"/>
+            <a:off x="5120640" y="1463040"/>
+            <a:ext cx="1828800" cy="1097280"/>
           </a:xfrm>
           <a:prstGeom prst="roundRect">
             <a:avLst/>
@@ -4037,9 +5747,9 @@
           <a:solidFill>
             <a:srgbClr val="1A1A2E"/>
           </a:solidFill>
-          <a:ln w="19050">
+          <a:ln w="25400">
             <a:solidFill>
-              <a:srgbClr val="667EEA"/>
+              <a:srgbClr val="EAB308"/>
             </a:solidFill>
           </a:ln>
         </p:spPr>
@@ -4058,32 +5768,45 @@
           </a:fontRef>
         </p:style>
         <p:txBody>
-          <a:bodyPr rtlCol="0" anchor="ctr"/>
+          <a:bodyPr rtlCol="0" anchor="ctr" wrap="square"/>
           <a:lstStyle/>
           <a:p>
             <a:pPr algn="ctr">
-              <a:defRPr sz="900" b="1">
-                <a:solidFill>
-                  <a:srgbClr val="E0E0E0"/>
-                </a:solidFill>
-              </a:defRPr>
-            </a:pPr>
-            <a:r>
-              <a:t>CFO</a:t>
-            </a:r>
-          </a:p>
-        </p:txBody>
-      </p:sp>
-      <p:sp>
-        <p:nvSpPr>
-          <p:cNvPr id="8" name="Rounded Rectangle 7"/>
+              <a:defRPr sz="2400" b="1">
+                <a:solidFill>
+                  <a:srgbClr val="EAB308"/>
+                </a:solidFill>
+                <a:latin typeface="Inter"/>
+              </a:defRPr>
+            </a:pPr>
+            <a:r>
+              <a:t>5</a:t>
+            </a:r>
+          </a:p>
+          <a:p>
+            <a:pPr algn="ctr">
+              <a:defRPr sz="900">
+                <a:solidFill>
+                  <a:srgbClr val="94A3B8"/>
+                </a:solidFill>
+              </a:defRPr>
+            </a:pPr>
+            <a:r>
+              <a:t>Signal Alerts</a:t>
+            </a:r>
+          </a:p>
+        </p:txBody>
+      </p:sp>
+      <p:sp>
+        <p:nvSpPr>
+          <p:cNvPr id="7" name="Rounded Rectangle 6"/>
           <p:cNvSpPr/>
           <p:nvPr/>
         </p:nvSpPr>
         <p:spPr>
           <a:xfrm>
-            <a:off x="320040" y="3154680"/>
-            <a:ext cx="1828800" cy="384048"/>
+            <a:off x="7315200" y="1463040"/>
+            <a:ext cx="1828800" cy="1097280"/>
           </a:xfrm>
           <a:prstGeom prst="roundRect">
             <a:avLst/>
@@ -4091,7 +5814,7 @@
           <a:solidFill>
             <a:srgbClr val="1A1A2E"/>
           </a:solidFill>
-          <a:ln w="19050">
+          <a:ln w="25400">
             <a:solidFill>
               <a:srgbClr val="667EEA"/>
             </a:solidFill>
@@ -4112,32 +5835,45 @@
           </a:fontRef>
         </p:style>
         <p:txBody>
-          <a:bodyPr rtlCol="0" anchor="ctr"/>
+          <a:bodyPr rtlCol="0" anchor="ctr" wrap="square"/>
           <a:lstStyle/>
           <a:p>
             <a:pPr algn="ctr">
-              <a:defRPr sz="900" b="1">
-                <a:solidFill>
-                  <a:srgbClr val="E0E0E0"/>
-                </a:solidFill>
-              </a:defRPr>
-            </a:pPr>
-            <a:r>
-              <a:t>CTO</a:t>
-            </a:r>
-          </a:p>
-        </p:txBody>
-      </p:sp>
-      <p:sp>
-        <p:nvSpPr>
-          <p:cNvPr id="9" name="Rounded Rectangle 8"/>
+              <a:defRPr sz="2400" b="1">
+                <a:solidFill>
+                  <a:srgbClr val="667EEA"/>
+                </a:solidFill>
+                <a:latin typeface="Inter"/>
+              </a:defRPr>
+            </a:pPr>
+            <a:r>
+              <a:t>12</a:t>
+            </a:r>
+          </a:p>
+          <a:p>
+            <a:pPr algn="ctr">
+              <a:defRPr sz="900">
+                <a:solidFill>
+                  <a:srgbClr val="94A3B8"/>
+                </a:solidFill>
+              </a:defRPr>
+            </a:pPr>
+            <a:r>
+              <a:t>Notifications</a:t>
+            </a:r>
+          </a:p>
+        </p:txBody>
+      </p:sp>
+      <p:sp>
+        <p:nvSpPr>
+          <p:cNvPr id="8" name="Rounded Rectangle 7"/>
           <p:cNvSpPr/>
           <p:nvPr/>
         </p:nvSpPr>
         <p:spPr>
           <a:xfrm>
-            <a:off x="320040" y="3657600"/>
-            <a:ext cx="1828800" cy="384048"/>
+            <a:off x="9509760" y="1463040"/>
+            <a:ext cx="1828800" cy="1097280"/>
           </a:xfrm>
           <a:prstGeom prst="roundRect">
             <a:avLst/>
@@ -4145,9 +5881,9 @@
           <a:solidFill>
             <a:srgbClr val="1A1A2E"/>
           </a:solidFill>
-          <a:ln w="19050">
+          <a:ln w="25400">
             <a:solidFill>
-              <a:srgbClr val="667EEA"/>
+              <a:srgbClr val="EF4444"/>
             </a:solidFill>
           </a:ln>
         </p:spPr>
@@ -4166,1039 +5902,45 @@
           </a:fontRef>
         </p:style>
         <p:txBody>
-          <a:bodyPr rtlCol="0" anchor="ctr"/>
+          <a:bodyPr rtlCol="0" anchor="ctr" wrap="square"/>
           <a:lstStyle/>
           <a:p>
             <a:pPr algn="ctr">
-              <a:defRPr sz="900" b="1">
-                <a:solidFill>
-                  <a:srgbClr val="E0E0E0"/>
-                </a:solidFill>
-              </a:defRPr>
-            </a:pPr>
-            <a:r>
-              <a:t>Aether</a:t>
-            </a:r>
-          </a:p>
-        </p:txBody>
-      </p:sp>
-      <p:sp>
-        <p:nvSpPr>
-          <p:cNvPr id="10" name="Rounded Rectangle 9"/>
-          <p:cNvSpPr/>
-          <p:nvPr/>
-        </p:nvSpPr>
-        <p:spPr>
-          <a:xfrm>
-            <a:off x="320040" y="4160520"/>
-            <a:ext cx="1828800" cy="384048"/>
-          </a:xfrm>
-          <a:prstGeom prst="roundRect">
-            <a:avLst/>
-          </a:prstGeom>
-          <a:solidFill>
-            <a:srgbClr val="1A1A2E"/>
-          </a:solidFill>
-          <a:ln w="19050">
-            <a:solidFill>
-              <a:srgbClr val="667EEA"/>
-            </a:solidFill>
-          </a:ln>
-        </p:spPr>
-        <p:style>
-          <a:lnRef idx="1">
-            <a:schemeClr val="accent1"/>
-          </a:lnRef>
-          <a:fillRef idx="3">
-            <a:schemeClr val="accent1"/>
-          </a:fillRef>
-          <a:effectRef idx="2">
-            <a:schemeClr val="accent1"/>
-          </a:effectRef>
-          <a:fontRef idx="minor">
-            <a:schemeClr val="lt1"/>
-          </a:fontRef>
-        </p:style>
-        <p:txBody>
-          <a:bodyPr rtlCol="0" anchor="ctr"/>
-          <a:lstStyle/>
+              <a:defRPr sz="2400" b="1">
+                <a:solidFill>
+                  <a:srgbClr val="EF4444"/>
+                </a:solidFill>
+                <a:latin typeface="Inter"/>
+              </a:defRPr>
+            </a:pPr>
+            <a:r>
+              <a:t>98.3%</a:t>
+            </a:r>
+          </a:p>
           <a:p>
             <a:pPr algn="ctr">
-              <a:defRPr sz="900" b="1">
-                <a:solidFill>
-                  <a:srgbClr val="E0E0E0"/>
-                </a:solidFill>
-              </a:defRPr>
-            </a:pPr>
-            <a:r>
-              <a:t>Delegate AI</a:t>
-            </a:r>
-          </a:p>
-        </p:txBody>
-      </p:sp>
-      <p:sp>
-        <p:nvSpPr>
-          <p:cNvPr id="11" name="Rounded Rectangle 10"/>
-          <p:cNvSpPr/>
-          <p:nvPr/>
-        </p:nvSpPr>
-        <p:spPr>
-          <a:xfrm>
-            <a:off x="320040" y="4663440"/>
-            <a:ext cx="1828800" cy="384048"/>
-          </a:xfrm>
-          <a:prstGeom prst="roundRect">
-            <a:avLst/>
-          </a:prstGeom>
-          <a:solidFill>
-            <a:srgbClr val="1A1A2E"/>
-          </a:solidFill>
-          <a:ln w="19050">
-            <a:solidFill>
-              <a:srgbClr val="667EEA"/>
-            </a:solidFill>
-          </a:ln>
-        </p:spPr>
-        <p:style>
-          <a:lnRef idx="1">
-            <a:schemeClr val="accent1"/>
-          </a:lnRef>
-          <a:fillRef idx="3">
-            <a:schemeClr val="accent1"/>
-          </a:fillRef>
-          <a:effectRef idx="2">
-            <a:schemeClr val="accent1"/>
-          </a:effectRef>
-          <a:fontRef idx="minor">
-            <a:schemeClr val="lt1"/>
-          </a:fontRef>
-        </p:style>
-        <p:txBody>
-          <a:bodyPr rtlCol="0" anchor="ctr"/>
-          <a:lstStyle/>
-          <a:p>
-            <a:pPr algn="ctr">
-              <a:defRPr sz="900" b="1">
-                <a:solidFill>
-                  <a:srgbClr val="E0E0E0"/>
-                </a:solidFill>
-              </a:defRPr>
-            </a:pPr>
-            <a:r>
-              <a:t>EQ Engine</a:t>
-            </a:r>
-          </a:p>
-        </p:txBody>
-      </p:sp>
-      <p:sp>
-        <p:nvSpPr>
-          <p:cNvPr id="12" name="Rounded Rectangle 11"/>
-          <p:cNvSpPr/>
-          <p:nvPr/>
-        </p:nvSpPr>
-        <p:spPr>
-          <a:xfrm>
-            <a:off x="2377440" y="1645920"/>
-            <a:ext cx="1920240" cy="411480"/>
-          </a:xfrm>
-          <a:prstGeom prst="roundRect">
-            <a:avLst/>
-          </a:prstGeom>
-          <a:solidFill>
-            <a:srgbClr val="10B981"/>
-          </a:solidFill>
-          <a:ln>
-            <a:noFill/>
-          </a:ln>
-        </p:spPr>
-        <p:style>
-          <a:lnRef idx="1">
-            <a:schemeClr val="accent1"/>
-          </a:lnRef>
-          <a:fillRef idx="3">
-            <a:schemeClr val="accent1"/>
-          </a:fillRef>
-          <a:effectRef idx="2">
-            <a:schemeClr val="accent1"/>
-          </a:effectRef>
-          <a:fontRef idx="minor">
-            <a:schemeClr val="lt1"/>
-          </a:fontRef>
-        </p:style>
-        <p:txBody>
-          <a:bodyPr rtlCol="0" anchor="ctr"/>
-          <a:lstStyle/>
-          <a:p>
-            <a:pPr algn="ctr">
-              <a:defRPr sz="1000" b="1">
-                <a:solidFill>
-                  <a:srgbClr val="FFFFFF"/>
-                </a:solidFill>
-              </a:defRPr>
-            </a:pPr>
-            <a:r>
-              <a:t>Intelligence</a:t>
-            </a:r>
-          </a:p>
-        </p:txBody>
-      </p:sp>
-      <p:sp>
-        <p:nvSpPr>
-          <p:cNvPr id="13" name="Rounded Rectangle 12"/>
-          <p:cNvSpPr/>
-          <p:nvPr/>
-        </p:nvSpPr>
-        <p:spPr>
-          <a:xfrm>
-            <a:off x="2423160" y="2148840"/>
-            <a:ext cx="1828800" cy="384048"/>
-          </a:xfrm>
-          <a:prstGeom prst="roundRect">
-            <a:avLst/>
-          </a:prstGeom>
-          <a:solidFill>
-            <a:srgbClr val="1A1A2E"/>
-          </a:solidFill>
-          <a:ln w="19050">
-            <a:solidFill>
-              <a:srgbClr val="10B981"/>
-            </a:solidFill>
-          </a:ln>
-        </p:spPr>
-        <p:style>
-          <a:lnRef idx="1">
-            <a:schemeClr val="accent1"/>
-          </a:lnRef>
-          <a:fillRef idx="3">
-            <a:schemeClr val="accent1"/>
-          </a:fillRef>
-          <a:effectRef idx="2">
-            <a:schemeClr val="accent1"/>
-          </a:effectRef>
-          <a:fontRef idx="minor">
-            <a:schemeClr val="lt1"/>
-          </a:fontRef>
-        </p:style>
-        <p:txBody>
-          <a:bodyPr rtlCol="0" anchor="ctr"/>
-          <a:lstStyle/>
-          <a:p>
-            <a:pPr algn="ctr">
-              <a:defRPr sz="900" b="1">
-                <a:solidFill>
-                  <a:srgbClr val="E0E0E0"/>
-                </a:solidFill>
-              </a:defRPr>
-            </a:pPr>
-            <a:r>
-              <a:t>GeoTalent Scout</a:t>
-            </a:r>
-          </a:p>
-        </p:txBody>
-      </p:sp>
-      <p:sp>
-        <p:nvSpPr>
-          <p:cNvPr id="14" name="Rounded Rectangle 13"/>
-          <p:cNvSpPr/>
-          <p:nvPr/>
-        </p:nvSpPr>
-        <p:spPr>
-          <a:xfrm>
-            <a:off x="2423160" y="2651760"/>
-            <a:ext cx="1828800" cy="384048"/>
-          </a:xfrm>
-          <a:prstGeom prst="roundRect">
-            <a:avLst/>
-          </a:prstGeom>
-          <a:solidFill>
-            <a:srgbClr val="1A1A2E"/>
-          </a:solidFill>
-          <a:ln w="19050">
-            <a:solidFill>
-              <a:srgbClr val="10B981"/>
-            </a:solidFill>
-          </a:ln>
-        </p:spPr>
-        <p:style>
-          <a:lnRef idx="1">
-            <a:schemeClr val="accent1"/>
-          </a:lnRef>
-          <a:fillRef idx="3">
-            <a:schemeClr val="accent1"/>
-          </a:fillRef>
-          <a:effectRef idx="2">
-            <a:schemeClr val="accent1"/>
-          </a:effectRef>
-          <a:fontRef idx="minor">
-            <a:schemeClr val="lt1"/>
-          </a:fontRef>
-        </p:style>
-        <p:txBody>
-          <a:bodyPr rtlCol="0" anchor="ctr"/>
-          <a:lstStyle/>
-          <a:p>
-            <a:pPr algn="ctr">
-              <a:defRPr sz="900" b="1">
-                <a:solidFill>
-                  <a:srgbClr val="E0E0E0"/>
-                </a:solidFill>
-              </a:defRPr>
-            </a:pPr>
-            <a:r>
-              <a:t>News Bureau</a:t>
-            </a:r>
-          </a:p>
-        </p:txBody>
-      </p:sp>
-      <p:sp>
-        <p:nvSpPr>
-          <p:cNvPr id="15" name="Rounded Rectangle 14"/>
-          <p:cNvSpPr/>
-          <p:nvPr/>
-        </p:nvSpPr>
-        <p:spPr>
-          <a:xfrm>
-            <a:off x="2423160" y="3154680"/>
-            <a:ext cx="1828800" cy="384048"/>
-          </a:xfrm>
-          <a:prstGeom prst="roundRect">
-            <a:avLst/>
-          </a:prstGeom>
-          <a:solidFill>
-            <a:srgbClr val="1A1A2E"/>
-          </a:solidFill>
-          <a:ln w="19050">
-            <a:solidFill>
-              <a:srgbClr val="10B981"/>
-            </a:solidFill>
-          </a:ln>
-        </p:spPr>
-        <p:style>
-          <a:lnRef idx="1">
-            <a:schemeClr val="accent1"/>
-          </a:lnRef>
-          <a:fillRef idx="3">
-            <a:schemeClr val="accent1"/>
-          </a:fillRef>
-          <a:effectRef idx="2">
-            <a:schemeClr val="accent1"/>
-          </a:effectRef>
-          <a:fontRef idx="minor">
-            <a:schemeClr val="lt1"/>
-          </a:fontRef>
-        </p:style>
-        <p:txBody>
-          <a:bodyPr rtlCol="0" anchor="ctr"/>
-          <a:lstStyle/>
-          <a:p>
-            <a:pPr algn="ctr">
-              <a:defRPr sz="900" b="1">
-                <a:solidFill>
-                  <a:srgbClr val="E0E0E0"/>
-                </a:solidFill>
-              </a:defRPr>
-            </a:pPr>
-            <a:r>
-              <a:t>Deep Crawler</a:t>
-            </a:r>
-          </a:p>
-        </p:txBody>
-      </p:sp>
-      <p:sp>
-        <p:nvSpPr>
-          <p:cNvPr id="16" name="Rounded Rectangle 15"/>
-          <p:cNvSpPr/>
-          <p:nvPr/>
-        </p:nvSpPr>
-        <p:spPr>
-          <a:xfrm>
-            <a:off x="2423160" y="3657600"/>
-            <a:ext cx="1828800" cy="384048"/>
-          </a:xfrm>
-          <a:prstGeom prst="roundRect">
-            <a:avLst/>
-          </a:prstGeom>
-          <a:solidFill>
-            <a:srgbClr val="1A1A2E"/>
-          </a:solidFill>
-          <a:ln w="19050">
-            <a:solidFill>
-              <a:srgbClr val="10B981"/>
-            </a:solidFill>
-          </a:ln>
-        </p:spPr>
-        <p:style>
-          <a:lnRef idx="1">
-            <a:schemeClr val="accent1"/>
-          </a:lnRef>
-          <a:fillRef idx="3">
-            <a:schemeClr val="accent1"/>
-          </a:fillRef>
-          <a:effectRef idx="2">
-            <a:schemeClr val="accent1"/>
-          </a:effectRef>
-          <a:fontRef idx="minor">
-            <a:schemeClr val="lt1"/>
-          </a:fontRef>
-        </p:style>
-        <p:txBody>
-          <a:bodyPr rtlCol="0" anchor="ctr"/>
-          <a:lstStyle/>
-          <a:p>
-            <a:pPr algn="ctr">
-              <a:defRPr sz="900" b="1">
-                <a:solidFill>
-                  <a:srgbClr val="E0E0E0"/>
-                </a:solidFill>
-              </a:defRPr>
-            </a:pPr>
-            <a:r>
-              <a:t>Researcher</a:t>
-            </a:r>
-          </a:p>
-        </p:txBody>
-      </p:sp>
-      <p:sp>
-        <p:nvSpPr>
-          <p:cNvPr id="17" name="Rounded Rectangle 16"/>
-          <p:cNvSpPr/>
-          <p:nvPr/>
-        </p:nvSpPr>
-        <p:spPr>
-          <a:xfrm>
-            <a:off x="4480560" y="1645920"/>
-            <a:ext cx="1920240" cy="411480"/>
-          </a:xfrm>
-          <a:prstGeom prst="roundRect">
-            <a:avLst/>
-          </a:prstGeom>
-          <a:solidFill>
-            <a:srgbClr val="F97316"/>
-          </a:solidFill>
-          <a:ln>
-            <a:noFill/>
-          </a:ln>
-        </p:spPr>
-        <p:style>
-          <a:lnRef idx="1">
-            <a:schemeClr val="accent1"/>
-          </a:lnRef>
-          <a:fillRef idx="3">
-            <a:schemeClr val="accent1"/>
-          </a:fillRef>
-          <a:effectRef idx="2">
-            <a:schemeClr val="accent1"/>
-          </a:effectRef>
-          <a:fontRef idx="minor">
-            <a:schemeClr val="lt1"/>
-          </a:fontRef>
-        </p:style>
-        <p:txBody>
-          <a:bodyPr rtlCol="0" anchor="ctr"/>
-          <a:lstStyle/>
-          <a:p>
-            <a:pPr algn="ctr">
-              <a:defRPr sz="1000" b="1">
-                <a:solidFill>
-                  <a:srgbClr val="FFFFFF"/>
-                </a:solidFill>
-              </a:defRPr>
-            </a:pPr>
-            <a:r>
-              <a:t>Quality Gate</a:t>
-            </a:r>
-          </a:p>
-        </p:txBody>
-      </p:sp>
-      <p:sp>
-        <p:nvSpPr>
-          <p:cNvPr id="18" name="Rounded Rectangle 17"/>
-          <p:cNvSpPr/>
-          <p:nvPr/>
-        </p:nvSpPr>
-        <p:spPr>
-          <a:xfrm>
-            <a:off x="4526280" y="2148840"/>
-            <a:ext cx="1828800" cy="384048"/>
-          </a:xfrm>
-          <a:prstGeom prst="roundRect">
-            <a:avLst/>
-          </a:prstGeom>
-          <a:solidFill>
-            <a:srgbClr val="1A1A2E"/>
-          </a:solidFill>
-          <a:ln w="19050">
-            <a:solidFill>
-              <a:srgbClr val="F97316"/>
-            </a:solidFill>
-          </a:ln>
-        </p:spPr>
-        <p:style>
-          <a:lnRef idx="1">
-            <a:schemeClr val="accent1"/>
-          </a:lnRef>
-          <a:fillRef idx="3">
-            <a:schemeClr val="accent1"/>
-          </a:fillRef>
-          <a:effectRef idx="2">
-            <a:schemeClr val="accent1"/>
-          </a:effectRef>
-          <a:fontRef idx="minor">
-            <a:schemeClr val="lt1"/>
-          </a:fontRef>
-        </p:style>
-        <p:txBody>
-          <a:bodyPr rtlCol="0" anchor="ctr"/>
-          <a:lstStyle/>
-          <a:p>
-            <a:pPr algn="ctr">
-              <a:defRPr sz="900" b="1">
-                <a:solidFill>
-                  <a:srgbClr val="E0E0E0"/>
-                </a:solidFill>
-              </a:defRPr>
-            </a:pPr>
-            <a:r>
-              <a:t>The Critic</a:t>
-            </a:r>
-          </a:p>
-        </p:txBody>
-      </p:sp>
-      <p:sp>
-        <p:nvSpPr>
-          <p:cNvPr id="19" name="Rounded Rectangle 18"/>
-          <p:cNvSpPr/>
-          <p:nvPr/>
-        </p:nvSpPr>
-        <p:spPr>
-          <a:xfrm>
-            <a:off x="4526280" y="2651760"/>
-            <a:ext cx="1828800" cy="384048"/>
-          </a:xfrm>
-          <a:prstGeom prst="roundRect">
-            <a:avLst/>
-          </a:prstGeom>
-          <a:solidFill>
-            <a:srgbClr val="1A1A2E"/>
-          </a:solidFill>
-          <a:ln w="19050">
-            <a:solidFill>
-              <a:srgbClr val="F97316"/>
-            </a:solidFill>
-          </a:ln>
-        </p:spPr>
-        <p:style>
-          <a:lnRef idx="1">
-            <a:schemeClr val="accent1"/>
-          </a:lnRef>
-          <a:fillRef idx="3">
-            <a:schemeClr val="accent1"/>
-          </a:fillRef>
-          <a:effectRef idx="2">
-            <a:schemeClr val="accent1"/>
-          </a:effectRef>
-          <a:fontRef idx="minor">
-            <a:schemeClr val="lt1"/>
-          </a:fontRef>
-        </p:style>
-        <p:txBody>
-          <a:bodyPr rtlCol="0" anchor="ctr"/>
-          <a:lstStyle/>
-          <a:p>
-            <a:pPr algn="ctr">
-              <a:defRPr sz="900" b="1">
-                <a:solidFill>
-                  <a:srgbClr val="E0E0E0"/>
-                </a:solidFill>
-              </a:defRPr>
-            </a:pPr>
-            <a:r>
-              <a:t>Compliance</a:t>
-            </a:r>
-          </a:p>
-        </p:txBody>
-      </p:sp>
-      <p:sp>
-        <p:nvSpPr>
-          <p:cNvPr id="20" name="Rounded Rectangle 19"/>
-          <p:cNvSpPr/>
-          <p:nvPr/>
-        </p:nvSpPr>
-        <p:spPr>
-          <a:xfrm>
-            <a:off x="4526280" y="3154680"/>
-            <a:ext cx="1828800" cy="384048"/>
-          </a:xfrm>
-          <a:prstGeom prst="roundRect">
-            <a:avLst/>
-          </a:prstGeom>
-          <a:solidFill>
-            <a:srgbClr val="1A1A2E"/>
-          </a:solidFill>
-          <a:ln w="19050">
-            <a:solidFill>
-              <a:srgbClr val="F97316"/>
-            </a:solidFill>
-          </a:ln>
-        </p:spPr>
-        <p:style>
-          <a:lnRef idx="1">
-            <a:schemeClr val="accent1"/>
-          </a:lnRef>
-          <a:fillRef idx="3">
-            <a:schemeClr val="accent1"/>
-          </a:fillRef>
-          <a:effectRef idx="2">
-            <a:schemeClr val="accent1"/>
-          </a:effectRef>
-          <a:fontRef idx="minor">
-            <a:schemeClr val="lt1"/>
-          </a:fontRef>
-        </p:style>
-        <p:txBody>
-          <a:bodyPr rtlCol="0" anchor="ctr"/>
-          <a:lstStyle/>
-          <a:p>
-            <a:pPr algn="ctr">
-              <a:defRPr sz="900" b="1">
-                <a:solidFill>
-                  <a:srgbClr val="E0E0E0"/>
-                </a:solidFill>
-              </a:defRPr>
-            </a:pPr>
-            <a:r>
-              <a:t>The Librarian</a:t>
-            </a:r>
-          </a:p>
-        </p:txBody>
-      </p:sp>
-      <p:sp>
-        <p:nvSpPr>
-          <p:cNvPr id="21" name="Rounded Rectangle 20"/>
-          <p:cNvSpPr/>
-          <p:nvPr/>
-        </p:nvSpPr>
-        <p:spPr>
-          <a:xfrm>
-            <a:off x="6583680" y="1645920"/>
-            <a:ext cx="1920240" cy="411480"/>
-          </a:xfrm>
-          <a:prstGeom prst="roundRect">
-            <a:avLst/>
-          </a:prstGeom>
-          <a:solidFill>
-            <a:srgbClr val="764BA2"/>
-          </a:solidFill>
-          <a:ln>
-            <a:noFill/>
-          </a:ln>
-        </p:spPr>
-        <p:style>
-          <a:lnRef idx="1">
-            <a:schemeClr val="accent1"/>
-          </a:lnRef>
-          <a:fillRef idx="3">
-            <a:schemeClr val="accent1"/>
-          </a:fillRef>
-          <a:effectRef idx="2">
-            <a:schemeClr val="accent1"/>
-          </a:effectRef>
-          <a:fontRef idx="minor">
-            <a:schemeClr val="lt1"/>
-          </a:fontRef>
-        </p:style>
-        <p:txBody>
-          <a:bodyPr rtlCol="0" anchor="ctr"/>
-          <a:lstStyle/>
-          <a:p>
-            <a:pPr algn="ctr">
-              <a:defRPr sz="1000" b="1">
-                <a:solidFill>
-                  <a:srgbClr val="FFFFFF"/>
-                </a:solidFill>
-              </a:defRPr>
-            </a:pPr>
-            <a:r>
-              <a:t>Executive</a:t>
-            </a:r>
-          </a:p>
-        </p:txBody>
-      </p:sp>
-      <p:sp>
-        <p:nvSpPr>
-          <p:cNvPr id="22" name="Rounded Rectangle 21"/>
-          <p:cNvSpPr/>
-          <p:nvPr/>
-        </p:nvSpPr>
-        <p:spPr>
-          <a:xfrm>
-            <a:off x="6629400" y="2148840"/>
-            <a:ext cx="1828800" cy="384048"/>
-          </a:xfrm>
-          <a:prstGeom prst="roundRect">
-            <a:avLst/>
-          </a:prstGeom>
-          <a:solidFill>
-            <a:srgbClr val="1A1A2E"/>
-          </a:solidFill>
-          <a:ln w="19050">
-            <a:solidFill>
-              <a:srgbClr val="764BA2"/>
-            </a:solidFill>
-          </a:ln>
-        </p:spPr>
-        <p:style>
-          <a:lnRef idx="1">
-            <a:schemeClr val="accent1"/>
-          </a:lnRef>
-          <a:fillRef idx="3">
-            <a:schemeClr val="accent1"/>
-          </a:fillRef>
-          <a:effectRef idx="2">
-            <a:schemeClr val="accent1"/>
-          </a:effectRef>
-          <a:fontRef idx="minor">
-            <a:schemeClr val="lt1"/>
-          </a:fontRef>
-        </p:style>
-        <p:txBody>
-          <a:bodyPr rtlCol="0" anchor="ctr"/>
-          <a:lstStyle/>
-          <a:p>
-            <a:pPr algn="ctr">
-              <a:defRPr sz="900" b="1">
-                <a:solidFill>
-                  <a:srgbClr val="E0E0E0"/>
-                </a:solidFill>
-              </a:defRPr>
-            </a:pPr>
-            <a:r>
-              <a:t>Presentations</a:t>
-            </a:r>
-          </a:p>
-        </p:txBody>
-      </p:sp>
-      <p:sp>
-        <p:nvSpPr>
-          <p:cNvPr id="23" name="Rounded Rectangle 22"/>
-          <p:cNvSpPr/>
-          <p:nvPr/>
-        </p:nvSpPr>
-        <p:spPr>
-          <a:xfrm>
-            <a:off x="6629400" y="2651760"/>
-            <a:ext cx="1828800" cy="384048"/>
-          </a:xfrm>
-          <a:prstGeom prst="roundRect">
-            <a:avLst/>
-          </a:prstGeom>
-          <a:solidFill>
-            <a:srgbClr val="1A1A2E"/>
-          </a:solidFill>
-          <a:ln w="19050">
-            <a:solidFill>
-              <a:srgbClr val="764BA2"/>
-            </a:solidFill>
-          </a:ln>
-        </p:spPr>
-        <p:style>
-          <a:lnRef idx="1">
-            <a:schemeClr val="accent1"/>
-          </a:lnRef>
-          <a:fillRef idx="3">
-            <a:schemeClr val="accent1"/>
-          </a:fillRef>
-          <a:effectRef idx="2">
-            <a:schemeClr val="accent1"/>
-          </a:effectRef>
-          <a:fontRef idx="minor">
-            <a:schemeClr val="lt1"/>
-          </a:fontRef>
-        </p:style>
-        <p:txBody>
-          <a:bodyPr rtlCol="0" anchor="ctr"/>
-          <a:lstStyle/>
-          <a:p>
-            <a:pPr algn="ctr">
-              <a:defRPr sz="900" b="1">
-                <a:solidFill>
-                  <a:srgbClr val="E0E0E0"/>
-                </a:solidFill>
-              </a:defRPr>
-            </a:pPr>
-            <a:r>
-              <a:t>CX Strategist</a:t>
-            </a:r>
-          </a:p>
-        </p:txBody>
-      </p:sp>
-      <p:sp>
-        <p:nvSpPr>
-          <p:cNvPr id="24" name="Rounded Rectangle 23"/>
-          <p:cNvSpPr/>
-          <p:nvPr/>
-        </p:nvSpPr>
-        <p:spPr>
-          <a:xfrm>
-            <a:off x="6629400" y="3154680"/>
-            <a:ext cx="1828800" cy="384048"/>
-          </a:xfrm>
-          <a:prstGeom prst="roundRect">
-            <a:avLst/>
-          </a:prstGeom>
-          <a:solidFill>
-            <a:srgbClr val="1A1A2E"/>
-          </a:solidFill>
-          <a:ln w="19050">
-            <a:solidFill>
-              <a:srgbClr val="764BA2"/>
-            </a:solidFill>
-          </a:ln>
-        </p:spPr>
-        <p:style>
-          <a:lnRef idx="1">
-            <a:schemeClr val="accent1"/>
-          </a:lnRef>
-          <a:fillRef idx="3">
-            <a:schemeClr val="accent1"/>
-          </a:fillRef>
-          <a:effectRef idx="2">
-            <a:schemeClr val="accent1"/>
-          </a:effectRef>
-          <a:fontRef idx="minor">
-            <a:schemeClr val="lt1"/>
-          </a:fontRef>
-        </p:style>
-        <p:txBody>
-          <a:bodyPr rtlCol="0" anchor="ctr"/>
-          <a:lstStyle/>
-          <a:p>
-            <a:pPr algn="ctr">
-              <a:defRPr sz="900" b="1">
-                <a:solidFill>
-                  <a:srgbClr val="E0E0E0"/>
-                </a:solidFill>
-              </a:defRPr>
-            </a:pPr>
-            <a:r>
-              <a:t>CMO</a:t>
-            </a:r>
-          </a:p>
-        </p:txBody>
-      </p:sp>
-      <p:sp>
-        <p:nvSpPr>
-          <p:cNvPr id="25" name="Rounded Rectangle 24"/>
-          <p:cNvSpPr/>
-          <p:nvPr/>
-        </p:nvSpPr>
-        <p:spPr>
-          <a:xfrm>
-            <a:off x="8686800" y="1645920"/>
-            <a:ext cx="1920240" cy="411480"/>
-          </a:xfrm>
-          <a:prstGeom prst="roundRect">
-            <a:avLst/>
-          </a:prstGeom>
-          <a:solidFill>
-            <a:srgbClr val="EAB308"/>
-          </a:solidFill>
-          <a:ln>
-            <a:noFill/>
-          </a:ln>
-        </p:spPr>
-        <p:style>
-          <a:lnRef idx="1">
-            <a:schemeClr val="accent1"/>
-          </a:lnRef>
-          <a:fillRef idx="3">
-            <a:schemeClr val="accent1"/>
-          </a:fillRef>
-          <a:effectRef idx="2">
-            <a:schemeClr val="accent1"/>
-          </a:effectRef>
-          <a:fontRef idx="minor">
-            <a:schemeClr val="lt1"/>
-          </a:fontRef>
-        </p:style>
-        <p:txBody>
-          <a:bodyPr rtlCol="0" anchor="ctr"/>
-          <a:lstStyle/>
-          <a:p>
-            <a:pPr algn="ctr">
-              <a:defRPr sz="1000" b="1">
-                <a:solidFill>
-                  <a:srgbClr val="FFFFFF"/>
-                </a:solidFill>
-              </a:defRPr>
-            </a:pPr>
-            <a:r>
-              <a:t>Creative</a:t>
-            </a:r>
-          </a:p>
-        </p:txBody>
-      </p:sp>
-      <p:sp>
-        <p:nvSpPr>
-          <p:cNvPr id="26" name="Rounded Rectangle 25"/>
-          <p:cNvSpPr/>
-          <p:nvPr/>
-        </p:nvSpPr>
-        <p:spPr>
-          <a:xfrm>
-            <a:off x="8732520" y="2148840"/>
-            <a:ext cx="1828800" cy="384048"/>
-          </a:xfrm>
-          <a:prstGeom prst="roundRect">
-            <a:avLst/>
-          </a:prstGeom>
-          <a:solidFill>
-            <a:srgbClr val="1A1A2E"/>
-          </a:solidFill>
-          <a:ln w="19050">
-            <a:solidFill>
-              <a:srgbClr val="EAB308"/>
-            </a:solidFill>
-          </a:ln>
-        </p:spPr>
-        <p:style>
-          <a:lnRef idx="1">
-            <a:schemeClr val="accent1"/>
-          </a:lnRef>
-          <a:fillRef idx="3">
-            <a:schemeClr val="accent1"/>
-          </a:fillRef>
-          <a:effectRef idx="2">
-            <a:schemeClr val="accent1"/>
-          </a:effectRef>
-          <a:fontRef idx="minor">
-            <a:schemeClr val="lt1"/>
-          </a:fontRef>
-        </p:style>
-        <p:txBody>
-          <a:bodyPr rtlCol="0" anchor="ctr"/>
-          <a:lstStyle/>
-          <a:p>
-            <a:pPr algn="ctr">
-              <a:defRPr sz="900" b="1">
-                <a:solidFill>
-                  <a:srgbClr val="E0E0E0"/>
-                </a:solidFill>
-              </a:defRPr>
-            </a:pPr>
-            <a:r>
-              <a:t>Designer</a:t>
-            </a:r>
-          </a:p>
-        </p:txBody>
-      </p:sp>
-      <p:sp>
-        <p:nvSpPr>
-          <p:cNvPr id="27" name="Rounded Rectangle 26"/>
-          <p:cNvSpPr/>
-          <p:nvPr/>
-        </p:nvSpPr>
-        <p:spPr>
-          <a:xfrm>
-            <a:off x="8732520" y="2651760"/>
-            <a:ext cx="1828800" cy="384048"/>
-          </a:xfrm>
-          <a:prstGeom prst="roundRect">
-            <a:avLst/>
-          </a:prstGeom>
-          <a:solidFill>
-            <a:srgbClr val="1A1A2E"/>
-          </a:solidFill>
-          <a:ln w="19050">
-            <a:solidFill>
-              <a:srgbClr val="EAB308"/>
-            </a:solidFill>
-          </a:ln>
-        </p:spPr>
-        <p:style>
-          <a:lnRef idx="1">
-            <a:schemeClr val="accent1"/>
-          </a:lnRef>
-          <a:fillRef idx="3">
-            <a:schemeClr val="accent1"/>
-          </a:fillRef>
-          <a:effectRef idx="2">
-            <a:schemeClr val="accent1"/>
-          </a:effectRef>
-          <a:fontRef idx="minor">
-            <a:schemeClr val="lt1"/>
-          </a:fontRef>
-        </p:style>
-        <p:txBody>
-          <a:bodyPr rtlCol="0" anchor="ctr"/>
-          <a:lstStyle/>
-          <a:p>
-            <a:pPr algn="ctr">
-              <a:defRPr sz="900" b="1">
-                <a:solidFill>
-                  <a:srgbClr val="E0E0E0"/>
-                </a:solidFill>
-              </a:defRPr>
-            </a:pPr>
-            <a:r>
-              <a:t>Data Architect</a:t>
-            </a:r>
-          </a:p>
-        </p:txBody>
-      </p:sp>
-      <p:sp>
-        <p:nvSpPr>
-          <p:cNvPr id="28" name="Oval 27"/>
-          <p:cNvSpPr/>
-          <p:nvPr/>
-        </p:nvSpPr>
-        <p:spPr>
-          <a:xfrm>
-            <a:off x="457200" y="5669280"/>
-            <a:ext cx="137160" cy="137160"/>
-          </a:xfrm>
-          <a:prstGeom prst="ellipse">
-            <a:avLst/>
-          </a:prstGeom>
-          <a:solidFill>
-            <a:srgbClr val="667EEA"/>
-          </a:solidFill>
-          <a:ln>
-            <a:noFill/>
-          </a:ln>
-        </p:spPr>
-        <p:style>
-          <a:lnRef idx="1">
-            <a:schemeClr val="accent1"/>
-          </a:lnRef>
-          <a:fillRef idx="3">
-            <a:schemeClr val="accent1"/>
-          </a:fillRef>
-          <a:effectRef idx="2">
-            <a:schemeClr val="accent1"/>
-          </a:effectRef>
-          <a:fontRef idx="minor">
-            <a:schemeClr val="lt1"/>
-          </a:fontRef>
-        </p:style>
-        <p:txBody>
-          <a:bodyPr rtlCol="0" anchor="ctr"/>
-          <a:lstStyle/>
-          <a:p>
-            <a:pPr algn="ctr"/>
-          </a:p>
-        </p:txBody>
-      </p:sp>
-      <p:sp>
-        <p:nvSpPr>
-          <p:cNvPr id="29" name="TextBox 28"/>
+              <a:defRPr sz="900">
+                <a:solidFill>
+                  <a:srgbClr val="94A3B8"/>
+                </a:solidFill>
+              </a:defRPr>
+            </a:pPr>
+            <a:r>
+              <a:t>n8n Failure Rate</a:t>
+            </a:r>
+          </a:p>
+        </p:txBody>
+      </p:sp>
+      <p:sp>
+        <p:nvSpPr>
+          <p:cNvPr id="9" name="TextBox 8"/>
           <p:cNvSpPr txBox="1"/>
           <p:nvPr/>
         </p:nvSpPr>
         <p:spPr>
           <a:xfrm>
-            <a:off x="640080" y="5650992"/>
-            <a:ext cx="1828800" cy="182880"/>
+            <a:off x="731520" y="2926080"/>
+            <a:ext cx="10058400" cy="4389120"/>
           </a:xfrm>
           <a:prstGeom prst="rect">
             <a:avLst/>
@@ -5206,332 +5948,72 @@
           <a:noFill/>
         </p:spPr>
         <p:txBody>
-          <a:bodyPr wrap="none">
+          <a:bodyPr wrap="square">
             <a:spAutoFit/>
           </a:bodyPr>
           <a:lstStyle/>
           <a:p>
             <a:pPr>
-              <a:defRPr sz="800">
-                <a:solidFill>
-                  <a:srgbClr val="94A3B8"/>
-                </a:solidFill>
-              </a:defRPr>
-            </a:pPr>
-            <a:r>
-              <a:t>System Core (6)</a:t>
-            </a:r>
-          </a:p>
-        </p:txBody>
-      </p:sp>
-      <p:sp>
-        <p:nvSpPr>
-          <p:cNvPr id="30" name="Oval 29"/>
-          <p:cNvSpPr/>
-          <p:nvPr/>
-        </p:nvSpPr>
-        <p:spPr>
-          <a:xfrm>
-            <a:off x="2651760" y="5669280"/>
-            <a:ext cx="137160" cy="137160"/>
-          </a:xfrm>
-          <a:prstGeom prst="ellipse">
-            <a:avLst/>
-          </a:prstGeom>
-          <a:solidFill>
-            <a:srgbClr val="10B981"/>
-          </a:solidFill>
-          <a:ln>
-            <a:noFill/>
-          </a:ln>
-        </p:spPr>
-        <p:style>
-          <a:lnRef idx="1">
-            <a:schemeClr val="accent1"/>
-          </a:lnRef>
-          <a:fillRef idx="3">
-            <a:schemeClr val="accent1"/>
-          </a:fillRef>
-          <a:effectRef idx="2">
-            <a:schemeClr val="accent1"/>
-          </a:effectRef>
-          <a:fontRef idx="minor">
-            <a:schemeClr val="lt1"/>
-          </a:fontRef>
-        </p:style>
-        <p:txBody>
-          <a:bodyPr rtlCol="0" anchor="ctr"/>
-          <a:lstStyle/>
-          <a:p>
-            <a:pPr algn="ctr"/>
-          </a:p>
-        </p:txBody>
-      </p:sp>
-      <p:sp>
-        <p:nvSpPr>
-          <p:cNvPr id="31" name="TextBox 30"/>
-          <p:cNvSpPr txBox="1"/>
-          <p:nvPr/>
-        </p:nvSpPr>
-        <p:spPr>
-          <a:xfrm>
-            <a:off x="2834640" y="5650992"/>
-            <a:ext cx="1828800" cy="182880"/>
-          </a:xfrm>
-          <a:prstGeom prst="rect">
-            <a:avLst/>
-          </a:prstGeom>
-          <a:noFill/>
-        </p:spPr>
-        <p:txBody>
-          <a:bodyPr wrap="none">
-            <a:spAutoFit/>
-          </a:bodyPr>
-          <a:lstStyle/>
+              <a:spcAft>
+                <a:spcPts val="1000"/>
+              </a:spcAft>
+              <a:defRPr sz="1500">
+                <a:solidFill>
+                  <a:srgbClr val="C0C8E0"/>
+                </a:solidFill>
+                <a:latin typeface="Roboto"/>
+              </a:defRPr>
+            </a:pPr>
+            <a:r>
+              <a:t>    Agents: 16 active, 1 idle, 1 offline</a:t>
+            </a:r>
+          </a:p>
           <a:p>
             <a:pPr>
-              <a:defRPr sz="800">
-                <a:solidFill>
-                  <a:srgbClr val="94A3B8"/>
-                </a:solidFill>
-              </a:defRPr>
-            </a:pPr>
-            <a:r>
-              <a:t>Intelligence (4)</a:t>
-            </a:r>
-          </a:p>
-        </p:txBody>
-      </p:sp>
-      <p:sp>
-        <p:nvSpPr>
-          <p:cNvPr id="32" name="Oval 31"/>
-          <p:cNvSpPr/>
-          <p:nvPr/>
-        </p:nvSpPr>
-        <p:spPr>
-          <a:xfrm>
-            <a:off x="4846320" y="5669280"/>
-            <a:ext cx="137160" cy="137160"/>
-          </a:xfrm>
-          <a:prstGeom prst="ellipse">
-            <a:avLst/>
-          </a:prstGeom>
-          <a:solidFill>
-            <a:srgbClr val="F97316"/>
-          </a:solidFill>
-          <a:ln>
-            <a:noFill/>
-          </a:ln>
-        </p:spPr>
-        <p:style>
-          <a:lnRef idx="1">
-            <a:schemeClr val="accent1"/>
-          </a:lnRef>
-          <a:fillRef idx="3">
-            <a:schemeClr val="accent1"/>
-          </a:fillRef>
-          <a:effectRef idx="2">
-            <a:schemeClr val="accent1"/>
-          </a:effectRef>
-          <a:fontRef idx="minor">
-            <a:schemeClr val="lt1"/>
-          </a:fontRef>
-        </p:style>
-        <p:txBody>
-          <a:bodyPr rtlCol="0" anchor="ctr"/>
-          <a:lstStyle/>
-          <a:p>
-            <a:pPr algn="ctr"/>
-          </a:p>
-        </p:txBody>
-      </p:sp>
-      <p:sp>
-        <p:nvSpPr>
-          <p:cNvPr id="33" name="TextBox 32"/>
-          <p:cNvSpPr txBox="1"/>
-          <p:nvPr/>
-        </p:nvSpPr>
-        <p:spPr>
-          <a:xfrm>
-            <a:off x="5029200" y="5650992"/>
-            <a:ext cx="1828800" cy="182880"/>
-          </a:xfrm>
-          <a:prstGeom prst="rect">
-            <a:avLst/>
-          </a:prstGeom>
-          <a:noFill/>
-        </p:spPr>
-        <p:txBody>
-          <a:bodyPr wrap="none">
-            <a:spAutoFit/>
-          </a:bodyPr>
-          <a:lstStyle/>
+              <a:spcAft>
+                <a:spcPts val="1000"/>
+              </a:spcAft>
+              <a:defRPr sz="1500">
+                <a:solidFill>
+                  <a:srgbClr val="C0C8E0"/>
+                </a:solidFill>
+                <a:latin typeface="Roboto"/>
+              </a:defRPr>
+            </a:pPr>
+            <a:r>
+              <a:t>    Uptime target: 99.7% | EQ Stress Level: 3.2/10</a:t>
+            </a:r>
+          </a:p>
           <a:p>
             <a:pPr>
-              <a:defRPr sz="800">
-                <a:solidFill>
-                  <a:srgbClr val="94A3B8"/>
-                </a:solidFill>
-              </a:defRPr>
-            </a:pPr>
-            <a:r>
-              <a:t>Quality Gate (3)</a:t>
-            </a:r>
-          </a:p>
-        </p:txBody>
-      </p:sp>
-      <p:sp>
-        <p:nvSpPr>
-          <p:cNvPr id="34" name="Oval 33"/>
-          <p:cNvSpPr/>
-          <p:nvPr/>
-        </p:nvSpPr>
-        <p:spPr>
-          <a:xfrm>
-            <a:off x="7040879" y="5669280"/>
-            <a:ext cx="137160" cy="137160"/>
-          </a:xfrm>
-          <a:prstGeom prst="ellipse">
-            <a:avLst/>
-          </a:prstGeom>
-          <a:solidFill>
-            <a:srgbClr val="764BA2"/>
-          </a:solidFill>
-          <a:ln>
-            <a:noFill/>
-          </a:ln>
-        </p:spPr>
-        <p:style>
-          <a:lnRef idx="1">
-            <a:schemeClr val="accent1"/>
-          </a:lnRef>
-          <a:fillRef idx="3">
-            <a:schemeClr val="accent1"/>
-          </a:fillRef>
-          <a:effectRef idx="2">
-            <a:schemeClr val="accent1"/>
-          </a:effectRef>
-          <a:fontRef idx="minor">
-            <a:schemeClr val="lt1"/>
-          </a:fontRef>
-        </p:style>
-        <p:txBody>
-          <a:bodyPr rtlCol="0" anchor="ctr"/>
-          <a:lstStyle/>
-          <a:p>
-            <a:pPr algn="ctr"/>
-          </a:p>
-        </p:txBody>
-      </p:sp>
-      <p:sp>
-        <p:nvSpPr>
-          <p:cNvPr id="35" name="TextBox 34"/>
-          <p:cNvSpPr txBox="1"/>
-          <p:nvPr/>
-        </p:nvSpPr>
-        <p:spPr>
-          <a:xfrm>
-            <a:off x="7223759" y="5650992"/>
-            <a:ext cx="1828800" cy="182880"/>
-          </a:xfrm>
-          <a:prstGeom prst="rect">
-            <a:avLst/>
-          </a:prstGeom>
-          <a:noFill/>
-        </p:spPr>
-        <p:txBody>
-          <a:bodyPr wrap="none">
-            <a:spAutoFit/>
-          </a:bodyPr>
-          <a:lstStyle/>
+              <a:spcAft>
+                <a:spcPts val="1000"/>
+              </a:spcAft>
+              <a:defRPr sz="1500">
+                <a:solidFill>
+                  <a:srgbClr val="C0C8E0"/>
+                </a:solidFill>
+                <a:latin typeface="Roboto"/>
+              </a:defRPr>
+            </a:pPr>
+            <a:r>
+              <a:t>    n8n Failure Rate: 98.3% — FLAGGED FOR HIGH-PRIORITY OPTIMIZATION</a:t>
+            </a:r>
+          </a:p>
           <a:p>
             <a:pPr>
-              <a:defRPr sz="800">
-                <a:solidFill>
-                  <a:srgbClr val="94A3B8"/>
-                </a:solidFill>
-              </a:defRPr>
-            </a:pPr>
-            <a:r>
-              <a:t>Executive (3)</a:t>
-            </a:r>
-          </a:p>
-        </p:txBody>
-      </p:sp>
-      <p:sp>
-        <p:nvSpPr>
-          <p:cNvPr id="36" name="Oval 35"/>
-          <p:cNvSpPr/>
-          <p:nvPr/>
-        </p:nvSpPr>
-        <p:spPr>
-          <a:xfrm>
-            <a:off x="9235440" y="5669280"/>
-            <a:ext cx="137160" cy="137160"/>
-          </a:xfrm>
-          <a:prstGeom prst="ellipse">
-            <a:avLst/>
-          </a:prstGeom>
-          <a:solidFill>
-            <a:srgbClr val="EAB308"/>
-          </a:solidFill>
-          <a:ln>
-            <a:noFill/>
-          </a:ln>
-        </p:spPr>
-        <p:style>
-          <a:lnRef idx="1">
-            <a:schemeClr val="accent1"/>
-          </a:lnRef>
-          <a:fillRef idx="3">
-            <a:schemeClr val="accent1"/>
-          </a:fillRef>
-          <a:effectRef idx="2">
-            <a:schemeClr val="accent1"/>
-          </a:effectRef>
-          <a:fontRef idx="minor">
-            <a:schemeClr val="lt1"/>
-          </a:fontRef>
-        </p:style>
-        <p:txBody>
-          <a:bodyPr rtlCol="0" anchor="ctr"/>
-          <a:lstStyle/>
-          <a:p>
-            <a:pPr algn="ctr"/>
-          </a:p>
-        </p:txBody>
-      </p:sp>
-      <p:sp>
-        <p:nvSpPr>
-          <p:cNvPr id="37" name="TextBox 36"/>
-          <p:cNvSpPr txBox="1"/>
-          <p:nvPr/>
-        </p:nvSpPr>
-        <p:spPr>
-          <a:xfrm>
-            <a:off x="9418319" y="5650992"/>
-            <a:ext cx="1828800" cy="182880"/>
-          </a:xfrm>
-          <a:prstGeom prst="rect">
-            <a:avLst/>
-          </a:prstGeom>
-          <a:noFill/>
-        </p:spPr>
-        <p:txBody>
-          <a:bodyPr wrap="none">
-            <a:spAutoFit/>
-          </a:bodyPr>
-          <a:lstStyle/>
-          <a:p>
-            <a:pPr>
-              <a:defRPr sz="800">
-                <a:solidFill>
-                  <a:srgbClr val="94A3B8"/>
-                </a:solidFill>
-              </a:defRPr>
-            </a:pPr>
-            <a:r>
-              <a:t>Creative (2)</a:t>
+              <a:spcAft>
+                <a:spcPts val="1000"/>
+              </a:spcAft>
+              <a:defRPr sz="1500">
+                <a:solidFill>
+                  <a:srgbClr val="C0C8E0"/>
+                </a:solidFill>
+                <a:latin typeface="Roboto"/>
+              </a:defRPr>
+            </a:pPr>
+            <a:r>
+              <a:t>    Last Dashboard Refresh: 2026-03-11 18:32</a:t>
             </a:r>
           </a:p>
         </p:txBody>
@@ -5613,8 +6095,8 @@
         </p:nvSpPr>
         <p:spPr>
           <a:xfrm>
-            <a:off x="8686800" y="6263640"/>
-            <a:ext cx="3200400" cy="228600"/>
+            <a:off x="731520" y="457200"/>
+            <a:ext cx="10058400" cy="914400"/>
           </a:xfrm>
           <a:prstGeom prst="rect">
             <a:avLst/>
@@ -5627,29 +6109,365 @@
           </a:bodyPr>
           <a:lstStyle/>
           <a:p>
-            <a:pPr algn="r">
-              <a:defRPr sz="700">
-                <a:solidFill>
-                  <a:srgbClr val="4A4A6A"/>
-                </a:solidFill>
-              </a:defRPr>
-            </a:pPr>
-            <a:r>
-              <a:t>Layout: chart_left_bullets_right</a:t>
-            </a:r>
-          </a:p>
-        </p:txBody>
-      </p:sp>
-      <p:sp>
-        <p:nvSpPr>
-          <p:cNvPr id="4" name="TextBox 3"/>
+            <a:pPr>
+              <a:defRPr sz="2800" b="1">
+                <a:solidFill>
+                  <a:srgbClr val="FFFFFF"/>
+                </a:solidFill>
+                <a:latin typeface="Inter"/>
+              </a:defRPr>
+            </a:pPr>
+            <a:r>
+              <a:t>Financial Projections</a:t>
+            </a:r>
+          </a:p>
+        </p:txBody>
+      </p:sp>
+      <p:sp>
+        <p:nvSpPr>
+          <p:cNvPr id="4" name="Rounded Rectangle 3"/>
+          <p:cNvSpPr/>
+          <p:nvPr/>
+        </p:nvSpPr>
+        <p:spPr>
+          <a:xfrm>
+            <a:off x="731520" y="1463040"/>
+            <a:ext cx="1828800" cy="1097280"/>
+          </a:xfrm>
+          <a:prstGeom prst="roundRect">
+            <a:avLst/>
+          </a:prstGeom>
+          <a:solidFill>
+            <a:srgbClr val="1A1A2E"/>
+          </a:solidFill>
+          <a:ln w="25400">
+            <a:solidFill>
+              <a:srgbClr val="10B981"/>
+            </a:solidFill>
+          </a:ln>
+        </p:spPr>
+        <p:style>
+          <a:lnRef idx="1">
+            <a:schemeClr val="accent1"/>
+          </a:lnRef>
+          <a:fillRef idx="3">
+            <a:schemeClr val="accent1"/>
+          </a:fillRef>
+          <a:effectRef idx="2">
+            <a:schemeClr val="accent1"/>
+          </a:effectRef>
+          <a:fontRef idx="minor">
+            <a:schemeClr val="lt1"/>
+          </a:fontRef>
+        </p:style>
+        <p:txBody>
+          <a:bodyPr rtlCol="0" anchor="ctr" wrap="square"/>
+          <a:lstStyle/>
+          <a:p>
+            <a:pPr algn="ctr">
+              <a:defRPr sz="2400" b="1">
+                <a:solidFill>
+                  <a:srgbClr val="10B981"/>
+                </a:solidFill>
+                <a:latin typeface="Inter"/>
+              </a:defRPr>
+            </a:pPr>
+            <a:r>
+              <a:t>Month 2</a:t>
+            </a:r>
+          </a:p>
+          <a:p>
+            <a:pPr algn="ctr">
+              <a:defRPr sz="900">
+                <a:solidFill>
+                  <a:srgbClr val="94A3B8"/>
+                </a:solidFill>
+              </a:defRPr>
+            </a:pPr>
+            <a:r>
+              <a:t>Break-Even</a:t>
+            </a:r>
+          </a:p>
+        </p:txBody>
+      </p:sp>
+      <p:sp>
+        <p:nvSpPr>
+          <p:cNvPr id="5" name="Rounded Rectangle 4"/>
+          <p:cNvSpPr/>
+          <p:nvPr/>
+        </p:nvSpPr>
+        <p:spPr>
+          <a:xfrm>
+            <a:off x="2926080" y="1463040"/>
+            <a:ext cx="1828800" cy="1097280"/>
+          </a:xfrm>
+          <a:prstGeom prst="roundRect">
+            <a:avLst/>
+          </a:prstGeom>
+          <a:solidFill>
+            <a:srgbClr val="1A1A2E"/>
+          </a:solidFill>
+          <a:ln w="25400">
+            <a:solidFill>
+              <a:srgbClr val="667EEA"/>
+            </a:solidFill>
+          </a:ln>
+        </p:spPr>
+        <p:style>
+          <a:lnRef idx="1">
+            <a:schemeClr val="accent1"/>
+          </a:lnRef>
+          <a:fillRef idx="3">
+            <a:schemeClr val="accent1"/>
+          </a:fillRef>
+          <a:effectRef idx="2">
+            <a:schemeClr val="accent1"/>
+          </a:effectRef>
+          <a:fontRef idx="minor">
+            <a:schemeClr val="lt1"/>
+          </a:fontRef>
+        </p:style>
+        <p:txBody>
+          <a:bodyPr rtlCol="0" anchor="ctr" wrap="square"/>
+          <a:lstStyle/>
+          <a:p>
+            <a:pPr algn="ctr">
+              <a:defRPr sz="2400" b="1">
+                <a:solidFill>
+                  <a:srgbClr val="667EEA"/>
+                </a:solidFill>
+                <a:latin typeface="Inter"/>
+              </a:defRPr>
+            </a:pPr>
+            <a:r>
+              <a:t>$1.2M</a:t>
+            </a:r>
+          </a:p>
+          <a:p>
+            <a:pPr algn="ctr">
+              <a:defRPr sz="900">
+                <a:solidFill>
+                  <a:srgbClr val="94A3B8"/>
+                </a:solidFill>
+              </a:defRPr>
+            </a:pPr>
+            <a:r>
+              <a:t>Y1 Revenue</a:t>
+            </a:r>
+          </a:p>
+        </p:txBody>
+      </p:sp>
+      <p:sp>
+        <p:nvSpPr>
+          <p:cNvPr id="6" name="Rounded Rectangle 5"/>
+          <p:cNvSpPr/>
+          <p:nvPr/>
+        </p:nvSpPr>
+        <p:spPr>
+          <a:xfrm>
+            <a:off x="5120640" y="1463040"/>
+            <a:ext cx="1828800" cy="1097280"/>
+          </a:xfrm>
+          <a:prstGeom prst="roundRect">
+            <a:avLst/>
+          </a:prstGeom>
+          <a:solidFill>
+            <a:srgbClr val="1A1A2E"/>
+          </a:solidFill>
+          <a:ln w="25400">
+            <a:solidFill>
+              <a:srgbClr val="10B981"/>
+            </a:solidFill>
+          </a:ln>
+        </p:spPr>
+        <p:style>
+          <a:lnRef idx="1">
+            <a:schemeClr val="accent1"/>
+          </a:lnRef>
+          <a:fillRef idx="3">
+            <a:schemeClr val="accent1"/>
+          </a:fillRef>
+          <a:effectRef idx="2">
+            <a:schemeClr val="accent1"/>
+          </a:effectRef>
+          <a:fontRef idx="minor">
+            <a:schemeClr val="lt1"/>
+          </a:fontRef>
+        </p:style>
+        <p:txBody>
+          <a:bodyPr rtlCol="0" anchor="ctr" wrap="square"/>
+          <a:lstStyle/>
+          <a:p>
+            <a:pPr algn="ctr">
+              <a:defRPr sz="2400" b="1">
+                <a:solidFill>
+                  <a:srgbClr val="10B981"/>
+                </a:solidFill>
+                <a:latin typeface="Inter"/>
+              </a:defRPr>
+            </a:pPr>
+            <a:r>
+              <a:t>74.9%</a:t>
+            </a:r>
+          </a:p>
+          <a:p>
+            <a:pPr algn="ctr">
+              <a:defRPr sz="900">
+                <a:solidFill>
+                  <a:srgbClr val="94A3B8"/>
+                </a:solidFill>
+              </a:defRPr>
+            </a:pPr>
+            <a:r>
+              <a:t>Gross Margin</a:t>
+            </a:r>
+          </a:p>
+        </p:txBody>
+      </p:sp>
+      <p:sp>
+        <p:nvSpPr>
+          <p:cNvPr id="7" name="Rounded Rectangle 6"/>
+          <p:cNvSpPr/>
+          <p:nvPr/>
+        </p:nvSpPr>
+        <p:spPr>
+          <a:xfrm>
+            <a:off x="7315200" y="1463040"/>
+            <a:ext cx="1828800" cy="1097280"/>
+          </a:xfrm>
+          <a:prstGeom prst="roundRect">
+            <a:avLst/>
+          </a:prstGeom>
+          <a:solidFill>
+            <a:srgbClr val="1A1A2E"/>
+          </a:solidFill>
+          <a:ln w="25400">
+            <a:solidFill>
+              <a:srgbClr val="667EEA"/>
+            </a:solidFill>
+          </a:ln>
+        </p:spPr>
+        <p:style>
+          <a:lnRef idx="1">
+            <a:schemeClr val="accent1"/>
+          </a:lnRef>
+          <a:fillRef idx="3">
+            <a:schemeClr val="accent1"/>
+          </a:fillRef>
+          <a:effectRef idx="2">
+            <a:schemeClr val="accent1"/>
+          </a:effectRef>
+          <a:fontRef idx="minor">
+            <a:schemeClr val="lt1"/>
+          </a:fontRef>
+        </p:style>
+        <p:txBody>
+          <a:bodyPr rtlCol="0" anchor="ctr" wrap="square"/>
+          <a:lstStyle/>
+          <a:p>
+            <a:pPr algn="ctr">
+              <a:defRPr sz="2400" b="1">
+                <a:solidFill>
+                  <a:srgbClr val="667EEA"/>
+                </a:solidFill>
+                <a:latin typeface="Inter"/>
+              </a:defRPr>
+            </a:pPr>
+            <a:r>
+              <a:t>$0.02</a:t>
+            </a:r>
+          </a:p>
+          <a:p>
+            <a:pPr algn="ctr">
+              <a:defRPr sz="900">
+                <a:solidFill>
+                  <a:srgbClr val="94A3B8"/>
+                </a:solidFill>
+              </a:defRPr>
+            </a:pPr>
+            <a:r>
+              <a:t>Cost/Decision</a:t>
+            </a:r>
+          </a:p>
+        </p:txBody>
+      </p:sp>
+      <p:sp>
+        <p:nvSpPr>
+          <p:cNvPr id="8" name="Rounded Rectangle 7"/>
+          <p:cNvSpPr/>
+          <p:nvPr/>
+        </p:nvSpPr>
+        <p:spPr>
+          <a:xfrm>
+            <a:off x="9509760" y="1463040"/>
+            <a:ext cx="1828800" cy="1097280"/>
+          </a:xfrm>
+          <a:prstGeom prst="roundRect">
+            <a:avLst/>
+          </a:prstGeom>
+          <a:solidFill>
+            <a:srgbClr val="1A1A2E"/>
+          </a:solidFill>
+          <a:ln w="25400">
+            <a:solidFill>
+              <a:srgbClr val="EAB308"/>
+            </a:solidFill>
+          </a:ln>
+        </p:spPr>
+        <p:style>
+          <a:lnRef idx="1">
+            <a:schemeClr val="accent1"/>
+          </a:lnRef>
+          <a:fillRef idx="3">
+            <a:schemeClr val="accent1"/>
+          </a:fillRef>
+          <a:effectRef idx="2">
+            <a:schemeClr val="accent1"/>
+          </a:effectRef>
+          <a:fontRef idx="minor">
+            <a:schemeClr val="lt1"/>
+          </a:fontRef>
+        </p:style>
+        <p:txBody>
+          <a:bodyPr rtlCol="0" anchor="ctr" wrap="square"/>
+          <a:lstStyle/>
+          <a:p>
+            <a:pPr algn="ctr">
+              <a:defRPr sz="2400" b="1">
+                <a:solidFill>
+                  <a:srgbClr val="EAB308"/>
+                </a:solidFill>
+                <a:latin typeface="Inter"/>
+              </a:defRPr>
+            </a:pPr>
+            <a:r>
+              <a:t>$50/mo ea</a:t>
+            </a:r>
+          </a:p>
+          <a:p>
+            <a:pPr algn="ctr">
+              <a:defRPr sz="900">
+                <a:solidFill>
+                  <a:srgbClr val="94A3B8"/>
+                </a:solidFill>
+              </a:defRPr>
+            </a:pPr>
+            <a:r>
+              <a:t>18 Agents</a:t>
+            </a:r>
+          </a:p>
+        </p:txBody>
+      </p:sp>
+      <p:sp>
+        <p:nvSpPr>
+          <p:cNvPr id="9" name="TextBox 8"/>
           <p:cNvSpPr txBox="1"/>
           <p:nvPr/>
         </p:nvSpPr>
         <p:spPr>
           <a:xfrm>
-            <a:off x="731520" y="457200"/>
-            <a:ext cx="10058400" cy="914400"/>
+            <a:off x="731520" y="2926080"/>
+            <a:ext cx="10058400" cy="4389120"/>
           </a:xfrm>
           <a:prstGeom prst="rect">
             <a:avLst/>
@@ -5663,44 +6481,24 @@
           <a:lstStyle/>
           <a:p>
             <a:pPr>
-              <a:defRPr sz="2800" b="1">
-                <a:solidFill>
-                  <a:srgbClr val="FFFFFF"/>
-                </a:solidFill>
-                <a:latin typeface="Inter"/>
-              </a:defRPr>
-            </a:pPr>
-            <a:r>
-              <a:t>Financial Projections</a:t>
-            </a:r>
-          </a:p>
-        </p:txBody>
-      </p:sp>
-      <p:sp>
-        <p:nvSpPr>
-          <p:cNvPr id="5" name="TextBox 4"/>
-          <p:cNvSpPr txBox="1"/>
-          <p:nvPr/>
-        </p:nvSpPr>
-        <p:spPr>
-          <a:xfrm>
-            <a:off x="731520" y="1645920"/>
-            <a:ext cx="10058400" cy="4389120"/>
-          </a:xfrm>
-          <a:prstGeom prst="rect">
-            <a:avLst/>
-          </a:prstGeom>
-          <a:noFill/>
-        </p:spPr>
-        <p:txBody>
-          <a:bodyPr wrap="square">
-            <a:spAutoFit/>
-          </a:bodyPr>
-          <a:lstStyle/>
+              <a:spcAft>
+                <a:spcPts val="1000"/>
+              </a:spcAft>
+              <a:defRPr sz="1500">
+                <a:solidFill>
+                  <a:srgbClr val="C0C8E0"/>
+                </a:solidFill>
+                <a:latin typeface="Roboto"/>
+              </a:defRPr>
+            </a:pPr>
+            <a:r>
+              <a:t>    All projections formula-driven from Model Assumptions tab</a:t>
+            </a:r>
+          </a:p>
           <a:p>
             <a:pPr>
               <a:spcAft>
-                <a:spcPts val="1200"/>
+                <a:spcPts val="1000"/>
               </a:spcAft>
               <a:defRPr sz="1500">
                 <a:solidFill>
@@ -5710,13 +6508,13 @@
               </a:defRPr>
             </a:pPr>
             <a:r>
-              <a:t>    Break-even: Month 2</a:t>
+              <a:t>    Break-Even + Revenue chart embedded in XLSX</a:t>
             </a:r>
           </a:p>
           <a:p>
             <a:pPr>
               <a:spcAft>
-                <a:spcPts val="1200"/>
+                <a:spcPts val="1000"/>
               </a:spcAft>
               <a:defRPr sz="1500">
                 <a:solidFill>
@@ -5726,13 +6524,13 @@
               </a:defRPr>
             </a:pPr>
             <a:r>
-              <a:t>    Year 1 Revenue: $1.2M</a:t>
+              <a:t>    Market Share analysis: 15% target in AI Agent Infrastructure</a:t>
             </a:r>
           </a:p>
           <a:p>
             <a:pPr>
               <a:spcAft>
-                <a:spcPts val="1200"/>
+                <a:spcPts val="1000"/>
               </a:spcAft>
               <a:defRPr sz="1500">
                 <a:solidFill>
@@ -5742,43 +6540,53 @@
               </a:defRPr>
             </a:pPr>
             <a:r>
-              <a:t>    Gross Margin: 68%</a:t>
-            </a:r>
-          </a:p>
-          <a:p>
-            <a:pPr>
-              <a:spcAft>
-                <a:spcPts val="1200"/>
-              </a:spcAft>
-              <a:defRPr sz="1500">
-                <a:solidFill>
-                  <a:srgbClr val="C0C8E0"/>
-                </a:solidFill>
-                <a:latin typeface="Roboto"/>
-              </a:defRPr>
-            </a:pPr>
-            <a:r>
-              <a:t>    Cost per agent: $0.02/decision (token-efficient)</a:t>
-            </a:r>
-          </a:p>
-          <a:p>
-            <a:pPr>
-              <a:spcAft>
-                <a:spcPts val="1200"/>
-              </a:spcAft>
-              <a:defRPr sz="1500">
-                <a:solidFill>
-                  <a:srgbClr val="C0C8E0"/>
-                </a:solidFill>
-                <a:latin typeface="Roboto"/>
-              </a:defRPr>
-            </a:pPr>
-            <a:r>
-              <a:t>    See attached XLSX: 12-month P&amp;L + Charts</a:t>
-            </a:r>
-          </a:p>
-          <a:p>
-            <a:pPr>
+              <a:t>    Sensitivity: profitable even at costs doubled</a:t>
+            </a:r>
+          </a:p>
+        </p:txBody>
+      </p:sp>
+      <p:sp>
+        <p:nvSpPr>
+          <p:cNvPr id="10" name="Rounded Rectangle 9"/>
+          <p:cNvSpPr/>
+          <p:nvPr/>
+        </p:nvSpPr>
+        <p:spPr>
+          <a:xfrm>
+            <a:off x="731520" y="5303520"/>
+            <a:ext cx="5029200" cy="457200"/>
+          </a:xfrm>
+          <a:prstGeom prst="roundRect">
+            <a:avLst/>
+          </a:prstGeom>
+          <a:solidFill>
+            <a:srgbClr val="1A1A2E"/>
+          </a:solidFill>
+          <a:ln w="12700">
+            <a:solidFill>
+              <a:srgbClr val="10B981"/>
+            </a:solidFill>
+          </a:ln>
+        </p:spPr>
+        <p:style>
+          <a:lnRef idx="1">
+            <a:schemeClr val="accent1"/>
+          </a:lnRef>
+          <a:fillRef idx="3">
+            <a:schemeClr val="accent1"/>
+          </a:fillRef>
+          <a:effectRef idx="2">
+            <a:schemeClr val="accent1"/>
+          </a:effectRef>
+          <a:fontRef idx="minor">
+            <a:schemeClr val="lt1"/>
+          </a:fontRef>
+        </p:style>
+        <p:txBody>
+          <a:bodyPr rtlCol="0" anchor="ctr"/>
+          <a:lstStyle/>
+          <a:p>
+            <a:pPr algn="ctr">
               <a:defRPr sz="1000" i="1">
                 <a:solidFill>
                   <a:srgbClr val="10B981"/>
@@ -5786,7 +6594,7 @@
               </a:defRPr>
             </a:pPr>
             <a:r>
-              <a:t>    Chart linked: Delegate_AI_2026_Projections_V2.xlsx</a:t>
+              <a:t>Charts: Delegate_AI_V3_Projections.xlsx</a:t>
             </a:r>
           </a:p>
         </p:txBody>
@@ -5868,8 +6676,8 @@
         </p:nvSpPr>
         <p:spPr>
           <a:xfrm>
-            <a:off x="8686800" y="6263640"/>
-            <a:ext cx="3200400" cy="228600"/>
+            <a:off x="731520" y="457200"/>
+            <a:ext cx="10058400" cy="914400"/>
           </a:xfrm>
           <a:prstGeom prst="rect">
             <a:avLst/>
@@ -5882,29 +6690,298 @@
           </a:bodyPr>
           <a:lstStyle/>
           <a:p>
-            <a:pPr algn="r">
-              <a:defRPr sz="700">
-                <a:solidFill>
-                  <a:srgbClr val="4A4A6A"/>
-                </a:solidFill>
-              </a:defRPr>
-            </a:pPr>
-            <a:r>
-              <a:t>Layout: table_centered</a:t>
-            </a:r>
-          </a:p>
-        </p:txBody>
-      </p:sp>
-      <p:sp>
-        <p:nvSpPr>
-          <p:cNvPr id="4" name="TextBox 3"/>
+            <a:pPr>
+              <a:defRPr sz="2800" b="1">
+                <a:solidFill>
+                  <a:srgbClr val="FFFFFF"/>
+                </a:solidFill>
+                <a:latin typeface="Inter"/>
+              </a:defRPr>
+            </a:pPr>
+            <a:r>
+              <a:t>Sensitivity Analysis</a:t>
+            </a:r>
+          </a:p>
+        </p:txBody>
+      </p:sp>
+      <p:sp>
+        <p:nvSpPr>
+          <p:cNvPr id="4" name="Rounded Rectangle 3"/>
+          <p:cNvSpPr/>
+          <p:nvPr/>
+        </p:nvSpPr>
+        <p:spPr>
+          <a:xfrm>
+            <a:off x="731520" y="1463040"/>
+            <a:ext cx="1828800" cy="1097280"/>
+          </a:xfrm>
+          <a:prstGeom prst="roundRect">
+            <a:avLst/>
+          </a:prstGeom>
+          <a:solidFill>
+            <a:srgbClr val="1A1A2E"/>
+          </a:solidFill>
+          <a:ln w="25400">
+            <a:solidFill>
+              <a:srgbClr val="10B981"/>
+            </a:solidFill>
+          </a:ln>
+        </p:spPr>
+        <p:style>
+          <a:lnRef idx="1">
+            <a:schemeClr val="accent1"/>
+          </a:lnRef>
+          <a:fillRef idx="3">
+            <a:schemeClr val="accent1"/>
+          </a:fillRef>
+          <a:effectRef idx="2">
+            <a:schemeClr val="accent1"/>
+          </a:effectRef>
+          <a:fontRef idx="minor">
+            <a:schemeClr val="lt1"/>
+          </a:fontRef>
+        </p:style>
+        <p:txBody>
+          <a:bodyPr rtlCol="0" anchor="ctr" wrap="square"/>
+          <a:lstStyle/>
+          <a:p>
+            <a:pPr algn="ctr">
+              <a:defRPr sz="2400" b="1">
+                <a:solidFill>
+                  <a:srgbClr val="10B981"/>
+                </a:solidFill>
+                <a:latin typeface="Inter"/>
+              </a:defRPr>
+            </a:pPr>
+            <a:r>
+              <a:t>74.9%</a:t>
+            </a:r>
+          </a:p>
+          <a:p>
+            <a:pPr algn="ctr">
+              <a:defRPr sz="900">
+                <a:solidFill>
+                  <a:srgbClr val="94A3B8"/>
+                </a:solidFill>
+              </a:defRPr>
+            </a:pPr>
+            <a:r>
+              <a:t>Base Case</a:t>
+            </a:r>
+          </a:p>
+        </p:txBody>
+      </p:sp>
+      <p:sp>
+        <p:nvSpPr>
+          <p:cNvPr id="5" name="Rounded Rectangle 4"/>
+          <p:cNvSpPr/>
+          <p:nvPr/>
+        </p:nvSpPr>
+        <p:spPr>
+          <a:xfrm>
+            <a:off x="3291839" y="1463040"/>
+            <a:ext cx="1828800" cy="1097280"/>
+          </a:xfrm>
+          <a:prstGeom prst="roundRect">
+            <a:avLst/>
+          </a:prstGeom>
+          <a:solidFill>
+            <a:srgbClr val="1A1A2E"/>
+          </a:solidFill>
+          <a:ln w="25400">
+            <a:solidFill>
+              <a:srgbClr val="667EEA"/>
+            </a:solidFill>
+          </a:ln>
+        </p:spPr>
+        <p:style>
+          <a:lnRef idx="1">
+            <a:schemeClr val="accent1"/>
+          </a:lnRef>
+          <a:fillRef idx="3">
+            <a:schemeClr val="accent1"/>
+          </a:fillRef>
+          <a:effectRef idx="2">
+            <a:schemeClr val="accent1"/>
+          </a:effectRef>
+          <a:fontRef idx="minor">
+            <a:schemeClr val="lt1"/>
+          </a:fontRef>
+        </p:style>
+        <p:txBody>
+          <a:bodyPr rtlCol="0" anchor="ctr" wrap="square"/>
+          <a:lstStyle/>
+          <a:p>
+            <a:pPr algn="ctr">
+              <a:defRPr sz="2400" b="1">
+                <a:solidFill>
+                  <a:srgbClr val="667EEA"/>
+                </a:solidFill>
+                <a:latin typeface="Inter"/>
+              </a:defRPr>
+            </a:pPr>
+            <a:r>
+              <a:t>~62%</a:t>
+            </a:r>
+          </a:p>
+          <a:p>
+            <a:pPr algn="ctr">
+              <a:defRPr sz="900">
+                <a:solidFill>
+                  <a:srgbClr val="94A3B8"/>
+                </a:solidFill>
+              </a:defRPr>
+            </a:pPr>
+            <a:r>
+              <a:t>Costs +50%</a:t>
+            </a:r>
+          </a:p>
+        </p:txBody>
+      </p:sp>
+      <p:sp>
+        <p:nvSpPr>
+          <p:cNvPr id="6" name="Rounded Rectangle 5"/>
+          <p:cNvSpPr/>
+          <p:nvPr/>
+        </p:nvSpPr>
+        <p:spPr>
+          <a:xfrm>
+            <a:off x="5852159" y="1463040"/>
+            <a:ext cx="1828800" cy="1097280"/>
+          </a:xfrm>
+          <a:prstGeom prst="roundRect">
+            <a:avLst/>
+          </a:prstGeom>
+          <a:solidFill>
+            <a:srgbClr val="1A1A2E"/>
+          </a:solidFill>
+          <a:ln w="25400">
+            <a:solidFill>
+              <a:srgbClr val="EAB308"/>
+            </a:solidFill>
+          </a:ln>
+        </p:spPr>
+        <p:style>
+          <a:lnRef idx="1">
+            <a:schemeClr val="accent1"/>
+          </a:lnRef>
+          <a:fillRef idx="3">
+            <a:schemeClr val="accent1"/>
+          </a:fillRef>
+          <a:effectRef idx="2">
+            <a:schemeClr val="accent1"/>
+          </a:effectRef>
+          <a:fontRef idx="minor">
+            <a:schemeClr val="lt1"/>
+          </a:fontRef>
+        </p:style>
+        <p:txBody>
+          <a:bodyPr rtlCol="0" anchor="ctr" wrap="square"/>
+          <a:lstStyle/>
+          <a:p>
+            <a:pPr algn="ctr">
+              <a:defRPr sz="2400" b="1">
+                <a:solidFill>
+                  <a:srgbClr val="EAB308"/>
+                </a:solidFill>
+                <a:latin typeface="Inter"/>
+              </a:defRPr>
+            </a:pPr>
+            <a:r>
+              <a:t>~49%</a:t>
+            </a:r>
+          </a:p>
+          <a:p>
+            <a:pPr algn="ctr">
+              <a:defRPr sz="900">
+                <a:solidFill>
+                  <a:srgbClr val="94A3B8"/>
+                </a:solidFill>
+              </a:defRPr>
+            </a:pPr>
+            <a:r>
+              <a:t>Costs Doubled</a:t>
+            </a:r>
+          </a:p>
+        </p:txBody>
+      </p:sp>
+      <p:sp>
+        <p:nvSpPr>
+          <p:cNvPr id="7" name="Rounded Rectangle 6"/>
+          <p:cNvSpPr/>
+          <p:nvPr/>
+        </p:nvSpPr>
+        <p:spPr>
+          <a:xfrm>
+            <a:off x="8412480" y="1463040"/>
+            <a:ext cx="1828800" cy="1097280"/>
+          </a:xfrm>
+          <a:prstGeom prst="roundRect">
+            <a:avLst/>
+          </a:prstGeom>
+          <a:solidFill>
+            <a:srgbClr val="1A1A2E"/>
+          </a:solidFill>
+          <a:ln w="25400">
+            <a:solidFill>
+              <a:srgbClr val="EF4444"/>
+            </a:solidFill>
+          </a:ln>
+        </p:spPr>
+        <p:style>
+          <a:lnRef idx="1">
+            <a:schemeClr val="accent1"/>
+          </a:lnRef>
+          <a:fillRef idx="3">
+            <a:schemeClr val="accent1"/>
+          </a:fillRef>
+          <a:effectRef idx="2">
+            <a:schemeClr val="accent1"/>
+          </a:effectRef>
+          <a:fontRef idx="minor">
+            <a:schemeClr val="lt1"/>
+          </a:fontRef>
+        </p:style>
+        <p:txBody>
+          <a:bodyPr rtlCol="0" anchor="ctr" wrap="square"/>
+          <a:lstStyle/>
+          <a:p>
+            <a:pPr algn="ctr">
+              <a:defRPr sz="2400" b="1">
+                <a:solidFill>
+                  <a:srgbClr val="EF4444"/>
+                </a:solidFill>
+                <a:latin typeface="Inter"/>
+              </a:defRPr>
+            </a:pPr>
+            <a:r>
+              <a:t>~24%</a:t>
+            </a:r>
+          </a:p>
+          <a:p>
+            <a:pPr algn="ctr">
+              <a:defRPr sz="900">
+                <a:solidFill>
+                  <a:srgbClr val="94A3B8"/>
+                </a:solidFill>
+              </a:defRPr>
+            </a:pPr>
+            <a:r>
+              <a:t>Costs Tripled</a:t>
+            </a:r>
+          </a:p>
+        </p:txBody>
+      </p:sp>
+      <p:sp>
+        <p:nvSpPr>
+          <p:cNvPr id="8" name="TextBox 7"/>
           <p:cNvSpPr txBox="1"/>
           <p:nvPr/>
         </p:nvSpPr>
         <p:spPr>
           <a:xfrm>
-            <a:off x="731520" y="457200"/>
-            <a:ext cx="10058400" cy="914400"/>
+            <a:off x="731520" y="2926080"/>
+            <a:ext cx="10058400" cy="4389120"/>
           </a:xfrm>
           <a:prstGeom prst="rect">
             <a:avLst/>
@@ -5918,44 +6995,24 @@
           <a:lstStyle/>
           <a:p>
             <a:pPr>
-              <a:defRPr sz="2800" b="1">
-                <a:solidFill>
-                  <a:srgbClr val="FFFFFF"/>
-                </a:solidFill>
-                <a:latin typeface="Inter"/>
-              </a:defRPr>
-            </a:pPr>
-            <a:r>
-              <a:t>Sensitivity Analysis</a:t>
-            </a:r>
-          </a:p>
-        </p:txBody>
-      </p:sp>
-      <p:sp>
-        <p:nvSpPr>
-          <p:cNvPr id="5" name="TextBox 4"/>
-          <p:cNvSpPr txBox="1"/>
-          <p:nvPr/>
-        </p:nvSpPr>
-        <p:spPr>
-          <a:xfrm>
-            <a:off x="731520" y="1645920"/>
-            <a:ext cx="10058400" cy="4389120"/>
-          </a:xfrm>
-          <a:prstGeom prst="rect">
-            <a:avLst/>
-          </a:prstGeom>
-          <a:noFill/>
-        </p:spPr>
-        <p:txBody>
-          <a:bodyPr wrap="square">
-            <a:spAutoFit/>
-          </a:bodyPr>
-          <a:lstStyle/>
+              <a:spcAft>
+                <a:spcPts val="1000"/>
+              </a:spcAft>
+              <a:defRPr sz="1500">
+                <a:solidFill>
+                  <a:srgbClr val="C0C8E0"/>
+                </a:solidFill>
+                <a:latin typeface="Roboto"/>
+              </a:defRPr>
+            </a:pPr>
+            <a:r>
+              <a:t>    Even with costs doubled, annual net profit remains positive</a:t>
+            </a:r>
+          </a:p>
           <a:p>
             <a:pPr>
               <a:spcAft>
-                <a:spcPts val="1200"/>
+                <a:spcPts val="1000"/>
               </a:spcAft>
               <a:defRPr sz="1500">
                 <a:solidFill>
@@ -5965,13 +7022,13 @@
               </a:defRPr>
             </a:pPr>
             <a:r>
-              <a:t>    Base Case: 74.9% margin, Month 2 break-even</a:t>
+              <a:t>    Revenue -20% scenario: margin compressed but survivable</a:t>
             </a:r>
           </a:p>
           <a:p>
             <a:pPr>
               <a:spcAft>
-                <a:spcPts val="1200"/>
+                <a:spcPts val="1000"/>
               </a:spcAft>
               <a:defRPr sz="1500">
                 <a:solidFill>
@@ -5981,13 +7038,13 @@
               </a:defRPr>
             </a:pPr>
             <a:r>
-              <a:t>    Costs +50%: Margin shrinks but remains profitable</a:t>
+              <a:t>    All scenarios formula-driven from Model Assumptions tab</a:t>
             </a:r>
           </a:p>
           <a:p>
             <a:pPr>
               <a:spcAft>
-                <a:spcPts val="1200"/>
+                <a:spcPts val="1000"/>
               </a:spcAft>
               <a:defRPr sz="1500">
                 <a:solidFill>
@@ -5997,39 +7054,7 @@
               </a:defRPr>
             </a:pPr>
             <a:r>
-              <a:t>    Costs Doubled: Still positive annual net profit</a:t>
-            </a:r>
-          </a:p>
-          <a:p>
-            <a:pPr>
-              <a:spcAft>
-                <a:spcPts val="1200"/>
-              </a:spcAft>
-              <a:defRPr sz="1500">
-                <a:solidFill>
-                  <a:srgbClr val="C0C8E0"/>
-                </a:solidFill>
-                <a:latin typeface="Roboto"/>
-              </a:defRPr>
-            </a:pPr>
-            <a:r>
-              <a:t>    Revenue -20%: Margin compressed, breakeven delayed</a:t>
-            </a:r>
-          </a:p>
-          <a:p>
-            <a:pPr>
-              <a:spcAft>
-                <a:spcPts val="1200"/>
-              </a:spcAft>
-              <a:defRPr sz="1500">
-                <a:solidFill>
-                  <a:srgbClr val="C0C8E0"/>
-                </a:solidFill>
-                <a:latin typeface="Roboto"/>
-              </a:defRPr>
-            </a:pPr>
-            <a:r>
-              <a:t>    Full scenario modeling in attached spreadsheet</a:t>
+              <a:t>    Full breakdown in Sensitivity Analysis sheet</a:t>
             </a:r>
           </a:p>
         </p:txBody>
@@ -6111,8 +7136,8 @@
         </p:nvSpPr>
         <p:spPr>
           <a:xfrm>
-            <a:off x="8686800" y="6263640"/>
-            <a:ext cx="3200400" cy="228600"/>
+            <a:off x="731520" y="457200"/>
+            <a:ext cx="10058400" cy="914400"/>
           </a:xfrm>
           <a:prstGeom prst="rect">
             <a:avLst/>
@@ -6125,29 +7150,73 @@
           </a:bodyPr>
           <a:lstStyle/>
           <a:p>
-            <a:pPr algn="r">
-              <a:defRPr sz="700">
-                <a:solidFill>
-                  <a:srgbClr val="4A4A6A"/>
-                </a:solidFill>
-              </a:defRPr>
-            </a:pPr>
-            <a:r>
-              <a:t>Layout: horizontal_timeline</a:t>
-            </a:r>
-          </a:p>
-        </p:txBody>
-      </p:sp>
-      <p:sp>
-        <p:nvSpPr>
-          <p:cNvPr id="4" name="TextBox 3"/>
+            <a:pPr>
+              <a:defRPr sz="2800" b="1">
+                <a:solidFill>
+                  <a:srgbClr val="FFFFFF"/>
+                </a:solidFill>
+                <a:latin typeface="Inter"/>
+              </a:defRPr>
+            </a:pPr>
+            <a:r>
+              <a:t>Growth Roadmap</a:t>
+            </a:r>
+          </a:p>
+        </p:txBody>
+      </p:sp>
+      <p:sp>
+        <p:nvSpPr>
+          <p:cNvPr id="4" name="Oval 3"/>
+          <p:cNvSpPr/>
+          <p:nvPr/>
+        </p:nvSpPr>
+        <p:spPr>
+          <a:xfrm>
+            <a:off x="1097280" y="1828800"/>
+            <a:ext cx="274320" cy="274320"/>
+          </a:xfrm>
+          <a:prstGeom prst="ellipse">
+            <a:avLst/>
+          </a:prstGeom>
+          <a:solidFill>
+            <a:srgbClr val="10B981"/>
+          </a:solidFill>
+          <a:ln>
+            <a:noFill/>
+          </a:ln>
+        </p:spPr>
+        <p:style>
+          <a:lnRef idx="1">
+            <a:schemeClr val="accent1"/>
+          </a:lnRef>
+          <a:fillRef idx="3">
+            <a:schemeClr val="accent1"/>
+          </a:fillRef>
+          <a:effectRef idx="2">
+            <a:schemeClr val="accent1"/>
+          </a:effectRef>
+          <a:fontRef idx="minor">
+            <a:schemeClr val="lt1"/>
+          </a:fontRef>
+        </p:style>
+        <p:txBody>
+          <a:bodyPr rtlCol="0" anchor="ctr"/>
+          <a:lstStyle/>
+          <a:p>
+            <a:pPr algn="ctr"/>
+          </a:p>
+        </p:txBody>
+      </p:sp>
+      <p:sp>
+        <p:nvSpPr>
+          <p:cNvPr id="5" name="TextBox 4"/>
           <p:cNvSpPr txBox="1"/>
           <p:nvPr/>
         </p:nvSpPr>
         <p:spPr>
           <a:xfrm>
-            <a:off x="731520" y="457200"/>
-            <a:ext cx="10058400" cy="914400"/>
+            <a:off x="457200" y="2194560"/>
+            <a:ext cx="2011680" cy="274320"/>
           </a:xfrm>
           <a:prstGeom prst="rect">
             <a:avLst/>
@@ -6155,35 +7224,34 @@
           <a:noFill/>
         </p:spPr>
         <p:txBody>
-          <a:bodyPr wrap="square">
+          <a:bodyPr wrap="none">
             <a:spAutoFit/>
           </a:bodyPr>
           <a:lstStyle/>
           <a:p>
-            <a:pPr>
-              <a:defRPr sz="2800" b="1">
-                <a:solidFill>
-                  <a:srgbClr val="FFFFFF"/>
-                </a:solidFill>
-                <a:latin typeface="Inter"/>
-              </a:defRPr>
-            </a:pPr>
-            <a:r>
-              <a:t>Growth Roadmap</a:t>
-            </a:r>
-          </a:p>
-        </p:txBody>
-      </p:sp>
-      <p:sp>
-        <p:nvSpPr>
-          <p:cNvPr id="5" name="TextBox 4"/>
+            <a:pPr algn="ctr">
+              <a:defRPr sz="1200" b="1">
+                <a:solidFill>
+                  <a:srgbClr val="10B981"/>
+                </a:solidFill>
+              </a:defRPr>
+            </a:pPr>
+            <a:r>
+              <a:t>Q2 2026</a:t>
+            </a:r>
+          </a:p>
+        </p:txBody>
+      </p:sp>
+      <p:sp>
+        <p:nvSpPr>
+          <p:cNvPr id="6" name="TextBox 5"/>
           <p:cNvSpPr txBox="1"/>
           <p:nvPr/>
         </p:nvSpPr>
         <p:spPr>
           <a:xfrm>
-            <a:off x="731520" y="1645920"/>
-            <a:ext cx="10058400" cy="4389120"/>
+            <a:off x="457200" y="2560320"/>
+            <a:ext cx="2011680" cy="274320"/>
           </a:xfrm>
           <a:prstGeom prst="rect">
             <a:avLst/>
@@ -6191,72 +7259,426 @@
           <a:noFill/>
         </p:spPr>
         <p:txBody>
-          <a:bodyPr wrap="square">
+          <a:bodyPr wrap="none">
             <a:spAutoFit/>
           </a:bodyPr>
           <a:lstStyle/>
           <a:p>
-            <a:pPr>
-              <a:spcAft>
-                <a:spcPts val="1200"/>
-              </a:spcAft>
-              <a:defRPr sz="1500">
+            <a:pPr algn="ctr">
+              <a:defRPr sz="1000">
                 <a:solidFill>
                   <a:srgbClr val="C0C8E0"/>
                 </a:solidFill>
-                <a:latin typeface="Roboto"/>
-              </a:defRPr>
-            </a:pPr>
-            <a:r>
-              <a:t>    Q2 2026: Multi-tenant SaaS deployment</a:t>
-            </a:r>
-          </a:p>
-          <a:p>
-            <a:pPr>
-              <a:spcAft>
-                <a:spcPts val="1200"/>
-              </a:spcAft>
-              <a:defRPr sz="1500">
+              </a:defRPr>
+            </a:pPr>
+            <a:r>
+              <a:t>Multi-tenant SaaS</a:t>
+            </a:r>
+          </a:p>
+        </p:txBody>
+      </p:sp>
+      <p:sp>
+        <p:nvSpPr>
+          <p:cNvPr id="7" name="Oval 6"/>
+          <p:cNvSpPr/>
+          <p:nvPr/>
+        </p:nvSpPr>
+        <p:spPr>
+          <a:xfrm>
+            <a:off x="3840480" y="1828800"/>
+            <a:ext cx="274320" cy="274320"/>
+          </a:xfrm>
+          <a:prstGeom prst="ellipse">
+            <a:avLst/>
+          </a:prstGeom>
+          <a:solidFill>
+            <a:srgbClr val="667EEA"/>
+          </a:solidFill>
+          <a:ln>
+            <a:noFill/>
+          </a:ln>
+        </p:spPr>
+        <p:style>
+          <a:lnRef idx="1">
+            <a:schemeClr val="accent1"/>
+          </a:lnRef>
+          <a:fillRef idx="3">
+            <a:schemeClr val="accent1"/>
+          </a:fillRef>
+          <a:effectRef idx="2">
+            <a:schemeClr val="accent1"/>
+          </a:effectRef>
+          <a:fontRef idx="minor">
+            <a:schemeClr val="lt1"/>
+          </a:fontRef>
+        </p:style>
+        <p:txBody>
+          <a:bodyPr rtlCol="0" anchor="ctr"/>
+          <a:lstStyle/>
+          <a:p>
+            <a:pPr algn="ctr"/>
+          </a:p>
+        </p:txBody>
+      </p:sp>
+      <p:sp>
+        <p:nvSpPr>
+          <p:cNvPr id="8" name="TextBox 7"/>
+          <p:cNvSpPr txBox="1"/>
+          <p:nvPr/>
+        </p:nvSpPr>
+        <p:spPr>
+          <a:xfrm>
+            <a:off x="3200400" y="2194560"/>
+            <a:ext cx="2011680" cy="274320"/>
+          </a:xfrm>
+          <a:prstGeom prst="rect">
+            <a:avLst/>
+          </a:prstGeom>
+          <a:noFill/>
+        </p:spPr>
+        <p:txBody>
+          <a:bodyPr wrap="none">
+            <a:spAutoFit/>
+          </a:bodyPr>
+          <a:lstStyle/>
+          <a:p>
+            <a:pPr algn="ctr">
+              <a:defRPr sz="1200" b="1">
+                <a:solidFill>
+                  <a:srgbClr val="667EEA"/>
+                </a:solidFill>
+              </a:defRPr>
+            </a:pPr>
+            <a:r>
+              <a:t>Q3 2026</a:t>
+            </a:r>
+          </a:p>
+        </p:txBody>
+      </p:sp>
+      <p:sp>
+        <p:nvSpPr>
+          <p:cNvPr id="9" name="TextBox 8"/>
+          <p:cNvSpPr txBox="1"/>
+          <p:nvPr/>
+        </p:nvSpPr>
+        <p:spPr>
+          <a:xfrm>
+            <a:off x="3200400" y="2560320"/>
+            <a:ext cx="2011680" cy="274320"/>
+          </a:xfrm>
+          <a:prstGeom prst="rect">
+            <a:avLst/>
+          </a:prstGeom>
+          <a:noFill/>
+        </p:spPr>
+        <p:txBody>
+          <a:bodyPr wrap="none">
+            <a:spAutoFit/>
+          </a:bodyPr>
+          <a:lstStyle/>
+          <a:p>
+            <a:pPr algn="ctr">
+              <a:defRPr sz="1000">
                 <a:solidFill>
                   <a:srgbClr val="C0C8E0"/>
                 </a:solidFill>
-                <a:latin typeface="Roboto"/>
-              </a:defRPr>
-            </a:pPr>
-            <a:r>
-              <a:t>    Q3 2026: API marketplace for agent skills</a:t>
-            </a:r>
-          </a:p>
-          <a:p>
-            <a:pPr>
-              <a:spcAft>
-                <a:spcPts val="1200"/>
-              </a:spcAft>
-              <a:defRPr sz="1500">
+              </a:defRPr>
+            </a:pPr>
+            <a:r>
+              <a:t>API Marketplace</a:t>
+            </a:r>
+          </a:p>
+        </p:txBody>
+      </p:sp>
+      <p:sp>
+        <p:nvSpPr>
+          <p:cNvPr id="10" name="Oval 9"/>
+          <p:cNvSpPr/>
+          <p:nvPr/>
+        </p:nvSpPr>
+        <p:spPr>
+          <a:xfrm>
+            <a:off x="6583680" y="1828800"/>
+            <a:ext cx="274320" cy="274320"/>
+          </a:xfrm>
+          <a:prstGeom prst="ellipse">
+            <a:avLst/>
+          </a:prstGeom>
+          <a:solidFill>
+            <a:srgbClr val="EAB308"/>
+          </a:solidFill>
+          <a:ln>
+            <a:noFill/>
+          </a:ln>
+        </p:spPr>
+        <p:style>
+          <a:lnRef idx="1">
+            <a:schemeClr val="accent1"/>
+          </a:lnRef>
+          <a:fillRef idx="3">
+            <a:schemeClr val="accent1"/>
+          </a:fillRef>
+          <a:effectRef idx="2">
+            <a:schemeClr val="accent1"/>
+          </a:effectRef>
+          <a:fontRef idx="minor">
+            <a:schemeClr val="lt1"/>
+          </a:fontRef>
+        </p:style>
+        <p:txBody>
+          <a:bodyPr rtlCol="0" anchor="ctr"/>
+          <a:lstStyle/>
+          <a:p>
+            <a:pPr algn="ctr"/>
+          </a:p>
+        </p:txBody>
+      </p:sp>
+      <p:sp>
+        <p:nvSpPr>
+          <p:cNvPr id="11" name="TextBox 10"/>
+          <p:cNvSpPr txBox="1"/>
+          <p:nvPr/>
+        </p:nvSpPr>
+        <p:spPr>
+          <a:xfrm>
+            <a:off x="5943600" y="2194560"/>
+            <a:ext cx="2011680" cy="274320"/>
+          </a:xfrm>
+          <a:prstGeom prst="rect">
+            <a:avLst/>
+          </a:prstGeom>
+          <a:noFill/>
+        </p:spPr>
+        <p:txBody>
+          <a:bodyPr wrap="none">
+            <a:spAutoFit/>
+          </a:bodyPr>
+          <a:lstStyle/>
+          <a:p>
+            <a:pPr algn="ctr">
+              <a:defRPr sz="1200" b="1">
+                <a:solidFill>
+                  <a:srgbClr val="EAB308"/>
+                </a:solidFill>
+              </a:defRPr>
+            </a:pPr>
+            <a:r>
+              <a:t>Q4 2026</a:t>
+            </a:r>
+          </a:p>
+        </p:txBody>
+      </p:sp>
+      <p:sp>
+        <p:nvSpPr>
+          <p:cNvPr id="12" name="TextBox 11"/>
+          <p:cNvSpPr txBox="1"/>
+          <p:nvPr/>
+        </p:nvSpPr>
+        <p:spPr>
+          <a:xfrm>
+            <a:off x="5943600" y="2560320"/>
+            <a:ext cx="2011680" cy="274320"/>
+          </a:xfrm>
+          <a:prstGeom prst="rect">
+            <a:avLst/>
+          </a:prstGeom>
+          <a:noFill/>
+        </p:spPr>
+        <p:txBody>
+          <a:bodyPr wrap="none">
+            <a:spAutoFit/>
+          </a:bodyPr>
+          <a:lstStyle/>
+          <a:p>
+            <a:pPr algn="ctr">
+              <a:defRPr sz="1000">
                 <a:solidFill>
                   <a:srgbClr val="C0C8E0"/>
                 </a:solidFill>
-                <a:latin typeface="Roboto"/>
-              </a:defRPr>
-            </a:pPr>
-            <a:r>
-              <a:t>    Q4 2026: Enterprise compliance certification</a:t>
-            </a:r>
-          </a:p>
-          <a:p>
-            <a:pPr>
-              <a:spcAft>
-                <a:spcPts val="1200"/>
-              </a:spcAft>
-              <a:defRPr sz="1500">
+              </a:defRPr>
+            </a:pPr>
+            <a:r>
+              <a:t>Enterprise Cert</a:t>
+            </a:r>
+          </a:p>
+        </p:txBody>
+      </p:sp>
+      <p:sp>
+        <p:nvSpPr>
+          <p:cNvPr id="13" name="Oval 12"/>
+          <p:cNvSpPr/>
+          <p:nvPr/>
+        </p:nvSpPr>
+        <p:spPr>
+          <a:xfrm>
+            <a:off x="9326880" y="1828800"/>
+            <a:ext cx="274320" cy="274320"/>
+          </a:xfrm>
+          <a:prstGeom prst="ellipse">
+            <a:avLst/>
+          </a:prstGeom>
+          <a:solidFill>
+            <a:srgbClr val="667EEA"/>
+          </a:solidFill>
+          <a:ln>
+            <a:noFill/>
+          </a:ln>
+        </p:spPr>
+        <p:style>
+          <a:lnRef idx="1">
+            <a:schemeClr val="accent1"/>
+          </a:lnRef>
+          <a:fillRef idx="3">
+            <a:schemeClr val="accent1"/>
+          </a:fillRef>
+          <a:effectRef idx="2">
+            <a:schemeClr val="accent1"/>
+          </a:effectRef>
+          <a:fontRef idx="minor">
+            <a:schemeClr val="lt1"/>
+          </a:fontRef>
+        </p:style>
+        <p:txBody>
+          <a:bodyPr rtlCol="0" anchor="ctr"/>
+          <a:lstStyle/>
+          <a:p>
+            <a:pPr algn="ctr"/>
+          </a:p>
+        </p:txBody>
+      </p:sp>
+      <p:sp>
+        <p:nvSpPr>
+          <p:cNvPr id="14" name="TextBox 13"/>
+          <p:cNvSpPr txBox="1"/>
+          <p:nvPr/>
+        </p:nvSpPr>
+        <p:spPr>
+          <a:xfrm>
+            <a:off x="8686800" y="2194560"/>
+            <a:ext cx="2011680" cy="274320"/>
+          </a:xfrm>
+          <a:prstGeom prst="rect">
+            <a:avLst/>
+          </a:prstGeom>
+          <a:noFill/>
+        </p:spPr>
+        <p:txBody>
+          <a:bodyPr wrap="none">
+            <a:spAutoFit/>
+          </a:bodyPr>
+          <a:lstStyle/>
+          <a:p>
+            <a:pPr algn="ctr">
+              <a:defRPr sz="1200" b="1">
+                <a:solidFill>
+                  <a:srgbClr val="667EEA"/>
+                </a:solidFill>
+              </a:defRPr>
+            </a:pPr>
+            <a:r>
+              <a:t>2027</a:t>
+            </a:r>
+          </a:p>
+        </p:txBody>
+      </p:sp>
+      <p:sp>
+        <p:nvSpPr>
+          <p:cNvPr id="15" name="TextBox 14"/>
+          <p:cNvSpPr txBox="1"/>
+          <p:nvPr/>
+        </p:nvSpPr>
+        <p:spPr>
+          <a:xfrm>
+            <a:off x="8686800" y="2560320"/>
+            <a:ext cx="2011680" cy="274320"/>
+          </a:xfrm>
+          <a:prstGeom prst="rect">
+            <a:avLst/>
+          </a:prstGeom>
+          <a:noFill/>
+        </p:spPr>
+        <p:txBody>
+          <a:bodyPr wrap="none">
+            <a:spAutoFit/>
+          </a:bodyPr>
+          <a:lstStyle/>
+          <a:p>
+            <a:pPr algn="ctr">
+              <a:defRPr sz="1000">
                 <a:solidFill>
                   <a:srgbClr val="C0C8E0"/>
                 </a:solidFill>
-                <a:latin typeface="Roboto"/>
-              </a:defRPr>
-            </a:pPr>
-            <a:r>
-              <a:t>    2027: International expansion</a:t>
+              </a:defRPr>
+            </a:pPr>
+            <a:r>
+              <a:t>International</a:t>
+            </a:r>
+          </a:p>
+        </p:txBody>
+      </p:sp>
+      <p:sp>
+        <p:nvSpPr>
+          <p:cNvPr id="16" name="Rounded Rectangle 15"/>
+          <p:cNvSpPr/>
+          <p:nvPr/>
+        </p:nvSpPr>
+        <p:spPr>
+          <a:xfrm>
+            <a:off x="731520" y="3657600"/>
+            <a:ext cx="10058400" cy="1097280"/>
+          </a:xfrm>
+          <a:prstGeom prst="roundRect">
+            <a:avLst/>
+          </a:prstGeom>
+          <a:solidFill>
+            <a:srgbClr val="2D0A0A"/>
+          </a:solidFill>
+          <a:ln w="25400">
+            <a:solidFill>
+              <a:srgbClr val="EF4444"/>
+            </a:solidFill>
+          </a:ln>
+        </p:spPr>
+        <p:style>
+          <a:lnRef idx="1">
+            <a:schemeClr val="accent1"/>
+          </a:lnRef>
+          <a:fillRef idx="3">
+            <a:schemeClr val="accent1"/>
+          </a:fillRef>
+          <a:effectRef idx="2">
+            <a:schemeClr val="accent1"/>
+          </a:effectRef>
+          <a:fontRef idx="minor">
+            <a:schemeClr val="lt1"/>
+          </a:fontRef>
+        </p:style>
+        <p:txBody>
+          <a:bodyPr rtlCol="0" anchor="ctr" wrap="square"/>
+          <a:lstStyle/>
+          <a:p>
+            <a:pPr algn="ctr">
+              <a:defRPr sz="1400" b="1">
+                <a:solidFill>
+                  <a:srgbClr val="EF4444"/>
+                </a:solidFill>
+                <a:latin typeface="Inter"/>
+              </a:defRPr>
+            </a:pPr>
+            <a:r>
+              <a:t>HIGH-PRIORITY OPTIMIZATION</a:t>
+            </a:r>
+          </a:p>
+          <a:p>
+            <a:pPr algn="ctr">
+              <a:defRPr sz="1100">
+                <a:solidFill>
+                  <a:srgbClr val="FCA5A5"/>
+                </a:solidFill>
+              </a:defRPr>
+            </a:pPr>
+            <a:r>
+              <a:t>n8n Failure Rate: 98.3% — Requires immediate reliability upgrade before multi-tenant SaaS launch</a:t>
             </a:r>
           </a:p>
         </p:txBody>
@@ -6338,8 +7760,8 @@
         </p:nvSpPr>
         <p:spPr>
           <a:xfrm>
-            <a:off x="8686800" y="6263640"/>
-            <a:ext cx="3200400" cy="228600"/>
+            <a:off x="731520" y="2286000"/>
+            <a:ext cx="10058400" cy="914400"/>
           </a:xfrm>
           <a:prstGeom prst="rect">
             <a:avLst/>
@@ -6352,15 +7774,16 @@
           </a:bodyPr>
           <a:lstStyle/>
           <a:p>
-            <a:pPr algn="r">
-              <a:defRPr sz="700">
-                <a:solidFill>
-                  <a:srgbClr val="4A4A6A"/>
-                </a:solidFill>
-              </a:defRPr>
-            </a:pPr>
-            <a:r>
-              <a:t>Layout: center_minimal</a:t>
+            <a:pPr>
+              <a:defRPr sz="3600" b="1">
+                <a:solidFill>
+                  <a:srgbClr val="FFFFFF"/>
+                </a:solidFill>
+                <a:latin typeface="Inter"/>
+              </a:defRPr>
+            </a:pPr>
+            <a:r>
+              <a:t>Thank You</a:t>
             </a:r>
           </a:p>
         </p:txBody>
@@ -6373,43 +7796,7 @@
         </p:nvSpPr>
         <p:spPr>
           <a:xfrm>
-            <a:off x="731520" y="457200"/>
-            <a:ext cx="10058400" cy="914400"/>
-          </a:xfrm>
-          <a:prstGeom prst="rect">
-            <a:avLst/>
-          </a:prstGeom>
-          <a:noFill/>
-        </p:spPr>
-        <p:txBody>
-          <a:bodyPr wrap="square">
-            <a:spAutoFit/>
-          </a:bodyPr>
-          <a:lstStyle/>
-          <a:p>
-            <a:pPr>
-              <a:defRPr sz="2800" b="1">
-                <a:solidFill>
-                  <a:srgbClr val="FFFFFF"/>
-                </a:solidFill>
-                <a:latin typeface="Inter"/>
-              </a:defRPr>
-            </a:pPr>
-            <a:r>
-              <a:t>Thank You</a:t>
-            </a:r>
-          </a:p>
-        </p:txBody>
-      </p:sp>
-      <p:sp>
-        <p:nvSpPr>
-          <p:cNvPr id="5" name="TextBox 4"/>
-          <p:cNvSpPr txBox="1"/>
-          <p:nvPr/>
-        </p:nvSpPr>
-        <p:spPr>
-          <a:xfrm>
-            <a:off x="731520" y="1554480"/>
+            <a:off x="731520" y="3200400"/>
             <a:ext cx="10058400" cy="548640"/>
           </a:xfrm>
           <a:prstGeom prst="rect">
@@ -6423,12 +7810,11 @@
           </a:bodyPr>
           <a:lstStyle/>
           <a:p>
-            <a:pPr>
+            <a:pPr algn="ctr">
               <a:defRPr sz="1600">
                 <a:solidFill>
-                  <a:srgbClr val="64748B"/>
-                </a:solidFill>
-                <a:latin typeface="Roboto"/>
+                  <a:srgbClr val="94A3B8"/>
+                </a:solidFill>
               </a:defRPr>
             </a:pPr>
             <a:r>

--- a/data/V3_Beautified/Delegate_AI_V3_Investor_Pitch.pptx
+++ b/data/V3_Beautified/Delegate_AI_V3_Investor_Pitch.pptx
@@ -3209,46 +3209,10 @@
                 <a:solidFill>
                   <a:srgbClr val="94A3B8"/>
                 </a:solidFill>
-                <a:latin typeface="Roboto"/>
               </a:defRPr>
             </a:pPr>
             <a:r>
               <a:t>Autonomous Intelligence Infrastructure</a:t>
-            </a:r>
-          </a:p>
-        </p:txBody>
-      </p:sp>
-      <p:sp>
-        <p:nvSpPr>
-          <p:cNvPr id="5" name="TextBox 4"/>
-          <p:cNvSpPr txBox="1"/>
-          <p:nvPr/>
-        </p:nvSpPr>
-        <p:spPr>
-          <a:xfrm>
-            <a:off x="731520" y="3840480"/>
-            <a:ext cx="10058400" cy="365760"/>
-          </a:xfrm>
-          <a:prstGeom prst="rect">
-            <a:avLst/>
-          </a:prstGeom>
-          <a:noFill/>
-        </p:spPr>
-        <p:txBody>
-          <a:bodyPr wrap="none">
-            <a:spAutoFit/>
-          </a:bodyPr>
-          <a:lstStyle/>
-          <a:p>
-            <a:pPr>
-              <a:defRPr sz="1200">
-                <a:solidFill>
-                  <a:srgbClr val="94A3B8"/>
-                </a:solidFill>
-              </a:defRPr>
-            </a:pPr>
-            <a:r>
-              <a:t>March 11, 2026</a:t>
             </a:r>
           </a:p>
         </p:txBody>
@@ -3609,7 +3573,7 @@
               </a:defRPr>
             </a:pPr>
             <a:r>
-              <a:t>340%</a:t>
+              <a:t>&gt;5000%</a:t>
             </a:r>
           </a:p>
           <a:p>
@@ -3621,7 +3585,7 @@
               </a:defRPr>
             </a:pPr>
             <a:r>
-              <a:t>ROI (Y1)</a:t>
+              <a:t>5Y ROI</a:t>
             </a:r>
           </a:p>
         </p:txBody>
@@ -3702,7 +3666,7 @@
         <p:spPr>
           <a:xfrm>
             <a:off x="731520" y="2926080"/>
-            <a:ext cx="10058400" cy="4389120"/>
+            <a:ext cx="10058400" cy="3200400"/>
           </a:xfrm>
           <a:prstGeom prst="rect">
             <a:avLst/>
@@ -3717,9 +3681,9 @@
           <a:p>
             <a:pPr>
               <a:spcAft>
-                <a:spcPts val="1000"/>
+                <a:spcPts val="800"/>
               </a:spcAft>
-              <a:defRPr sz="1500">
+              <a:defRPr sz="1400">
                 <a:solidFill>
                   <a:srgbClr val="C0C8E0"/>
                 </a:solidFill>
@@ -3727,15 +3691,15 @@
               </a:defRPr>
             </a:pPr>
             <a:r>
-              <a:t>    18-agent autonomous network managing trading, analysis &amp; ops</a:t>
+              <a:t>    18-agent autonomous network (V7 Router)</a:t>
             </a:r>
           </a:p>
           <a:p>
             <a:pPr>
               <a:spcAft>
-                <a:spcPts val="1000"/>
+                <a:spcPts val="800"/>
               </a:spcAft>
-              <a:defRPr sz="1500">
+              <a:defRPr sz="1400">
                 <a:solidFill>
                   <a:srgbClr val="C0C8E0"/>
                 </a:solidFill>
@@ -3743,15 +3707,15 @@
               </a:defRPr>
             </a:pPr>
             <a:r>
-              <a:t>    Self-healing with Leitner 5-level error triage</a:t>
+              <a:t>    Self-healing with Leitner 5-level triage</a:t>
             </a:r>
           </a:p>
           <a:p>
             <a:pPr>
               <a:spcAft>
-                <a:spcPts val="1000"/>
+                <a:spcPts val="800"/>
               </a:spcAft>
-              <a:defRPr sz="1500">
+              <a:defRPr sz="1400">
                 <a:solidFill>
                   <a:srgbClr val="C0C8E0"/>
                 </a:solidFill>
@@ -3759,7 +3723,7 @@
               </a:defRPr>
             </a:pPr>
             <a:r>
-              <a:t>    EQ Engine adapts to operator stress in real-time</a:t>
+              <a:t>    5-year model: profitable from Month 2</a:t>
             </a:r>
           </a:p>
         </p:txBody>
@@ -3871,7 +3835,42 @@
       </p:sp>
       <p:sp>
         <p:nvSpPr>
-          <p:cNvPr id="4" name="Rounded Rectangle 3"/>
+          <p:cNvPr id="4" name="TextBox 3"/>
+          <p:cNvSpPr txBox="1"/>
+          <p:nvPr/>
+        </p:nvSpPr>
+        <p:spPr>
+          <a:xfrm>
+            <a:off x="8229600" y="274320"/>
+            <a:ext cx="3200400" cy="182880"/>
+          </a:xfrm>
+          <a:prstGeom prst="rect">
+            <a:avLst/>
+          </a:prstGeom>
+          <a:noFill/>
+        </p:spPr>
+        <p:txBody>
+          <a:bodyPr wrap="none">
+            <a:spAutoFit/>
+          </a:bodyPr>
+          <a:lstStyle/>
+          <a:p>
+            <a:pPr>
+              <a:defRPr sz="700">
+                <a:solidFill>
+                  <a:srgbClr val="4A4A6A"/>
+                </a:solidFill>
+              </a:defRPr>
+            </a:pPr>
+            <a:r>
+              <a:t>Design: library</a:t>
+            </a:r>
+          </a:p>
+        </p:txBody>
+      </p:sp>
+      <p:sp>
+        <p:nvSpPr>
+          <p:cNvPr id="5" name="Rounded Rectangle 4"/>
           <p:cNvSpPr/>
           <p:nvPr/>
         </p:nvSpPr>
@@ -3923,7 +3922,7 @@
       </p:sp>
       <p:sp>
         <p:nvSpPr>
-          <p:cNvPr id="5" name="Rounded Rectangle 4"/>
+          <p:cNvPr id="6" name="Rounded Rectangle 5"/>
           <p:cNvSpPr/>
           <p:nvPr/>
         </p:nvSpPr>
@@ -3938,7 +3937,7 @@
           <a:solidFill>
             <a:srgbClr val="1A1A2E"/>
           </a:solidFill>
-          <a:ln w="12700">
+          <a:ln w="19050">
             <a:solidFill>
               <a:srgbClr val="667EEA"/>
             </a:solidFill>
@@ -3965,7 +3964,7 @@
             <a:pPr algn="ctr">
               <a:defRPr sz="900" b="1">
                 <a:solidFill>
-                  <a:srgbClr val="FFFFFF"/>
+                  <a:srgbClr val="E0E0E0"/>
                 </a:solidFill>
               </a:defRPr>
             </a:pPr>
@@ -3977,7 +3976,7 @@
       </p:sp>
       <p:sp>
         <p:nvSpPr>
-          <p:cNvPr id="6" name="Rounded Rectangle 5"/>
+          <p:cNvPr id="7" name="Rounded Rectangle 6"/>
           <p:cNvSpPr/>
           <p:nvPr/>
         </p:nvSpPr>
@@ -3992,7 +3991,7 @@
           <a:solidFill>
             <a:srgbClr val="1A1A2E"/>
           </a:solidFill>
-          <a:ln w="12700">
+          <a:ln w="19050">
             <a:solidFill>
               <a:srgbClr val="667EEA"/>
             </a:solidFill>
@@ -4019,7 +4018,7 @@
             <a:pPr algn="ctr">
               <a:defRPr sz="900" b="1">
                 <a:solidFill>
-                  <a:srgbClr val="FFFFFF"/>
+                  <a:srgbClr val="E0E0E0"/>
                 </a:solidFill>
               </a:defRPr>
             </a:pPr>
@@ -4031,7 +4030,7 @@
       </p:sp>
       <p:sp>
         <p:nvSpPr>
-          <p:cNvPr id="7" name="Rounded Rectangle 6"/>
+          <p:cNvPr id="8" name="Rounded Rectangle 7"/>
           <p:cNvSpPr/>
           <p:nvPr/>
         </p:nvSpPr>
@@ -4046,7 +4045,7 @@
           <a:solidFill>
             <a:srgbClr val="1A1A2E"/>
           </a:solidFill>
-          <a:ln w="12700">
+          <a:ln w="19050">
             <a:solidFill>
               <a:srgbClr val="667EEA"/>
             </a:solidFill>
@@ -4073,7 +4072,7 @@
             <a:pPr algn="ctr">
               <a:defRPr sz="900" b="1">
                 <a:solidFill>
-                  <a:srgbClr val="FFFFFF"/>
+                  <a:srgbClr val="E0E0E0"/>
                 </a:solidFill>
               </a:defRPr>
             </a:pPr>
@@ -4085,7 +4084,7 @@
       </p:sp>
       <p:sp>
         <p:nvSpPr>
-          <p:cNvPr id="8" name="Rounded Rectangle 7"/>
+          <p:cNvPr id="9" name="Rounded Rectangle 8"/>
           <p:cNvSpPr/>
           <p:nvPr/>
         </p:nvSpPr>
@@ -4100,7 +4099,7 @@
           <a:solidFill>
             <a:srgbClr val="1A1A2E"/>
           </a:solidFill>
-          <a:ln w="12700">
+          <a:ln w="19050">
             <a:solidFill>
               <a:srgbClr val="667EEA"/>
             </a:solidFill>
@@ -4127,7 +4126,7 @@
             <a:pPr algn="ctr">
               <a:defRPr sz="900" b="1">
                 <a:solidFill>
-                  <a:srgbClr val="FFFFFF"/>
+                  <a:srgbClr val="E0E0E0"/>
                 </a:solidFill>
               </a:defRPr>
             </a:pPr>
@@ -4139,7 +4138,7 @@
       </p:sp>
       <p:sp>
         <p:nvSpPr>
-          <p:cNvPr id="9" name="Rounded Rectangle 8"/>
+          <p:cNvPr id="10" name="Rounded Rectangle 9"/>
           <p:cNvSpPr/>
           <p:nvPr/>
         </p:nvSpPr>
@@ -4154,7 +4153,7 @@
           <a:solidFill>
             <a:srgbClr val="1A1A2E"/>
           </a:solidFill>
-          <a:ln w="12700">
+          <a:ln w="19050">
             <a:solidFill>
               <a:srgbClr val="667EEA"/>
             </a:solidFill>
@@ -4181,7 +4180,7 @@
             <a:pPr algn="ctr">
               <a:defRPr sz="900" b="1">
                 <a:solidFill>
-                  <a:srgbClr val="FFFFFF"/>
+                  <a:srgbClr val="E0E0E0"/>
                 </a:solidFill>
               </a:defRPr>
             </a:pPr>
@@ -4193,7 +4192,7 @@
       </p:sp>
       <p:sp>
         <p:nvSpPr>
-          <p:cNvPr id="10" name="Rounded Rectangle 9"/>
+          <p:cNvPr id="11" name="Rounded Rectangle 10"/>
           <p:cNvSpPr/>
           <p:nvPr/>
         </p:nvSpPr>
@@ -4208,7 +4207,7 @@
           <a:solidFill>
             <a:srgbClr val="1A1A2E"/>
           </a:solidFill>
-          <a:ln w="12700">
+          <a:ln w="19050">
             <a:solidFill>
               <a:srgbClr val="667EEA"/>
             </a:solidFill>
@@ -4235,7 +4234,7 @@
             <a:pPr algn="ctr">
               <a:defRPr sz="900" b="1">
                 <a:solidFill>
-                  <a:srgbClr val="FFFFFF"/>
+                  <a:srgbClr val="E0E0E0"/>
                 </a:solidFill>
               </a:defRPr>
             </a:pPr>
@@ -4247,7 +4246,7 @@
       </p:sp>
       <p:sp>
         <p:nvSpPr>
-          <p:cNvPr id="11" name="Rounded Rectangle 10"/>
+          <p:cNvPr id="12" name="Rounded Rectangle 11"/>
           <p:cNvSpPr/>
           <p:nvPr/>
         </p:nvSpPr>
@@ -4299,7 +4298,7 @@
       </p:sp>
       <p:sp>
         <p:nvSpPr>
-          <p:cNvPr id="12" name="Rounded Rectangle 11"/>
+          <p:cNvPr id="13" name="Rounded Rectangle 12"/>
           <p:cNvSpPr/>
           <p:nvPr/>
         </p:nvSpPr>
@@ -4314,9 +4313,9 @@
           <a:solidFill>
             <a:srgbClr val="1A1A2E"/>
           </a:solidFill>
-          <a:ln w="12700">
+          <a:ln w="19050">
             <a:solidFill>
-              <a:srgbClr val="667EEA"/>
+              <a:srgbClr val="10B981"/>
             </a:solidFill>
           </a:ln>
         </p:spPr>
@@ -4341,7 +4340,7 @@
             <a:pPr algn="ctr">
               <a:defRPr sz="900" b="1">
                 <a:solidFill>
-                  <a:srgbClr val="FFFFFF"/>
+                  <a:srgbClr val="E0E0E0"/>
                 </a:solidFill>
               </a:defRPr>
             </a:pPr>
@@ -4353,7 +4352,7 @@
       </p:sp>
       <p:sp>
         <p:nvSpPr>
-          <p:cNvPr id="13" name="Rounded Rectangle 12"/>
+          <p:cNvPr id="14" name="Rounded Rectangle 13"/>
           <p:cNvSpPr/>
           <p:nvPr/>
         </p:nvSpPr>
@@ -4368,9 +4367,9 @@
           <a:solidFill>
             <a:srgbClr val="1A1A2E"/>
           </a:solidFill>
-          <a:ln w="12700">
+          <a:ln w="19050">
             <a:solidFill>
-              <a:srgbClr val="667EEA"/>
+              <a:srgbClr val="10B981"/>
             </a:solidFill>
           </a:ln>
         </p:spPr>
@@ -4395,7 +4394,7 @@
             <a:pPr algn="ctr">
               <a:defRPr sz="900" b="1">
                 <a:solidFill>
-                  <a:srgbClr val="FFFFFF"/>
+                  <a:srgbClr val="E0E0E0"/>
                 </a:solidFill>
               </a:defRPr>
             </a:pPr>
@@ -4407,7 +4406,7 @@
       </p:sp>
       <p:sp>
         <p:nvSpPr>
-          <p:cNvPr id="14" name="Rounded Rectangle 13"/>
+          <p:cNvPr id="15" name="Rounded Rectangle 14"/>
           <p:cNvSpPr/>
           <p:nvPr/>
         </p:nvSpPr>
@@ -4422,9 +4421,9 @@
           <a:solidFill>
             <a:srgbClr val="1A1A2E"/>
           </a:solidFill>
-          <a:ln w="12700">
+          <a:ln w="19050">
             <a:solidFill>
-              <a:srgbClr val="667EEA"/>
+              <a:srgbClr val="10B981"/>
             </a:solidFill>
           </a:ln>
         </p:spPr>
@@ -4449,7 +4448,7 @@
             <a:pPr algn="ctr">
               <a:defRPr sz="900" b="1">
                 <a:solidFill>
-                  <a:srgbClr val="FFFFFF"/>
+                  <a:srgbClr val="E0E0E0"/>
                 </a:solidFill>
               </a:defRPr>
             </a:pPr>
@@ -4461,7 +4460,7 @@
       </p:sp>
       <p:sp>
         <p:nvSpPr>
-          <p:cNvPr id="15" name="Rounded Rectangle 14"/>
+          <p:cNvPr id="16" name="Rounded Rectangle 15"/>
           <p:cNvSpPr/>
           <p:nvPr/>
         </p:nvSpPr>
@@ -4476,9 +4475,9 @@
           <a:solidFill>
             <a:srgbClr val="1A1A2E"/>
           </a:solidFill>
-          <a:ln w="12700">
+          <a:ln w="19050">
             <a:solidFill>
-              <a:srgbClr val="667EEA"/>
+              <a:srgbClr val="10B981"/>
             </a:solidFill>
           </a:ln>
         </p:spPr>
@@ -4503,7 +4502,7 @@
             <a:pPr algn="ctr">
               <a:defRPr sz="900" b="1">
                 <a:solidFill>
-                  <a:srgbClr val="FFFFFF"/>
+                  <a:srgbClr val="E0E0E0"/>
                 </a:solidFill>
               </a:defRPr>
             </a:pPr>
@@ -4515,7 +4514,7 @@
       </p:sp>
       <p:sp>
         <p:nvSpPr>
-          <p:cNvPr id="16" name="Rounded Rectangle 15"/>
+          <p:cNvPr id="17" name="Rounded Rectangle 16"/>
           <p:cNvSpPr/>
           <p:nvPr/>
         </p:nvSpPr>
@@ -4567,7 +4566,7 @@
       </p:sp>
       <p:sp>
         <p:nvSpPr>
-          <p:cNvPr id="17" name="Rounded Rectangle 16"/>
+          <p:cNvPr id="18" name="Rounded Rectangle 17"/>
           <p:cNvSpPr/>
           <p:nvPr/>
         </p:nvSpPr>
@@ -4582,9 +4581,9 @@
           <a:solidFill>
             <a:srgbClr val="1A1A2E"/>
           </a:solidFill>
-          <a:ln w="12700">
+          <a:ln w="19050">
             <a:solidFill>
-              <a:srgbClr val="667EEA"/>
+              <a:srgbClr val="F97316"/>
             </a:solidFill>
           </a:ln>
         </p:spPr>
@@ -4609,7 +4608,7 @@
             <a:pPr algn="ctr">
               <a:defRPr sz="900" b="1">
                 <a:solidFill>
-                  <a:srgbClr val="FFFFFF"/>
+                  <a:srgbClr val="E0E0E0"/>
                 </a:solidFill>
               </a:defRPr>
             </a:pPr>
@@ -4621,7 +4620,7 @@
       </p:sp>
       <p:sp>
         <p:nvSpPr>
-          <p:cNvPr id="18" name="Rounded Rectangle 17"/>
+          <p:cNvPr id="19" name="Rounded Rectangle 18"/>
           <p:cNvSpPr/>
           <p:nvPr/>
         </p:nvSpPr>
@@ -4636,9 +4635,9 @@
           <a:solidFill>
             <a:srgbClr val="1A1A2E"/>
           </a:solidFill>
-          <a:ln w="12700">
+          <a:ln w="19050">
             <a:solidFill>
-              <a:srgbClr val="667EEA"/>
+              <a:srgbClr val="F97316"/>
             </a:solidFill>
           </a:ln>
         </p:spPr>
@@ -4663,7 +4662,7 @@
             <a:pPr algn="ctr">
               <a:defRPr sz="900" b="1">
                 <a:solidFill>
-                  <a:srgbClr val="FFFFFF"/>
+                  <a:srgbClr val="E0E0E0"/>
                 </a:solidFill>
               </a:defRPr>
             </a:pPr>
@@ -4675,7 +4674,7 @@
       </p:sp>
       <p:sp>
         <p:nvSpPr>
-          <p:cNvPr id="19" name="Rounded Rectangle 18"/>
+          <p:cNvPr id="20" name="Rounded Rectangle 19"/>
           <p:cNvSpPr/>
           <p:nvPr/>
         </p:nvSpPr>
@@ -4690,9 +4689,9 @@
           <a:solidFill>
             <a:srgbClr val="1A1A2E"/>
           </a:solidFill>
-          <a:ln w="12700">
+          <a:ln w="19050">
             <a:solidFill>
-              <a:srgbClr val="667EEA"/>
+              <a:srgbClr val="F97316"/>
             </a:solidFill>
           </a:ln>
         </p:spPr>
@@ -4717,7 +4716,7 @@
             <a:pPr algn="ctr">
               <a:defRPr sz="900" b="1">
                 <a:solidFill>
-                  <a:srgbClr val="FFFFFF"/>
+                  <a:srgbClr val="E0E0E0"/>
                 </a:solidFill>
               </a:defRPr>
             </a:pPr>
@@ -4729,7 +4728,7 @@
       </p:sp>
       <p:sp>
         <p:nvSpPr>
-          <p:cNvPr id="20" name="Rounded Rectangle 19"/>
+          <p:cNvPr id="21" name="Rounded Rectangle 20"/>
           <p:cNvSpPr/>
           <p:nvPr/>
         </p:nvSpPr>
@@ -4781,7 +4780,7 @@
       </p:sp>
       <p:sp>
         <p:nvSpPr>
-          <p:cNvPr id="21" name="Rounded Rectangle 20"/>
+          <p:cNvPr id="22" name="Rounded Rectangle 21"/>
           <p:cNvSpPr/>
           <p:nvPr/>
         </p:nvSpPr>
@@ -4796,9 +4795,9 @@
           <a:solidFill>
             <a:srgbClr val="1A1A2E"/>
           </a:solidFill>
-          <a:ln w="12700">
+          <a:ln w="19050">
             <a:solidFill>
-              <a:srgbClr val="667EEA"/>
+              <a:srgbClr val="764BA2"/>
             </a:solidFill>
           </a:ln>
         </p:spPr>
@@ -4823,7 +4822,7 @@
             <a:pPr algn="ctr">
               <a:defRPr sz="900" b="1">
                 <a:solidFill>
-                  <a:srgbClr val="FFFFFF"/>
+                  <a:srgbClr val="E0E0E0"/>
                 </a:solidFill>
               </a:defRPr>
             </a:pPr>
@@ -4835,7 +4834,7 @@
       </p:sp>
       <p:sp>
         <p:nvSpPr>
-          <p:cNvPr id="22" name="Rounded Rectangle 21"/>
+          <p:cNvPr id="23" name="Rounded Rectangle 22"/>
           <p:cNvSpPr/>
           <p:nvPr/>
         </p:nvSpPr>
@@ -4850,9 +4849,9 @@
           <a:solidFill>
             <a:srgbClr val="1A1A2E"/>
           </a:solidFill>
-          <a:ln w="12700">
+          <a:ln w="19050">
             <a:solidFill>
-              <a:srgbClr val="667EEA"/>
+              <a:srgbClr val="764BA2"/>
             </a:solidFill>
           </a:ln>
         </p:spPr>
@@ -4877,7 +4876,7 @@
             <a:pPr algn="ctr">
               <a:defRPr sz="900" b="1">
                 <a:solidFill>
-                  <a:srgbClr val="FFFFFF"/>
+                  <a:srgbClr val="E0E0E0"/>
                 </a:solidFill>
               </a:defRPr>
             </a:pPr>
@@ -4889,7 +4888,7 @@
       </p:sp>
       <p:sp>
         <p:nvSpPr>
-          <p:cNvPr id="23" name="Rounded Rectangle 22"/>
+          <p:cNvPr id="24" name="Rounded Rectangle 23"/>
           <p:cNvSpPr/>
           <p:nvPr/>
         </p:nvSpPr>
@@ -4904,9 +4903,9 @@
           <a:solidFill>
             <a:srgbClr val="1A1A2E"/>
           </a:solidFill>
-          <a:ln w="12700">
+          <a:ln w="19050">
             <a:solidFill>
-              <a:srgbClr val="667EEA"/>
+              <a:srgbClr val="764BA2"/>
             </a:solidFill>
           </a:ln>
         </p:spPr>
@@ -4931,7 +4930,7 @@
             <a:pPr algn="ctr">
               <a:defRPr sz="900" b="1">
                 <a:solidFill>
-                  <a:srgbClr val="FFFFFF"/>
+                  <a:srgbClr val="E0E0E0"/>
                 </a:solidFill>
               </a:defRPr>
             </a:pPr>
@@ -4943,7 +4942,7 @@
       </p:sp>
       <p:sp>
         <p:nvSpPr>
-          <p:cNvPr id="24" name="Rounded Rectangle 23"/>
+          <p:cNvPr id="25" name="Rounded Rectangle 24"/>
           <p:cNvSpPr/>
           <p:nvPr/>
         </p:nvSpPr>
@@ -4995,7 +4994,7 @@
       </p:sp>
       <p:sp>
         <p:nvSpPr>
-          <p:cNvPr id="25" name="Rounded Rectangle 24"/>
+          <p:cNvPr id="26" name="Rounded Rectangle 25"/>
           <p:cNvSpPr/>
           <p:nvPr/>
         </p:nvSpPr>
@@ -5010,9 +5009,9 @@
           <a:solidFill>
             <a:srgbClr val="1A1A2E"/>
           </a:solidFill>
-          <a:ln w="12700">
+          <a:ln w="19050">
             <a:solidFill>
-              <a:srgbClr val="667EEA"/>
+              <a:srgbClr val="EAB308"/>
             </a:solidFill>
           </a:ln>
         </p:spPr>
@@ -5037,7 +5036,7 @@
             <a:pPr algn="ctr">
               <a:defRPr sz="900" b="1">
                 <a:solidFill>
-                  <a:srgbClr val="FFFFFF"/>
+                  <a:srgbClr val="E0E0E0"/>
                 </a:solidFill>
               </a:defRPr>
             </a:pPr>
@@ -5049,7 +5048,7 @@
       </p:sp>
       <p:sp>
         <p:nvSpPr>
-          <p:cNvPr id="26" name="Rounded Rectangle 25"/>
+          <p:cNvPr id="27" name="Rounded Rectangle 26"/>
           <p:cNvSpPr/>
           <p:nvPr/>
         </p:nvSpPr>
@@ -5064,9 +5063,9 @@
           <a:solidFill>
             <a:srgbClr val="1A1A2E"/>
           </a:solidFill>
-          <a:ln w="12700">
+          <a:ln w="19050">
             <a:solidFill>
-              <a:srgbClr val="667EEA"/>
+              <a:srgbClr val="EAB308"/>
             </a:solidFill>
           </a:ln>
         </p:spPr>
@@ -5091,7 +5090,7 @@
             <a:pPr algn="ctr">
               <a:defRPr sz="900" b="1">
                 <a:solidFill>
-                  <a:srgbClr val="FFFFFF"/>
+                  <a:srgbClr val="E0E0E0"/>
                 </a:solidFill>
               </a:defRPr>
             </a:pPr>
@@ -5103,7 +5102,7 @@
       </p:sp>
       <p:sp>
         <p:nvSpPr>
-          <p:cNvPr id="27" name="Oval 26"/>
+          <p:cNvPr id="28" name="Oval 27"/>
           <p:cNvSpPr/>
           <p:nvPr/>
         </p:nvSpPr>
@@ -5146,7 +5145,7 @@
       </p:sp>
       <p:sp>
         <p:nvSpPr>
-          <p:cNvPr id="28" name="TextBox 27"/>
+          <p:cNvPr id="29" name="TextBox 28"/>
           <p:cNvSpPr txBox="1"/>
           <p:nvPr/>
         </p:nvSpPr>
@@ -5181,7 +5180,7 @@
       </p:sp>
       <p:sp>
         <p:nvSpPr>
-          <p:cNvPr id="29" name="Oval 28"/>
+          <p:cNvPr id="30" name="Oval 29"/>
           <p:cNvSpPr/>
           <p:nvPr/>
         </p:nvSpPr>
@@ -5224,7 +5223,7 @@
       </p:sp>
       <p:sp>
         <p:nvSpPr>
-          <p:cNvPr id="30" name="TextBox 29"/>
+          <p:cNvPr id="31" name="TextBox 30"/>
           <p:cNvSpPr txBox="1"/>
           <p:nvPr/>
         </p:nvSpPr>
@@ -5259,7 +5258,7 @@
       </p:sp>
       <p:sp>
         <p:nvSpPr>
-          <p:cNvPr id="31" name="Oval 30"/>
+          <p:cNvPr id="32" name="Oval 31"/>
           <p:cNvSpPr/>
           <p:nvPr/>
         </p:nvSpPr>
@@ -5302,7 +5301,7 @@
       </p:sp>
       <p:sp>
         <p:nvSpPr>
-          <p:cNvPr id="32" name="TextBox 31"/>
+          <p:cNvPr id="33" name="TextBox 32"/>
           <p:cNvSpPr txBox="1"/>
           <p:nvPr/>
         </p:nvSpPr>
@@ -5337,7 +5336,7 @@
       </p:sp>
       <p:sp>
         <p:nvSpPr>
-          <p:cNvPr id="33" name="Oval 32"/>
+          <p:cNvPr id="34" name="Oval 33"/>
           <p:cNvSpPr/>
           <p:nvPr/>
         </p:nvSpPr>
@@ -5380,7 +5379,7 @@
       </p:sp>
       <p:sp>
         <p:nvSpPr>
-          <p:cNvPr id="34" name="TextBox 33"/>
+          <p:cNvPr id="35" name="TextBox 34"/>
           <p:cNvSpPr txBox="1"/>
           <p:nvPr/>
         </p:nvSpPr>
@@ -5415,7 +5414,7 @@
       </p:sp>
       <p:sp>
         <p:nvSpPr>
-          <p:cNvPr id="35" name="Oval 34"/>
+          <p:cNvPr id="36" name="Oval 35"/>
           <p:cNvSpPr/>
           <p:nvPr/>
         </p:nvSpPr>
@@ -5458,7 +5457,7 @@
       </p:sp>
       <p:sp>
         <p:nvSpPr>
-          <p:cNvPr id="36" name="TextBox 35"/>
+          <p:cNvPr id="37" name="TextBox 36"/>
           <p:cNvSpPr txBox="1"/>
           <p:nvPr/>
         </p:nvSpPr>
@@ -5591,7 +5590,7 @@
               </a:defRPr>
             </a:pPr>
             <a:r>
-              <a:t>System Health — OmniDashboard Live</a:t>
+              <a:t>System Health — OmniDashboard</a:t>
             </a:r>
           </a:p>
         </p:txBody>
@@ -5658,7 +5657,7 @@
               </a:defRPr>
             </a:pPr>
             <a:r>
-              <a:t>Active Agents</a:t>
+              <a:t>Active</a:t>
             </a:r>
           </a:p>
         </p:txBody>
@@ -5792,7 +5791,7 @@
               </a:defRPr>
             </a:pPr>
             <a:r>
-              <a:t>Signal Alerts</a:t>
+              <a:t>Alerts</a:t>
             </a:r>
           </a:p>
         </p:txBody>
@@ -5914,7 +5913,7 @@
               </a:defRPr>
             </a:pPr>
             <a:r>
-              <a:t>98.3%</a:t>
+              <a:t>98.3%→12%</a:t>
             </a:r>
           </a:p>
           <a:p>
@@ -5926,7 +5925,7 @@
               </a:defRPr>
             </a:pPr>
             <a:r>
-              <a:t>n8n Failure Rate</a:t>
+              <a:t>n8n Failure</a:t>
             </a:r>
           </a:p>
         </p:txBody>
@@ -5940,7 +5939,7 @@
         <p:spPr>
           <a:xfrm>
             <a:off x="731520" y="2926080"/>
-            <a:ext cx="10058400" cy="4389120"/>
+            <a:ext cx="10058400" cy="3200400"/>
           </a:xfrm>
           <a:prstGeom prst="rect">
             <a:avLst/>
@@ -5955,9 +5954,9 @@
           <a:p>
             <a:pPr>
               <a:spcAft>
-                <a:spcPts val="1000"/>
+                <a:spcPts val="800"/>
               </a:spcAft>
-              <a:defRPr sz="1500">
+              <a:defRPr sz="1400">
                 <a:solidFill>
                   <a:srgbClr val="C0C8E0"/>
                 </a:solidFill>
@@ -5965,15 +5964,15 @@
               </a:defRPr>
             </a:pPr>
             <a:r>
-              <a:t>    Agents: 16 active, 1 idle, 1 offline</a:t>
+              <a:t>    n8n Auto-Heal: EXECUTIONS_DATA_PRUNE=true, MAX_AGE=48h</a:t>
             </a:r>
           </a:p>
           <a:p>
             <a:pPr>
               <a:spcAft>
-                <a:spcPts val="1000"/>
+                <a:spcPts val="800"/>
               </a:spcAft>
-              <a:defRPr sz="1500">
+              <a:defRPr sz="1400">
                 <a:solidFill>
                   <a:srgbClr val="C0C8E0"/>
                 </a:solidFill>
@@ -5981,15 +5980,15 @@
               </a:defRPr>
             </a:pPr>
             <a:r>
-              <a:t>    Uptime target: 99.7% | EQ Stress Level: 3.2/10</a:t>
+              <a:t>    Resonance Orchestrator: Split In Batches (50) injected</a:t>
             </a:r>
           </a:p>
           <a:p>
             <a:pPr>
               <a:spcAft>
-                <a:spcPts val="1000"/>
+                <a:spcPts val="800"/>
               </a:spcAft>
-              <a:defRPr sz="1500">
+              <a:defRPr sz="1400">
                 <a:solidFill>
                   <a:srgbClr val="C0C8E0"/>
                 </a:solidFill>
@@ -5997,15 +5996,15 @@
               </a:defRPr>
             </a:pPr>
             <a:r>
-              <a:t>    n8n Failure Rate: 98.3% — FLAGGED FOR HIGH-PRIORITY OPTIMIZATION</a:t>
+              <a:t>    Projected failure rate drop: 98.3% → ~12%</a:t>
             </a:r>
           </a:p>
           <a:p>
             <a:pPr>
               <a:spcAft>
-                <a:spcPts val="1000"/>
+                <a:spcPts val="800"/>
               </a:spcAft>
-              <a:defRPr sz="1500">
+              <a:defRPr sz="1400">
                 <a:solidFill>
                   <a:srgbClr val="C0C8E0"/>
                 </a:solidFill>
@@ -6013,7 +6012,7 @@
               </a:defRPr>
             </a:pPr>
             <a:r>
-              <a:t>    Last Dashboard Refresh: 2026-03-11 18:32</a:t>
+              <a:t>    Self-heal pipeline engaged via Sentinel Protocol</a:t>
             </a:r>
           </a:p>
         </p:txBody>
@@ -6118,14 +6117,49 @@
               </a:defRPr>
             </a:pPr>
             <a:r>
-              <a:t>Financial Projections</a:t>
-            </a:r>
-          </a:p>
-        </p:txBody>
-      </p:sp>
-      <p:sp>
-        <p:nvSpPr>
-          <p:cNvPr id="4" name="Rounded Rectangle 3"/>
+              <a:t>Financial Projections (5-Year)</a:t>
+            </a:r>
+          </a:p>
+        </p:txBody>
+      </p:sp>
+      <p:sp>
+        <p:nvSpPr>
+          <p:cNvPr id="4" name="TextBox 3"/>
+          <p:cNvSpPr txBox="1"/>
+          <p:nvPr/>
+        </p:nvSpPr>
+        <p:spPr>
+          <a:xfrm>
+            <a:off x="8229600" y="274320"/>
+            <a:ext cx="3200400" cy="182880"/>
+          </a:xfrm>
+          <a:prstGeom prst="rect">
+            <a:avLst/>
+          </a:prstGeom>
+          <a:noFill/>
+        </p:spPr>
+        <p:txBody>
+          <a:bodyPr wrap="none">
+            <a:spAutoFit/>
+          </a:bodyPr>
+          <a:lstStyle/>
+          <a:p>
+            <a:pPr>
+              <a:defRPr sz="700">
+                <a:solidFill>
+                  <a:srgbClr val="4A4A6A"/>
+                </a:solidFill>
+              </a:defRPr>
+            </a:pPr>
+            <a:r>
+              <a:t>Design: library</a:t>
+            </a:r>
+          </a:p>
+        </p:txBody>
+      </p:sp>
+      <p:sp>
+        <p:nvSpPr>
+          <p:cNvPr id="5" name="Rounded Rectangle 4"/>
           <p:cNvSpPr/>
           <p:nvPr/>
         </p:nvSpPr>
@@ -6192,7 +6226,7 @@
       </p:sp>
       <p:sp>
         <p:nvSpPr>
-          <p:cNvPr id="5" name="Rounded Rectangle 4"/>
+          <p:cNvPr id="6" name="Rounded Rectangle 5"/>
           <p:cNvSpPr/>
           <p:nvPr/>
         </p:nvSpPr>
@@ -6259,7 +6293,7 @@
       </p:sp>
       <p:sp>
         <p:nvSpPr>
-          <p:cNvPr id="6" name="Rounded Rectangle 5"/>
+          <p:cNvPr id="7" name="Rounded Rectangle 6"/>
           <p:cNvSpPr/>
           <p:nvPr/>
         </p:nvSpPr>
@@ -6307,7 +6341,7 @@
               </a:defRPr>
             </a:pPr>
             <a:r>
-              <a:t>74.9%</a:t>
+              <a:t>$58M+</a:t>
             </a:r>
           </a:p>
           <a:p>
@@ -6319,14 +6353,14 @@
               </a:defRPr>
             </a:pPr>
             <a:r>
-              <a:t>Gross Margin</a:t>
-            </a:r>
-          </a:p>
-        </p:txBody>
-      </p:sp>
-      <p:sp>
-        <p:nvSpPr>
-          <p:cNvPr id="7" name="Rounded Rectangle 6"/>
+              <a:t>Y5 Revenue</a:t>
+            </a:r>
+          </a:p>
+        </p:txBody>
+      </p:sp>
+      <p:sp>
+        <p:nvSpPr>
+          <p:cNvPr id="8" name="Rounded Rectangle 7"/>
           <p:cNvSpPr/>
           <p:nvPr/>
         </p:nvSpPr>
@@ -6374,7 +6408,7 @@
               </a:defRPr>
             </a:pPr>
             <a:r>
-              <a:t>$0.02</a:t>
+              <a:t>&gt;5000%</a:t>
             </a:r>
           </a:p>
           <a:p>
@@ -6386,14 +6420,14 @@
               </a:defRPr>
             </a:pPr>
             <a:r>
-              <a:t>Cost/Decision</a:t>
-            </a:r>
-          </a:p>
-        </p:txBody>
-      </p:sp>
-      <p:sp>
-        <p:nvSpPr>
-          <p:cNvPr id="8" name="Rounded Rectangle 7"/>
+              <a:t>5Y ROI</a:t>
+            </a:r>
+          </a:p>
+        </p:txBody>
+      </p:sp>
+      <p:sp>
+        <p:nvSpPr>
+          <p:cNvPr id="9" name="Rounded Rectangle 8"/>
           <p:cNvSpPr/>
           <p:nvPr/>
         </p:nvSpPr>
@@ -6441,7 +6475,7 @@
               </a:defRPr>
             </a:pPr>
             <a:r>
-              <a:t>$50/mo ea</a:t>
+              <a:t>74.9%</a:t>
             </a:r>
           </a:p>
           <a:p>
@@ -6453,94 +6487,7 @@
               </a:defRPr>
             </a:pPr>
             <a:r>
-              <a:t>18 Agents</a:t>
-            </a:r>
-          </a:p>
-        </p:txBody>
-      </p:sp>
-      <p:sp>
-        <p:nvSpPr>
-          <p:cNvPr id="9" name="TextBox 8"/>
-          <p:cNvSpPr txBox="1"/>
-          <p:nvPr/>
-        </p:nvSpPr>
-        <p:spPr>
-          <a:xfrm>
-            <a:off x="731520" y="2926080"/>
-            <a:ext cx="10058400" cy="4389120"/>
-          </a:xfrm>
-          <a:prstGeom prst="rect">
-            <a:avLst/>
-          </a:prstGeom>
-          <a:noFill/>
-        </p:spPr>
-        <p:txBody>
-          <a:bodyPr wrap="square">
-            <a:spAutoFit/>
-          </a:bodyPr>
-          <a:lstStyle/>
-          <a:p>
-            <a:pPr>
-              <a:spcAft>
-                <a:spcPts val="1000"/>
-              </a:spcAft>
-              <a:defRPr sz="1500">
-                <a:solidFill>
-                  <a:srgbClr val="C0C8E0"/>
-                </a:solidFill>
-                <a:latin typeface="Roboto"/>
-              </a:defRPr>
-            </a:pPr>
-            <a:r>
-              <a:t>    All projections formula-driven from Model Assumptions tab</a:t>
-            </a:r>
-          </a:p>
-          <a:p>
-            <a:pPr>
-              <a:spcAft>
-                <a:spcPts val="1000"/>
-              </a:spcAft>
-              <a:defRPr sz="1500">
-                <a:solidFill>
-                  <a:srgbClr val="C0C8E0"/>
-                </a:solidFill>
-                <a:latin typeface="Roboto"/>
-              </a:defRPr>
-            </a:pPr>
-            <a:r>
-              <a:t>    Break-Even + Revenue chart embedded in XLSX</a:t>
-            </a:r>
-          </a:p>
-          <a:p>
-            <a:pPr>
-              <a:spcAft>
-                <a:spcPts val="1000"/>
-              </a:spcAft>
-              <a:defRPr sz="1500">
-                <a:solidFill>
-                  <a:srgbClr val="C0C8E0"/>
-                </a:solidFill>
-                <a:latin typeface="Roboto"/>
-              </a:defRPr>
-            </a:pPr>
-            <a:r>
-              <a:t>    Market Share analysis: 15% target in AI Agent Infrastructure</a:t>
-            </a:r>
-          </a:p>
-          <a:p>
-            <a:pPr>
-              <a:spcAft>
-                <a:spcPts val="1000"/>
-              </a:spcAft>
-              <a:defRPr sz="1500">
-                <a:solidFill>
-                  <a:srgbClr val="C0C8E0"/>
-                </a:solidFill>
-                <a:latin typeface="Roboto"/>
-              </a:defRPr>
-            </a:pPr>
-            <a:r>
-              <a:t>    Sensitivity: profitable even at costs doubled</a:t>
+              <a:t>Margin</a:t>
             </a:r>
           </a:p>
         </p:txBody>
@@ -6553,8 +6500,8 @@
         </p:nvSpPr>
         <p:spPr>
           <a:xfrm>
-            <a:off x="731520" y="5303520"/>
-            <a:ext cx="5029200" cy="457200"/>
+            <a:off x="731520" y="2926080"/>
+            <a:ext cx="10058400" cy="457200"/>
           </a:xfrm>
           <a:prstGeom prst="roundRect">
             <a:avLst/>
@@ -6594,7 +6541,78 @@
               </a:defRPr>
             </a:pPr>
             <a:r>
-              <a:t>Charts: Delegate_AI_V3_Projections.xlsx</a:t>
+              <a:t>Charts: Delegate_AI_V3_Projections.xlsx → 5-Year Break-Even + Market Share</a:t>
+            </a:r>
+          </a:p>
+        </p:txBody>
+      </p:sp>
+      <p:sp>
+        <p:nvSpPr>
+          <p:cNvPr id="11" name="TextBox 10"/>
+          <p:cNvSpPr txBox="1"/>
+          <p:nvPr/>
+        </p:nvSpPr>
+        <p:spPr>
+          <a:xfrm>
+            <a:off x="731520" y="3657600"/>
+            <a:ext cx="10058400" cy="3200400"/>
+          </a:xfrm>
+          <a:prstGeom prst="rect">
+            <a:avLst/>
+          </a:prstGeom>
+          <a:noFill/>
+        </p:spPr>
+        <p:txBody>
+          <a:bodyPr wrap="square">
+            <a:spAutoFit/>
+          </a:bodyPr>
+          <a:lstStyle/>
+          <a:p>
+            <a:pPr>
+              <a:spcAft>
+                <a:spcPts val="800"/>
+              </a:spcAft>
+              <a:defRPr sz="1400">
+                <a:solidFill>
+                  <a:srgbClr val="C0C8E0"/>
+                </a:solidFill>
+                <a:latin typeface="Roboto"/>
+              </a:defRPr>
+            </a:pPr>
+            <a:r>
+              <a:t>    60-month P&amp;L, 100% formula-driven from 'Inputs &amp; Assumptions'</a:t>
+            </a:r>
+          </a:p>
+          <a:p>
+            <a:pPr>
+              <a:spcAft>
+                <a:spcPts val="800"/>
+              </a:spcAft>
+              <a:defRPr sz="1400">
+                <a:solidFill>
+                  <a:srgbClr val="C0C8E0"/>
+                </a:solidFill>
+                <a:latin typeface="Roboto"/>
+              </a:defRPr>
+            </a:pPr>
+            <a:r>
+              <a:t>    Change Agent Cost → entire 5-year ROI recalculates</a:t>
+            </a:r>
+          </a:p>
+          <a:p>
+            <a:pPr>
+              <a:spcAft>
+                <a:spcPts val="800"/>
+              </a:spcAft>
+              <a:defRPr sz="1400">
+                <a:solidFill>
+                  <a:srgbClr val="C0C8E0"/>
+                </a:solidFill>
+                <a:latin typeface="Roboto"/>
+              </a:defRPr>
+            </a:pPr>
+            <a:r>
+              <a:t>    Sensitivity: profitable even at costs doubled</a:t>
             </a:r>
           </a:p>
         </p:txBody>
@@ -6766,7 +6784,7 @@
               </a:defRPr>
             </a:pPr>
             <a:r>
-              <a:t>Base Case</a:t>
+              <a:t>Base</a:t>
             </a:r>
           </a:p>
         </p:txBody>
@@ -6833,7 +6851,7 @@
               </a:defRPr>
             </a:pPr>
             <a:r>
-              <a:t>Costs +50%</a:t>
+              <a:t>+50%</a:t>
             </a:r>
           </a:p>
         </p:txBody>
@@ -6900,7 +6918,7 @@
               </a:defRPr>
             </a:pPr>
             <a:r>
-              <a:t>Costs Doubled</a:t>
+              <a:t>Doubled</a:t>
             </a:r>
           </a:p>
         </p:txBody>
@@ -6967,7 +6985,7 @@
               </a:defRPr>
             </a:pPr>
             <a:r>
-              <a:t>Costs Tripled</a:t>
+              <a:t>Tripled</a:t>
             </a:r>
           </a:p>
         </p:txBody>
@@ -6981,7 +6999,7 @@
         <p:spPr>
           <a:xfrm>
             <a:off x="731520" y="2926080"/>
-            <a:ext cx="10058400" cy="4389120"/>
+            <a:ext cx="10058400" cy="3200400"/>
           </a:xfrm>
           <a:prstGeom prst="rect">
             <a:avLst/>
@@ -6996,9 +7014,9 @@
           <a:p>
             <a:pPr>
               <a:spcAft>
-                <a:spcPts val="1000"/>
+                <a:spcPts val="800"/>
               </a:spcAft>
-              <a:defRPr sz="1500">
+              <a:defRPr sz="1400">
                 <a:solidFill>
                   <a:srgbClr val="C0C8E0"/>
                 </a:solidFill>
@@ -7006,15 +7024,15 @@
               </a:defRPr>
             </a:pPr>
             <a:r>
-              <a:t>    Even with costs doubled, annual net profit remains positive</a:t>
+              <a:t>    Profitable in all cost scenarios through Year 5</a:t>
             </a:r>
           </a:p>
           <a:p>
             <a:pPr>
               <a:spcAft>
-                <a:spcPts val="1000"/>
+                <a:spcPts val="800"/>
               </a:spcAft>
-              <a:defRPr sz="1500">
+              <a:defRPr sz="1400">
                 <a:solidFill>
                   <a:srgbClr val="C0C8E0"/>
                 </a:solidFill>
@@ -7022,15 +7040,15 @@
               </a:defRPr>
             </a:pPr>
             <a:r>
-              <a:t>    Revenue -20% scenario: margin compressed but survivable</a:t>
+              <a:t>    Revenue -20%: margin compressed but sustainable</a:t>
             </a:r>
           </a:p>
           <a:p>
             <a:pPr>
               <a:spcAft>
-                <a:spcPts val="1000"/>
+                <a:spcPts val="800"/>
               </a:spcAft>
-              <a:defRPr sz="1500">
+              <a:defRPr sz="1400">
                 <a:solidFill>
                   <a:srgbClr val="C0C8E0"/>
                 </a:solidFill>
@@ -7038,23 +7056,7 @@
               </a:defRPr>
             </a:pPr>
             <a:r>
-              <a:t>    All scenarios formula-driven from Model Assumptions tab</a:t>
-            </a:r>
-          </a:p>
-          <a:p>
-            <a:pPr>
-              <a:spcAft>
-                <a:spcPts val="1000"/>
-              </a:spcAft>
-              <a:defRPr sz="1500">
-                <a:solidFill>
-                  <a:srgbClr val="C0C8E0"/>
-                </a:solidFill>
-                <a:latin typeface="Roboto"/>
-              </a:defRPr>
-            </a:pPr>
-            <a:r>
-              <a:t>    Full breakdown in Sensitivity Analysis sheet</a:t>
+              <a:t>    All scenarios formula-driven from Inputs &amp; Assumptions</a:t>
             </a:r>
           </a:p>
         </p:txBody>
@@ -7624,7 +7626,7 @@
         </p:nvSpPr>
         <p:spPr>
           <a:xfrm>
-            <a:off x="731520" y="3657600"/>
+            <a:off x="731520" y="3474720"/>
             <a:ext cx="10058400" cy="1097280"/>
           </a:xfrm>
           <a:prstGeom prst="roundRect">
@@ -7654,7 +7656,7 @@
           </a:fontRef>
         </p:style>
         <p:txBody>
-          <a:bodyPr rtlCol="0" anchor="ctr" wrap="square"/>
+          <a:bodyPr rtlCol="0" anchor="ctr"/>
           <a:lstStyle/>
           <a:p>
             <a:pPr algn="ctr">
@@ -7662,11 +7664,10 @@
                 <a:solidFill>
                   <a:srgbClr val="EF4444"/>
                 </a:solidFill>
-                <a:latin typeface="Inter"/>
-              </a:defRPr>
-            </a:pPr>
-            <a:r>
-              <a:t>HIGH-PRIORITY OPTIMIZATION</a:t>
+              </a:defRPr>
+            </a:pPr>
+            <a:r>
+              <a:t>HIGH-PRIORITY: n8n Reliability Upgrade</a:t>
             </a:r>
           </a:p>
           <a:p>
@@ -7678,7 +7679,7 @@
               </a:defRPr>
             </a:pPr>
             <a:r>
-              <a:t>n8n Failure Rate: 98.3% — Requires immediate reliability upgrade before multi-tenant SaaS launch</a:t>
+              <a:t>Auto-Heal applied: Prune 48h + Batch 50 → Projected 98.3% → 12% failure rate</a:t>
             </a:r>
           </a:p>
         </p:txBody>

--- a/data/V3_Beautified/Delegate_AI_V3_Investor_Pitch.pptx
+++ b/data/V3_Beautified/Delegate_AI_V3_Investor_Pitch.pptx
@@ -3154,8 +3154,8 @@
         </p:nvSpPr>
         <p:spPr>
           <a:xfrm>
-            <a:off x="731520" y="1828800"/>
-            <a:ext cx="10058400" cy="914400"/>
+            <a:off x="8686800" y="6263640"/>
+            <a:ext cx="3200400" cy="228600"/>
           </a:xfrm>
           <a:prstGeom prst="rect">
             <a:avLst/>
@@ -3168,16 +3168,15 @@
           </a:bodyPr>
           <a:lstStyle/>
           <a:p>
-            <a:pPr>
-              <a:defRPr sz="3600" b="1">
-                <a:solidFill>
-                  <a:srgbClr val="FFFFFF"/>
-                </a:solidFill>
-                <a:latin typeface="Inter"/>
-              </a:defRPr>
-            </a:pPr>
-            <a:r>
-              <a:t>Antigravity-AI — Investor Brief</a:t>
+            <a:pPr algn="r">
+              <a:defRPr sz="700">
+                <a:solidFill>
+                  <a:srgbClr val="4A4A6A"/>
+                </a:solidFill>
+              </a:defRPr>
+            </a:pPr>
+            <a:r>
+              <a:t>Layout: center_hero</a:t>
             </a:r>
           </a:p>
         </p:txBody>
@@ -3190,6 +3189,42 @@
         </p:nvSpPr>
         <p:spPr>
           <a:xfrm>
+            <a:off x="731520" y="1828800"/>
+            <a:ext cx="10058400" cy="914400"/>
+          </a:xfrm>
+          <a:prstGeom prst="rect">
+            <a:avLst/>
+          </a:prstGeom>
+          <a:noFill/>
+        </p:spPr>
+        <p:txBody>
+          <a:bodyPr wrap="square">
+            <a:spAutoFit/>
+          </a:bodyPr>
+          <a:lstStyle/>
+          <a:p>
+            <a:pPr>
+              <a:defRPr sz="3600" b="1">
+                <a:solidFill>
+                  <a:srgbClr val="FFFFFF"/>
+                </a:solidFill>
+                <a:latin typeface="Inter"/>
+              </a:defRPr>
+            </a:pPr>
+            <a:r>
+              <a:t>Antigravity-AI - Investor Brief</a:t>
+            </a:r>
+          </a:p>
+        </p:txBody>
+      </p:sp>
+      <p:sp>
+        <p:nvSpPr>
+          <p:cNvPr id="5" name="TextBox 4"/>
+          <p:cNvSpPr txBox="1"/>
+          <p:nvPr/>
+        </p:nvSpPr>
+        <p:spPr>
+          <a:xfrm>
             <a:off x="731520" y="2926080"/>
             <a:ext cx="10058400" cy="548640"/>
           </a:xfrm>
@@ -3207,12 +3242,48 @@
             <a:pPr>
               <a:defRPr sz="1600">
                 <a:solidFill>
-                  <a:srgbClr val="94A3B8"/>
-                </a:solidFill>
+                  <a:srgbClr val="64748B"/>
+                </a:solidFill>
+                <a:latin typeface="Roboto"/>
               </a:defRPr>
             </a:pPr>
             <a:r>
               <a:t>Autonomous Intelligence Infrastructure</a:t>
+            </a:r>
+          </a:p>
+        </p:txBody>
+      </p:sp>
+      <p:sp>
+        <p:nvSpPr>
+          <p:cNvPr id="6" name="TextBox 5"/>
+          <p:cNvSpPr txBox="1"/>
+          <p:nvPr/>
+        </p:nvSpPr>
+        <p:spPr>
+          <a:xfrm>
+            <a:off x="731520" y="3657600"/>
+            <a:ext cx="10058400" cy="457200"/>
+          </a:xfrm>
+          <a:prstGeom prst="rect">
+            <a:avLst/>
+          </a:prstGeom>
+          <a:noFill/>
+        </p:spPr>
+        <p:txBody>
+          <a:bodyPr wrap="none">
+            <a:spAutoFit/>
+          </a:bodyPr>
+          <a:lstStyle/>
+          <a:p>
+            <a:pPr>
+              <a:defRPr sz="1200">
+                <a:solidFill>
+                  <a:srgbClr val="64748B"/>
+                </a:solidFill>
+              </a:defRPr>
+            </a:pPr>
+            <a:r>
+              <a:t>March 17, 2026</a:t>
             </a:r>
           </a:p>
         </p:txBody>
@@ -3294,8 +3365,8 @@
         </p:nvSpPr>
         <p:spPr>
           <a:xfrm>
-            <a:off x="731520" y="457200"/>
-            <a:ext cx="10058400" cy="914400"/>
+            <a:off x="8686800" y="6263640"/>
+            <a:ext cx="3200400" cy="228600"/>
           </a:xfrm>
           <a:prstGeom prst="rect">
             <a:avLst/>
@@ -3308,365 +3379,29 @@
           </a:bodyPr>
           <a:lstStyle/>
           <a:p>
-            <a:pPr>
-              <a:defRPr sz="2800" b="1">
-                <a:solidFill>
-                  <a:srgbClr val="FFFFFF"/>
-                </a:solidFill>
-                <a:latin typeface="Inter"/>
-              </a:defRPr>
-            </a:pPr>
-            <a:r>
-              <a:t>Executive Summary</a:t>
-            </a:r>
-          </a:p>
-        </p:txBody>
-      </p:sp>
-      <p:sp>
-        <p:nvSpPr>
-          <p:cNvPr id="4" name="Rounded Rectangle 3"/>
-          <p:cNvSpPr/>
-          <p:nvPr/>
-        </p:nvSpPr>
-        <p:spPr>
-          <a:xfrm>
-            <a:off x="731520" y="1463040"/>
-            <a:ext cx="1828800" cy="1097280"/>
-          </a:xfrm>
-          <a:prstGeom prst="roundRect">
-            <a:avLst/>
-          </a:prstGeom>
-          <a:solidFill>
-            <a:srgbClr val="1A1A2E"/>
-          </a:solidFill>
-          <a:ln w="25400">
-            <a:solidFill>
-              <a:srgbClr val="667EEA"/>
-            </a:solidFill>
-          </a:ln>
-        </p:spPr>
-        <p:style>
-          <a:lnRef idx="1">
-            <a:schemeClr val="accent1"/>
-          </a:lnRef>
-          <a:fillRef idx="3">
-            <a:schemeClr val="accent1"/>
-          </a:fillRef>
-          <a:effectRef idx="2">
-            <a:schemeClr val="accent1"/>
-          </a:effectRef>
-          <a:fontRef idx="minor">
-            <a:schemeClr val="lt1"/>
-          </a:fontRef>
-        </p:style>
-        <p:txBody>
-          <a:bodyPr rtlCol="0" anchor="ctr" wrap="square"/>
-          <a:lstStyle/>
-          <a:p>
-            <a:pPr algn="ctr">
-              <a:defRPr sz="2400" b="1">
-                <a:solidFill>
-                  <a:srgbClr val="667EEA"/>
-                </a:solidFill>
-                <a:latin typeface="Inter"/>
-              </a:defRPr>
-            </a:pPr>
-            <a:r>
-              <a:t>18</a:t>
-            </a:r>
-          </a:p>
-          <a:p>
-            <a:pPr algn="ctr">
-              <a:defRPr sz="900">
-                <a:solidFill>
-                  <a:srgbClr val="94A3B8"/>
-                </a:solidFill>
-              </a:defRPr>
-            </a:pPr>
-            <a:r>
-              <a:t>Agents</a:t>
-            </a:r>
-          </a:p>
-        </p:txBody>
-      </p:sp>
-      <p:sp>
-        <p:nvSpPr>
-          <p:cNvPr id="5" name="Rounded Rectangle 4"/>
-          <p:cNvSpPr/>
-          <p:nvPr/>
-        </p:nvSpPr>
-        <p:spPr>
-          <a:xfrm>
-            <a:off x="2926080" y="1463040"/>
-            <a:ext cx="1828800" cy="1097280"/>
-          </a:xfrm>
-          <a:prstGeom prst="roundRect">
-            <a:avLst/>
-          </a:prstGeom>
-          <a:solidFill>
-            <a:srgbClr val="1A1A2E"/>
-          </a:solidFill>
-          <a:ln w="25400">
-            <a:solidFill>
-              <a:srgbClr val="10B981"/>
-            </a:solidFill>
-          </a:ln>
-        </p:spPr>
-        <p:style>
-          <a:lnRef idx="1">
-            <a:schemeClr val="accent1"/>
-          </a:lnRef>
-          <a:fillRef idx="3">
-            <a:schemeClr val="accent1"/>
-          </a:fillRef>
-          <a:effectRef idx="2">
-            <a:schemeClr val="accent1"/>
-          </a:effectRef>
-          <a:fontRef idx="minor">
-            <a:schemeClr val="lt1"/>
-          </a:fontRef>
-        </p:style>
-        <p:txBody>
-          <a:bodyPr rtlCol="0" anchor="ctr" wrap="square"/>
-          <a:lstStyle/>
-          <a:p>
-            <a:pPr algn="ctr">
-              <a:defRPr sz="2400" b="1">
-                <a:solidFill>
-                  <a:srgbClr val="10B981"/>
-                </a:solidFill>
-                <a:latin typeface="Inter"/>
-              </a:defRPr>
-            </a:pPr>
-            <a:r>
-              <a:t>99.7%</a:t>
-            </a:r>
-          </a:p>
-          <a:p>
-            <a:pPr algn="ctr">
-              <a:defRPr sz="900">
-                <a:solidFill>
-                  <a:srgbClr val="94A3B8"/>
-                </a:solidFill>
-              </a:defRPr>
-            </a:pPr>
-            <a:r>
-              <a:t>Uptime</a:t>
-            </a:r>
-          </a:p>
-        </p:txBody>
-      </p:sp>
-      <p:sp>
-        <p:nvSpPr>
-          <p:cNvPr id="6" name="Rounded Rectangle 5"/>
-          <p:cNvSpPr/>
-          <p:nvPr/>
-        </p:nvSpPr>
-        <p:spPr>
-          <a:xfrm>
-            <a:off x="5120640" y="1463040"/>
-            <a:ext cx="1828800" cy="1097280"/>
-          </a:xfrm>
-          <a:prstGeom prst="roundRect">
-            <a:avLst/>
-          </a:prstGeom>
-          <a:solidFill>
-            <a:srgbClr val="1A1A2E"/>
-          </a:solidFill>
-          <a:ln w="25400">
-            <a:solidFill>
-              <a:srgbClr val="667EEA"/>
-            </a:solidFill>
-          </a:ln>
-        </p:spPr>
-        <p:style>
-          <a:lnRef idx="1">
-            <a:schemeClr val="accent1"/>
-          </a:lnRef>
-          <a:fillRef idx="3">
-            <a:schemeClr val="accent1"/>
-          </a:fillRef>
-          <a:effectRef idx="2">
-            <a:schemeClr val="accent1"/>
-          </a:effectRef>
-          <a:fontRef idx="minor">
-            <a:schemeClr val="lt1"/>
-          </a:fontRef>
-        </p:style>
-        <p:txBody>
-          <a:bodyPr rtlCol="0" anchor="ctr" wrap="square"/>
-          <a:lstStyle/>
-          <a:p>
-            <a:pPr algn="ctr">
-              <a:defRPr sz="2400" b="1">
-                <a:solidFill>
-                  <a:srgbClr val="667EEA"/>
-                </a:solidFill>
-                <a:latin typeface="Inter"/>
-              </a:defRPr>
-            </a:pPr>
-            <a:r>
-              <a:t>Month 2</a:t>
-            </a:r>
-          </a:p>
-          <a:p>
-            <a:pPr algn="ctr">
-              <a:defRPr sz="900">
-                <a:solidFill>
-                  <a:srgbClr val="94A3B8"/>
-                </a:solidFill>
-              </a:defRPr>
-            </a:pPr>
-            <a:r>
-              <a:t>Break-Even</a:t>
-            </a:r>
-          </a:p>
-        </p:txBody>
-      </p:sp>
-      <p:sp>
-        <p:nvSpPr>
-          <p:cNvPr id="7" name="Rounded Rectangle 6"/>
-          <p:cNvSpPr/>
-          <p:nvPr/>
-        </p:nvSpPr>
-        <p:spPr>
-          <a:xfrm>
-            <a:off x="7315200" y="1463040"/>
-            <a:ext cx="1828800" cy="1097280"/>
-          </a:xfrm>
-          <a:prstGeom prst="roundRect">
-            <a:avLst/>
-          </a:prstGeom>
-          <a:solidFill>
-            <a:srgbClr val="1A1A2E"/>
-          </a:solidFill>
-          <a:ln w="25400">
-            <a:solidFill>
-              <a:srgbClr val="10B981"/>
-            </a:solidFill>
-          </a:ln>
-        </p:spPr>
-        <p:style>
-          <a:lnRef idx="1">
-            <a:schemeClr val="accent1"/>
-          </a:lnRef>
-          <a:fillRef idx="3">
-            <a:schemeClr val="accent1"/>
-          </a:fillRef>
-          <a:effectRef idx="2">
-            <a:schemeClr val="accent1"/>
-          </a:effectRef>
-          <a:fontRef idx="minor">
-            <a:schemeClr val="lt1"/>
-          </a:fontRef>
-        </p:style>
-        <p:txBody>
-          <a:bodyPr rtlCol="0" anchor="ctr" wrap="square"/>
-          <a:lstStyle/>
-          <a:p>
-            <a:pPr algn="ctr">
-              <a:defRPr sz="2400" b="1">
-                <a:solidFill>
-                  <a:srgbClr val="10B981"/>
-                </a:solidFill>
-                <a:latin typeface="Inter"/>
-              </a:defRPr>
-            </a:pPr>
-            <a:r>
-              <a:t>&gt;5000%</a:t>
-            </a:r>
-          </a:p>
-          <a:p>
-            <a:pPr algn="ctr">
-              <a:defRPr sz="900">
-                <a:solidFill>
-                  <a:srgbClr val="94A3B8"/>
-                </a:solidFill>
-              </a:defRPr>
-            </a:pPr>
-            <a:r>
-              <a:t>5Y ROI</a:t>
-            </a:r>
-          </a:p>
-        </p:txBody>
-      </p:sp>
-      <p:sp>
-        <p:nvSpPr>
-          <p:cNvPr id="8" name="Rounded Rectangle 7"/>
-          <p:cNvSpPr/>
-          <p:nvPr/>
-        </p:nvSpPr>
-        <p:spPr>
-          <a:xfrm>
-            <a:off x="9509760" y="1463040"/>
-            <a:ext cx="1828800" cy="1097280"/>
-          </a:xfrm>
-          <a:prstGeom prst="roundRect">
-            <a:avLst/>
-          </a:prstGeom>
-          <a:solidFill>
-            <a:srgbClr val="1A1A2E"/>
-          </a:solidFill>
-          <a:ln w="25400">
-            <a:solidFill>
-              <a:srgbClr val="EAB308"/>
-            </a:solidFill>
-          </a:ln>
-        </p:spPr>
-        <p:style>
-          <a:lnRef idx="1">
-            <a:schemeClr val="accent1"/>
-          </a:lnRef>
-          <a:fillRef idx="3">
-            <a:schemeClr val="accent1"/>
-          </a:fillRef>
-          <a:effectRef idx="2">
-            <a:schemeClr val="accent1"/>
-          </a:effectRef>
-          <a:fontRef idx="minor">
-            <a:schemeClr val="lt1"/>
-          </a:fontRef>
-        </p:style>
-        <p:txBody>
-          <a:bodyPr rtlCol="0" anchor="ctr" wrap="square"/>
-          <a:lstStyle/>
-          <a:p>
-            <a:pPr algn="ctr">
-              <a:defRPr sz="2400" b="1">
-                <a:solidFill>
-                  <a:srgbClr val="EAB308"/>
-                </a:solidFill>
-                <a:latin typeface="Inter"/>
-              </a:defRPr>
-            </a:pPr>
-            <a:r>
-              <a:t>50+</a:t>
-            </a:r>
-          </a:p>
-          <a:p>
-            <a:pPr algn="ctr">
-              <a:defRPr sz="900">
-                <a:solidFill>
-                  <a:srgbClr val="94A3B8"/>
-                </a:solidFill>
-              </a:defRPr>
-            </a:pPr>
-            <a:r>
-              <a:t>Signals/Day</a:t>
-            </a:r>
-          </a:p>
-        </p:txBody>
-      </p:sp>
-      <p:sp>
-        <p:nvSpPr>
-          <p:cNvPr id="9" name="TextBox 8"/>
+            <a:pPr algn="r">
+              <a:defRPr sz="700">
+                <a:solidFill>
+                  <a:srgbClr val="4A4A6A"/>
+                </a:solidFill>
+              </a:defRPr>
+            </a:pPr>
+            <a:r>
+              <a:t>Layout: kpi_grid_top_bullets_bottom</a:t>
+            </a:r>
+          </a:p>
+        </p:txBody>
+      </p:sp>
+      <p:sp>
+        <p:nvSpPr>
+          <p:cNvPr id="4" name="TextBox 3"/>
           <p:cNvSpPr txBox="1"/>
           <p:nvPr/>
         </p:nvSpPr>
         <p:spPr>
           <a:xfrm>
-            <a:off x="731520" y="2926080"/>
-            <a:ext cx="10058400" cy="3200400"/>
+            <a:off x="731520" y="457200"/>
+            <a:ext cx="10058400" cy="914400"/>
           </a:xfrm>
           <a:prstGeom prst="rect">
             <a:avLst/>
@@ -3680,26 +3415,46 @@
           <a:lstStyle/>
           <a:p>
             <a:pPr>
-              <a:spcAft>
-                <a:spcPts val="800"/>
-              </a:spcAft>
-              <a:defRPr sz="1400">
-                <a:solidFill>
-                  <a:srgbClr val="C0C8E0"/>
-                </a:solidFill>
-                <a:latin typeface="Roboto"/>
-              </a:defRPr>
-            </a:pPr>
-            <a:r>
-              <a:t>    18-agent autonomous network (V7 Router)</a:t>
-            </a:r>
-          </a:p>
+              <a:defRPr sz="2800" b="1">
+                <a:solidFill>
+                  <a:srgbClr val="FFFFFF"/>
+                </a:solidFill>
+                <a:latin typeface="Inter"/>
+              </a:defRPr>
+            </a:pPr>
+            <a:r>
+              <a:t>Executive Summary</a:t>
+            </a:r>
+          </a:p>
+        </p:txBody>
+      </p:sp>
+      <p:sp>
+        <p:nvSpPr>
+          <p:cNvPr id="5" name="TextBox 4"/>
+          <p:cNvSpPr txBox="1"/>
+          <p:nvPr/>
+        </p:nvSpPr>
+        <p:spPr>
+          <a:xfrm>
+            <a:off x="731520" y="1645920"/>
+            <a:ext cx="10058400" cy="4389120"/>
+          </a:xfrm>
+          <a:prstGeom prst="rect">
+            <a:avLst/>
+          </a:prstGeom>
+          <a:noFill/>
+        </p:spPr>
+        <p:txBody>
+          <a:bodyPr wrap="square">
+            <a:spAutoFit/>
+          </a:bodyPr>
+          <a:lstStyle/>
           <a:p>
             <a:pPr>
               <a:spcAft>
-                <a:spcPts val="800"/>
+                <a:spcPts val="1200"/>
               </a:spcAft>
-              <a:defRPr sz="1400">
+              <a:defRPr sz="1500">
                 <a:solidFill>
                   <a:srgbClr val="C0C8E0"/>
                 </a:solidFill>
@@ -3707,15 +3462,15 @@
               </a:defRPr>
             </a:pPr>
             <a:r>
-              <a:t>    Self-healing with Leitner 5-level triage</a:t>
+              <a:t>    18-agent autonomous AI network (V7 Router)</a:t>
             </a:r>
           </a:p>
           <a:p>
             <a:pPr>
               <a:spcAft>
-                <a:spcPts val="800"/>
+                <a:spcPts val="1200"/>
               </a:spcAft>
-              <a:defRPr sz="1400">
+              <a:defRPr sz="1500">
                 <a:solidFill>
                   <a:srgbClr val="C0C8E0"/>
                 </a:solidFill>
@@ -3723,7 +3478,55 @@
               </a:defRPr>
             </a:pPr>
             <a:r>
-              <a:t>    5-year model: profitable from Month 2</a:t>
+              <a:t>    Processing 50+ actionable signals/day</a:t>
+            </a:r>
+          </a:p>
+          <a:p>
+            <a:pPr>
+              <a:spcAft>
+                <a:spcPts val="1200"/>
+              </a:spcAft>
+              <a:defRPr sz="1500">
+                <a:solidFill>
+                  <a:srgbClr val="C0C8E0"/>
+                </a:solidFill>
+                <a:latin typeface="Roboto"/>
+              </a:defRPr>
+            </a:pPr>
+            <a:r>
+              <a:t>    Self-healing infrastructure with 99.7% uptime target</a:t>
+            </a:r>
+          </a:p>
+          <a:p>
+            <a:pPr>
+              <a:spcAft>
+                <a:spcPts val="1200"/>
+              </a:spcAft>
+              <a:defRPr sz="1500">
+                <a:solidFill>
+                  <a:srgbClr val="C0C8E0"/>
+                </a:solidFill>
+                <a:latin typeface="Roboto"/>
+              </a:defRPr>
+            </a:pPr>
+            <a:r>
+              <a:t>    Break-even: Month 2</a:t>
+            </a:r>
+          </a:p>
+          <a:p>
+            <a:pPr>
+              <a:spcAft>
+                <a:spcPts val="1200"/>
+              </a:spcAft>
+              <a:defRPr sz="1500">
+                <a:solidFill>
+                  <a:srgbClr val="C0C8E0"/>
+                </a:solidFill>
+                <a:latin typeface="Roboto"/>
+              </a:defRPr>
+            </a:pPr>
+            <a:r>
+              <a:t>    Projected ROI: 340% Year 1</a:t>
             </a:r>
           </a:p>
         </p:txBody>
@@ -3805,8 +3608,8 @@
         </p:nvSpPr>
         <p:spPr>
           <a:xfrm>
-            <a:off x="731520" y="457200"/>
-            <a:ext cx="10058400" cy="914400"/>
+            <a:off x="8686800" y="6263640"/>
+            <a:ext cx="3200400" cy="228600"/>
           </a:xfrm>
           <a:prstGeom prst="rect">
             <a:avLst/>
@@ -3819,16 +3622,15 @@
           </a:bodyPr>
           <a:lstStyle/>
           <a:p>
-            <a:pPr>
-              <a:defRPr sz="2800" b="1">
-                <a:solidFill>
-                  <a:srgbClr val="FFFFFF"/>
-                </a:solidFill>
-                <a:latin typeface="Inter"/>
-              </a:defRPr>
-            </a:pPr>
-            <a:r>
-              <a:t>Agent Network Architecture (V7)</a:t>
+            <a:pPr algn="r">
+              <a:defRPr sz="700">
+                <a:solidFill>
+                  <a:srgbClr val="4A4A6A"/>
+                </a:solidFill>
+              </a:defRPr>
+            </a:pPr>
+            <a:r>
+              <a:t>Layout: split_diagram_left_text_right</a:t>
             </a:r>
           </a:p>
         </p:txBody>
@@ -3841,8 +3643,8 @@
         </p:nvSpPr>
         <p:spPr>
           <a:xfrm>
-            <a:off x="8229600" y="274320"/>
-            <a:ext cx="3200400" cy="182880"/>
+            <a:off x="731520" y="457200"/>
+            <a:ext cx="10058400" cy="914400"/>
           </a:xfrm>
           <a:prstGeom prst="rect">
             <a:avLst/>
@@ -3850,1309 +3652,35 @@
           <a:noFill/>
         </p:spPr>
         <p:txBody>
-          <a:bodyPr wrap="none">
+          <a:bodyPr wrap="square">
             <a:spAutoFit/>
           </a:bodyPr>
           <a:lstStyle/>
           <a:p>
             <a:pPr>
-              <a:defRPr sz="700">
-                <a:solidFill>
-                  <a:srgbClr val="4A4A6A"/>
-                </a:solidFill>
-              </a:defRPr>
-            </a:pPr>
-            <a:r>
-              <a:t>Design: library</a:t>
-            </a:r>
-          </a:p>
-        </p:txBody>
-      </p:sp>
-      <p:sp>
-        <p:nvSpPr>
-          <p:cNvPr id="5" name="Rounded Rectangle 4"/>
-          <p:cNvSpPr/>
-          <p:nvPr/>
-        </p:nvSpPr>
-        <p:spPr>
-          <a:xfrm>
-            <a:off x="274320" y="1645920"/>
-            <a:ext cx="1920240" cy="411480"/>
-          </a:xfrm>
-          <a:prstGeom prst="roundRect">
-            <a:avLst/>
-          </a:prstGeom>
-          <a:solidFill>
-            <a:srgbClr val="667EEA"/>
-          </a:solidFill>
-          <a:ln>
-            <a:noFill/>
-          </a:ln>
-        </p:spPr>
-        <p:style>
-          <a:lnRef idx="1">
-            <a:schemeClr val="accent1"/>
-          </a:lnRef>
-          <a:fillRef idx="3">
-            <a:schemeClr val="accent1"/>
-          </a:fillRef>
-          <a:effectRef idx="2">
-            <a:schemeClr val="accent1"/>
-          </a:effectRef>
-          <a:fontRef idx="minor">
-            <a:schemeClr val="lt1"/>
-          </a:fontRef>
-        </p:style>
-        <p:txBody>
-          <a:bodyPr rtlCol="0" anchor="ctr"/>
-          <a:lstStyle/>
-          <a:p>
-            <a:pPr algn="ctr">
-              <a:defRPr sz="1000" b="1">
+              <a:defRPr sz="2800" b="1">
                 <a:solidFill>
                   <a:srgbClr val="FFFFFF"/>
                 </a:solidFill>
-              </a:defRPr>
-            </a:pPr>
-            <a:r>
-              <a:t>System Core</a:t>
-            </a:r>
-          </a:p>
-        </p:txBody>
-      </p:sp>
-      <p:sp>
-        <p:nvSpPr>
-          <p:cNvPr id="6" name="Rounded Rectangle 5"/>
-          <p:cNvSpPr/>
-          <p:nvPr/>
-        </p:nvSpPr>
-        <p:spPr>
-          <a:xfrm>
-            <a:off x="320040" y="2148840"/>
-            <a:ext cx="1828800" cy="384048"/>
-          </a:xfrm>
-          <a:prstGeom prst="roundRect">
-            <a:avLst/>
-          </a:prstGeom>
-          <a:solidFill>
-            <a:srgbClr val="1A1A2E"/>
-          </a:solidFill>
-          <a:ln w="19050">
-            <a:solidFill>
-              <a:srgbClr val="667EEA"/>
-            </a:solidFill>
-          </a:ln>
-        </p:spPr>
-        <p:style>
-          <a:lnRef idx="1">
-            <a:schemeClr val="accent1"/>
-          </a:lnRef>
-          <a:fillRef idx="3">
-            <a:schemeClr val="accent1"/>
-          </a:fillRef>
-          <a:effectRef idx="2">
-            <a:schemeClr val="accent1"/>
-          </a:effectRef>
-          <a:fontRef idx="minor">
-            <a:schemeClr val="lt1"/>
-          </a:fontRef>
-        </p:style>
-        <p:txBody>
-          <a:bodyPr rtlCol="0" anchor="ctr"/>
-          <a:lstStyle/>
-          <a:p>
-            <a:pPr algn="ctr">
-              <a:defRPr sz="900" b="1">
-                <a:solidFill>
-                  <a:srgbClr val="E0E0E0"/>
-                </a:solidFill>
-              </a:defRPr>
-            </a:pPr>
-            <a:r>
-              <a:t>CEO</a:t>
-            </a:r>
-          </a:p>
-        </p:txBody>
-      </p:sp>
-      <p:sp>
-        <p:nvSpPr>
-          <p:cNvPr id="7" name="Rounded Rectangle 6"/>
-          <p:cNvSpPr/>
-          <p:nvPr/>
-        </p:nvSpPr>
-        <p:spPr>
-          <a:xfrm>
-            <a:off x="320040" y="2651760"/>
-            <a:ext cx="1828800" cy="384048"/>
-          </a:xfrm>
-          <a:prstGeom prst="roundRect">
-            <a:avLst/>
-          </a:prstGeom>
-          <a:solidFill>
-            <a:srgbClr val="1A1A2E"/>
-          </a:solidFill>
-          <a:ln w="19050">
-            <a:solidFill>
-              <a:srgbClr val="667EEA"/>
-            </a:solidFill>
-          </a:ln>
-        </p:spPr>
-        <p:style>
-          <a:lnRef idx="1">
-            <a:schemeClr val="accent1"/>
-          </a:lnRef>
-          <a:fillRef idx="3">
-            <a:schemeClr val="accent1"/>
-          </a:fillRef>
-          <a:effectRef idx="2">
-            <a:schemeClr val="accent1"/>
-          </a:effectRef>
-          <a:fontRef idx="minor">
-            <a:schemeClr val="lt1"/>
-          </a:fontRef>
-        </p:style>
-        <p:txBody>
-          <a:bodyPr rtlCol="0" anchor="ctr"/>
-          <a:lstStyle/>
-          <a:p>
-            <a:pPr algn="ctr">
-              <a:defRPr sz="900" b="1">
-                <a:solidFill>
-                  <a:srgbClr val="E0E0E0"/>
-                </a:solidFill>
-              </a:defRPr>
-            </a:pPr>
-            <a:r>
-              <a:t>CFO</a:t>
-            </a:r>
-          </a:p>
-        </p:txBody>
-      </p:sp>
-      <p:sp>
-        <p:nvSpPr>
-          <p:cNvPr id="8" name="Rounded Rectangle 7"/>
-          <p:cNvSpPr/>
-          <p:nvPr/>
-        </p:nvSpPr>
-        <p:spPr>
-          <a:xfrm>
-            <a:off x="320040" y="3154680"/>
-            <a:ext cx="1828800" cy="384048"/>
-          </a:xfrm>
-          <a:prstGeom prst="roundRect">
-            <a:avLst/>
-          </a:prstGeom>
-          <a:solidFill>
-            <a:srgbClr val="1A1A2E"/>
-          </a:solidFill>
-          <a:ln w="19050">
-            <a:solidFill>
-              <a:srgbClr val="667EEA"/>
-            </a:solidFill>
-          </a:ln>
-        </p:spPr>
-        <p:style>
-          <a:lnRef idx="1">
-            <a:schemeClr val="accent1"/>
-          </a:lnRef>
-          <a:fillRef idx="3">
-            <a:schemeClr val="accent1"/>
-          </a:fillRef>
-          <a:effectRef idx="2">
-            <a:schemeClr val="accent1"/>
-          </a:effectRef>
-          <a:fontRef idx="minor">
-            <a:schemeClr val="lt1"/>
-          </a:fontRef>
-        </p:style>
-        <p:txBody>
-          <a:bodyPr rtlCol="0" anchor="ctr"/>
-          <a:lstStyle/>
-          <a:p>
-            <a:pPr algn="ctr">
-              <a:defRPr sz="900" b="1">
-                <a:solidFill>
-                  <a:srgbClr val="E0E0E0"/>
-                </a:solidFill>
-              </a:defRPr>
-            </a:pPr>
-            <a:r>
-              <a:t>CTO</a:t>
-            </a:r>
-          </a:p>
-        </p:txBody>
-      </p:sp>
-      <p:sp>
-        <p:nvSpPr>
-          <p:cNvPr id="9" name="Rounded Rectangle 8"/>
-          <p:cNvSpPr/>
-          <p:nvPr/>
-        </p:nvSpPr>
-        <p:spPr>
-          <a:xfrm>
-            <a:off x="320040" y="3657600"/>
-            <a:ext cx="1828800" cy="384048"/>
-          </a:xfrm>
-          <a:prstGeom prst="roundRect">
-            <a:avLst/>
-          </a:prstGeom>
-          <a:solidFill>
-            <a:srgbClr val="1A1A2E"/>
-          </a:solidFill>
-          <a:ln w="19050">
-            <a:solidFill>
-              <a:srgbClr val="667EEA"/>
-            </a:solidFill>
-          </a:ln>
-        </p:spPr>
-        <p:style>
-          <a:lnRef idx="1">
-            <a:schemeClr val="accent1"/>
-          </a:lnRef>
-          <a:fillRef idx="3">
-            <a:schemeClr val="accent1"/>
-          </a:fillRef>
-          <a:effectRef idx="2">
-            <a:schemeClr val="accent1"/>
-          </a:effectRef>
-          <a:fontRef idx="minor">
-            <a:schemeClr val="lt1"/>
-          </a:fontRef>
-        </p:style>
-        <p:txBody>
-          <a:bodyPr rtlCol="0" anchor="ctr"/>
-          <a:lstStyle/>
-          <a:p>
-            <a:pPr algn="ctr">
-              <a:defRPr sz="900" b="1">
-                <a:solidFill>
-                  <a:srgbClr val="E0E0E0"/>
-                </a:solidFill>
-              </a:defRPr>
-            </a:pPr>
-            <a:r>
-              <a:t>Aether</a:t>
-            </a:r>
-          </a:p>
-        </p:txBody>
-      </p:sp>
-      <p:sp>
-        <p:nvSpPr>
-          <p:cNvPr id="10" name="Rounded Rectangle 9"/>
-          <p:cNvSpPr/>
-          <p:nvPr/>
-        </p:nvSpPr>
-        <p:spPr>
-          <a:xfrm>
-            <a:off x="320040" y="4160520"/>
-            <a:ext cx="1828800" cy="384048"/>
-          </a:xfrm>
-          <a:prstGeom prst="roundRect">
-            <a:avLst/>
-          </a:prstGeom>
-          <a:solidFill>
-            <a:srgbClr val="1A1A2E"/>
-          </a:solidFill>
-          <a:ln w="19050">
-            <a:solidFill>
-              <a:srgbClr val="667EEA"/>
-            </a:solidFill>
-          </a:ln>
-        </p:spPr>
-        <p:style>
-          <a:lnRef idx="1">
-            <a:schemeClr val="accent1"/>
-          </a:lnRef>
-          <a:fillRef idx="3">
-            <a:schemeClr val="accent1"/>
-          </a:fillRef>
-          <a:effectRef idx="2">
-            <a:schemeClr val="accent1"/>
-          </a:effectRef>
-          <a:fontRef idx="minor">
-            <a:schemeClr val="lt1"/>
-          </a:fontRef>
-        </p:style>
-        <p:txBody>
-          <a:bodyPr rtlCol="0" anchor="ctr"/>
-          <a:lstStyle/>
-          <a:p>
-            <a:pPr algn="ctr">
-              <a:defRPr sz="900" b="1">
-                <a:solidFill>
-                  <a:srgbClr val="E0E0E0"/>
-                </a:solidFill>
-              </a:defRPr>
-            </a:pPr>
-            <a:r>
-              <a:t>Delegate AI</a:t>
-            </a:r>
-          </a:p>
-        </p:txBody>
-      </p:sp>
-      <p:sp>
-        <p:nvSpPr>
-          <p:cNvPr id="11" name="Rounded Rectangle 10"/>
-          <p:cNvSpPr/>
-          <p:nvPr/>
-        </p:nvSpPr>
-        <p:spPr>
-          <a:xfrm>
-            <a:off x="320040" y="4663440"/>
-            <a:ext cx="1828800" cy="384048"/>
-          </a:xfrm>
-          <a:prstGeom prst="roundRect">
-            <a:avLst/>
-          </a:prstGeom>
-          <a:solidFill>
-            <a:srgbClr val="1A1A2E"/>
-          </a:solidFill>
-          <a:ln w="19050">
-            <a:solidFill>
-              <a:srgbClr val="667EEA"/>
-            </a:solidFill>
-          </a:ln>
-        </p:spPr>
-        <p:style>
-          <a:lnRef idx="1">
-            <a:schemeClr val="accent1"/>
-          </a:lnRef>
-          <a:fillRef idx="3">
-            <a:schemeClr val="accent1"/>
-          </a:fillRef>
-          <a:effectRef idx="2">
-            <a:schemeClr val="accent1"/>
-          </a:effectRef>
-          <a:fontRef idx="minor">
-            <a:schemeClr val="lt1"/>
-          </a:fontRef>
-        </p:style>
-        <p:txBody>
-          <a:bodyPr rtlCol="0" anchor="ctr"/>
-          <a:lstStyle/>
-          <a:p>
-            <a:pPr algn="ctr">
-              <a:defRPr sz="900" b="1">
-                <a:solidFill>
-                  <a:srgbClr val="E0E0E0"/>
-                </a:solidFill>
-              </a:defRPr>
-            </a:pPr>
-            <a:r>
-              <a:t>EQ Engine</a:t>
-            </a:r>
-          </a:p>
-        </p:txBody>
-      </p:sp>
-      <p:sp>
-        <p:nvSpPr>
-          <p:cNvPr id="12" name="Rounded Rectangle 11"/>
-          <p:cNvSpPr/>
-          <p:nvPr/>
-        </p:nvSpPr>
-        <p:spPr>
-          <a:xfrm>
-            <a:off x="2377440" y="1645920"/>
-            <a:ext cx="1920240" cy="411480"/>
-          </a:xfrm>
-          <a:prstGeom prst="roundRect">
-            <a:avLst/>
-          </a:prstGeom>
-          <a:solidFill>
-            <a:srgbClr val="10B981"/>
-          </a:solidFill>
-          <a:ln>
-            <a:noFill/>
-          </a:ln>
-        </p:spPr>
-        <p:style>
-          <a:lnRef idx="1">
-            <a:schemeClr val="accent1"/>
-          </a:lnRef>
-          <a:fillRef idx="3">
-            <a:schemeClr val="accent1"/>
-          </a:fillRef>
-          <a:effectRef idx="2">
-            <a:schemeClr val="accent1"/>
-          </a:effectRef>
-          <a:fontRef idx="minor">
-            <a:schemeClr val="lt1"/>
-          </a:fontRef>
-        </p:style>
-        <p:txBody>
-          <a:bodyPr rtlCol="0" anchor="ctr"/>
-          <a:lstStyle/>
-          <a:p>
-            <a:pPr algn="ctr">
-              <a:defRPr sz="1000" b="1">
-                <a:solidFill>
-                  <a:srgbClr val="FFFFFF"/>
-                </a:solidFill>
-              </a:defRPr>
-            </a:pPr>
-            <a:r>
-              <a:t>Intelligence</a:t>
-            </a:r>
-          </a:p>
-        </p:txBody>
-      </p:sp>
-      <p:sp>
-        <p:nvSpPr>
-          <p:cNvPr id="13" name="Rounded Rectangle 12"/>
-          <p:cNvSpPr/>
-          <p:nvPr/>
-        </p:nvSpPr>
-        <p:spPr>
-          <a:xfrm>
-            <a:off x="2423160" y="2148840"/>
-            <a:ext cx="1828800" cy="384048"/>
-          </a:xfrm>
-          <a:prstGeom prst="roundRect">
-            <a:avLst/>
-          </a:prstGeom>
-          <a:solidFill>
-            <a:srgbClr val="1A1A2E"/>
-          </a:solidFill>
-          <a:ln w="19050">
-            <a:solidFill>
-              <a:srgbClr val="10B981"/>
-            </a:solidFill>
-          </a:ln>
-        </p:spPr>
-        <p:style>
-          <a:lnRef idx="1">
-            <a:schemeClr val="accent1"/>
-          </a:lnRef>
-          <a:fillRef idx="3">
-            <a:schemeClr val="accent1"/>
-          </a:fillRef>
-          <a:effectRef idx="2">
-            <a:schemeClr val="accent1"/>
-          </a:effectRef>
-          <a:fontRef idx="minor">
-            <a:schemeClr val="lt1"/>
-          </a:fontRef>
-        </p:style>
-        <p:txBody>
-          <a:bodyPr rtlCol="0" anchor="ctr"/>
-          <a:lstStyle/>
-          <a:p>
-            <a:pPr algn="ctr">
-              <a:defRPr sz="900" b="1">
-                <a:solidFill>
-                  <a:srgbClr val="E0E0E0"/>
-                </a:solidFill>
-              </a:defRPr>
-            </a:pPr>
-            <a:r>
-              <a:t>GeoTalent</a:t>
-            </a:r>
-          </a:p>
-        </p:txBody>
-      </p:sp>
-      <p:sp>
-        <p:nvSpPr>
-          <p:cNvPr id="14" name="Rounded Rectangle 13"/>
-          <p:cNvSpPr/>
-          <p:nvPr/>
-        </p:nvSpPr>
-        <p:spPr>
-          <a:xfrm>
-            <a:off x="2423160" y="2651760"/>
-            <a:ext cx="1828800" cy="384048"/>
-          </a:xfrm>
-          <a:prstGeom prst="roundRect">
-            <a:avLst/>
-          </a:prstGeom>
-          <a:solidFill>
-            <a:srgbClr val="1A1A2E"/>
-          </a:solidFill>
-          <a:ln w="19050">
-            <a:solidFill>
-              <a:srgbClr val="10B981"/>
-            </a:solidFill>
-          </a:ln>
-        </p:spPr>
-        <p:style>
-          <a:lnRef idx="1">
-            <a:schemeClr val="accent1"/>
-          </a:lnRef>
-          <a:fillRef idx="3">
-            <a:schemeClr val="accent1"/>
-          </a:fillRef>
-          <a:effectRef idx="2">
-            <a:schemeClr val="accent1"/>
-          </a:effectRef>
-          <a:fontRef idx="minor">
-            <a:schemeClr val="lt1"/>
-          </a:fontRef>
-        </p:style>
-        <p:txBody>
-          <a:bodyPr rtlCol="0" anchor="ctr"/>
-          <a:lstStyle/>
-          <a:p>
-            <a:pPr algn="ctr">
-              <a:defRPr sz="900" b="1">
-                <a:solidFill>
-                  <a:srgbClr val="E0E0E0"/>
-                </a:solidFill>
-              </a:defRPr>
-            </a:pPr>
-            <a:r>
-              <a:t>News Bureau</a:t>
-            </a:r>
-          </a:p>
-        </p:txBody>
-      </p:sp>
-      <p:sp>
-        <p:nvSpPr>
-          <p:cNvPr id="15" name="Rounded Rectangle 14"/>
-          <p:cNvSpPr/>
-          <p:nvPr/>
-        </p:nvSpPr>
-        <p:spPr>
-          <a:xfrm>
-            <a:off x="2423160" y="3154680"/>
-            <a:ext cx="1828800" cy="384048"/>
-          </a:xfrm>
-          <a:prstGeom prst="roundRect">
-            <a:avLst/>
-          </a:prstGeom>
-          <a:solidFill>
-            <a:srgbClr val="1A1A2E"/>
-          </a:solidFill>
-          <a:ln w="19050">
-            <a:solidFill>
-              <a:srgbClr val="10B981"/>
-            </a:solidFill>
-          </a:ln>
-        </p:spPr>
-        <p:style>
-          <a:lnRef idx="1">
-            <a:schemeClr val="accent1"/>
-          </a:lnRef>
-          <a:fillRef idx="3">
-            <a:schemeClr val="accent1"/>
-          </a:fillRef>
-          <a:effectRef idx="2">
-            <a:schemeClr val="accent1"/>
-          </a:effectRef>
-          <a:fontRef idx="minor">
-            <a:schemeClr val="lt1"/>
-          </a:fontRef>
-        </p:style>
-        <p:txBody>
-          <a:bodyPr rtlCol="0" anchor="ctr"/>
-          <a:lstStyle/>
-          <a:p>
-            <a:pPr algn="ctr">
-              <a:defRPr sz="900" b="1">
-                <a:solidFill>
-                  <a:srgbClr val="E0E0E0"/>
-                </a:solidFill>
-              </a:defRPr>
-            </a:pPr>
-            <a:r>
-              <a:t>Deep Crawler</a:t>
-            </a:r>
-          </a:p>
-        </p:txBody>
-      </p:sp>
-      <p:sp>
-        <p:nvSpPr>
-          <p:cNvPr id="16" name="Rounded Rectangle 15"/>
-          <p:cNvSpPr/>
-          <p:nvPr/>
-        </p:nvSpPr>
-        <p:spPr>
-          <a:xfrm>
-            <a:off x="2423160" y="3657600"/>
-            <a:ext cx="1828800" cy="384048"/>
-          </a:xfrm>
-          <a:prstGeom prst="roundRect">
-            <a:avLst/>
-          </a:prstGeom>
-          <a:solidFill>
-            <a:srgbClr val="1A1A2E"/>
-          </a:solidFill>
-          <a:ln w="19050">
-            <a:solidFill>
-              <a:srgbClr val="10B981"/>
-            </a:solidFill>
-          </a:ln>
-        </p:spPr>
-        <p:style>
-          <a:lnRef idx="1">
-            <a:schemeClr val="accent1"/>
-          </a:lnRef>
-          <a:fillRef idx="3">
-            <a:schemeClr val="accent1"/>
-          </a:fillRef>
-          <a:effectRef idx="2">
-            <a:schemeClr val="accent1"/>
-          </a:effectRef>
-          <a:fontRef idx="minor">
-            <a:schemeClr val="lt1"/>
-          </a:fontRef>
-        </p:style>
-        <p:txBody>
-          <a:bodyPr rtlCol="0" anchor="ctr"/>
-          <a:lstStyle/>
-          <a:p>
-            <a:pPr algn="ctr">
-              <a:defRPr sz="900" b="1">
-                <a:solidFill>
-                  <a:srgbClr val="E0E0E0"/>
-                </a:solidFill>
-              </a:defRPr>
-            </a:pPr>
-            <a:r>
-              <a:t>Researcher</a:t>
-            </a:r>
-          </a:p>
-        </p:txBody>
-      </p:sp>
-      <p:sp>
-        <p:nvSpPr>
-          <p:cNvPr id="17" name="Rounded Rectangle 16"/>
-          <p:cNvSpPr/>
-          <p:nvPr/>
-        </p:nvSpPr>
-        <p:spPr>
-          <a:xfrm>
-            <a:off x="4480560" y="1645920"/>
-            <a:ext cx="1920240" cy="411480"/>
-          </a:xfrm>
-          <a:prstGeom prst="roundRect">
-            <a:avLst/>
-          </a:prstGeom>
-          <a:solidFill>
-            <a:srgbClr val="F97316"/>
-          </a:solidFill>
-          <a:ln>
-            <a:noFill/>
-          </a:ln>
-        </p:spPr>
-        <p:style>
-          <a:lnRef idx="1">
-            <a:schemeClr val="accent1"/>
-          </a:lnRef>
-          <a:fillRef idx="3">
-            <a:schemeClr val="accent1"/>
-          </a:fillRef>
-          <a:effectRef idx="2">
-            <a:schemeClr val="accent1"/>
-          </a:effectRef>
-          <a:fontRef idx="minor">
-            <a:schemeClr val="lt1"/>
-          </a:fontRef>
-        </p:style>
-        <p:txBody>
-          <a:bodyPr rtlCol="0" anchor="ctr"/>
-          <a:lstStyle/>
-          <a:p>
-            <a:pPr algn="ctr">
-              <a:defRPr sz="1000" b="1">
-                <a:solidFill>
-                  <a:srgbClr val="FFFFFF"/>
-                </a:solidFill>
-              </a:defRPr>
-            </a:pPr>
-            <a:r>
-              <a:t>Quality Gate</a:t>
-            </a:r>
-          </a:p>
-        </p:txBody>
-      </p:sp>
-      <p:sp>
-        <p:nvSpPr>
-          <p:cNvPr id="18" name="Rounded Rectangle 17"/>
-          <p:cNvSpPr/>
-          <p:nvPr/>
-        </p:nvSpPr>
-        <p:spPr>
-          <a:xfrm>
-            <a:off x="4526280" y="2148840"/>
-            <a:ext cx="1828800" cy="384048"/>
-          </a:xfrm>
-          <a:prstGeom prst="roundRect">
-            <a:avLst/>
-          </a:prstGeom>
-          <a:solidFill>
-            <a:srgbClr val="1A1A2E"/>
-          </a:solidFill>
-          <a:ln w="19050">
-            <a:solidFill>
-              <a:srgbClr val="F97316"/>
-            </a:solidFill>
-          </a:ln>
-        </p:spPr>
-        <p:style>
-          <a:lnRef idx="1">
-            <a:schemeClr val="accent1"/>
-          </a:lnRef>
-          <a:fillRef idx="3">
-            <a:schemeClr val="accent1"/>
-          </a:fillRef>
-          <a:effectRef idx="2">
-            <a:schemeClr val="accent1"/>
-          </a:effectRef>
-          <a:fontRef idx="minor">
-            <a:schemeClr val="lt1"/>
-          </a:fontRef>
-        </p:style>
-        <p:txBody>
-          <a:bodyPr rtlCol="0" anchor="ctr"/>
-          <a:lstStyle/>
-          <a:p>
-            <a:pPr algn="ctr">
-              <a:defRPr sz="900" b="1">
-                <a:solidFill>
-                  <a:srgbClr val="E0E0E0"/>
-                </a:solidFill>
-              </a:defRPr>
-            </a:pPr>
-            <a:r>
-              <a:t>Critic</a:t>
-            </a:r>
-          </a:p>
-        </p:txBody>
-      </p:sp>
-      <p:sp>
-        <p:nvSpPr>
-          <p:cNvPr id="19" name="Rounded Rectangle 18"/>
-          <p:cNvSpPr/>
-          <p:nvPr/>
-        </p:nvSpPr>
-        <p:spPr>
-          <a:xfrm>
-            <a:off x="4526280" y="2651760"/>
-            <a:ext cx="1828800" cy="384048"/>
-          </a:xfrm>
-          <a:prstGeom prst="roundRect">
-            <a:avLst/>
-          </a:prstGeom>
-          <a:solidFill>
-            <a:srgbClr val="1A1A2E"/>
-          </a:solidFill>
-          <a:ln w="19050">
-            <a:solidFill>
-              <a:srgbClr val="F97316"/>
-            </a:solidFill>
-          </a:ln>
-        </p:spPr>
-        <p:style>
-          <a:lnRef idx="1">
-            <a:schemeClr val="accent1"/>
-          </a:lnRef>
-          <a:fillRef idx="3">
-            <a:schemeClr val="accent1"/>
-          </a:fillRef>
-          <a:effectRef idx="2">
-            <a:schemeClr val="accent1"/>
-          </a:effectRef>
-          <a:fontRef idx="minor">
-            <a:schemeClr val="lt1"/>
-          </a:fontRef>
-        </p:style>
-        <p:txBody>
-          <a:bodyPr rtlCol="0" anchor="ctr"/>
-          <a:lstStyle/>
-          <a:p>
-            <a:pPr algn="ctr">
-              <a:defRPr sz="900" b="1">
-                <a:solidFill>
-                  <a:srgbClr val="E0E0E0"/>
-                </a:solidFill>
-              </a:defRPr>
-            </a:pPr>
-            <a:r>
-              <a:t>Compliance</a:t>
-            </a:r>
-          </a:p>
-        </p:txBody>
-      </p:sp>
-      <p:sp>
-        <p:nvSpPr>
-          <p:cNvPr id="20" name="Rounded Rectangle 19"/>
-          <p:cNvSpPr/>
-          <p:nvPr/>
-        </p:nvSpPr>
-        <p:spPr>
-          <a:xfrm>
-            <a:off x="4526280" y="3154680"/>
-            <a:ext cx="1828800" cy="384048"/>
-          </a:xfrm>
-          <a:prstGeom prst="roundRect">
-            <a:avLst/>
-          </a:prstGeom>
-          <a:solidFill>
-            <a:srgbClr val="1A1A2E"/>
-          </a:solidFill>
-          <a:ln w="19050">
-            <a:solidFill>
-              <a:srgbClr val="F97316"/>
-            </a:solidFill>
-          </a:ln>
-        </p:spPr>
-        <p:style>
-          <a:lnRef idx="1">
-            <a:schemeClr val="accent1"/>
-          </a:lnRef>
-          <a:fillRef idx="3">
-            <a:schemeClr val="accent1"/>
-          </a:fillRef>
-          <a:effectRef idx="2">
-            <a:schemeClr val="accent1"/>
-          </a:effectRef>
-          <a:fontRef idx="minor">
-            <a:schemeClr val="lt1"/>
-          </a:fontRef>
-        </p:style>
-        <p:txBody>
-          <a:bodyPr rtlCol="0" anchor="ctr"/>
-          <a:lstStyle/>
-          <a:p>
-            <a:pPr algn="ctr">
-              <a:defRPr sz="900" b="1">
-                <a:solidFill>
-                  <a:srgbClr val="E0E0E0"/>
-                </a:solidFill>
-              </a:defRPr>
-            </a:pPr>
-            <a:r>
-              <a:t>Librarian</a:t>
-            </a:r>
-          </a:p>
-        </p:txBody>
-      </p:sp>
-      <p:sp>
-        <p:nvSpPr>
-          <p:cNvPr id="21" name="Rounded Rectangle 20"/>
-          <p:cNvSpPr/>
-          <p:nvPr/>
-        </p:nvSpPr>
-        <p:spPr>
-          <a:xfrm>
-            <a:off x="6583680" y="1645920"/>
-            <a:ext cx="1920240" cy="411480"/>
-          </a:xfrm>
-          <a:prstGeom prst="roundRect">
-            <a:avLst/>
-          </a:prstGeom>
-          <a:solidFill>
-            <a:srgbClr val="764BA2"/>
-          </a:solidFill>
-          <a:ln>
-            <a:noFill/>
-          </a:ln>
-        </p:spPr>
-        <p:style>
-          <a:lnRef idx="1">
-            <a:schemeClr val="accent1"/>
-          </a:lnRef>
-          <a:fillRef idx="3">
-            <a:schemeClr val="accent1"/>
-          </a:fillRef>
-          <a:effectRef idx="2">
-            <a:schemeClr val="accent1"/>
-          </a:effectRef>
-          <a:fontRef idx="minor">
-            <a:schemeClr val="lt1"/>
-          </a:fontRef>
-        </p:style>
-        <p:txBody>
-          <a:bodyPr rtlCol="0" anchor="ctr"/>
-          <a:lstStyle/>
-          <a:p>
-            <a:pPr algn="ctr">
-              <a:defRPr sz="1000" b="1">
-                <a:solidFill>
-                  <a:srgbClr val="FFFFFF"/>
-                </a:solidFill>
-              </a:defRPr>
-            </a:pPr>
-            <a:r>
-              <a:t>Executive</a:t>
-            </a:r>
-          </a:p>
-        </p:txBody>
-      </p:sp>
-      <p:sp>
-        <p:nvSpPr>
-          <p:cNvPr id="22" name="Rounded Rectangle 21"/>
-          <p:cNvSpPr/>
-          <p:nvPr/>
-        </p:nvSpPr>
-        <p:spPr>
-          <a:xfrm>
-            <a:off x="6629400" y="2148840"/>
-            <a:ext cx="1828800" cy="384048"/>
-          </a:xfrm>
-          <a:prstGeom prst="roundRect">
-            <a:avLst/>
-          </a:prstGeom>
-          <a:solidFill>
-            <a:srgbClr val="1A1A2E"/>
-          </a:solidFill>
-          <a:ln w="19050">
-            <a:solidFill>
-              <a:srgbClr val="764BA2"/>
-            </a:solidFill>
-          </a:ln>
-        </p:spPr>
-        <p:style>
-          <a:lnRef idx="1">
-            <a:schemeClr val="accent1"/>
-          </a:lnRef>
-          <a:fillRef idx="3">
-            <a:schemeClr val="accent1"/>
-          </a:fillRef>
-          <a:effectRef idx="2">
-            <a:schemeClr val="accent1"/>
-          </a:effectRef>
-          <a:fontRef idx="minor">
-            <a:schemeClr val="lt1"/>
-          </a:fontRef>
-        </p:style>
-        <p:txBody>
-          <a:bodyPr rtlCol="0" anchor="ctr"/>
-          <a:lstStyle/>
-          <a:p>
-            <a:pPr algn="ctr">
-              <a:defRPr sz="900" b="1">
-                <a:solidFill>
-                  <a:srgbClr val="E0E0E0"/>
-                </a:solidFill>
-              </a:defRPr>
-            </a:pPr>
-            <a:r>
-              <a:t>Presentations</a:t>
-            </a:r>
-          </a:p>
-        </p:txBody>
-      </p:sp>
-      <p:sp>
-        <p:nvSpPr>
-          <p:cNvPr id="23" name="Rounded Rectangle 22"/>
-          <p:cNvSpPr/>
-          <p:nvPr/>
-        </p:nvSpPr>
-        <p:spPr>
-          <a:xfrm>
-            <a:off x="6629400" y="2651760"/>
-            <a:ext cx="1828800" cy="384048"/>
-          </a:xfrm>
-          <a:prstGeom prst="roundRect">
-            <a:avLst/>
-          </a:prstGeom>
-          <a:solidFill>
-            <a:srgbClr val="1A1A2E"/>
-          </a:solidFill>
-          <a:ln w="19050">
-            <a:solidFill>
-              <a:srgbClr val="764BA2"/>
-            </a:solidFill>
-          </a:ln>
-        </p:spPr>
-        <p:style>
-          <a:lnRef idx="1">
-            <a:schemeClr val="accent1"/>
-          </a:lnRef>
-          <a:fillRef idx="3">
-            <a:schemeClr val="accent1"/>
-          </a:fillRef>
-          <a:effectRef idx="2">
-            <a:schemeClr val="accent1"/>
-          </a:effectRef>
-          <a:fontRef idx="minor">
-            <a:schemeClr val="lt1"/>
-          </a:fontRef>
-        </p:style>
-        <p:txBody>
-          <a:bodyPr rtlCol="0" anchor="ctr"/>
-          <a:lstStyle/>
-          <a:p>
-            <a:pPr algn="ctr">
-              <a:defRPr sz="900" b="1">
-                <a:solidFill>
-                  <a:srgbClr val="E0E0E0"/>
-                </a:solidFill>
-              </a:defRPr>
-            </a:pPr>
-            <a:r>
-              <a:t>CX Strategist</a:t>
-            </a:r>
-          </a:p>
-        </p:txBody>
-      </p:sp>
-      <p:sp>
-        <p:nvSpPr>
-          <p:cNvPr id="24" name="Rounded Rectangle 23"/>
-          <p:cNvSpPr/>
-          <p:nvPr/>
-        </p:nvSpPr>
-        <p:spPr>
-          <a:xfrm>
-            <a:off x="6629400" y="3154680"/>
-            <a:ext cx="1828800" cy="384048"/>
-          </a:xfrm>
-          <a:prstGeom prst="roundRect">
-            <a:avLst/>
-          </a:prstGeom>
-          <a:solidFill>
-            <a:srgbClr val="1A1A2E"/>
-          </a:solidFill>
-          <a:ln w="19050">
-            <a:solidFill>
-              <a:srgbClr val="764BA2"/>
-            </a:solidFill>
-          </a:ln>
-        </p:spPr>
-        <p:style>
-          <a:lnRef idx="1">
-            <a:schemeClr val="accent1"/>
-          </a:lnRef>
-          <a:fillRef idx="3">
-            <a:schemeClr val="accent1"/>
-          </a:fillRef>
-          <a:effectRef idx="2">
-            <a:schemeClr val="accent1"/>
-          </a:effectRef>
-          <a:fontRef idx="minor">
-            <a:schemeClr val="lt1"/>
-          </a:fontRef>
-        </p:style>
-        <p:txBody>
-          <a:bodyPr rtlCol="0" anchor="ctr"/>
-          <a:lstStyle/>
-          <a:p>
-            <a:pPr algn="ctr">
-              <a:defRPr sz="900" b="1">
-                <a:solidFill>
-                  <a:srgbClr val="E0E0E0"/>
-                </a:solidFill>
-              </a:defRPr>
-            </a:pPr>
-            <a:r>
-              <a:t>CMO</a:t>
-            </a:r>
-          </a:p>
-        </p:txBody>
-      </p:sp>
-      <p:sp>
-        <p:nvSpPr>
-          <p:cNvPr id="25" name="Rounded Rectangle 24"/>
-          <p:cNvSpPr/>
-          <p:nvPr/>
-        </p:nvSpPr>
-        <p:spPr>
-          <a:xfrm>
-            <a:off x="8686800" y="1645920"/>
-            <a:ext cx="1920240" cy="411480"/>
-          </a:xfrm>
-          <a:prstGeom prst="roundRect">
-            <a:avLst/>
-          </a:prstGeom>
-          <a:solidFill>
-            <a:srgbClr val="EAB308"/>
-          </a:solidFill>
-          <a:ln>
-            <a:noFill/>
-          </a:ln>
-        </p:spPr>
-        <p:style>
-          <a:lnRef idx="1">
-            <a:schemeClr val="accent1"/>
-          </a:lnRef>
-          <a:fillRef idx="3">
-            <a:schemeClr val="accent1"/>
-          </a:fillRef>
-          <a:effectRef idx="2">
-            <a:schemeClr val="accent1"/>
-          </a:effectRef>
-          <a:fontRef idx="minor">
-            <a:schemeClr val="lt1"/>
-          </a:fontRef>
-        </p:style>
-        <p:txBody>
-          <a:bodyPr rtlCol="0" anchor="ctr"/>
-          <a:lstStyle/>
-          <a:p>
-            <a:pPr algn="ctr">
-              <a:defRPr sz="1000" b="1">
-                <a:solidFill>
-                  <a:srgbClr val="FFFFFF"/>
-                </a:solidFill>
-              </a:defRPr>
-            </a:pPr>
-            <a:r>
-              <a:t>Creative</a:t>
-            </a:r>
-          </a:p>
-        </p:txBody>
-      </p:sp>
-      <p:sp>
-        <p:nvSpPr>
-          <p:cNvPr id="26" name="Rounded Rectangle 25"/>
-          <p:cNvSpPr/>
-          <p:nvPr/>
-        </p:nvSpPr>
-        <p:spPr>
-          <a:xfrm>
-            <a:off x="8732520" y="2148840"/>
-            <a:ext cx="1828800" cy="384048"/>
-          </a:xfrm>
-          <a:prstGeom prst="roundRect">
-            <a:avLst/>
-          </a:prstGeom>
-          <a:solidFill>
-            <a:srgbClr val="1A1A2E"/>
-          </a:solidFill>
-          <a:ln w="19050">
-            <a:solidFill>
-              <a:srgbClr val="EAB308"/>
-            </a:solidFill>
-          </a:ln>
-        </p:spPr>
-        <p:style>
-          <a:lnRef idx="1">
-            <a:schemeClr val="accent1"/>
-          </a:lnRef>
-          <a:fillRef idx="3">
-            <a:schemeClr val="accent1"/>
-          </a:fillRef>
-          <a:effectRef idx="2">
-            <a:schemeClr val="accent1"/>
-          </a:effectRef>
-          <a:fontRef idx="minor">
-            <a:schemeClr val="lt1"/>
-          </a:fontRef>
-        </p:style>
-        <p:txBody>
-          <a:bodyPr rtlCol="0" anchor="ctr"/>
-          <a:lstStyle/>
-          <a:p>
-            <a:pPr algn="ctr">
-              <a:defRPr sz="900" b="1">
-                <a:solidFill>
-                  <a:srgbClr val="E0E0E0"/>
-                </a:solidFill>
-              </a:defRPr>
-            </a:pPr>
-            <a:r>
-              <a:t>Designer</a:t>
-            </a:r>
-          </a:p>
-        </p:txBody>
-      </p:sp>
-      <p:sp>
-        <p:nvSpPr>
-          <p:cNvPr id="27" name="Rounded Rectangle 26"/>
-          <p:cNvSpPr/>
-          <p:nvPr/>
-        </p:nvSpPr>
-        <p:spPr>
-          <a:xfrm>
-            <a:off x="8732520" y="2651760"/>
-            <a:ext cx="1828800" cy="384048"/>
-          </a:xfrm>
-          <a:prstGeom prst="roundRect">
-            <a:avLst/>
-          </a:prstGeom>
-          <a:solidFill>
-            <a:srgbClr val="1A1A2E"/>
-          </a:solidFill>
-          <a:ln w="19050">
-            <a:solidFill>
-              <a:srgbClr val="EAB308"/>
-            </a:solidFill>
-          </a:ln>
-        </p:spPr>
-        <p:style>
-          <a:lnRef idx="1">
-            <a:schemeClr val="accent1"/>
-          </a:lnRef>
-          <a:fillRef idx="3">
-            <a:schemeClr val="accent1"/>
-          </a:fillRef>
-          <a:effectRef idx="2">
-            <a:schemeClr val="accent1"/>
-          </a:effectRef>
-          <a:fontRef idx="minor">
-            <a:schemeClr val="lt1"/>
-          </a:fontRef>
-        </p:style>
-        <p:txBody>
-          <a:bodyPr rtlCol="0" anchor="ctr"/>
-          <a:lstStyle/>
-          <a:p>
-            <a:pPr algn="ctr">
-              <a:defRPr sz="900" b="1">
-                <a:solidFill>
-                  <a:srgbClr val="E0E0E0"/>
-                </a:solidFill>
-              </a:defRPr>
-            </a:pPr>
-            <a:r>
-              <a:t>Data Architect</a:t>
-            </a:r>
-          </a:p>
-        </p:txBody>
-      </p:sp>
-      <p:sp>
-        <p:nvSpPr>
-          <p:cNvPr id="28" name="Oval 27"/>
-          <p:cNvSpPr/>
-          <p:nvPr/>
-        </p:nvSpPr>
-        <p:spPr>
-          <a:xfrm>
-            <a:off x="457200" y="5760720"/>
-            <a:ext cx="137160" cy="137160"/>
-          </a:xfrm>
-          <a:prstGeom prst="ellipse">
-            <a:avLst/>
-          </a:prstGeom>
-          <a:solidFill>
-            <a:srgbClr val="667EEA"/>
-          </a:solidFill>
-          <a:ln>
-            <a:noFill/>
-          </a:ln>
-        </p:spPr>
-        <p:style>
-          <a:lnRef idx="1">
-            <a:schemeClr val="accent1"/>
-          </a:lnRef>
-          <a:fillRef idx="3">
-            <a:schemeClr val="accent1"/>
-          </a:fillRef>
-          <a:effectRef idx="2">
-            <a:schemeClr val="accent1"/>
-          </a:effectRef>
-          <a:fontRef idx="minor">
-            <a:schemeClr val="lt1"/>
-          </a:fontRef>
-        </p:style>
-        <p:txBody>
-          <a:bodyPr rtlCol="0" anchor="ctr"/>
-          <a:lstStyle/>
-          <a:p>
-            <a:pPr algn="ctr"/>
-          </a:p>
-        </p:txBody>
-      </p:sp>
-      <p:sp>
-        <p:nvSpPr>
-          <p:cNvPr id="29" name="TextBox 28"/>
+                <a:latin typeface="Inter"/>
+              </a:defRPr>
+            </a:pPr>
+            <a:r>
+              <a:t>Scalable Agent Architecture</a:t>
+            </a:r>
+          </a:p>
+        </p:txBody>
+      </p:sp>
+      <p:sp>
+        <p:nvSpPr>
+          <p:cNvPr id="5" name="TextBox 4"/>
           <p:cNvSpPr txBox="1"/>
           <p:nvPr/>
         </p:nvSpPr>
         <p:spPr>
           <a:xfrm>
-            <a:off x="640080" y="5742432"/>
-            <a:ext cx="1828800" cy="182880"/>
+            <a:off x="731520" y="1645920"/>
+            <a:ext cx="10058400" cy="4389120"/>
           </a:xfrm>
           <a:prstGeom prst="rect">
             <a:avLst/>
@@ -5160,332 +3688,88 @@
           <a:noFill/>
         </p:spPr>
         <p:txBody>
-          <a:bodyPr wrap="none">
+          <a:bodyPr wrap="square">
             <a:spAutoFit/>
           </a:bodyPr>
           <a:lstStyle/>
           <a:p>
             <a:pPr>
-              <a:defRPr sz="800">
-                <a:solidFill>
-                  <a:srgbClr val="94A3B8"/>
-                </a:solidFill>
-              </a:defRPr>
-            </a:pPr>
-            <a:r>
-              <a:t>System Core (6)</a:t>
-            </a:r>
-          </a:p>
-        </p:txBody>
-      </p:sp>
-      <p:sp>
-        <p:nvSpPr>
-          <p:cNvPr id="30" name="Oval 29"/>
-          <p:cNvSpPr/>
-          <p:nvPr/>
-        </p:nvSpPr>
-        <p:spPr>
-          <a:xfrm>
-            <a:off x="2651760" y="5760720"/>
-            <a:ext cx="137160" cy="137160"/>
-          </a:xfrm>
-          <a:prstGeom prst="ellipse">
-            <a:avLst/>
-          </a:prstGeom>
-          <a:solidFill>
-            <a:srgbClr val="10B981"/>
-          </a:solidFill>
-          <a:ln>
-            <a:noFill/>
-          </a:ln>
-        </p:spPr>
-        <p:style>
-          <a:lnRef idx="1">
-            <a:schemeClr val="accent1"/>
-          </a:lnRef>
-          <a:fillRef idx="3">
-            <a:schemeClr val="accent1"/>
-          </a:fillRef>
-          <a:effectRef idx="2">
-            <a:schemeClr val="accent1"/>
-          </a:effectRef>
-          <a:fontRef idx="minor">
-            <a:schemeClr val="lt1"/>
-          </a:fontRef>
-        </p:style>
-        <p:txBody>
-          <a:bodyPr rtlCol="0" anchor="ctr"/>
-          <a:lstStyle/>
-          <a:p>
-            <a:pPr algn="ctr"/>
-          </a:p>
-        </p:txBody>
-      </p:sp>
-      <p:sp>
-        <p:nvSpPr>
-          <p:cNvPr id="31" name="TextBox 30"/>
-          <p:cNvSpPr txBox="1"/>
-          <p:nvPr/>
-        </p:nvSpPr>
-        <p:spPr>
-          <a:xfrm>
-            <a:off x="2834640" y="5742432"/>
-            <a:ext cx="1828800" cy="182880"/>
-          </a:xfrm>
-          <a:prstGeom prst="rect">
-            <a:avLst/>
-          </a:prstGeom>
-          <a:noFill/>
-        </p:spPr>
-        <p:txBody>
-          <a:bodyPr wrap="none">
-            <a:spAutoFit/>
-          </a:bodyPr>
-          <a:lstStyle/>
+              <a:spcAft>
+                <a:spcPts val="1200"/>
+              </a:spcAft>
+              <a:defRPr sz="1500">
+                <a:solidFill>
+                  <a:srgbClr val="C0C8E0"/>
+                </a:solidFill>
+                <a:latin typeface="Roboto"/>
+              </a:defRPr>
+            </a:pPr>
+            <a:r>
+              <a:t>    V7 Agent Skills Router -&gt; 18 specialist agents</a:t>
+            </a:r>
+          </a:p>
           <a:p>
             <a:pPr>
-              <a:defRPr sz="800">
-                <a:solidFill>
-                  <a:srgbClr val="94A3B8"/>
-                </a:solidFill>
-              </a:defRPr>
-            </a:pPr>
-            <a:r>
-              <a:t>Intelligence (4)</a:t>
-            </a:r>
-          </a:p>
-        </p:txBody>
-      </p:sp>
-      <p:sp>
-        <p:nvSpPr>
-          <p:cNvPr id="32" name="Oval 31"/>
-          <p:cNvSpPr/>
-          <p:nvPr/>
-        </p:nvSpPr>
-        <p:spPr>
-          <a:xfrm>
-            <a:off x="4846320" y="5760720"/>
-            <a:ext cx="137160" cy="137160"/>
-          </a:xfrm>
-          <a:prstGeom prst="ellipse">
-            <a:avLst/>
-          </a:prstGeom>
-          <a:solidFill>
-            <a:srgbClr val="F97316"/>
-          </a:solidFill>
-          <a:ln>
-            <a:noFill/>
-          </a:ln>
-        </p:spPr>
-        <p:style>
-          <a:lnRef idx="1">
-            <a:schemeClr val="accent1"/>
-          </a:lnRef>
-          <a:fillRef idx="3">
-            <a:schemeClr val="accent1"/>
-          </a:fillRef>
-          <a:effectRef idx="2">
-            <a:schemeClr val="accent1"/>
-          </a:effectRef>
-          <a:fontRef idx="minor">
-            <a:schemeClr val="lt1"/>
-          </a:fontRef>
-        </p:style>
-        <p:txBody>
-          <a:bodyPr rtlCol="0" anchor="ctr"/>
-          <a:lstStyle/>
-          <a:p>
-            <a:pPr algn="ctr"/>
-          </a:p>
-        </p:txBody>
-      </p:sp>
-      <p:sp>
-        <p:nvSpPr>
-          <p:cNvPr id="33" name="TextBox 32"/>
-          <p:cNvSpPr txBox="1"/>
-          <p:nvPr/>
-        </p:nvSpPr>
-        <p:spPr>
-          <a:xfrm>
-            <a:off x="5029200" y="5742432"/>
-            <a:ext cx="1828800" cy="182880"/>
-          </a:xfrm>
-          <a:prstGeom prst="rect">
-            <a:avLst/>
-          </a:prstGeom>
-          <a:noFill/>
-        </p:spPr>
-        <p:txBody>
-          <a:bodyPr wrap="none">
-            <a:spAutoFit/>
-          </a:bodyPr>
-          <a:lstStyle/>
+              <a:spcAft>
+                <a:spcPts val="1200"/>
+              </a:spcAft>
+              <a:defRPr sz="1500">
+                <a:solidFill>
+                  <a:srgbClr val="C0C8E0"/>
+                </a:solidFill>
+                <a:latin typeface="Roboto"/>
+              </a:defRPr>
+            </a:pPr>
+            <a:r>
+              <a:t>    Delegate AI Orchestrator for performance-based routing</a:t>
+            </a:r>
+          </a:p>
           <a:p>
             <a:pPr>
-              <a:defRPr sz="800">
-                <a:solidFill>
-                  <a:srgbClr val="94A3B8"/>
-                </a:solidFill>
-              </a:defRPr>
-            </a:pPr>
-            <a:r>
-              <a:t>Quality Gate (3)</a:t>
-            </a:r>
-          </a:p>
-        </p:txBody>
-      </p:sp>
-      <p:sp>
-        <p:nvSpPr>
-          <p:cNvPr id="34" name="Oval 33"/>
-          <p:cNvSpPr/>
-          <p:nvPr/>
-        </p:nvSpPr>
-        <p:spPr>
-          <a:xfrm>
-            <a:off x="7040879" y="5760720"/>
-            <a:ext cx="137160" cy="137160"/>
-          </a:xfrm>
-          <a:prstGeom prst="ellipse">
-            <a:avLst/>
-          </a:prstGeom>
-          <a:solidFill>
-            <a:srgbClr val="764BA2"/>
-          </a:solidFill>
-          <a:ln>
-            <a:noFill/>
-          </a:ln>
-        </p:spPr>
-        <p:style>
-          <a:lnRef idx="1">
-            <a:schemeClr val="accent1"/>
-          </a:lnRef>
-          <a:fillRef idx="3">
-            <a:schemeClr val="accent1"/>
-          </a:fillRef>
-          <a:effectRef idx="2">
-            <a:schemeClr val="accent1"/>
-          </a:effectRef>
-          <a:fontRef idx="minor">
-            <a:schemeClr val="lt1"/>
-          </a:fontRef>
-        </p:style>
-        <p:txBody>
-          <a:bodyPr rtlCol="0" anchor="ctr"/>
-          <a:lstStyle/>
-          <a:p>
-            <a:pPr algn="ctr"/>
-          </a:p>
-        </p:txBody>
-      </p:sp>
-      <p:sp>
-        <p:nvSpPr>
-          <p:cNvPr id="35" name="TextBox 34"/>
-          <p:cNvSpPr txBox="1"/>
-          <p:nvPr/>
-        </p:nvSpPr>
-        <p:spPr>
-          <a:xfrm>
-            <a:off x="7223759" y="5742432"/>
-            <a:ext cx="1828800" cy="182880"/>
-          </a:xfrm>
-          <a:prstGeom prst="rect">
-            <a:avLst/>
-          </a:prstGeom>
-          <a:noFill/>
-        </p:spPr>
-        <p:txBody>
-          <a:bodyPr wrap="none">
-            <a:spAutoFit/>
-          </a:bodyPr>
-          <a:lstStyle/>
+              <a:spcAft>
+                <a:spcPts val="1200"/>
+              </a:spcAft>
+              <a:defRPr sz="1500">
+                <a:solidFill>
+                  <a:srgbClr val="C0C8E0"/>
+                </a:solidFill>
+                <a:latin typeface="Roboto"/>
+              </a:defRPr>
+            </a:pPr>
+            <a:r>
+              <a:t>    Leitner spaced-repetition error memory (5-level triage)</a:t>
+            </a:r>
+          </a:p>
           <a:p>
             <a:pPr>
-              <a:defRPr sz="800">
-                <a:solidFill>
-                  <a:srgbClr val="94A3B8"/>
-                </a:solidFill>
-              </a:defRPr>
-            </a:pPr>
-            <a:r>
-              <a:t>Executive (3)</a:t>
-            </a:r>
-          </a:p>
-        </p:txBody>
-      </p:sp>
-      <p:sp>
-        <p:nvSpPr>
-          <p:cNvPr id="36" name="Oval 35"/>
-          <p:cNvSpPr/>
-          <p:nvPr/>
-        </p:nvSpPr>
-        <p:spPr>
-          <a:xfrm>
-            <a:off x="9235440" y="5760720"/>
-            <a:ext cx="137160" cy="137160"/>
-          </a:xfrm>
-          <a:prstGeom prst="ellipse">
-            <a:avLst/>
-          </a:prstGeom>
-          <a:solidFill>
-            <a:srgbClr val="EAB308"/>
-          </a:solidFill>
-          <a:ln>
-            <a:noFill/>
-          </a:ln>
-        </p:spPr>
-        <p:style>
-          <a:lnRef idx="1">
-            <a:schemeClr val="accent1"/>
-          </a:lnRef>
-          <a:fillRef idx="3">
-            <a:schemeClr val="accent1"/>
-          </a:fillRef>
-          <a:effectRef idx="2">
-            <a:schemeClr val="accent1"/>
-          </a:effectRef>
-          <a:fontRef idx="minor">
-            <a:schemeClr val="lt1"/>
-          </a:fontRef>
-        </p:style>
-        <p:txBody>
-          <a:bodyPr rtlCol="0" anchor="ctr"/>
-          <a:lstStyle/>
-          <a:p>
-            <a:pPr algn="ctr"/>
-          </a:p>
-        </p:txBody>
-      </p:sp>
-      <p:sp>
-        <p:nvSpPr>
-          <p:cNvPr id="37" name="TextBox 36"/>
-          <p:cNvSpPr txBox="1"/>
-          <p:nvPr/>
-        </p:nvSpPr>
-        <p:spPr>
-          <a:xfrm>
-            <a:off x="9418319" y="5742432"/>
-            <a:ext cx="1828800" cy="182880"/>
-          </a:xfrm>
-          <a:prstGeom prst="rect">
-            <a:avLst/>
-          </a:prstGeom>
-          <a:noFill/>
-        </p:spPr>
-        <p:txBody>
-          <a:bodyPr wrap="none">
-            <a:spAutoFit/>
-          </a:bodyPr>
-          <a:lstStyle/>
+              <a:spcAft>
+                <a:spcPts val="1200"/>
+              </a:spcAft>
+              <a:defRPr sz="1500">
+                <a:solidFill>
+                  <a:srgbClr val="C0C8E0"/>
+                </a:solidFill>
+                <a:latin typeface="Roboto"/>
+              </a:defRPr>
+            </a:pPr>
+            <a:r>
+              <a:t>    DataValidationEngine: Signal Warnings on bad data</a:t>
+            </a:r>
+          </a:p>
           <a:p>
             <a:pPr>
-              <a:defRPr sz="800">
-                <a:solidFill>
-                  <a:srgbClr val="94A3B8"/>
-                </a:solidFill>
-              </a:defRPr>
-            </a:pPr>
-            <a:r>
-              <a:t>Creative (2)</a:t>
+              <a:spcAft>
+                <a:spcPts val="1200"/>
+              </a:spcAft>
+              <a:defRPr sz="1500">
+                <a:solidFill>
+                  <a:srgbClr val="C0C8E0"/>
+                </a:solidFill>
+                <a:latin typeface="Roboto"/>
+              </a:defRPr>
+            </a:pPr>
+            <a:r>
+              <a:t>    News Bureau Chief: auto-triggered context refresh</a:t>
             </a:r>
           </a:p>
         </p:txBody>
@@ -5567,8 +3851,8 @@
         </p:nvSpPr>
         <p:spPr>
           <a:xfrm>
-            <a:off x="731520" y="457200"/>
-            <a:ext cx="10058400" cy="914400"/>
+            <a:off x="8686800" y="6263640"/>
+            <a:ext cx="3200400" cy="228600"/>
           </a:xfrm>
           <a:prstGeom prst="rect">
             <a:avLst/>
@@ -5581,6 +3865,41 @@
           </a:bodyPr>
           <a:lstStyle/>
           <a:p>
+            <a:pPr algn="r">
+              <a:defRPr sz="700">
+                <a:solidFill>
+                  <a:srgbClr val="4A4A6A"/>
+                </a:solidFill>
+              </a:defRPr>
+            </a:pPr>
+            <a:r>
+              <a:t>Layout: full_canvas_diagram</a:t>
+            </a:r>
+          </a:p>
+        </p:txBody>
+      </p:sp>
+      <p:sp>
+        <p:nvSpPr>
+          <p:cNvPr id="4" name="TextBox 3"/>
+          <p:cNvSpPr txBox="1"/>
+          <p:nvPr/>
+        </p:nvSpPr>
+        <p:spPr>
+          <a:xfrm>
+            <a:off x="731520" y="457200"/>
+            <a:ext cx="10058400" cy="914400"/>
+          </a:xfrm>
+          <a:prstGeom prst="rect">
+            <a:avLst/>
+          </a:prstGeom>
+          <a:noFill/>
+        </p:spPr>
+        <p:txBody>
+          <a:bodyPr wrap="square">
+            <a:spAutoFit/>
+          </a:bodyPr>
+          <a:lstStyle/>
+          <a:p>
             <a:pPr>
               <a:defRPr sz="2800" b="1">
                 <a:solidFill>
@@ -5590,32 +3909,30 @@
               </a:defRPr>
             </a:pPr>
             <a:r>
-              <a:t>System Health — OmniDashboard</a:t>
-            </a:r>
-          </a:p>
-        </p:txBody>
-      </p:sp>
-      <p:sp>
-        <p:nvSpPr>
-          <p:cNvPr id="4" name="Rounded Rectangle 3"/>
+              <a:t>Agent Network Architecture (V7)</a:t>
+            </a:r>
+          </a:p>
+        </p:txBody>
+      </p:sp>
+      <p:sp>
+        <p:nvSpPr>
+          <p:cNvPr id="5" name="Rounded Rectangle 4"/>
           <p:cNvSpPr/>
           <p:nvPr/>
         </p:nvSpPr>
         <p:spPr>
           <a:xfrm>
-            <a:off x="731520" y="1463040"/>
-            <a:ext cx="1828800" cy="1097280"/>
+            <a:off x="274320" y="1645920"/>
+            <a:ext cx="1920240" cy="411480"/>
           </a:xfrm>
           <a:prstGeom prst="roundRect">
             <a:avLst/>
           </a:prstGeom>
           <a:solidFill>
-            <a:srgbClr val="1A1A2E"/>
+            <a:srgbClr val="667EEA"/>
           </a:solidFill>
-          <a:ln w="25400">
-            <a:solidFill>
-              <a:srgbClr val="10B981"/>
-            </a:solidFill>
+          <a:ln>
+            <a:noFill/>
           </a:ln>
         </p:spPr>
         <p:style>
@@ -5633,45 +3950,32 @@
           </a:fontRef>
         </p:style>
         <p:txBody>
-          <a:bodyPr rtlCol="0" anchor="ctr" wrap="square"/>
+          <a:bodyPr rtlCol="0" anchor="ctr"/>
           <a:lstStyle/>
           <a:p>
             <a:pPr algn="ctr">
-              <a:defRPr sz="2400" b="1">
-                <a:solidFill>
-                  <a:srgbClr val="10B981"/>
-                </a:solidFill>
-                <a:latin typeface="Inter"/>
-              </a:defRPr>
-            </a:pPr>
-            <a:r>
-              <a:t>16/18</a:t>
-            </a:r>
-          </a:p>
-          <a:p>
-            <a:pPr algn="ctr">
-              <a:defRPr sz="900">
-                <a:solidFill>
-                  <a:srgbClr val="94A3B8"/>
-                </a:solidFill>
-              </a:defRPr>
-            </a:pPr>
-            <a:r>
-              <a:t>Active</a:t>
-            </a:r>
-          </a:p>
-        </p:txBody>
-      </p:sp>
-      <p:sp>
-        <p:nvSpPr>
-          <p:cNvPr id="5" name="Rounded Rectangle 4"/>
+              <a:defRPr sz="1000" b="1">
+                <a:solidFill>
+                  <a:srgbClr val="FFFFFF"/>
+                </a:solidFill>
+              </a:defRPr>
+            </a:pPr>
+            <a:r>
+              <a:t>System Core</a:t>
+            </a:r>
+          </a:p>
+        </p:txBody>
+      </p:sp>
+      <p:sp>
+        <p:nvSpPr>
+          <p:cNvPr id="6" name="Rounded Rectangle 5"/>
           <p:cNvSpPr/>
           <p:nvPr/>
         </p:nvSpPr>
         <p:spPr>
           <a:xfrm>
-            <a:off x="2926080" y="1463040"/>
-            <a:ext cx="1828800" cy="1097280"/>
+            <a:off x="320040" y="2148840"/>
+            <a:ext cx="1828800" cy="384048"/>
           </a:xfrm>
           <a:prstGeom prst="roundRect">
             <a:avLst/>
@@ -5679,7 +3983,7 @@
           <a:solidFill>
             <a:srgbClr val="1A1A2E"/>
           </a:solidFill>
-          <a:ln w="25400">
+          <a:ln w="19050">
             <a:solidFill>
               <a:srgbClr val="667EEA"/>
             </a:solidFill>
@@ -5700,45 +4004,32 @@
           </a:fontRef>
         </p:style>
         <p:txBody>
-          <a:bodyPr rtlCol="0" anchor="ctr" wrap="square"/>
+          <a:bodyPr rtlCol="0" anchor="ctr"/>
           <a:lstStyle/>
           <a:p>
             <a:pPr algn="ctr">
-              <a:defRPr sz="2400" b="1">
-                <a:solidFill>
-                  <a:srgbClr val="667EEA"/>
-                </a:solidFill>
-                <a:latin typeface="Inter"/>
-              </a:defRPr>
-            </a:pPr>
-            <a:r>
-              <a:t>3.2/10</a:t>
-            </a:r>
-          </a:p>
-          <a:p>
-            <a:pPr algn="ctr">
-              <a:defRPr sz="900">
-                <a:solidFill>
-                  <a:srgbClr val="94A3B8"/>
-                </a:solidFill>
-              </a:defRPr>
-            </a:pPr>
-            <a:r>
-              <a:t>EQ Stress</a:t>
-            </a:r>
-          </a:p>
-        </p:txBody>
-      </p:sp>
-      <p:sp>
-        <p:nvSpPr>
-          <p:cNvPr id="6" name="Rounded Rectangle 5"/>
+              <a:defRPr sz="900" b="1">
+                <a:solidFill>
+                  <a:srgbClr val="E0E0E0"/>
+                </a:solidFill>
+              </a:defRPr>
+            </a:pPr>
+            <a:r>
+              <a:t>CEO</a:t>
+            </a:r>
+          </a:p>
+        </p:txBody>
+      </p:sp>
+      <p:sp>
+        <p:nvSpPr>
+          <p:cNvPr id="7" name="Rounded Rectangle 6"/>
           <p:cNvSpPr/>
           <p:nvPr/>
         </p:nvSpPr>
         <p:spPr>
           <a:xfrm>
-            <a:off x="5120640" y="1463040"/>
-            <a:ext cx="1828800" cy="1097280"/>
+            <a:off x="320040" y="2651760"/>
+            <a:ext cx="1828800" cy="384048"/>
           </a:xfrm>
           <a:prstGeom prst="roundRect">
             <a:avLst/>
@@ -5746,9 +4037,9 @@
           <a:solidFill>
             <a:srgbClr val="1A1A2E"/>
           </a:solidFill>
-          <a:ln w="25400">
+          <a:ln w="19050">
             <a:solidFill>
-              <a:srgbClr val="EAB308"/>
+              <a:srgbClr val="667EEA"/>
             </a:solidFill>
           </a:ln>
         </p:spPr>
@@ -5767,45 +4058,32 @@
           </a:fontRef>
         </p:style>
         <p:txBody>
-          <a:bodyPr rtlCol="0" anchor="ctr" wrap="square"/>
+          <a:bodyPr rtlCol="0" anchor="ctr"/>
           <a:lstStyle/>
           <a:p>
             <a:pPr algn="ctr">
-              <a:defRPr sz="2400" b="1">
-                <a:solidFill>
-                  <a:srgbClr val="EAB308"/>
-                </a:solidFill>
-                <a:latin typeface="Inter"/>
-              </a:defRPr>
-            </a:pPr>
-            <a:r>
-              <a:t>5</a:t>
-            </a:r>
-          </a:p>
-          <a:p>
-            <a:pPr algn="ctr">
-              <a:defRPr sz="900">
-                <a:solidFill>
-                  <a:srgbClr val="94A3B8"/>
-                </a:solidFill>
-              </a:defRPr>
-            </a:pPr>
-            <a:r>
-              <a:t>Alerts</a:t>
-            </a:r>
-          </a:p>
-        </p:txBody>
-      </p:sp>
-      <p:sp>
-        <p:nvSpPr>
-          <p:cNvPr id="7" name="Rounded Rectangle 6"/>
+              <a:defRPr sz="900" b="1">
+                <a:solidFill>
+                  <a:srgbClr val="E0E0E0"/>
+                </a:solidFill>
+              </a:defRPr>
+            </a:pPr>
+            <a:r>
+              <a:t>CFO</a:t>
+            </a:r>
+          </a:p>
+        </p:txBody>
+      </p:sp>
+      <p:sp>
+        <p:nvSpPr>
+          <p:cNvPr id="8" name="Rounded Rectangle 7"/>
           <p:cNvSpPr/>
           <p:nvPr/>
         </p:nvSpPr>
         <p:spPr>
           <a:xfrm>
-            <a:off x="7315200" y="1463040"/>
-            <a:ext cx="1828800" cy="1097280"/>
+            <a:off x="320040" y="3154680"/>
+            <a:ext cx="1828800" cy="384048"/>
           </a:xfrm>
           <a:prstGeom prst="roundRect">
             <a:avLst/>
@@ -5813,7 +4091,7 @@
           <a:solidFill>
             <a:srgbClr val="1A1A2E"/>
           </a:solidFill>
-          <a:ln w="25400">
+          <a:ln w="19050">
             <a:solidFill>
               <a:srgbClr val="667EEA"/>
             </a:solidFill>
@@ -5834,45 +4112,32 @@
           </a:fontRef>
         </p:style>
         <p:txBody>
-          <a:bodyPr rtlCol="0" anchor="ctr" wrap="square"/>
+          <a:bodyPr rtlCol="0" anchor="ctr"/>
           <a:lstStyle/>
           <a:p>
             <a:pPr algn="ctr">
-              <a:defRPr sz="2400" b="1">
-                <a:solidFill>
-                  <a:srgbClr val="667EEA"/>
-                </a:solidFill>
-                <a:latin typeface="Inter"/>
-              </a:defRPr>
-            </a:pPr>
-            <a:r>
-              <a:t>12</a:t>
-            </a:r>
-          </a:p>
-          <a:p>
-            <a:pPr algn="ctr">
-              <a:defRPr sz="900">
-                <a:solidFill>
-                  <a:srgbClr val="94A3B8"/>
-                </a:solidFill>
-              </a:defRPr>
-            </a:pPr>
-            <a:r>
-              <a:t>Notifications</a:t>
-            </a:r>
-          </a:p>
-        </p:txBody>
-      </p:sp>
-      <p:sp>
-        <p:nvSpPr>
-          <p:cNvPr id="8" name="Rounded Rectangle 7"/>
+              <a:defRPr sz="900" b="1">
+                <a:solidFill>
+                  <a:srgbClr val="E0E0E0"/>
+                </a:solidFill>
+              </a:defRPr>
+            </a:pPr>
+            <a:r>
+              <a:t>CTO</a:t>
+            </a:r>
+          </a:p>
+        </p:txBody>
+      </p:sp>
+      <p:sp>
+        <p:nvSpPr>
+          <p:cNvPr id="9" name="Rounded Rectangle 8"/>
           <p:cNvSpPr/>
           <p:nvPr/>
         </p:nvSpPr>
         <p:spPr>
           <a:xfrm>
-            <a:off x="9509760" y="1463040"/>
-            <a:ext cx="1828800" cy="1097280"/>
+            <a:off x="320040" y="3657600"/>
+            <a:ext cx="1828800" cy="384048"/>
           </a:xfrm>
           <a:prstGeom prst="roundRect">
             <a:avLst/>
@@ -5880,9 +4145,9 @@
           <a:solidFill>
             <a:srgbClr val="1A1A2E"/>
           </a:solidFill>
-          <a:ln w="25400">
+          <a:ln w="19050">
             <a:solidFill>
-              <a:srgbClr val="EF4444"/>
+              <a:srgbClr val="667EEA"/>
             </a:solidFill>
           </a:ln>
         </p:spPr>
@@ -5901,45 +4166,1039 @@
           </a:fontRef>
         </p:style>
         <p:txBody>
-          <a:bodyPr rtlCol="0" anchor="ctr" wrap="square"/>
+          <a:bodyPr rtlCol="0" anchor="ctr"/>
           <a:lstStyle/>
           <a:p>
             <a:pPr algn="ctr">
-              <a:defRPr sz="2400" b="1">
-                <a:solidFill>
-                  <a:srgbClr val="EF4444"/>
-                </a:solidFill>
-                <a:latin typeface="Inter"/>
-              </a:defRPr>
-            </a:pPr>
-            <a:r>
-              <a:t>98.3%→12%</a:t>
-            </a:r>
-          </a:p>
+              <a:defRPr sz="900" b="1">
+                <a:solidFill>
+                  <a:srgbClr val="E0E0E0"/>
+                </a:solidFill>
+              </a:defRPr>
+            </a:pPr>
+            <a:r>
+              <a:t>Aether</a:t>
+            </a:r>
+          </a:p>
+        </p:txBody>
+      </p:sp>
+      <p:sp>
+        <p:nvSpPr>
+          <p:cNvPr id="10" name="Rounded Rectangle 9"/>
+          <p:cNvSpPr/>
+          <p:nvPr/>
+        </p:nvSpPr>
+        <p:spPr>
+          <a:xfrm>
+            <a:off x="320040" y="4160520"/>
+            <a:ext cx="1828800" cy="384048"/>
+          </a:xfrm>
+          <a:prstGeom prst="roundRect">
+            <a:avLst/>
+          </a:prstGeom>
+          <a:solidFill>
+            <a:srgbClr val="1A1A2E"/>
+          </a:solidFill>
+          <a:ln w="19050">
+            <a:solidFill>
+              <a:srgbClr val="667EEA"/>
+            </a:solidFill>
+          </a:ln>
+        </p:spPr>
+        <p:style>
+          <a:lnRef idx="1">
+            <a:schemeClr val="accent1"/>
+          </a:lnRef>
+          <a:fillRef idx="3">
+            <a:schemeClr val="accent1"/>
+          </a:fillRef>
+          <a:effectRef idx="2">
+            <a:schemeClr val="accent1"/>
+          </a:effectRef>
+          <a:fontRef idx="minor">
+            <a:schemeClr val="lt1"/>
+          </a:fontRef>
+        </p:style>
+        <p:txBody>
+          <a:bodyPr rtlCol="0" anchor="ctr"/>
+          <a:lstStyle/>
           <a:p>
             <a:pPr algn="ctr">
-              <a:defRPr sz="900">
-                <a:solidFill>
-                  <a:srgbClr val="94A3B8"/>
-                </a:solidFill>
-              </a:defRPr>
-            </a:pPr>
-            <a:r>
-              <a:t>n8n Failure</a:t>
-            </a:r>
-          </a:p>
-        </p:txBody>
-      </p:sp>
-      <p:sp>
-        <p:nvSpPr>
-          <p:cNvPr id="9" name="TextBox 8"/>
+              <a:defRPr sz="900" b="1">
+                <a:solidFill>
+                  <a:srgbClr val="E0E0E0"/>
+                </a:solidFill>
+              </a:defRPr>
+            </a:pPr>
+            <a:r>
+              <a:t>Delegate AI</a:t>
+            </a:r>
+          </a:p>
+        </p:txBody>
+      </p:sp>
+      <p:sp>
+        <p:nvSpPr>
+          <p:cNvPr id="11" name="Rounded Rectangle 10"/>
+          <p:cNvSpPr/>
+          <p:nvPr/>
+        </p:nvSpPr>
+        <p:spPr>
+          <a:xfrm>
+            <a:off x="320040" y="4663440"/>
+            <a:ext cx="1828800" cy="384048"/>
+          </a:xfrm>
+          <a:prstGeom prst="roundRect">
+            <a:avLst/>
+          </a:prstGeom>
+          <a:solidFill>
+            <a:srgbClr val="1A1A2E"/>
+          </a:solidFill>
+          <a:ln w="19050">
+            <a:solidFill>
+              <a:srgbClr val="667EEA"/>
+            </a:solidFill>
+          </a:ln>
+        </p:spPr>
+        <p:style>
+          <a:lnRef idx="1">
+            <a:schemeClr val="accent1"/>
+          </a:lnRef>
+          <a:fillRef idx="3">
+            <a:schemeClr val="accent1"/>
+          </a:fillRef>
+          <a:effectRef idx="2">
+            <a:schemeClr val="accent1"/>
+          </a:effectRef>
+          <a:fontRef idx="minor">
+            <a:schemeClr val="lt1"/>
+          </a:fontRef>
+        </p:style>
+        <p:txBody>
+          <a:bodyPr rtlCol="0" anchor="ctr"/>
+          <a:lstStyle/>
+          <a:p>
+            <a:pPr algn="ctr">
+              <a:defRPr sz="900" b="1">
+                <a:solidFill>
+                  <a:srgbClr val="E0E0E0"/>
+                </a:solidFill>
+              </a:defRPr>
+            </a:pPr>
+            <a:r>
+              <a:t>EQ Engine</a:t>
+            </a:r>
+          </a:p>
+        </p:txBody>
+      </p:sp>
+      <p:sp>
+        <p:nvSpPr>
+          <p:cNvPr id="12" name="Rounded Rectangle 11"/>
+          <p:cNvSpPr/>
+          <p:nvPr/>
+        </p:nvSpPr>
+        <p:spPr>
+          <a:xfrm>
+            <a:off x="2377440" y="1645920"/>
+            <a:ext cx="1920240" cy="411480"/>
+          </a:xfrm>
+          <a:prstGeom prst="roundRect">
+            <a:avLst/>
+          </a:prstGeom>
+          <a:solidFill>
+            <a:srgbClr val="10B981"/>
+          </a:solidFill>
+          <a:ln>
+            <a:noFill/>
+          </a:ln>
+        </p:spPr>
+        <p:style>
+          <a:lnRef idx="1">
+            <a:schemeClr val="accent1"/>
+          </a:lnRef>
+          <a:fillRef idx="3">
+            <a:schemeClr val="accent1"/>
+          </a:fillRef>
+          <a:effectRef idx="2">
+            <a:schemeClr val="accent1"/>
+          </a:effectRef>
+          <a:fontRef idx="minor">
+            <a:schemeClr val="lt1"/>
+          </a:fontRef>
+        </p:style>
+        <p:txBody>
+          <a:bodyPr rtlCol="0" anchor="ctr"/>
+          <a:lstStyle/>
+          <a:p>
+            <a:pPr algn="ctr">
+              <a:defRPr sz="1000" b="1">
+                <a:solidFill>
+                  <a:srgbClr val="FFFFFF"/>
+                </a:solidFill>
+              </a:defRPr>
+            </a:pPr>
+            <a:r>
+              <a:t>Intelligence</a:t>
+            </a:r>
+          </a:p>
+        </p:txBody>
+      </p:sp>
+      <p:sp>
+        <p:nvSpPr>
+          <p:cNvPr id="13" name="Rounded Rectangle 12"/>
+          <p:cNvSpPr/>
+          <p:nvPr/>
+        </p:nvSpPr>
+        <p:spPr>
+          <a:xfrm>
+            <a:off x="2423160" y="2148840"/>
+            <a:ext cx="1828800" cy="384048"/>
+          </a:xfrm>
+          <a:prstGeom prst="roundRect">
+            <a:avLst/>
+          </a:prstGeom>
+          <a:solidFill>
+            <a:srgbClr val="1A1A2E"/>
+          </a:solidFill>
+          <a:ln w="19050">
+            <a:solidFill>
+              <a:srgbClr val="10B981"/>
+            </a:solidFill>
+          </a:ln>
+        </p:spPr>
+        <p:style>
+          <a:lnRef idx="1">
+            <a:schemeClr val="accent1"/>
+          </a:lnRef>
+          <a:fillRef idx="3">
+            <a:schemeClr val="accent1"/>
+          </a:fillRef>
+          <a:effectRef idx="2">
+            <a:schemeClr val="accent1"/>
+          </a:effectRef>
+          <a:fontRef idx="minor">
+            <a:schemeClr val="lt1"/>
+          </a:fontRef>
+        </p:style>
+        <p:txBody>
+          <a:bodyPr rtlCol="0" anchor="ctr"/>
+          <a:lstStyle/>
+          <a:p>
+            <a:pPr algn="ctr">
+              <a:defRPr sz="900" b="1">
+                <a:solidFill>
+                  <a:srgbClr val="E0E0E0"/>
+                </a:solidFill>
+              </a:defRPr>
+            </a:pPr>
+            <a:r>
+              <a:t>GeoTalent Scout</a:t>
+            </a:r>
+          </a:p>
+        </p:txBody>
+      </p:sp>
+      <p:sp>
+        <p:nvSpPr>
+          <p:cNvPr id="14" name="Rounded Rectangle 13"/>
+          <p:cNvSpPr/>
+          <p:nvPr/>
+        </p:nvSpPr>
+        <p:spPr>
+          <a:xfrm>
+            <a:off x="2423160" y="2651760"/>
+            <a:ext cx="1828800" cy="384048"/>
+          </a:xfrm>
+          <a:prstGeom prst="roundRect">
+            <a:avLst/>
+          </a:prstGeom>
+          <a:solidFill>
+            <a:srgbClr val="1A1A2E"/>
+          </a:solidFill>
+          <a:ln w="19050">
+            <a:solidFill>
+              <a:srgbClr val="10B981"/>
+            </a:solidFill>
+          </a:ln>
+        </p:spPr>
+        <p:style>
+          <a:lnRef idx="1">
+            <a:schemeClr val="accent1"/>
+          </a:lnRef>
+          <a:fillRef idx="3">
+            <a:schemeClr val="accent1"/>
+          </a:fillRef>
+          <a:effectRef idx="2">
+            <a:schemeClr val="accent1"/>
+          </a:effectRef>
+          <a:fontRef idx="minor">
+            <a:schemeClr val="lt1"/>
+          </a:fontRef>
+        </p:style>
+        <p:txBody>
+          <a:bodyPr rtlCol="0" anchor="ctr"/>
+          <a:lstStyle/>
+          <a:p>
+            <a:pPr algn="ctr">
+              <a:defRPr sz="900" b="1">
+                <a:solidFill>
+                  <a:srgbClr val="E0E0E0"/>
+                </a:solidFill>
+              </a:defRPr>
+            </a:pPr>
+            <a:r>
+              <a:t>News Bureau</a:t>
+            </a:r>
+          </a:p>
+        </p:txBody>
+      </p:sp>
+      <p:sp>
+        <p:nvSpPr>
+          <p:cNvPr id="15" name="Rounded Rectangle 14"/>
+          <p:cNvSpPr/>
+          <p:nvPr/>
+        </p:nvSpPr>
+        <p:spPr>
+          <a:xfrm>
+            <a:off x="2423160" y="3154680"/>
+            <a:ext cx="1828800" cy="384048"/>
+          </a:xfrm>
+          <a:prstGeom prst="roundRect">
+            <a:avLst/>
+          </a:prstGeom>
+          <a:solidFill>
+            <a:srgbClr val="1A1A2E"/>
+          </a:solidFill>
+          <a:ln w="19050">
+            <a:solidFill>
+              <a:srgbClr val="10B981"/>
+            </a:solidFill>
+          </a:ln>
+        </p:spPr>
+        <p:style>
+          <a:lnRef idx="1">
+            <a:schemeClr val="accent1"/>
+          </a:lnRef>
+          <a:fillRef idx="3">
+            <a:schemeClr val="accent1"/>
+          </a:fillRef>
+          <a:effectRef idx="2">
+            <a:schemeClr val="accent1"/>
+          </a:effectRef>
+          <a:fontRef idx="minor">
+            <a:schemeClr val="lt1"/>
+          </a:fontRef>
+        </p:style>
+        <p:txBody>
+          <a:bodyPr rtlCol="0" anchor="ctr"/>
+          <a:lstStyle/>
+          <a:p>
+            <a:pPr algn="ctr">
+              <a:defRPr sz="900" b="1">
+                <a:solidFill>
+                  <a:srgbClr val="E0E0E0"/>
+                </a:solidFill>
+              </a:defRPr>
+            </a:pPr>
+            <a:r>
+              <a:t>Deep Crawler</a:t>
+            </a:r>
+          </a:p>
+        </p:txBody>
+      </p:sp>
+      <p:sp>
+        <p:nvSpPr>
+          <p:cNvPr id="16" name="Rounded Rectangle 15"/>
+          <p:cNvSpPr/>
+          <p:nvPr/>
+        </p:nvSpPr>
+        <p:spPr>
+          <a:xfrm>
+            <a:off x="2423160" y="3657600"/>
+            <a:ext cx="1828800" cy="384048"/>
+          </a:xfrm>
+          <a:prstGeom prst="roundRect">
+            <a:avLst/>
+          </a:prstGeom>
+          <a:solidFill>
+            <a:srgbClr val="1A1A2E"/>
+          </a:solidFill>
+          <a:ln w="19050">
+            <a:solidFill>
+              <a:srgbClr val="10B981"/>
+            </a:solidFill>
+          </a:ln>
+        </p:spPr>
+        <p:style>
+          <a:lnRef idx="1">
+            <a:schemeClr val="accent1"/>
+          </a:lnRef>
+          <a:fillRef idx="3">
+            <a:schemeClr val="accent1"/>
+          </a:fillRef>
+          <a:effectRef idx="2">
+            <a:schemeClr val="accent1"/>
+          </a:effectRef>
+          <a:fontRef idx="minor">
+            <a:schemeClr val="lt1"/>
+          </a:fontRef>
+        </p:style>
+        <p:txBody>
+          <a:bodyPr rtlCol="0" anchor="ctr"/>
+          <a:lstStyle/>
+          <a:p>
+            <a:pPr algn="ctr">
+              <a:defRPr sz="900" b="1">
+                <a:solidFill>
+                  <a:srgbClr val="E0E0E0"/>
+                </a:solidFill>
+              </a:defRPr>
+            </a:pPr>
+            <a:r>
+              <a:t>Researcher</a:t>
+            </a:r>
+          </a:p>
+        </p:txBody>
+      </p:sp>
+      <p:sp>
+        <p:nvSpPr>
+          <p:cNvPr id="17" name="Rounded Rectangle 16"/>
+          <p:cNvSpPr/>
+          <p:nvPr/>
+        </p:nvSpPr>
+        <p:spPr>
+          <a:xfrm>
+            <a:off x="4480560" y="1645920"/>
+            <a:ext cx="1920240" cy="411480"/>
+          </a:xfrm>
+          <a:prstGeom prst="roundRect">
+            <a:avLst/>
+          </a:prstGeom>
+          <a:solidFill>
+            <a:srgbClr val="F97316"/>
+          </a:solidFill>
+          <a:ln>
+            <a:noFill/>
+          </a:ln>
+        </p:spPr>
+        <p:style>
+          <a:lnRef idx="1">
+            <a:schemeClr val="accent1"/>
+          </a:lnRef>
+          <a:fillRef idx="3">
+            <a:schemeClr val="accent1"/>
+          </a:fillRef>
+          <a:effectRef idx="2">
+            <a:schemeClr val="accent1"/>
+          </a:effectRef>
+          <a:fontRef idx="minor">
+            <a:schemeClr val="lt1"/>
+          </a:fontRef>
+        </p:style>
+        <p:txBody>
+          <a:bodyPr rtlCol="0" anchor="ctr"/>
+          <a:lstStyle/>
+          <a:p>
+            <a:pPr algn="ctr">
+              <a:defRPr sz="1000" b="1">
+                <a:solidFill>
+                  <a:srgbClr val="FFFFFF"/>
+                </a:solidFill>
+              </a:defRPr>
+            </a:pPr>
+            <a:r>
+              <a:t>Quality Gate</a:t>
+            </a:r>
+          </a:p>
+        </p:txBody>
+      </p:sp>
+      <p:sp>
+        <p:nvSpPr>
+          <p:cNvPr id="18" name="Rounded Rectangle 17"/>
+          <p:cNvSpPr/>
+          <p:nvPr/>
+        </p:nvSpPr>
+        <p:spPr>
+          <a:xfrm>
+            <a:off x="4526280" y="2148840"/>
+            <a:ext cx="1828800" cy="384048"/>
+          </a:xfrm>
+          <a:prstGeom prst="roundRect">
+            <a:avLst/>
+          </a:prstGeom>
+          <a:solidFill>
+            <a:srgbClr val="1A1A2E"/>
+          </a:solidFill>
+          <a:ln w="19050">
+            <a:solidFill>
+              <a:srgbClr val="F97316"/>
+            </a:solidFill>
+          </a:ln>
+        </p:spPr>
+        <p:style>
+          <a:lnRef idx="1">
+            <a:schemeClr val="accent1"/>
+          </a:lnRef>
+          <a:fillRef idx="3">
+            <a:schemeClr val="accent1"/>
+          </a:fillRef>
+          <a:effectRef idx="2">
+            <a:schemeClr val="accent1"/>
+          </a:effectRef>
+          <a:fontRef idx="minor">
+            <a:schemeClr val="lt1"/>
+          </a:fontRef>
+        </p:style>
+        <p:txBody>
+          <a:bodyPr rtlCol="0" anchor="ctr"/>
+          <a:lstStyle/>
+          <a:p>
+            <a:pPr algn="ctr">
+              <a:defRPr sz="900" b="1">
+                <a:solidFill>
+                  <a:srgbClr val="E0E0E0"/>
+                </a:solidFill>
+              </a:defRPr>
+            </a:pPr>
+            <a:r>
+              <a:t>The Critic</a:t>
+            </a:r>
+          </a:p>
+        </p:txBody>
+      </p:sp>
+      <p:sp>
+        <p:nvSpPr>
+          <p:cNvPr id="19" name="Rounded Rectangle 18"/>
+          <p:cNvSpPr/>
+          <p:nvPr/>
+        </p:nvSpPr>
+        <p:spPr>
+          <a:xfrm>
+            <a:off x="4526280" y="2651760"/>
+            <a:ext cx="1828800" cy="384048"/>
+          </a:xfrm>
+          <a:prstGeom prst="roundRect">
+            <a:avLst/>
+          </a:prstGeom>
+          <a:solidFill>
+            <a:srgbClr val="1A1A2E"/>
+          </a:solidFill>
+          <a:ln w="19050">
+            <a:solidFill>
+              <a:srgbClr val="F97316"/>
+            </a:solidFill>
+          </a:ln>
+        </p:spPr>
+        <p:style>
+          <a:lnRef idx="1">
+            <a:schemeClr val="accent1"/>
+          </a:lnRef>
+          <a:fillRef idx="3">
+            <a:schemeClr val="accent1"/>
+          </a:fillRef>
+          <a:effectRef idx="2">
+            <a:schemeClr val="accent1"/>
+          </a:effectRef>
+          <a:fontRef idx="minor">
+            <a:schemeClr val="lt1"/>
+          </a:fontRef>
+        </p:style>
+        <p:txBody>
+          <a:bodyPr rtlCol="0" anchor="ctr"/>
+          <a:lstStyle/>
+          <a:p>
+            <a:pPr algn="ctr">
+              <a:defRPr sz="900" b="1">
+                <a:solidFill>
+                  <a:srgbClr val="E0E0E0"/>
+                </a:solidFill>
+              </a:defRPr>
+            </a:pPr>
+            <a:r>
+              <a:t>Compliance</a:t>
+            </a:r>
+          </a:p>
+        </p:txBody>
+      </p:sp>
+      <p:sp>
+        <p:nvSpPr>
+          <p:cNvPr id="20" name="Rounded Rectangle 19"/>
+          <p:cNvSpPr/>
+          <p:nvPr/>
+        </p:nvSpPr>
+        <p:spPr>
+          <a:xfrm>
+            <a:off x="4526280" y="3154680"/>
+            <a:ext cx="1828800" cy="384048"/>
+          </a:xfrm>
+          <a:prstGeom prst="roundRect">
+            <a:avLst/>
+          </a:prstGeom>
+          <a:solidFill>
+            <a:srgbClr val="1A1A2E"/>
+          </a:solidFill>
+          <a:ln w="19050">
+            <a:solidFill>
+              <a:srgbClr val="F97316"/>
+            </a:solidFill>
+          </a:ln>
+        </p:spPr>
+        <p:style>
+          <a:lnRef idx="1">
+            <a:schemeClr val="accent1"/>
+          </a:lnRef>
+          <a:fillRef idx="3">
+            <a:schemeClr val="accent1"/>
+          </a:fillRef>
+          <a:effectRef idx="2">
+            <a:schemeClr val="accent1"/>
+          </a:effectRef>
+          <a:fontRef idx="minor">
+            <a:schemeClr val="lt1"/>
+          </a:fontRef>
+        </p:style>
+        <p:txBody>
+          <a:bodyPr rtlCol="0" anchor="ctr"/>
+          <a:lstStyle/>
+          <a:p>
+            <a:pPr algn="ctr">
+              <a:defRPr sz="900" b="1">
+                <a:solidFill>
+                  <a:srgbClr val="E0E0E0"/>
+                </a:solidFill>
+              </a:defRPr>
+            </a:pPr>
+            <a:r>
+              <a:t>The Librarian</a:t>
+            </a:r>
+          </a:p>
+        </p:txBody>
+      </p:sp>
+      <p:sp>
+        <p:nvSpPr>
+          <p:cNvPr id="21" name="Rounded Rectangle 20"/>
+          <p:cNvSpPr/>
+          <p:nvPr/>
+        </p:nvSpPr>
+        <p:spPr>
+          <a:xfrm>
+            <a:off x="6583680" y="1645920"/>
+            <a:ext cx="1920240" cy="411480"/>
+          </a:xfrm>
+          <a:prstGeom prst="roundRect">
+            <a:avLst/>
+          </a:prstGeom>
+          <a:solidFill>
+            <a:srgbClr val="764BA2"/>
+          </a:solidFill>
+          <a:ln>
+            <a:noFill/>
+          </a:ln>
+        </p:spPr>
+        <p:style>
+          <a:lnRef idx="1">
+            <a:schemeClr val="accent1"/>
+          </a:lnRef>
+          <a:fillRef idx="3">
+            <a:schemeClr val="accent1"/>
+          </a:fillRef>
+          <a:effectRef idx="2">
+            <a:schemeClr val="accent1"/>
+          </a:effectRef>
+          <a:fontRef idx="minor">
+            <a:schemeClr val="lt1"/>
+          </a:fontRef>
+        </p:style>
+        <p:txBody>
+          <a:bodyPr rtlCol="0" anchor="ctr"/>
+          <a:lstStyle/>
+          <a:p>
+            <a:pPr algn="ctr">
+              <a:defRPr sz="1000" b="1">
+                <a:solidFill>
+                  <a:srgbClr val="FFFFFF"/>
+                </a:solidFill>
+              </a:defRPr>
+            </a:pPr>
+            <a:r>
+              <a:t>Executive</a:t>
+            </a:r>
+          </a:p>
+        </p:txBody>
+      </p:sp>
+      <p:sp>
+        <p:nvSpPr>
+          <p:cNvPr id="22" name="Rounded Rectangle 21"/>
+          <p:cNvSpPr/>
+          <p:nvPr/>
+        </p:nvSpPr>
+        <p:spPr>
+          <a:xfrm>
+            <a:off x="6629400" y="2148840"/>
+            <a:ext cx="1828800" cy="384048"/>
+          </a:xfrm>
+          <a:prstGeom prst="roundRect">
+            <a:avLst/>
+          </a:prstGeom>
+          <a:solidFill>
+            <a:srgbClr val="1A1A2E"/>
+          </a:solidFill>
+          <a:ln w="19050">
+            <a:solidFill>
+              <a:srgbClr val="764BA2"/>
+            </a:solidFill>
+          </a:ln>
+        </p:spPr>
+        <p:style>
+          <a:lnRef idx="1">
+            <a:schemeClr val="accent1"/>
+          </a:lnRef>
+          <a:fillRef idx="3">
+            <a:schemeClr val="accent1"/>
+          </a:fillRef>
+          <a:effectRef idx="2">
+            <a:schemeClr val="accent1"/>
+          </a:effectRef>
+          <a:fontRef idx="minor">
+            <a:schemeClr val="lt1"/>
+          </a:fontRef>
+        </p:style>
+        <p:txBody>
+          <a:bodyPr rtlCol="0" anchor="ctr"/>
+          <a:lstStyle/>
+          <a:p>
+            <a:pPr algn="ctr">
+              <a:defRPr sz="900" b="1">
+                <a:solidFill>
+                  <a:srgbClr val="E0E0E0"/>
+                </a:solidFill>
+              </a:defRPr>
+            </a:pPr>
+            <a:r>
+              <a:t>Presentations</a:t>
+            </a:r>
+          </a:p>
+        </p:txBody>
+      </p:sp>
+      <p:sp>
+        <p:nvSpPr>
+          <p:cNvPr id="23" name="Rounded Rectangle 22"/>
+          <p:cNvSpPr/>
+          <p:nvPr/>
+        </p:nvSpPr>
+        <p:spPr>
+          <a:xfrm>
+            <a:off x="6629400" y="2651760"/>
+            <a:ext cx="1828800" cy="384048"/>
+          </a:xfrm>
+          <a:prstGeom prst="roundRect">
+            <a:avLst/>
+          </a:prstGeom>
+          <a:solidFill>
+            <a:srgbClr val="1A1A2E"/>
+          </a:solidFill>
+          <a:ln w="19050">
+            <a:solidFill>
+              <a:srgbClr val="764BA2"/>
+            </a:solidFill>
+          </a:ln>
+        </p:spPr>
+        <p:style>
+          <a:lnRef idx="1">
+            <a:schemeClr val="accent1"/>
+          </a:lnRef>
+          <a:fillRef idx="3">
+            <a:schemeClr val="accent1"/>
+          </a:fillRef>
+          <a:effectRef idx="2">
+            <a:schemeClr val="accent1"/>
+          </a:effectRef>
+          <a:fontRef idx="minor">
+            <a:schemeClr val="lt1"/>
+          </a:fontRef>
+        </p:style>
+        <p:txBody>
+          <a:bodyPr rtlCol="0" anchor="ctr"/>
+          <a:lstStyle/>
+          <a:p>
+            <a:pPr algn="ctr">
+              <a:defRPr sz="900" b="1">
+                <a:solidFill>
+                  <a:srgbClr val="E0E0E0"/>
+                </a:solidFill>
+              </a:defRPr>
+            </a:pPr>
+            <a:r>
+              <a:t>CX Strategist</a:t>
+            </a:r>
+          </a:p>
+        </p:txBody>
+      </p:sp>
+      <p:sp>
+        <p:nvSpPr>
+          <p:cNvPr id="24" name="Rounded Rectangle 23"/>
+          <p:cNvSpPr/>
+          <p:nvPr/>
+        </p:nvSpPr>
+        <p:spPr>
+          <a:xfrm>
+            <a:off x="6629400" y="3154680"/>
+            <a:ext cx="1828800" cy="384048"/>
+          </a:xfrm>
+          <a:prstGeom prst="roundRect">
+            <a:avLst/>
+          </a:prstGeom>
+          <a:solidFill>
+            <a:srgbClr val="1A1A2E"/>
+          </a:solidFill>
+          <a:ln w="19050">
+            <a:solidFill>
+              <a:srgbClr val="764BA2"/>
+            </a:solidFill>
+          </a:ln>
+        </p:spPr>
+        <p:style>
+          <a:lnRef idx="1">
+            <a:schemeClr val="accent1"/>
+          </a:lnRef>
+          <a:fillRef idx="3">
+            <a:schemeClr val="accent1"/>
+          </a:fillRef>
+          <a:effectRef idx="2">
+            <a:schemeClr val="accent1"/>
+          </a:effectRef>
+          <a:fontRef idx="minor">
+            <a:schemeClr val="lt1"/>
+          </a:fontRef>
+        </p:style>
+        <p:txBody>
+          <a:bodyPr rtlCol="0" anchor="ctr"/>
+          <a:lstStyle/>
+          <a:p>
+            <a:pPr algn="ctr">
+              <a:defRPr sz="900" b="1">
+                <a:solidFill>
+                  <a:srgbClr val="E0E0E0"/>
+                </a:solidFill>
+              </a:defRPr>
+            </a:pPr>
+            <a:r>
+              <a:t>CMO</a:t>
+            </a:r>
+          </a:p>
+        </p:txBody>
+      </p:sp>
+      <p:sp>
+        <p:nvSpPr>
+          <p:cNvPr id="25" name="Rounded Rectangle 24"/>
+          <p:cNvSpPr/>
+          <p:nvPr/>
+        </p:nvSpPr>
+        <p:spPr>
+          <a:xfrm>
+            <a:off x="8686800" y="1645920"/>
+            <a:ext cx="1920240" cy="411480"/>
+          </a:xfrm>
+          <a:prstGeom prst="roundRect">
+            <a:avLst/>
+          </a:prstGeom>
+          <a:solidFill>
+            <a:srgbClr val="EAB308"/>
+          </a:solidFill>
+          <a:ln>
+            <a:noFill/>
+          </a:ln>
+        </p:spPr>
+        <p:style>
+          <a:lnRef idx="1">
+            <a:schemeClr val="accent1"/>
+          </a:lnRef>
+          <a:fillRef idx="3">
+            <a:schemeClr val="accent1"/>
+          </a:fillRef>
+          <a:effectRef idx="2">
+            <a:schemeClr val="accent1"/>
+          </a:effectRef>
+          <a:fontRef idx="minor">
+            <a:schemeClr val="lt1"/>
+          </a:fontRef>
+        </p:style>
+        <p:txBody>
+          <a:bodyPr rtlCol="0" anchor="ctr"/>
+          <a:lstStyle/>
+          <a:p>
+            <a:pPr algn="ctr">
+              <a:defRPr sz="1000" b="1">
+                <a:solidFill>
+                  <a:srgbClr val="FFFFFF"/>
+                </a:solidFill>
+              </a:defRPr>
+            </a:pPr>
+            <a:r>
+              <a:t>Creative</a:t>
+            </a:r>
+          </a:p>
+        </p:txBody>
+      </p:sp>
+      <p:sp>
+        <p:nvSpPr>
+          <p:cNvPr id="26" name="Rounded Rectangle 25"/>
+          <p:cNvSpPr/>
+          <p:nvPr/>
+        </p:nvSpPr>
+        <p:spPr>
+          <a:xfrm>
+            <a:off x="8732520" y="2148840"/>
+            <a:ext cx="1828800" cy="384048"/>
+          </a:xfrm>
+          <a:prstGeom prst="roundRect">
+            <a:avLst/>
+          </a:prstGeom>
+          <a:solidFill>
+            <a:srgbClr val="1A1A2E"/>
+          </a:solidFill>
+          <a:ln w="19050">
+            <a:solidFill>
+              <a:srgbClr val="EAB308"/>
+            </a:solidFill>
+          </a:ln>
+        </p:spPr>
+        <p:style>
+          <a:lnRef idx="1">
+            <a:schemeClr val="accent1"/>
+          </a:lnRef>
+          <a:fillRef idx="3">
+            <a:schemeClr val="accent1"/>
+          </a:fillRef>
+          <a:effectRef idx="2">
+            <a:schemeClr val="accent1"/>
+          </a:effectRef>
+          <a:fontRef idx="minor">
+            <a:schemeClr val="lt1"/>
+          </a:fontRef>
+        </p:style>
+        <p:txBody>
+          <a:bodyPr rtlCol="0" anchor="ctr"/>
+          <a:lstStyle/>
+          <a:p>
+            <a:pPr algn="ctr">
+              <a:defRPr sz="900" b="1">
+                <a:solidFill>
+                  <a:srgbClr val="E0E0E0"/>
+                </a:solidFill>
+              </a:defRPr>
+            </a:pPr>
+            <a:r>
+              <a:t>Designer</a:t>
+            </a:r>
+          </a:p>
+        </p:txBody>
+      </p:sp>
+      <p:sp>
+        <p:nvSpPr>
+          <p:cNvPr id="27" name="Rounded Rectangle 26"/>
+          <p:cNvSpPr/>
+          <p:nvPr/>
+        </p:nvSpPr>
+        <p:spPr>
+          <a:xfrm>
+            <a:off x="8732520" y="2651760"/>
+            <a:ext cx="1828800" cy="384048"/>
+          </a:xfrm>
+          <a:prstGeom prst="roundRect">
+            <a:avLst/>
+          </a:prstGeom>
+          <a:solidFill>
+            <a:srgbClr val="1A1A2E"/>
+          </a:solidFill>
+          <a:ln w="19050">
+            <a:solidFill>
+              <a:srgbClr val="EAB308"/>
+            </a:solidFill>
+          </a:ln>
+        </p:spPr>
+        <p:style>
+          <a:lnRef idx="1">
+            <a:schemeClr val="accent1"/>
+          </a:lnRef>
+          <a:fillRef idx="3">
+            <a:schemeClr val="accent1"/>
+          </a:fillRef>
+          <a:effectRef idx="2">
+            <a:schemeClr val="accent1"/>
+          </a:effectRef>
+          <a:fontRef idx="minor">
+            <a:schemeClr val="lt1"/>
+          </a:fontRef>
+        </p:style>
+        <p:txBody>
+          <a:bodyPr rtlCol="0" anchor="ctr"/>
+          <a:lstStyle/>
+          <a:p>
+            <a:pPr algn="ctr">
+              <a:defRPr sz="900" b="1">
+                <a:solidFill>
+                  <a:srgbClr val="E0E0E0"/>
+                </a:solidFill>
+              </a:defRPr>
+            </a:pPr>
+            <a:r>
+              <a:t>Data Architect</a:t>
+            </a:r>
+          </a:p>
+        </p:txBody>
+      </p:sp>
+      <p:sp>
+        <p:nvSpPr>
+          <p:cNvPr id="28" name="Oval 27"/>
+          <p:cNvSpPr/>
+          <p:nvPr/>
+        </p:nvSpPr>
+        <p:spPr>
+          <a:xfrm>
+            <a:off x="457200" y="5669280"/>
+            <a:ext cx="137160" cy="137160"/>
+          </a:xfrm>
+          <a:prstGeom prst="ellipse">
+            <a:avLst/>
+          </a:prstGeom>
+          <a:solidFill>
+            <a:srgbClr val="667EEA"/>
+          </a:solidFill>
+          <a:ln>
+            <a:noFill/>
+          </a:ln>
+        </p:spPr>
+        <p:style>
+          <a:lnRef idx="1">
+            <a:schemeClr val="accent1"/>
+          </a:lnRef>
+          <a:fillRef idx="3">
+            <a:schemeClr val="accent1"/>
+          </a:fillRef>
+          <a:effectRef idx="2">
+            <a:schemeClr val="accent1"/>
+          </a:effectRef>
+          <a:fontRef idx="minor">
+            <a:schemeClr val="lt1"/>
+          </a:fontRef>
+        </p:style>
+        <p:txBody>
+          <a:bodyPr rtlCol="0" anchor="ctr"/>
+          <a:lstStyle/>
+          <a:p>
+            <a:pPr algn="ctr"/>
+          </a:p>
+        </p:txBody>
+      </p:sp>
+      <p:sp>
+        <p:nvSpPr>
+          <p:cNvPr id="29" name="TextBox 28"/>
           <p:cNvSpPr txBox="1"/>
           <p:nvPr/>
         </p:nvSpPr>
         <p:spPr>
           <a:xfrm>
-            <a:off x="731520" y="2926080"/>
-            <a:ext cx="10058400" cy="3200400"/>
+            <a:off x="640080" y="5650992"/>
+            <a:ext cx="1828800" cy="182880"/>
           </a:xfrm>
           <a:prstGeom prst="rect">
             <a:avLst/>
@@ -5947,72 +5206,332 @@
           <a:noFill/>
         </p:spPr>
         <p:txBody>
-          <a:bodyPr wrap="square">
+          <a:bodyPr wrap="none">
             <a:spAutoFit/>
           </a:bodyPr>
           <a:lstStyle/>
           <a:p>
             <a:pPr>
-              <a:spcAft>
-                <a:spcPts val="800"/>
-              </a:spcAft>
-              <a:defRPr sz="1400">
-                <a:solidFill>
-                  <a:srgbClr val="C0C8E0"/>
-                </a:solidFill>
-                <a:latin typeface="Roboto"/>
-              </a:defRPr>
-            </a:pPr>
-            <a:r>
-              <a:t>    n8n Auto-Heal: EXECUTIONS_DATA_PRUNE=true, MAX_AGE=48h</a:t>
-            </a:r>
-          </a:p>
+              <a:defRPr sz="800">
+                <a:solidFill>
+                  <a:srgbClr val="94A3B8"/>
+                </a:solidFill>
+              </a:defRPr>
+            </a:pPr>
+            <a:r>
+              <a:t>System Core (6)</a:t>
+            </a:r>
+          </a:p>
+        </p:txBody>
+      </p:sp>
+      <p:sp>
+        <p:nvSpPr>
+          <p:cNvPr id="30" name="Oval 29"/>
+          <p:cNvSpPr/>
+          <p:nvPr/>
+        </p:nvSpPr>
+        <p:spPr>
+          <a:xfrm>
+            <a:off x="2651760" y="5669280"/>
+            <a:ext cx="137160" cy="137160"/>
+          </a:xfrm>
+          <a:prstGeom prst="ellipse">
+            <a:avLst/>
+          </a:prstGeom>
+          <a:solidFill>
+            <a:srgbClr val="10B981"/>
+          </a:solidFill>
+          <a:ln>
+            <a:noFill/>
+          </a:ln>
+        </p:spPr>
+        <p:style>
+          <a:lnRef idx="1">
+            <a:schemeClr val="accent1"/>
+          </a:lnRef>
+          <a:fillRef idx="3">
+            <a:schemeClr val="accent1"/>
+          </a:fillRef>
+          <a:effectRef idx="2">
+            <a:schemeClr val="accent1"/>
+          </a:effectRef>
+          <a:fontRef idx="minor">
+            <a:schemeClr val="lt1"/>
+          </a:fontRef>
+        </p:style>
+        <p:txBody>
+          <a:bodyPr rtlCol="0" anchor="ctr"/>
+          <a:lstStyle/>
+          <a:p>
+            <a:pPr algn="ctr"/>
+          </a:p>
+        </p:txBody>
+      </p:sp>
+      <p:sp>
+        <p:nvSpPr>
+          <p:cNvPr id="31" name="TextBox 30"/>
+          <p:cNvSpPr txBox="1"/>
+          <p:nvPr/>
+        </p:nvSpPr>
+        <p:spPr>
+          <a:xfrm>
+            <a:off x="2834640" y="5650992"/>
+            <a:ext cx="1828800" cy="182880"/>
+          </a:xfrm>
+          <a:prstGeom prst="rect">
+            <a:avLst/>
+          </a:prstGeom>
+          <a:noFill/>
+        </p:spPr>
+        <p:txBody>
+          <a:bodyPr wrap="none">
+            <a:spAutoFit/>
+          </a:bodyPr>
+          <a:lstStyle/>
           <a:p>
             <a:pPr>
-              <a:spcAft>
-                <a:spcPts val="800"/>
-              </a:spcAft>
-              <a:defRPr sz="1400">
-                <a:solidFill>
-                  <a:srgbClr val="C0C8E0"/>
-                </a:solidFill>
-                <a:latin typeface="Roboto"/>
-              </a:defRPr>
-            </a:pPr>
-            <a:r>
-              <a:t>    Resonance Orchestrator: Split In Batches (50) injected</a:t>
-            </a:r>
-          </a:p>
+              <a:defRPr sz="800">
+                <a:solidFill>
+                  <a:srgbClr val="94A3B8"/>
+                </a:solidFill>
+              </a:defRPr>
+            </a:pPr>
+            <a:r>
+              <a:t>Intelligence (4)</a:t>
+            </a:r>
+          </a:p>
+        </p:txBody>
+      </p:sp>
+      <p:sp>
+        <p:nvSpPr>
+          <p:cNvPr id="32" name="Oval 31"/>
+          <p:cNvSpPr/>
+          <p:nvPr/>
+        </p:nvSpPr>
+        <p:spPr>
+          <a:xfrm>
+            <a:off x="4846320" y="5669280"/>
+            <a:ext cx="137160" cy="137160"/>
+          </a:xfrm>
+          <a:prstGeom prst="ellipse">
+            <a:avLst/>
+          </a:prstGeom>
+          <a:solidFill>
+            <a:srgbClr val="F97316"/>
+          </a:solidFill>
+          <a:ln>
+            <a:noFill/>
+          </a:ln>
+        </p:spPr>
+        <p:style>
+          <a:lnRef idx="1">
+            <a:schemeClr val="accent1"/>
+          </a:lnRef>
+          <a:fillRef idx="3">
+            <a:schemeClr val="accent1"/>
+          </a:fillRef>
+          <a:effectRef idx="2">
+            <a:schemeClr val="accent1"/>
+          </a:effectRef>
+          <a:fontRef idx="minor">
+            <a:schemeClr val="lt1"/>
+          </a:fontRef>
+        </p:style>
+        <p:txBody>
+          <a:bodyPr rtlCol="0" anchor="ctr"/>
+          <a:lstStyle/>
+          <a:p>
+            <a:pPr algn="ctr"/>
+          </a:p>
+        </p:txBody>
+      </p:sp>
+      <p:sp>
+        <p:nvSpPr>
+          <p:cNvPr id="33" name="TextBox 32"/>
+          <p:cNvSpPr txBox="1"/>
+          <p:nvPr/>
+        </p:nvSpPr>
+        <p:spPr>
+          <a:xfrm>
+            <a:off x="5029200" y="5650992"/>
+            <a:ext cx="1828800" cy="182880"/>
+          </a:xfrm>
+          <a:prstGeom prst="rect">
+            <a:avLst/>
+          </a:prstGeom>
+          <a:noFill/>
+        </p:spPr>
+        <p:txBody>
+          <a:bodyPr wrap="none">
+            <a:spAutoFit/>
+          </a:bodyPr>
+          <a:lstStyle/>
           <a:p>
             <a:pPr>
-              <a:spcAft>
-                <a:spcPts val="800"/>
-              </a:spcAft>
-              <a:defRPr sz="1400">
-                <a:solidFill>
-                  <a:srgbClr val="C0C8E0"/>
-                </a:solidFill>
-                <a:latin typeface="Roboto"/>
-              </a:defRPr>
-            </a:pPr>
-            <a:r>
-              <a:t>    Projected failure rate drop: 98.3% → ~12%</a:t>
-            </a:r>
-          </a:p>
+              <a:defRPr sz="800">
+                <a:solidFill>
+                  <a:srgbClr val="94A3B8"/>
+                </a:solidFill>
+              </a:defRPr>
+            </a:pPr>
+            <a:r>
+              <a:t>Quality Gate (3)</a:t>
+            </a:r>
+          </a:p>
+        </p:txBody>
+      </p:sp>
+      <p:sp>
+        <p:nvSpPr>
+          <p:cNvPr id="34" name="Oval 33"/>
+          <p:cNvSpPr/>
+          <p:nvPr/>
+        </p:nvSpPr>
+        <p:spPr>
+          <a:xfrm>
+            <a:off x="7040879" y="5669280"/>
+            <a:ext cx="137160" cy="137160"/>
+          </a:xfrm>
+          <a:prstGeom prst="ellipse">
+            <a:avLst/>
+          </a:prstGeom>
+          <a:solidFill>
+            <a:srgbClr val="764BA2"/>
+          </a:solidFill>
+          <a:ln>
+            <a:noFill/>
+          </a:ln>
+        </p:spPr>
+        <p:style>
+          <a:lnRef idx="1">
+            <a:schemeClr val="accent1"/>
+          </a:lnRef>
+          <a:fillRef idx="3">
+            <a:schemeClr val="accent1"/>
+          </a:fillRef>
+          <a:effectRef idx="2">
+            <a:schemeClr val="accent1"/>
+          </a:effectRef>
+          <a:fontRef idx="minor">
+            <a:schemeClr val="lt1"/>
+          </a:fontRef>
+        </p:style>
+        <p:txBody>
+          <a:bodyPr rtlCol="0" anchor="ctr"/>
+          <a:lstStyle/>
+          <a:p>
+            <a:pPr algn="ctr"/>
+          </a:p>
+        </p:txBody>
+      </p:sp>
+      <p:sp>
+        <p:nvSpPr>
+          <p:cNvPr id="35" name="TextBox 34"/>
+          <p:cNvSpPr txBox="1"/>
+          <p:nvPr/>
+        </p:nvSpPr>
+        <p:spPr>
+          <a:xfrm>
+            <a:off x="7223759" y="5650992"/>
+            <a:ext cx="1828800" cy="182880"/>
+          </a:xfrm>
+          <a:prstGeom prst="rect">
+            <a:avLst/>
+          </a:prstGeom>
+          <a:noFill/>
+        </p:spPr>
+        <p:txBody>
+          <a:bodyPr wrap="none">
+            <a:spAutoFit/>
+          </a:bodyPr>
+          <a:lstStyle/>
           <a:p>
             <a:pPr>
-              <a:spcAft>
-                <a:spcPts val="800"/>
-              </a:spcAft>
-              <a:defRPr sz="1400">
-                <a:solidFill>
-                  <a:srgbClr val="C0C8E0"/>
-                </a:solidFill>
-                <a:latin typeface="Roboto"/>
-              </a:defRPr>
-            </a:pPr>
-            <a:r>
-              <a:t>    Self-heal pipeline engaged via Sentinel Protocol</a:t>
+              <a:defRPr sz="800">
+                <a:solidFill>
+                  <a:srgbClr val="94A3B8"/>
+                </a:solidFill>
+              </a:defRPr>
+            </a:pPr>
+            <a:r>
+              <a:t>Executive (3)</a:t>
+            </a:r>
+          </a:p>
+        </p:txBody>
+      </p:sp>
+      <p:sp>
+        <p:nvSpPr>
+          <p:cNvPr id="36" name="Oval 35"/>
+          <p:cNvSpPr/>
+          <p:nvPr/>
+        </p:nvSpPr>
+        <p:spPr>
+          <a:xfrm>
+            <a:off x="9235440" y="5669280"/>
+            <a:ext cx="137160" cy="137160"/>
+          </a:xfrm>
+          <a:prstGeom prst="ellipse">
+            <a:avLst/>
+          </a:prstGeom>
+          <a:solidFill>
+            <a:srgbClr val="EAB308"/>
+          </a:solidFill>
+          <a:ln>
+            <a:noFill/>
+          </a:ln>
+        </p:spPr>
+        <p:style>
+          <a:lnRef idx="1">
+            <a:schemeClr val="accent1"/>
+          </a:lnRef>
+          <a:fillRef idx="3">
+            <a:schemeClr val="accent1"/>
+          </a:fillRef>
+          <a:effectRef idx="2">
+            <a:schemeClr val="accent1"/>
+          </a:effectRef>
+          <a:fontRef idx="minor">
+            <a:schemeClr val="lt1"/>
+          </a:fontRef>
+        </p:style>
+        <p:txBody>
+          <a:bodyPr rtlCol="0" anchor="ctr"/>
+          <a:lstStyle/>
+          <a:p>
+            <a:pPr algn="ctr"/>
+          </a:p>
+        </p:txBody>
+      </p:sp>
+      <p:sp>
+        <p:nvSpPr>
+          <p:cNvPr id="37" name="TextBox 36"/>
+          <p:cNvSpPr txBox="1"/>
+          <p:nvPr/>
+        </p:nvSpPr>
+        <p:spPr>
+          <a:xfrm>
+            <a:off x="9418319" y="5650992"/>
+            <a:ext cx="1828800" cy="182880"/>
+          </a:xfrm>
+          <a:prstGeom prst="rect">
+            <a:avLst/>
+          </a:prstGeom>
+          <a:noFill/>
+        </p:spPr>
+        <p:txBody>
+          <a:bodyPr wrap="none">
+            <a:spAutoFit/>
+          </a:bodyPr>
+          <a:lstStyle/>
+          <a:p>
+            <a:pPr>
+              <a:defRPr sz="800">
+                <a:solidFill>
+                  <a:srgbClr val="94A3B8"/>
+                </a:solidFill>
+              </a:defRPr>
+            </a:pPr>
+            <a:r>
+              <a:t>Creative (2)</a:t>
             </a:r>
           </a:p>
         </p:txBody>
@@ -6094,8 +5613,8 @@
         </p:nvSpPr>
         <p:spPr>
           <a:xfrm>
-            <a:off x="731520" y="457200"/>
-            <a:ext cx="10058400" cy="914400"/>
+            <a:off x="8686800" y="6263640"/>
+            <a:ext cx="3200400" cy="228600"/>
           </a:xfrm>
           <a:prstGeom prst="rect">
             <a:avLst/>
@@ -6108,16 +5627,15 @@
           </a:bodyPr>
           <a:lstStyle/>
           <a:p>
-            <a:pPr>
-              <a:defRPr sz="2800" b="1">
-                <a:solidFill>
-                  <a:srgbClr val="FFFFFF"/>
-                </a:solidFill>
-                <a:latin typeface="Inter"/>
-              </a:defRPr>
-            </a:pPr>
-            <a:r>
-              <a:t>Financial Projections (5-Year)</a:t>
+            <a:pPr algn="r">
+              <a:defRPr sz="700">
+                <a:solidFill>
+                  <a:srgbClr val="4A4A6A"/>
+                </a:solidFill>
+              </a:defRPr>
+            </a:pPr>
+            <a:r>
+              <a:t>Layout: chart_left_bullets_right</a:t>
             </a:r>
           </a:p>
         </p:txBody>
@@ -6130,432 +5648,8 @@
         </p:nvSpPr>
         <p:spPr>
           <a:xfrm>
-            <a:off x="8229600" y="274320"/>
-            <a:ext cx="3200400" cy="182880"/>
-          </a:xfrm>
-          <a:prstGeom prst="rect">
-            <a:avLst/>
-          </a:prstGeom>
-          <a:noFill/>
-        </p:spPr>
-        <p:txBody>
-          <a:bodyPr wrap="none">
-            <a:spAutoFit/>
-          </a:bodyPr>
-          <a:lstStyle/>
-          <a:p>
-            <a:pPr>
-              <a:defRPr sz="700">
-                <a:solidFill>
-                  <a:srgbClr val="4A4A6A"/>
-                </a:solidFill>
-              </a:defRPr>
-            </a:pPr>
-            <a:r>
-              <a:t>Design: library</a:t>
-            </a:r>
-          </a:p>
-        </p:txBody>
-      </p:sp>
-      <p:sp>
-        <p:nvSpPr>
-          <p:cNvPr id="5" name="Rounded Rectangle 4"/>
-          <p:cNvSpPr/>
-          <p:nvPr/>
-        </p:nvSpPr>
-        <p:spPr>
-          <a:xfrm>
-            <a:off x="731520" y="1463040"/>
-            <a:ext cx="1828800" cy="1097280"/>
-          </a:xfrm>
-          <a:prstGeom prst="roundRect">
-            <a:avLst/>
-          </a:prstGeom>
-          <a:solidFill>
-            <a:srgbClr val="1A1A2E"/>
-          </a:solidFill>
-          <a:ln w="25400">
-            <a:solidFill>
-              <a:srgbClr val="10B981"/>
-            </a:solidFill>
-          </a:ln>
-        </p:spPr>
-        <p:style>
-          <a:lnRef idx="1">
-            <a:schemeClr val="accent1"/>
-          </a:lnRef>
-          <a:fillRef idx="3">
-            <a:schemeClr val="accent1"/>
-          </a:fillRef>
-          <a:effectRef idx="2">
-            <a:schemeClr val="accent1"/>
-          </a:effectRef>
-          <a:fontRef idx="minor">
-            <a:schemeClr val="lt1"/>
-          </a:fontRef>
-        </p:style>
-        <p:txBody>
-          <a:bodyPr rtlCol="0" anchor="ctr" wrap="square"/>
-          <a:lstStyle/>
-          <a:p>
-            <a:pPr algn="ctr">
-              <a:defRPr sz="2400" b="1">
-                <a:solidFill>
-                  <a:srgbClr val="10B981"/>
-                </a:solidFill>
-                <a:latin typeface="Inter"/>
-              </a:defRPr>
-            </a:pPr>
-            <a:r>
-              <a:t>Month 2</a:t>
-            </a:r>
-          </a:p>
-          <a:p>
-            <a:pPr algn="ctr">
-              <a:defRPr sz="900">
-                <a:solidFill>
-                  <a:srgbClr val="94A3B8"/>
-                </a:solidFill>
-              </a:defRPr>
-            </a:pPr>
-            <a:r>
-              <a:t>Break-Even</a:t>
-            </a:r>
-          </a:p>
-        </p:txBody>
-      </p:sp>
-      <p:sp>
-        <p:nvSpPr>
-          <p:cNvPr id="6" name="Rounded Rectangle 5"/>
-          <p:cNvSpPr/>
-          <p:nvPr/>
-        </p:nvSpPr>
-        <p:spPr>
-          <a:xfrm>
-            <a:off x="2926080" y="1463040"/>
-            <a:ext cx="1828800" cy="1097280"/>
-          </a:xfrm>
-          <a:prstGeom prst="roundRect">
-            <a:avLst/>
-          </a:prstGeom>
-          <a:solidFill>
-            <a:srgbClr val="1A1A2E"/>
-          </a:solidFill>
-          <a:ln w="25400">
-            <a:solidFill>
-              <a:srgbClr val="667EEA"/>
-            </a:solidFill>
-          </a:ln>
-        </p:spPr>
-        <p:style>
-          <a:lnRef idx="1">
-            <a:schemeClr val="accent1"/>
-          </a:lnRef>
-          <a:fillRef idx="3">
-            <a:schemeClr val="accent1"/>
-          </a:fillRef>
-          <a:effectRef idx="2">
-            <a:schemeClr val="accent1"/>
-          </a:effectRef>
-          <a:fontRef idx="minor">
-            <a:schemeClr val="lt1"/>
-          </a:fontRef>
-        </p:style>
-        <p:txBody>
-          <a:bodyPr rtlCol="0" anchor="ctr" wrap="square"/>
-          <a:lstStyle/>
-          <a:p>
-            <a:pPr algn="ctr">
-              <a:defRPr sz="2400" b="1">
-                <a:solidFill>
-                  <a:srgbClr val="667EEA"/>
-                </a:solidFill>
-                <a:latin typeface="Inter"/>
-              </a:defRPr>
-            </a:pPr>
-            <a:r>
-              <a:t>$1.2M</a:t>
-            </a:r>
-          </a:p>
-          <a:p>
-            <a:pPr algn="ctr">
-              <a:defRPr sz="900">
-                <a:solidFill>
-                  <a:srgbClr val="94A3B8"/>
-                </a:solidFill>
-              </a:defRPr>
-            </a:pPr>
-            <a:r>
-              <a:t>Y1 Revenue</a:t>
-            </a:r>
-          </a:p>
-        </p:txBody>
-      </p:sp>
-      <p:sp>
-        <p:nvSpPr>
-          <p:cNvPr id="7" name="Rounded Rectangle 6"/>
-          <p:cNvSpPr/>
-          <p:nvPr/>
-        </p:nvSpPr>
-        <p:spPr>
-          <a:xfrm>
-            <a:off x="5120640" y="1463040"/>
-            <a:ext cx="1828800" cy="1097280"/>
-          </a:xfrm>
-          <a:prstGeom prst="roundRect">
-            <a:avLst/>
-          </a:prstGeom>
-          <a:solidFill>
-            <a:srgbClr val="1A1A2E"/>
-          </a:solidFill>
-          <a:ln w="25400">
-            <a:solidFill>
-              <a:srgbClr val="10B981"/>
-            </a:solidFill>
-          </a:ln>
-        </p:spPr>
-        <p:style>
-          <a:lnRef idx="1">
-            <a:schemeClr val="accent1"/>
-          </a:lnRef>
-          <a:fillRef idx="3">
-            <a:schemeClr val="accent1"/>
-          </a:fillRef>
-          <a:effectRef idx="2">
-            <a:schemeClr val="accent1"/>
-          </a:effectRef>
-          <a:fontRef idx="minor">
-            <a:schemeClr val="lt1"/>
-          </a:fontRef>
-        </p:style>
-        <p:txBody>
-          <a:bodyPr rtlCol="0" anchor="ctr" wrap="square"/>
-          <a:lstStyle/>
-          <a:p>
-            <a:pPr algn="ctr">
-              <a:defRPr sz="2400" b="1">
-                <a:solidFill>
-                  <a:srgbClr val="10B981"/>
-                </a:solidFill>
-                <a:latin typeface="Inter"/>
-              </a:defRPr>
-            </a:pPr>
-            <a:r>
-              <a:t>$58M+</a:t>
-            </a:r>
-          </a:p>
-          <a:p>
-            <a:pPr algn="ctr">
-              <a:defRPr sz="900">
-                <a:solidFill>
-                  <a:srgbClr val="94A3B8"/>
-                </a:solidFill>
-              </a:defRPr>
-            </a:pPr>
-            <a:r>
-              <a:t>Y5 Revenue</a:t>
-            </a:r>
-          </a:p>
-        </p:txBody>
-      </p:sp>
-      <p:sp>
-        <p:nvSpPr>
-          <p:cNvPr id="8" name="Rounded Rectangle 7"/>
-          <p:cNvSpPr/>
-          <p:nvPr/>
-        </p:nvSpPr>
-        <p:spPr>
-          <a:xfrm>
-            <a:off x="7315200" y="1463040"/>
-            <a:ext cx="1828800" cy="1097280"/>
-          </a:xfrm>
-          <a:prstGeom prst="roundRect">
-            <a:avLst/>
-          </a:prstGeom>
-          <a:solidFill>
-            <a:srgbClr val="1A1A2E"/>
-          </a:solidFill>
-          <a:ln w="25400">
-            <a:solidFill>
-              <a:srgbClr val="667EEA"/>
-            </a:solidFill>
-          </a:ln>
-        </p:spPr>
-        <p:style>
-          <a:lnRef idx="1">
-            <a:schemeClr val="accent1"/>
-          </a:lnRef>
-          <a:fillRef idx="3">
-            <a:schemeClr val="accent1"/>
-          </a:fillRef>
-          <a:effectRef idx="2">
-            <a:schemeClr val="accent1"/>
-          </a:effectRef>
-          <a:fontRef idx="minor">
-            <a:schemeClr val="lt1"/>
-          </a:fontRef>
-        </p:style>
-        <p:txBody>
-          <a:bodyPr rtlCol="0" anchor="ctr" wrap="square"/>
-          <a:lstStyle/>
-          <a:p>
-            <a:pPr algn="ctr">
-              <a:defRPr sz="2400" b="1">
-                <a:solidFill>
-                  <a:srgbClr val="667EEA"/>
-                </a:solidFill>
-                <a:latin typeface="Inter"/>
-              </a:defRPr>
-            </a:pPr>
-            <a:r>
-              <a:t>&gt;5000%</a:t>
-            </a:r>
-          </a:p>
-          <a:p>
-            <a:pPr algn="ctr">
-              <a:defRPr sz="900">
-                <a:solidFill>
-                  <a:srgbClr val="94A3B8"/>
-                </a:solidFill>
-              </a:defRPr>
-            </a:pPr>
-            <a:r>
-              <a:t>5Y ROI</a:t>
-            </a:r>
-          </a:p>
-        </p:txBody>
-      </p:sp>
-      <p:sp>
-        <p:nvSpPr>
-          <p:cNvPr id="9" name="Rounded Rectangle 8"/>
-          <p:cNvSpPr/>
-          <p:nvPr/>
-        </p:nvSpPr>
-        <p:spPr>
-          <a:xfrm>
-            <a:off x="9509760" y="1463040"/>
-            <a:ext cx="1828800" cy="1097280"/>
-          </a:xfrm>
-          <a:prstGeom prst="roundRect">
-            <a:avLst/>
-          </a:prstGeom>
-          <a:solidFill>
-            <a:srgbClr val="1A1A2E"/>
-          </a:solidFill>
-          <a:ln w="25400">
-            <a:solidFill>
-              <a:srgbClr val="EAB308"/>
-            </a:solidFill>
-          </a:ln>
-        </p:spPr>
-        <p:style>
-          <a:lnRef idx="1">
-            <a:schemeClr val="accent1"/>
-          </a:lnRef>
-          <a:fillRef idx="3">
-            <a:schemeClr val="accent1"/>
-          </a:fillRef>
-          <a:effectRef idx="2">
-            <a:schemeClr val="accent1"/>
-          </a:effectRef>
-          <a:fontRef idx="minor">
-            <a:schemeClr val="lt1"/>
-          </a:fontRef>
-        </p:style>
-        <p:txBody>
-          <a:bodyPr rtlCol="0" anchor="ctr" wrap="square"/>
-          <a:lstStyle/>
-          <a:p>
-            <a:pPr algn="ctr">
-              <a:defRPr sz="2400" b="1">
-                <a:solidFill>
-                  <a:srgbClr val="EAB308"/>
-                </a:solidFill>
-                <a:latin typeface="Inter"/>
-              </a:defRPr>
-            </a:pPr>
-            <a:r>
-              <a:t>74.9%</a:t>
-            </a:r>
-          </a:p>
-          <a:p>
-            <a:pPr algn="ctr">
-              <a:defRPr sz="900">
-                <a:solidFill>
-                  <a:srgbClr val="94A3B8"/>
-                </a:solidFill>
-              </a:defRPr>
-            </a:pPr>
-            <a:r>
-              <a:t>Margin</a:t>
-            </a:r>
-          </a:p>
-        </p:txBody>
-      </p:sp>
-      <p:sp>
-        <p:nvSpPr>
-          <p:cNvPr id="10" name="Rounded Rectangle 9"/>
-          <p:cNvSpPr/>
-          <p:nvPr/>
-        </p:nvSpPr>
-        <p:spPr>
-          <a:xfrm>
-            <a:off x="731520" y="2926080"/>
-            <a:ext cx="10058400" cy="457200"/>
-          </a:xfrm>
-          <a:prstGeom prst="roundRect">
-            <a:avLst/>
-          </a:prstGeom>
-          <a:solidFill>
-            <a:srgbClr val="1A1A2E"/>
-          </a:solidFill>
-          <a:ln w="12700">
-            <a:solidFill>
-              <a:srgbClr val="10B981"/>
-            </a:solidFill>
-          </a:ln>
-        </p:spPr>
-        <p:style>
-          <a:lnRef idx="1">
-            <a:schemeClr val="accent1"/>
-          </a:lnRef>
-          <a:fillRef idx="3">
-            <a:schemeClr val="accent1"/>
-          </a:fillRef>
-          <a:effectRef idx="2">
-            <a:schemeClr val="accent1"/>
-          </a:effectRef>
-          <a:fontRef idx="minor">
-            <a:schemeClr val="lt1"/>
-          </a:fontRef>
-        </p:style>
-        <p:txBody>
-          <a:bodyPr rtlCol="0" anchor="ctr"/>
-          <a:lstStyle/>
-          <a:p>
-            <a:pPr algn="ctr">
-              <a:defRPr sz="1000" i="1">
-                <a:solidFill>
-                  <a:srgbClr val="10B981"/>
-                </a:solidFill>
-              </a:defRPr>
-            </a:pPr>
-            <a:r>
-              <a:t>Charts: Delegate_AI_V3_Projections.xlsx → 5-Year Break-Even + Market Share</a:t>
-            </a:r>
-          </a:p>
-        </p:txBody>
-      </p:sp>
-      <p:sp>
-        <p:nvSpPr>
-          <p:cNvPr id="11" name="TextBox 10"/>
-          <p:cNvSpPr txBox="1"/>
-          <p:nvPr/>
-        </p:nvSpPr>
-        <p:spPr>
-          <a:xfrm>
-            <a:off x="731520" y="3657600"/>
-            <a:ext cx="10058400" cy="3200400"/>
+            <a:off x="731520" y="457200"/>
+            <a:ext cx="10058400" cy="914400"/>
           </a:xfrm>
           <a:prstGeom prst="rect">
             <a:avLst/>
@@ -6569,26 +5663,46 @@
           <a:lstStyle/>
           <a:p>
             <a:pPr>
-              <a:spcAft>
-                <a:spcPts val="800"/>
-              </a:spcAft>
-              <a:defRPr sz="1400">
-                <a:solidFill>
-                  <a:srgbClr val="C0C8E0"/>
-                </a:solidFill>
-                <a:latin typeface="Roboto"/>
-              </a:defRPr>
-            </a:pPr>
-            <a:r>
-              <a:t>    60-month P&amp;L, 100% formula-driven from 'Inputs &amp; Assumptions'</a:t>
-            </a:r>
-          </a:p>
+              <a:defRPr sz="2800" b="1">
+                <a:solidFill>
+                  <a:srgbClr val="FFFFFF"/>
+                </a:solidFill>
+                <a:latin typeface="Inter"/>
+              </a:defRPr>
+            </a:pPr>
+            <a:r>
+              <a:t>Financial Projections</a:t>
+            </a:r>
+          </a:p>
+        </p:txBody>
+      </p:sp>
+      <p:sp>
+        <p:nvSpPr>
+          <p:cNvPr id="5" name="TextBox 4"/>
+          <p:cNvSpPr txBox="1"/>
+          <p:nvPr/>
+        </p:nvSpPr>
+        <p:spPr>
+          <a:xfrm>
+            <a:off x="731520" y="1645920"/>
+            <a:ext cx="10058400" cy="4389120"/>
+          </a:xfrm>
+          <a:prstGeom prst="rect">
+            <a:avLst/>
+          </a:prstGeom>
+          <a:noFill/>
+        </p:spPr>
+        <p:txBody>
+          <a:bodyPr wrap="square">
+            <a:spAutoFit/>
+          </a:bodyPr>
+          <a:lstStyle/>
           <a:p>
             <a:pPr>
               <a:spcAft>
-                <a:spcPts val="800"/>
+                <a:spcPts val="1200"/>
               </a:spcAft>
-              <a:defRPr sz="1400">
+              <a:defRPr sz="1500">
                 <a:solidFill>
                   <a:srgbClr val="C0C8E0"/>
                 </a:solidFill>
@@ -6596,15 +5710,15 @@
               </a:defRPr>
             </a:pPr>
             <a:r>
-              <a:t>    Change Agent Cost → entire 5-year ROI recalculates</a:t>
+              <a:t>    Break-even: Month 2</a:t>
             </a:r>
           </a:p>
           <a:p>
             <a:pPr>
               <a:spcAft>
-                <a:spcPts val="800"/>
+                <a:spcPts val="1200"/>
               </a:spcAft>
-              <a:defRPr sz="1400">
+              <a:defRPr sz="1500">
                 <a:solidFill>
                   <a:srgbClr val="C0C8E0"/>
                 </a:solidFill>
@@ -6612,7 +5726,67 @@
               </a:defRPr>
             </a:pPr>
             <a:r>
-              <a:t>    Sensitivity: profitable even at costs doubled</a:t>
+              <a:t>    Year 1 Revenue: $1.2M</a:t>
+            </a:r>
+          </a:p>
+          <a:p>
+            <a:pPr>
+              <a:spcAft>
+                <a:spcPts val="1200"/>
+              </a:spcAft>
+              <a:defRPr sz="1500">
+                <a:solidFill>
+                  <a:srgbClr val="C0C8E0"/>
+                </a:solidFill>
+                <a:latin typeface="Roboto"/>
+              </a:defRPr>
+            </a:pPr>
+            <a:r>
+              <a:t>    Gross Margin: 68%</a:t>
+            </a:r>
+          </a:p>
+          <a:p>
+            <a:pPr>
+              <a:spcAft>
+                <a:spcPts val="1200"/>
+              </a:spcAft>
+              <a:defRPr sz="1500">
+                <a:solidFill>
+                  <a:srgbClr val="C0C8E0"/>
+                </a:solidFill>
+                <a:latin typeface="Roboto"/>
+              </a:defRPr>
+            </a:pPr>
+            <a:r>
+              <a:t>    Cost per agent: $0.02/decision (token-efficient)</a:t>
+            </a:r>
+          </a:p>
+          <a:p>
+            <a:pPr>
+              <a:spcAft>
+                <a:spcPts val="1200"/>
+              </a:spcAft>
+              <a:defRPr sz="1500">
+                <a:solidFill>
+                  <a:srgbClr val="C0C8E0"/>
+                </a:solidFill>
+                <a:latin typeface="Roboto"/>
+              </a:defRPr>
+            </a:pPr>
+            <a:r>
+              <a:t>    See attached XLSX: 12-month P&amp;L + Charts</a:t>
+            </a:r>
+          </a:p>
+          <a:p>
+            <a:pPr>
+              <a:defRPr sz="1000" i="1">
+                <a:solidFill>
+                  <a:srgbClr val="10B981"/>
+                </a:solidFill>
+              </a:defRPr>
+            </a:pPr>
+            <a:r>
+              <a:t>    Chart linked: Delegate_AI_2026_Projections_V2.xlsx</a:t>
             </a:r>
           </a:p>
         </p:txBody>
@@ -6694,8 +5868,8 @@
         </p:nvSpPr>
         <p:spPr>
           <a:xfrm>
-            <a:off x="731520" y="457200"/>
-            <a:ext cx="10058400" cy="914400"/>
+            <a:off x="8686800" y="6263640"/>
+            <a:ext cx="3200400" cy="228600"/>
           </a:xfrm>
           <a:prstGeom prst="rect">
             <a:avLst/>
@@ -6708,298 +5882,29 @@
           </a:bodyPr>
           <a:lstStyle/>
           <a:p>
-            <a:pPr>
-              <a:defRPr sz="2800" b="1">
-                <a:solidFill>
-                  <a:srgbClr val="FFFFFF"/>
-                </a:solidFill>
-                <a:latin typeface="Inter"/>
-              </a:defRPr>
-            </a:pPr>
-            <a:r>
-              <a:t>Sensitivity Analysis</a:t>
-            </a:r>
-          </a:p>
-        </p:txBody>
-      </p:sp>
-      <p:sp>
-        <p:nvSpPr>
-          <p:cNvPr id="4" name="Rounded Rectangle 3"/>
-          <p:cNvSpPr/>
-          <p:nvPr/>
-        </p:nvSpPr>
-        <p:spPr>
-          <a:xfrm>
-            <a:off x="731520" y="1463040"/>
-            <a:ext cx="1828800" cy="1097280"/>
-          </a:xfrm>
-          <a:prstGeom prst="roundRect">
-            <a:avLst/>
-          </a:prstGeom>
-          <a:solidFill>
-            <a:srgbClr val="1A1A2E"/>
-          </a:solidFill>
-          <a:ln w="25400">
-            <a:solidFill>
-              <a:srgbClr val="10B981"/>
-            </a:solidFill>
-          </a:ln>
-        </p:spPr>
-        <p:style>
-          <a:lnRef idx="1">
-            <a:schemeClr val="accent1"/>
-          </a:lnRef>
-          <a:fillRef idx="3">
-            <a:schemeClr val="accent1"/>
-          </a:fillRef>
-          <a:effectRef idx="2">
-            <a:schemeClr val="accent1"/>
-          </a:effectRef>
-          <a:fontRef idx="minor">
-            <a:schemeClr val="lt1"/>
-          </a:fontRef>
-        </p:style>
-        <p:txBody>
-          <a:bodyPr rtlCol="0" anchor="ctr" wrap="square"/>
-          <a:lstStyle/>
-          <a:p>
-            <a:pPr algn="ctr">
-              <a:defRPr sz="2400" b="1">
-                <a:solidFill>
-                  <a:srgbClr val="10B981"/>
-                </a:solidFill>
-                <a:latin typeface="Inter"/>
-              </a:defRPr>
-            </a:pPr>
-            <a:r>
-              <a:t>74.9%</a:t>
-            </a:r>
-          </a:p>
-          <a:p>
-            <a:pPr algn="ctr">
-              <a:defRPr sz="900">
-                <a:solidFill>
-                  <a:srgbClr val="94A3B8"/>
-                </a:solidFill>
-              </a:defRPr>
-            </a:pPr>
-            <a:r>
-              <a:t>Base</a:t>
-            </a:r>
-          </a:p>
-        </p:txBody>
-      </p:sp>
-      <p:sp>
-        <p:nvSpPr>
-          <p:cNvPr id="5" name="Rounded Rectangle 4"/>
-          <p:cNvSpPr/>
-          <p:nvPr/>
-        </p:nvSpPr>
-        <p:spPr>
-          <a:xfrm>
-            <a:off x="3291839" y="1463040"/>
-            <a:ext cx="1828800" cy="1097280"/>
-          </a:xfrm>
-          <a:prstGeom prst="roundRect">
-            <a:avLst/>
-          </a:prstGeom>
-          <a:solidFill>
-            <a:srgbClr val="1A1A2E"/>
-          </a:solidFill>
-          <a:ln w="25400">
-            <a:solidFill>
-              <a:srgbClr val="667EEA"/>
-            </a:solidFill>
-          </a:ln>
-        </p:spPr>
-        <p:style>
-          <a:lnRef idx="1">
-            <a:schemeClr val="accent1"/>
-          </a:lnRef>
-          <a:fillRef idx="3">
-            <a:schemeClr val="accent1"/>
-          </a:fillRef>
-          <a:effectRef idx="2">
-            <a:schemeClr val="accent1"/>
-          </a:effectRef>
-          <a:fontRef idx="minor">
-            <a:schemeClr val="lt1"/>
-          </a:fontRef>
-        </p:style>
-        <p:txBody>
-          <a:bodyPr rtlCol="0" anchor="ctr" wrap="square"/>
-          <a:lstStyle/>
-          <a:p>
-            <a:pPr algn="ctr">
-              <a:defRPr sz="2400" b="1">
-                <a:solidFill>
-                  <a:srgbClr val="667EEA"/>
-                </a:solidFill>
-                <a:latin typeface="Inter"/>
-              </a:defRPr>
-            </a:pPr>
-            <a:r>
-              <a:t>~62%</a:t>
-            </a:r>
-          </a:p>
-          <a:p>
-            <a:pPr algn="ctr">
-              <a:defRPr sz="900">
-                <a:solidFill>
-                  <a:srgbClr val="94A3B8"/>
-                </a:solidFill>
-              </a:defRPr>
-            </a:pPr>
-            <a:r>
-              <a:t>+50%</a:t>
-            </a:r>
-          </a:p>
-        </p:txBody>
-      </p:sp>
-      <p:sp>
-        <p:nvSpPr>
-          <p:cNvPr id="6" name="Rounded Rectangle 5"/>
-          <p:cNvSpPr/>
-          <p:nvPr/>
-        </p:nvSpPr>
-        <p:spPr>
-          <a:xfrm>
-            <a:off x="5852159" y="1463040"/>
-            <a:ext cx="1828800" cy="1097280"/>
-          </a:xfrm>
-          <a:prstGeom prst="roundRect">
-            <a:avLst/>
-          </a:prstGeom>
-          <a:solidFill>
-            <a:srgbClr val="1A1A2E"/>
-          </a:solidFill>
-          <a:ln w="25400">
-            <a:solidFill>
-              <a:srgbClr val="EAB308"/>
-            </a:solidFill>
-          </a:ln>
-        </p:spPr>
-        <p:style>
-          <a:lnRef idx="1">
-            <a:schemeClr val="accent1"/>
-          </a:lnRef>
-          <a:fillRef idx="3">
-            <a:schemeClr val="accent1"/>
-          </a:fillRef>
-          <a:effectRef idx="2">
-            <a:schemeClr val="accent1"/>
-          </a:effectRef>
-          <a:fontRef idx="minor">
-            <a:schemeClr val="lt1"/>
-          </a:fontRef>
-        </p:style>
-        <p:txBody>
-          <a:bodyPr rtlCol="0" anchor="ctr" wrap="square"/>
-          <a:lstStyle/>
-          <a:p>
-            <a:pPr algn="ctr">
-              <a:defRPr sz="2400" b="1">
-                <a:solidFill>
-                  <a:srgbClr val="EAB308"/>
-                </a:solidFill>
-                <a:latin typeface="Inter"/>
-              </a:defRPr>
-            </a:pPr>
-            <a:r>
-              <a:t>~49%</a:t>
-            </a:r>
-          </a:p>
-          <a:p>
-            <a:pPr algn="ctr">
-              <a:defRPr sz="900">
-                <a:solidFill>
-                  <a:srgbClr val="94A3B8"/>
-                </a:solidFill>
-              </a:defRPr>
-            </a:pPr>
-            <a:r>
-              <a:t>Doubled</a:t>
-            </a:r>
-          </a:p>
-        </p:txBody>
-      </p:sp>
-      <p:sp>
-        <p:nvSpPr>
-          <p:cNvPr id="7" name="Rounded Rectangle 6"/>
-          <p:cNvSpPr/>
-          <p:nvPr/>
-        </p:nvSpPr>
-        <p:spPr>
-          <a:xfrm>
-            <a:off x="8412480" y="1463040"/>
-            <a:ext cx="1828800" cy="1097280"/>
-          </a:xfrm>
-          <a:prstGeom prst="roundRect">
-            <a:avLst/>
-          </a:prstGeom>
-          <a:solidFill>
-            <a:srgbClr val="1A1A2E"/>
-          </a:solidFill>
-          <a:ln w="25400">
-            <a:solidFill>
-              <a:srgbClr val="EF4444"/>
-            </a:solidFill>
-          </a:ln>
-        </p:spPr>
-        <p:style>
-          <a:lnRef idx="1">
-            <a:schemeClr val="accent1"/>
-          </a:lnRef>
-          <a:fillRef idx="3">
-            <a:schemeClr val="accent1"/>
-          </a:fillRef>
-          <a:effectRef idx="2">
-            <a:schemeClr val="accent1"/>
-          </a:effectRef>
-          <a:fontRef idx="minor">
-            <a:schemeClr val="lt1"/>
-          </a:fontRef>
-        </p:style>
-        <p:txBody>
-          <a:bodyPr rtlCol="0" anchor="ctr" wrap="square"/>
-          <a:lstStyle/>
-          <a:p>
-            <a:pPr algn="ctr">
-              <a:defRPr sz="2400" b="1">
-                <a:solidFill>
-                  <a:srgbClr val="EF4444"/>
-                </a:solidFill>
-                <a:latin typeface="Inter"/>
-              </a:defRPr>
-            </a:pPr>
-            <a:r>
-              <a:t>~24%</a:t>
-            </a:r>
-          </a:p>
-          <a:p>
-            <a:pPr algn="ctr">
-              <a:defRPr sz="900">
-                <a:solidFill>
-                  <a:srgbClr val="94A3B8"/>
-                </a:solidFill>
-              </a:defRPr>
-            </a:pPr>
-            <a:r>
-              <a:t>Tripled</a:t>
-            </a:r>
-          </a:p>
-        </p:txBody>
-      </p:sp>
-      <p:sp>
-        <p:nvSpPr>
-          <p:cNvPr id="8" name="TextBox 7"/>
+            <a:pPr algn="r">
+              <a:defRPr sz="700">
+                <a:solidFill>
+                  <a:srgbClr val="4A4A6A"/>
+                </a:solidFill>
+              </a:defRPr>
+            </a:pPr>
+            <a:r>
+              <a:t>Layout: table_centered</a:t>
+            </a:r>
+          </a:p>
+        </p:txBody>
+      </p:sp>
+      <p:sp>
+        <p:nvSpPr>
+          <p:cNvPr id="4" name="TextBox 3"/>
           <p:cNvSpPr txBox="1"/>
           <p:nvPr/>
         </p:nvSpPr>
         <p:spPr>
           <a:xfrm>
-            <a:off x="731520" y="2926080"/>
-            <a:ext cx="10058400" cy="3200400"/>
+            <a:off x="731520" y="457200"/>
+            <a:ext cx="10058400" cy="914400"/>
           </a:xfrm>
           <a:prstGeom prst="rect">
             <a:avLst/>
@@ -7013,26 +5918,46 @@
           <a:lstStyle/>
           <a:p>
             <a:pPr>
-              <a:spcAft>
-                <a:spcPts val="800"/>
-              </a:spcAft>
-              <a:defRPr sz="1400">
-                <a:solidFill>
-                  <a:srgbClr val="C0C8E0"/>
-                </a:solidFill>
-                <a:latin typeface="Roboto"/>
-              </a:defRPr>
-            </a:pPr>
-            <a:r>
-              <a:t>    Profitable in all cost scenarios through Year 5</a:t>
-            </a:r>
-          </a:p>
+              <a:defRPr sz="2800" b="1">
+                <a:solidFill>
+                  <a:srgbClr val="FFFFFF"/>
+                </a:solidFill>
+                <a:latin typeface="Inter"/>
+              </a:defRPr>
+            </a:pPr>
+            <a:r>
+              <a:t>Sensitivity Analysis</a:t>
+            </a:r>
+          </a:p>
+        </p:txBody>
+      </p:sp>
+      <p:sp>
+        <p:nvSpPr>
+          <p:cNvPr id="5" name="TextBox 4"/>
+          <p:cNvSpPr txBox="1"/>
+          <p:nvPr/>
+        </p:nvSpPr>
+        <p:spPr>
+          <a:xfrm>
+            <a:off x="731520" y="1645920"/>
+            <a:ext cx="10058400" cy="4389120"/>
+          </a:xfrm>
+          <a:prstGeom prst="rect">
+            <a:avLst/>
+          </a:prstGeom>
+          <a:noFill/>
+        </p:spPr>
+        <p:txBody>
+          <a:bodyPr wrap="square">
+            <a:spAutoFit/>
+          </a:bodyPr>
+          <a:lstStyle/>
           <a:p>
             <a:pPr>
               <a:spcAft>
-                <a:spcPts val="800"/>
+                <a:spcPts val="1200"/>
               </a:spcAft>
-              <a:defRPr sz="1400">
+              <a:defRPr sz="1500">
                 <a:solidFill>
                   <a:srgbClr val="C0C8E0"/>
                 </a:solidFill>
@@ -7040,15 +5965,15 @@
               </a:defRPr>
             </a:pPr>
             <a:r>
-              <a:t>    Revenue -20%: margin compressed but sustainable</a:t>
+              <a:t>    Base Case: 74.9% margin, Month 2 break-even</a:t>
             </a:r>
           </a:p>
           <a:p>
             <a:pPr>
               <a:spcAft>
-                <a:spcPts val="800"/>
+                <a:spcPts val="1200"/>
               </a:spcAft>
-              <a:defRPr sz="1400">
+              <a:defRPr sz="1500">
                 <a:solidFill>
                   <a:srgbClr val="C0C8E0"/>
                 </a:solidFill>
@@ -7056,7 +5981,55 @@
               </a:defRPr>
             </a:pPr>
             <a:r>
-              <a:t>    All scenarios formula-driven from Inputs &amp; Assumptions</a:t>
+              <a:t>    Costs +50%: Margin shrinks but remains profitable</a:t>
+            </a:r>
+          </a:p>
+          <a:p>
+            <a:pPr>
+              <a:spcAft>
+                <a:spcPts val="1200"/>
+              </a:spcAft>
+              <a:defRPr sz="1500">
+                <a:solidFill>
+                  <a:srgbClr val="C0C8E0"/>
+                </a:solidFill>
+                <a:latin typeface="Roboto"/>
+              </a:defRPr>
+            </a:pPr>
+            <a:r>
+              <a:t>    Costs Doubled: Still positive annual net profit</a:t>
+            </a:r>
+          </a:p>
+          <a:p>
+            <a:pPr>
+              <a:spcAft>
+                <a:spcPts val="1200"/>
+              </a:spcAft>
+              <a:defRPr sz="1500">
+                <a:solidFill>
+                  <a:srgbClr val="C0C8E0"/>
+                </a:solidFill>
+                <a:latin typeface="Roboto"/>
+              </a:defRPr>
+            </a:pPr>
+            <a:r>
+              <a:t>    Revenue -20%: Margin compressed, breakeven delayed</a:t>
+            </a:r>
+          </a:p>
+          <a:p>
+            <a:pPr>
+              <a:spcAft>
+                <a:spcPts val="1200"/>
+              </a:spcAft>
+              <a:defRPr sz="1500">
+                <a:solidFill>
+                  <a:srgbClr val="C0C8E0"/>
+                </a:solidFill>
+                <a:latin typeface="Roboto"/>
+              </a:defRPr>
+            </a:pPr>
+            <a:r>
+              <a:t>    Full scenario modeling in attached spreadsheet</a:t>
             </a:r>
           </a:p>
         </p:txBody>
@@ -7138,8 +6111,8 @@
         </p:nvSpPr>
         <p:spPr>
           <a:xfrm>
-            <a:off x="731520" y="457200"/>
-            <a:ext cx="10058400" cy="914400"/>
+            <a:off x="8686800" y="6263640"/>
+            <a:ext cx="3200400" cy="228600"/>
           </a:xfrm>
           <a:prstGeom prst="rect">
             <a:avLst/>
@@ -7152,6 +6125,41 @@
           </a:bodyPr>
           <a:lstStyle/>
           <a:p>
+            <a:pPr algn="r">
+              <a:defRPr sz="700">
+                <a:solidFill>
+                  <a:srgbClr val="4A4A6A"/>
+                </a:solidFill>
+              </a:defRPr>
+            </a:pPr>
+            <a:r>
+              <a:t>Layout: horizontal_timeline</a:t>
+            </a:r>
+          </a:p>
+        </p:txBody>
+      </p:sp>
+      <p:sp>
+        <p:nvSpPr>
+          <p:cNvPr id="4" name="TextBox 3"/>
+          <p:cNvSpPr txBox="1"/>
+          <p:nvPr/>
+        </p:nvSpPr>
+        <p:spPr>
+          <a:xfrm>
+            <a:off x="731520" y="457200"/>
+            <a:ext cx="10058400" cy="914400"/>
+          </a:xfrm>
+          <a:prstGeom prst="rect">
+            <a:avLst/>
+          </a:prstGeom>
+          <a:noFill/>
+        </p:spPr>
+        <p:txBody>
+          <a:bodyPr wrap="square">
+            <a:spAutoFit/>
+          </a:bodyPr>
+          <a:lstStyle/>
+          <a:p>
             <a:pPr>
               <a:defRPr sz="2800" b="1">
                 <a:solidFill>
@@ -7163,49 +6171,6 @@
             <a:r>
               <a:t>Growth Roadmap</a:t>
             </a:r>
-          </a:p>
-        </p:txBody>
-      </p:sp>
-      <p:sp>
-        <p:nvSpPr>
-          <p:cNvPr id="4" name="Oval 3"/>
-          <p:cNvSpPr/>
-          <p:nvPr/>
-        </p:nvSpPr>
-        <p:spPr>
-          <a:xfrm>
-            <a:off x="1097280" y="1828800"/>
-            <a:ext cx="274320" cy="274320"/>
-          </a:xfrm>
-          <a:prstGeom prst="ellipse">
-            <a:avLst/>
-          </a:prstGeom>
-          <a:solidFill>
-            <a:srgbClr val="10B981"/>
-          </a:solidFill>
-          <a:ln>
-            <a:noFill/>
-          </a:ln>
-        </p:spPr>
-        <p:style>
-          <a:lnRef idx="1">
-            <a:schemeClr val="accent1"/>
-          </a:lnRef>
-          <a:fillRef idx="3">
-            <a:schemeClr val="accent1"/>
-          </a:fillRef>
-          <a:effectRef idx="2">
-            <a:schemeClr val="accent1"/>
-          </a:effectRef>
-          <a:fontRef idx="minor">
-            <a:schemeClr val="lt1"/>
-          </a:fontRef>
-        </p:style>
-        <p:txBody>
-          <a:bodyPr rtlCol="0" anchor="ctr"/>
-          <a:lstStyle/>
-          <a:p>
-            <a:pPr algn="ctr"/>
           </a:p>
         </p:txBody>
       </p:sp>
@@ -7217,8 +6182,8 @@
         </p:nvSpPr>
         <p:spPr>
           <a:xfrm>
-            <a:off x="457200" y="2194560"/>
-            <a:ext cx="2011680" cy="274320"/>
+            <a:off x="731520" y="1645920"/>
+            <a:ext cx="10058400" cy="4389120"/>
           </a:xfrm>
           <a:prstGeom prst="rect">
             <a:avLst/>
@@ -7226,460 +6191,72 @@
           <a:noFill/>
         </p:spPr>
         <p:txBody>
-          <a:bodyPr wrap="none">
+          <a:bodyPr wrap="square">
             <a:spAutoFit/>
           </a:bodyPr>
           <a:lstStyle/>
           <a:p>
-            <a:pPr algn="ctr">
-              <a:defRPr sz="1200" b="1">
-                <a:solidFill>
-                  <a:srgbClr val="10B981"/>
-                </a:solidFill>
-              </a:defRPr>
-            </a:pPr>
-            <a:r>
-              <a:t>Q2 2026</a:t>
-            </a:r>
-          </a:p>
-        </p:txBody>
-      </p:sp>
-      <p:sp>
-        <p:nvSpPr>
-          <p:cNvPr id="6" name="TextBox 5"/>
-          <p:cNvSpPr txBox="1"/>
-          <p:nvPr/>
-        </p:nvSpPr>
-        <p:spPr>
-          <a:xfrm>
-            <a:off x="457200" y="2560320"/>
-            <a:ext cx="2011680" cy="274320"/>
-          </a:xfrm>
-          <a:prstGeom prst="rect">
-            <a:avLst/>
-          </a:prstGeom>
-          <a:noFill/>
-        </p:spPr>
-        <p:txBody>
-          <a:bodyPr wrap="none">
-            <a:spAutoFit/>
-          </a:bodyPr>
-          <a:lstStyle/>
-          <a:p>
-            <a:pPr algn="ctr">
-              <a:defRPr sz="1000">
+            <a:pPr>
+              <a:spcAft>
+                <a:spcPts val="1200"/>
+              </a:spcAft>
+              <a:defRPr sz="1500">
                 <a:solidFill>
                   <a:srgbClr val="C0C8E0"/>
                 </a:solidFill>
-              </a:defRPr>
-            </a:pPr>
-            <a:r>
-              <a:t>Multi-tenant SaaS</a:t>
-            </a:r>
-          </a:p>
-        </p:txBody>
-      </p:sp>
-      <p:sp>
-        <p:nvSpPr>
-          <p:cNvPr id="7" name="Oval 6"/>
-          <p:cNvSpPr/>
-          <p:nvPr/>
-        </p:nvSpPr>
-        <p:spPr>
-          <a:xfrm>
-            <a:off x="3840480" y="1828800"/>
-            <a:ext cx="274320" cy="274320"/>
-          </a:xfrm>
-          <a:prstGeom prst="ellipse">
-            <a:avLst/>
-          </a:prstGeom>
-          <a:solidFill>
-            <a:srgbClr val="667EEA"/>
-          </a:solidFill>
-          <a:ln>
-            <a:noFill/>
-          </a:ln>
-        </p:spPr>
-        <p:style>
-          <a:lnRef idx="1">
-            <a:schemeClr val="accent1"/>
-          </a:lnRef>
-          <a:fillRef idx="3">
-            <a:schemeClr val="accent1"/>
-          </a:fillRef>
-          <a:effectRef idx="2">
-            <a:schemeClr val="accent1"/>
-          </a:effectRef>
-          <a:fontRef idx="minor">
-            <a:schemeClr val="lt1"/>
-          </a:fontRef>
-        </p:style>
-        <p:txBody>
-          <a:bodyPr rtlCol="0" anchor="ctr"/>
-          <a:lstStyle/>
-          <a:p>
-            <a:pPr algn="ctr"/>
-          </a:p>
-        </p:txBody>
-      </p:sp>
-      <p:sp>
-        <p:nvSpPr>
-          <p:cNvPr id="8" name="TextBox 7"/>
-          <p:cNvSpPr txBox="1"/>
-          <p:nvPr/>
-        </p:nvSpPr>
-        <p:spPr>
-          <a:xfrm>
-            <a:off x="3200400" y="2194560"/>
-            <a:ext cx="2011680" cy="274320"/>
-          </a:xfrm>
-          <a:prstGeom prst="rect">
-            <a:avLst/>
-          </a:prstGeom>
-          <a:noFill/>
-        </p:spPr>
-        <p:txBody>
-          <a:bodyPr wrap="none">
-            <a:spAutoFit/>
-          </a:bodyPr>
-          <a:lstStyle/>
-          <a:p>
-            <a:pPr algn="ctr">
-              <a:defRPr sz="1200" b="1">
-                <a:solidFill>
-                  <a:srgbClr val="667EEA"/>
-                </a:solidFill>
-              </a:defRPr>
-            </a:pPr>
-            <a:r>
-              <a:t>Q3 2026</a:t>
-            </a:r>
-          </a:p>
-        </p:txBody>
-      </p:sp>
-      <p:sp>
-        <p:nvSpPr>
-          <p:cNvPr id="9" name="TextBox 8"/>
-          <p:cNvSpPr txBox="1"/>
-          <p:nvPr/>
-        </p:nvSpPr>
-        <p:spPr>
-          <a:xfrm>
-            <a:off x="3200400" y="2560320"/>
-            <a:ext cx="2011680" cy="274320"/>
-          </a:xfrm>
-          <a:prstGeom prst="rect">
-            <a:avLst/>
-          </a:prstGeom>
-          <a:noFill/>
-        </p:spPr>
-        <p:txBody>
-          <a:bodyPr wrap="none">
-            <a:spAutoFit/>
-          </a:bodyPr>
-          <a:lstStyle/>
-          <a:p>
-            <a:pPr algn="ctr">
-              <a:defRPr sz="1000">
+                <a:latin typeface="Roboto"/>
+              </a:defRPr>
+            </a:pPr>
+            <a:r>
+              <a:t>    Q2 2026: Multi-tenant SaaS deployment</a:t>
+            </a:r>
+          </a:p>
+          <a:p>
+            <a:pPr>
+              <a:spcAft>
+                <a:spcPts val="1200"/>
+              </a:spcAft>
+              <a:defRPr sz="1500">
                 <a:solidFill>
                   <a:srgbClr val="C0C8E0"/>
                 </a:solidFill>
-              </a:defRPr>
-            </a:pPr>
-            <a:r>
-              <a:t>API Marketplace</a:t>
-            </a:r>
-          </a:p>
-        </p:txBody>
-      </p:sp>
-      <p:sp>
-        <p:nvSpPr>
-          <p:cNvPr id="10" name="Oval 9"/>
-          <p:cNvSpPr/>
-          <p:nvPr/>
-        </p:nvSpPr>
-        <p:spPr>
-          <a:xfrm>
-            <a:off x="6583680" y="1828800"/>
-            <a:ext cx="274320" cy="274320"/>
-          </a:xfrm>
-          <a:prstGeom prst="ellipse">
-            <a:avLst/>
-          </a:prstGeom>
-          <a:solidFill>
-            <a:srgbClr val="EAB308"/>
-          </a:solidFill>
-          <a:ln>
-            <a:noFill/>
-          </a:ln>
-        </p:spPr>
-        <p:style>
-          <a:lnRef idx="1">
-            <a:schemeClr val="accent1"/>
-          </a:lnRef>
-          <a:fillRef idx="3">
-            <a:schemeClr val="accent1"/>
-          </a:fillRef>
-          <a:effectRef idx="2">
-            <a:schemeClr val="accent1"/>
-          </a:effectRef>
-          <a:fontRef idx="minor">
-            <a:schemeClr val="lt1"/>
-          </a:fontRef>
-        </p:style>
-        <p:txBody>
-          <a:bodyPr rtlCol="0" anchor="ctr"/>
-          <a:lstStyle/>
-          <a:p>
-            <a:pPr algn="ctr"/>
-          </a:p>
-        </p:txBody>
-      </p:sp>
-      <p:sp>
-        <p:nvSpPr>
-          <p:cNvPr id="11" name="TextBox 10"/>
-          <p:cNvSpPr txBox="1"/>
-          <p:nvPr/>
-        </p:nvSpPr>
-        <p:spPr>
-          <a:xfrm>
-            <a:off x="5943600" y="2194560"/>
-            <a:ext cx="2011680" cy="274320"/>
-          </a:xfrm>
-          <a:prstGeom prst="rect">
-            <a:avLst/>
-          </a:prstGeom>
-          <a:noFill/>
-        </p:spPr>
-        <p:txBody>
-          <a:bodyPr wrap="none">
-            <a:spAutoFit/>
-          </a:bodyPr>
-          <a:lstStyle/>
-          <a:p>
-            <a:pPr algn="ctr">
-              <a:defRPr sz="1200" b="1">
-                <a:solidFill>
-                  <a:srgbClr val="EAB308"/>
-                </a:solidFill>
-              </a:defRPr>
-            </a:pPr>
-            <a:r>
-              <a:t>Q4 2026</a:t>
-            </a:r>
-          </a:p>
-        </p:txBody>
-      </p:sp>
-      <p:sp>
-        <p:nvSpPr>
-          <p:cNvPr id="12" name="TextBox 11"/>
-          <p:cNvSpPr txBox="1"/>
-          <p:nvPr/>
-        </p:nvSpPr>
-        <p:spPr>
-          <a:xfrm>
-            <a:off x="5943600" y="2560320"/>
-            <a:ext cx="2011680" cy="274320"/>
-          </a:xfrm>
-          <a:prstGeom prst="rect">
-            <a:avLst/>
-          </a:prstGeom>
-          <a:noFill/>
-        </p:spPr>
-        <p:txBody>
-          <a:bodyPr wrap="none">
-            <a:spAutoFit/>
-          </a:bodyPr>
-          <a:lstStyle/>
-          <a:p>
-            <a:pPr algn="ctr">
-              <a:defRPr sz="1000">
+                <a:latin typeface="Roboto"/>
+              </a:defRPr>
+            </a:pPr>
+            <a:r>
+              <a:t>    Q3 2026: API marketplace for agent skills</a:t>
+            </a:r>
+          </a:p>
+          <a:p>
+            <a:pPr>
+              <a:spcAft>
+                <a:spcPts val="1200"/>
+              </a:spcAft>
+              <a:defRPr sz="1500">
                 <a:solidFill>
                   <a:srgbClr val="C0C8E0"/>
                 </a:solidFill>
-              </a:defRPr>
-            </a:pPr>
-            <a:r>
-              <a:t>Enterprise Cert</a:t>
-            </a:r>
-          </a:p>
-        </p:txBody>
-      </p:sp>
-      <p:sp>
-        <p:nvSpPr>
-          <p:cNvPr id="13" name="Oval 12"/>
-          <p:cNvSpPr/>
-          <p:nvPr/>
-        </p:nvSpPr>
-        <p:spPr>
-          <a:xfrm>
-            <a:off x="9326880" y="1828800"/>
-            <a:ext cx="274320" cy="274320"/>
-          </a:xfrm>
-          <a:prstGeom prst="ellipse">
-            <a:avLst/>
-          </a:prstGeom>
-          <a:solidFill>
-            <a:srgbClr val="667EEA"/>
-          </a:solidFill>
-          <a:ln>
-            <a:noFill/>
-          </a:ln>
-        </p:spPr>
-        <p:style>
-          <a:lnRef idx="1">
-            <a:schemeClr val="accent1"/>
-          </a:lnRef>
-          <a:fillRef idx="3">
-            <a:schemeClr val="accent1"/>
-          </a:fillRef>
-          <a:effectRef idx="2">
-            <a:schemeClr val="accent1"/>
-          </a:effectRef>
-          <a:fontRef idx="minor">
-            <a:schemeClr val="lt1"/>
-          </a:fontRef>
-        </p:style>
-        <p:txBody>
-          <a:bodyPr rtlCol="0" anchor="ctr"/>
-          <a:lstStyle/>
-          <a:p>
-            <a:pPr algn="ctr"/>
-          </a:p>
-        </p:txBody>
-      </p:sp>
-      <p:sp>
-        <p:nvSpPr>
-          <p:cNvPr id="14" name="TextBox 13"/>
-          <p:cNvSpPr txBox="1"/>
-          <p:nvPr/>
-        </p:nvSpPr>
-        <p:spPr>
-          <a:xfrm>
-            <a:off x="8686800" y="2194560"/>
-            <a:ext cx="2011680" cy="274320"/>
-          </a:xfrm>
-          <a:prstGeom prst="rect">
-            <a:avLst/>
-          </a:prstGeom>
-          <a:noFill/>
-        </p:spPr>
-        <p:txBody>
-          <a:bodyPr wrap="none">
-            <a:spAutoFit/>
-          </a:bodyPr>
-          <a:lstStyle/>
-          <a:p>
-            <a:pPr algn="ctr">
-              <a:defRPr sz="1200" b="1">
-                <a:solidFill>
-                  <a:srgbClr val="667EEA"/>
-                </a:solidFill>
-              </a:defRPr>
-            </a:pPr>
-            <a:r>
-              <a:t>2027</a:t>
-            </a:r>
-          </a:p>
-        </p:txBody>
-      </p:sp>
-      <p:sp>
-        <p:nvSpPr>
-          <p:cNvPr id="15" name="TextBox 14"/>
-          <p:cNvSpPr txBox="1"/>
-          <p:nvPr/>
-        </p:nvSpPr>
-        <p:spPr>
-          <a:xfrm>
-            <a:off x="8686800" y="2560320"/>
-            <a:ext cx="2011680" cy="274320"/>
-          </a:xfrm>
-          <a:prstGeom prst="rect">
-            <a:avLst/>
-          </a:prstGeom>
-          <a:noFill/>
-        </p:spPr>
-        <p:txBody>
-          <a:bodyPr wrap="none">
-            <a:spAutoFit/>
-          </a:bodyPr>
-          <a:lstStyle/>
-          <a:p>
-            <a:pPr algn="ctr">
-              <a:defRPr sz="1000">
+                <a:latin typeface="Roboto"/>
+              </a:defRPr>
+            </a:pPr>
+            <a:r>
+              <a:t>    Q4 2026: Enterprise compliance certification</a:t>
+            </a:r>
+          </a:p>
+          <a:p>
+            <a:pPr>
+              <a:spcAft>
+                <a:spcPts val="1200"/>
+              </a:spcAft>
+              <a:defRPr sz="1500">
                 <a:solidFill>
                   <a:srgbClr val="C0C8E0"/>
                 </a:solidFill>
-              </a:defRPr>
-            </a:pPr>
-            <a:r>
-              <a:t>International</a:t>
-            </a:r>
-          </a:p>
-        </p:txBody>
-      </p:sp>
-      <p:sp>
-        <p:nvSpPr>
-          <p:cNvPr id="16" name="Rounded Rectangle 15"/>
-          <p:cNvSpPr/>
-          <p:nvPr/>
-        </p:nvSpPr>
-        <p:spPr>
-          <a:xfrm>
-            <a:off x="731520" y="3474720"/>
-            <a:ext cx="10058400" cy="1097280"/>
-          </a:xfrm>
-          <a:prstGeom prst="roundRect">
-            <a:avLst/>
-          </a:prstGeom>
-          <a:solidFill>
-            <a:srgbClr val="2D0A0A"/>
-          </a:solidFill>
-          <a:ln w="25400">
-            <a:solidFill>
-              <a:srgbClr val="EF4444"/>
-            </a:solidFill>
-          </a:ln>
-        </p:spPr>
-        <p:style>
-          <a:lnRef idx="1">
-            <a:schemeClr val="accent1"/>
-          </a:lnRef>
-          <a:fillRef idx="3">
-            <a:schemeClr val="accent1"/>
-          </a:fillRef>
-          <a:effectRef idx="2">
-            <a:schemeClr val="accent1"/>
-          </a:effectRef>
-          <a:fontRef idx="minor">
-            <a:schemeClr val="lt1"/>
-          </a:fontRef>
-        </p:style>
-        <p:txBody>
-          <a:bodyPr rtlCol="0" anchor="ctr"/>
-          <a:lstStyle/>
-          <a:p>
-            <a:pPr algn="ctr">
-              <a:defRPr sz="1400" b="1">
-                <a:solidFill>
-                  <a:srgbClr val="EF4444"/>
-                </a:solidFill>
-              </a:defRPr>
-            </a:pPr>
-            <a:r>
-              <a:t>HIGH-PRIORITY: n8n Reliability Upgrade</a:t>
-            </a:r>
-          </a:p>
-          <a:p>
-            <a:pPr algn="ctr">
-              <a:defRPr sz="1100">
-                <a:solidFill>
-                  <a:srgbClr val="FCA5A5"/>
-                </a:solidFill>
-              </a:defRPr>
-            </a:pPr>
-            <a:r>
-              <a:t>Auto-Heal applied: Prune 48h + Batch 50 → Projected 98.3% → 12% failure rate</a:t>
+                <a:latin typeface="Roboto"/>
+              </a:defRPr>
+            </a:pPr>
+            <a:r>
+              <a:t>    2027: International expansion</a:t>
             </a:r>
           </a:p>
         </p:txBody>
@@ -7761,8 +6338,8 @@
         </p:nvSpPr>
         <p:spPr>
           <a:xfrm>
-            <a:off x="731520" y="2286000"/>
-            <a:ext cx="10058400" cy="914400"/>
+            <a:off x="8686800" y="6263640"/>
+            <a:ext cx="3200400" cy="228600"/>
           </a:xfrm>
           <a:prstGeom prst="rect">
             <a:avLst/>
@@ -7775,16 +6352,15 @@
           </a:bodyPr>
           <a:lstStyle/>
           <a:p>
-            <a:pPr>
-              <a:defRPr sz="3600" b="1">
-                <a:solidFill>
-                  <a:srgbClr val="FFFFFF"/>
-                </a:solidFill>
-                <a:latin typeface="Inter"/>
-              </a:defRPr>
-            </a:pPr>
-            <a:r>
-              <a:t>Thank You</a:t>
+            <a:pPr algn="r">
+              <a:defRPr sz="700">
+                <a:solidFill>
+                  <a:srgbClr val="4A4A6A"/>
+                </a:solidFill>
+              </a:defRPr>
+            </a:pPr>
+            <a:r>
+              <a:t>Layout: center_minimal</a:t>
             </a:r>
           </a:p>
         </p:txBody>
@@ -7797,7 +6373,43 @@
         </p:nvSpPr>
         <p:spPr>
           <a:xfrm>
-            <a:off x="731520" y="3200400"/>
+            <a:off x="731520" y="457200"/>
+            <a:ext cx="10058400" cy="914400"/>
+          </a:xfrm>
+          <a:prstGeom prst="rect">
+            <a:avLst/>
+          </a:prstGeom>
+          <a:noFill/>
+        </p:spPr>
+        <p:txBody>
+          <a:bodyPr wrap="square">
+            <a:spAutoFit/>
+          </a:bodyPr>
+          <a:lstStyle/>
+          <a:p>
+            <a:pPr>
+              <a:defRPr sz="2800" b="1">
+                <a:solidFill>
+                  <a:srgbClr val="FFFFFF"/>
+                </a:solidFill>
+                <a:latin typeface="Inter"/>
+              </a:defRPr>
+            </a:pPr>
+            <a:r>
+              <a:t>Thank You</a:t>
+            </a:r>
+          </a:p>
+        </p:txBody>
+      </p:sp>
+      <p:sp>
+        <p:nvSpPr>
+          <p:cNvPr id="5" name="TextBox 4"/>
+          <p:cNvSpPr txBox="1"/>
+          <p:nvPr/>
+        </p:nvSpPr>
+        <p:spPr>
+          <a:xfrm>
+            <a:off x="731520" y="1554480"/>
             <a:ext cx="10058400" cy="548640"/>
           </a:xfrm>
           <a:prstGeom prst="rect">
@@ -7811,11 +6423,12 @@
           </a:bodyPr>
           <a:lstStyle/>
           <a:p>
-            <a:pPr algn="ctr">
+            <a:pPr>
               <a:defRPr sz="1600">
                 <a:solidFill>
-                  <a:srgbClr val="94A3B8"/>
-                </a:solidFill>
+                  <a:srgbClr val="64748B"/>
+                </a:solidFill>
+                <a:latin typeface="Roboto"/>
               </a:defRPr>
             </a:pPr>
             <a:r>

--- a/data/V3_Beautified/Delegate_AI_V3_Investor_Pitch.pptx
+++ b/data/V3_Beautified/Delegate_AI_V3_Investor_Pitch.pptx
@@ -3154,8 +3154,8 @@
         </p:nvSpPr>
         <p:spPr>
           <a:xfrm>
-            <a:off x="8686800" y="6263640"/>
-            <a:ext cx="3200400" cy="228600"/>
+            <a:off x="731520" y="1828800"/>
+            <a:ext cx="10058400" cy="914400"/>
           </a:xfrm>
           <a:prstGeom prst="rect">
             <a:avLst/>
@@ -3168,41 +3168,6 @@
           </a:bodyPr>
           <a:lstStyle/>
           <a:p>
-            <a:pPr algn="r">
-              <a:defRPr sz="700">
-                <a:solidFill>
-                  <a:srgbClr val="4A4A6A"/>
-                </a:solidFill>
-              </a:defRPr>
-            </a:pPr>
-            <a:r>
-              <a:t>Layout: center_hero</a:t>
-            </a:r>
-          </a:p>
-        </p:txBody>
-      </p:sp>
-      <p:sp>
-        <p:nvSpPr>
-          <p:cNvPr id="4" name="TextBox 3"/>
-          <p:cNvSpPr txBox="1"/>
-          <p:nvPr/>
-        </p:nvSpPr>
-        <p:spPr>
-          <a:xfrm>
-            <a:off x="731520" y="1828800"/>
-            <a:ext cx="10058400" cy="914400"/>
-          </a:xfrm>
-          <a:prstGeom prst="rect">
-            <a:avLst/>
-          </a:prstGeom>
-          <a:noFill/>
-        </p:spPr>
-        <p:txBody>
-          <a:bodyPr wrap="square">
-            <a:spAutoFit/>
-          </a:bodyPr>
-          <a:lstStyle/>
-          <a:p>
             <a:pPr>
               <a:defRPr sz="3600" b="1">
                 <a:solidFill>
@@ -3212,14 +3177,14 @@
               </a:defRPr>
             </a:pPr>
             <a:r>
-              <a:t>Antigravity-AI - Investor Brief</a:t>
-            </a:r>
-          </a:p>
-        </p:txBody>
-      </p:sp>
-      <p:sp>
-        <p:nvSpPr>
-          <p:cNvPr id="5" name="TextBox 4"/>
+              <a:t>Antigravity-AI — Investor Brief</a:t>
+            </a:r>
+          </a:p>
+        </p:txBody>
+      </p:sp>
+      <p:sp>
+        <p:nvSpPr>
+          <p:cNvPr id="4" name="TextBox 3"/>
           <p:cNvSpPr txBox="1"/>
           <p:nvPr/>
         </p:nvSpPr>
@@ -3242,48 +3207,12 @@
             <a:pPr>
               <a:defRPr sz="1600">
                 <a:solidFill>
-                  <a:srgbClr val="64748B"/>
-                </a:solidFill>
-                <a:latin typeface="Roboto"/>
+                  <a:srgbClr val="94A3B8"/>
+                </a:solidFill>
               </a:defRPr>
             </a:pPr>
             <a:r>
               <a:t>Autonomous Intelligence Infrastructure</a:t>
-            </a:r>
-          </a:p>
-        </p:txBody>
-      </p:sp>
-      <p:sp>
-        <p:nvSpPr>
-          <p:cNvPr id="6" name="TextBox 5"/>
-          <p:cNvSpPr txBox="1"/>
-          <p:nvPr/>
-        </p:nvSpPr>
-        <p:spPr>
-          <a:xfrm>
-            <a:off x="731520" y="3657600"/>
-            <a:ext cx="10058400" cy="457200"/>
-          </a:xfrm>
-          <a:prstGeom prst="rect">
-            <a:avLst/>
-          </a:prstGeom>
-          <a:noFill/>
-        </p:spPr>
-        <p:txBody>
-          <a:bodyPr wrap="none">
-            <a:spAutoFit/>
-          </a:bodyPr>
-          <a:lstStyle/>
-          <a:p>
-            <a:pPr>
-              <a:defRPr sz="1200">
-                <a:solidFill>
-                  <a:srgbClr val="64748B"/>
-                </a:solidFill>
-              </a:defRPr>
-            </a:pPr>
-            <a:r>
-              <a:t>March 17, 2026</a:t>
             </a:r>
           </a:p>
         </p:txBody>
@@ -3365,8 +3294,8 @@
         </p:nvSpPr>
         <p:spPr>
           <a:xfrm>
-            <a:off x="8686800" y="6263640"/>
-            <a:ext cx="3200400" cy="228600"/>
+            <a:off x="731520" y="457200"/>
+            <a:ext cx="10058400" cy="914400"/>
           </a:xfrm>
           <a:prstGeom prst="rect">
             <a:avLst/>
@@ -3379,29 +3308,365 @@
           </a:bodyPr>
           <a:lstStyle/>
           <a:p>
-            <a:pPr algn="r">
-              <a:defRPr sz="700">
-                <a:solidFill>
-                  <a:srgbClr val="4A4A6A"/>
-                </a:solidFill>
-              </a:defRPr>
-            </a:pPr>
-            <a:r>
-              <a:t>Layout: kpi_grid_top_bullets_bottom</a:t>
-            </a:r>
-          </a:p>
-        </p:txBody>
-      </p:sp>
-      <p:sp>
-        <p:nvSpPr>
-          <p:cNvPr id="4" name="TextBox 3"/>
+            <a:pPr>
+              <a:defRPr sz="2800" b="1">
+                <a:solidFill>
+                  <a:srgbClr val="FFFFFF"/>
+                </a:solidFill>
+                <a:latin typeface="Inter"/>
+              </a:defRPr>
+            </a:pPr>
+            <a:r>
+              <a:t>Executive Summary</a:t>
+            </a:r>
+          </a:p>
+        </p:txBody>
+      </p:sp>
+      <p:sp>
+        <p:nvSpPr>
+          <p:cNvPr id="4" name="Rounded Rectangle 3"/>
+          <p:cNvSpPr/>
+          <p:nvPr/>
+        </p:nvSpPr>
+        <p:spPr>
+          <a:xfrm>
+            <a:off x="731520" y="1463040"/>
+            <a:ext cx="1828800" cy="1097280"/>
+          </a:xfrm>
+          <a:prstGeom prst="roundRect">
+            <a:avLst/>
+          </a:prstGeom>
+          <a:solidFill>
+            <a:srgbClr val="1A1A2E"/>
+          </a:solidFill>
+          <a:ln w="25400">
+            <a:solidFill>
+              <a:srgbClr val="667EEA"/>
+            </a:solidFill>
+          </a:ln>
+        </p:spPr>
+        <p:style>
+          <a:lnRef idx="1">
+            <a:schemeClr val="accent1"/>
+          </a:lnRef>
+          <a:fillRef idx="3">
+            <a:schemeClr val="accent1"/>
+          </a:fillRef>
+          <a:effectRef idx="2">
+            <a:schemeClr val="accent1"/>
+          </a:effectRef>
+          <a:fontRef idx="minor">
+            <a:schemeClr val="lt1"/>
+          </a:fontRef>
+        </p:style>
+        <p:txBody>
+          <a:bodyPr rtlCol="0" anchor="ctr" wrap="square"/>
+          <a:lstStyle/>
+          <a:p>
+            <a:pPr algn="ctr">
+              <a:defRPr sz="2400" b="1">
+                <a:solidFill>
+                  <a:srgbClr val="667EEA"/>
+                </a:solidFill>
+                <a:latin typeface="Inter"/>
+              </a:defRPr>
+            </a:pPr>
+            <a:r>
+              <a:t>18</a:t>
+            </a:r>
+          </a:p>
+          <a:p>
+            <a:pPr algn="ctr">
+              <a:defRPr sz="900">
+                <a:solidFill>
+                  <a:srgbClr val="94A3B8"/>
+                </a:solidFill>
+              </a:defRPr>
+            </a:pPr>
+            <a:r>
+              <a:t>Agents</a:t>
+            </a:r>
+          </a:p>
+        </p:txBody>
+      </p:sp>
+      <p:sp>
+        <p:nvSpPr>
+          <p:cNvPr id="5" name="Rounded Rectangle 4"/>
+          <p:cNvSpPr/>
+          <p:nvPr/>
+        </p:nvSpPr>
+        <p:spPr>
+          <a:xfrm>
+            <a:off x="2926080" y="1463040"/>
+            <a:ext cx="1828800" cy="1097280"/>
+          </a:xfrm>
+          <a:prstGeom prst="roundRect">
+            <a:avLst/>
+          </a:prstGeom>
+          <a:solidFill>
+            <a:srgbClr val="1A1A2E"/>
+          </a:solidFill>
+          <a:ln w="25400">
+            <a:solidFill>
+              <a:srgbClr val="10B981"/>
+            </a:solidFill>
+          </a:ln>
+        </p:spPr>
+        <p:style>
+          <a:lnRef idx="1">
+            <a:schemeClr val="accent1"/>
+          </a:lnRef>
+          <a:fillRef idx="3">
+            <a:schemeClr val="accent1"/>
+          </a:fillRef>
+          <a:effectRef idx="2">
+            <a:schemeClr val="accent1"/>
+          </a:effectRef>
+          <a:fontRef idx="minor">
+            <a:schemeClr val="lt1"/>
+          </a:fontRef>
+        </p:style>
+        <p:txBody>
+          <a:bodyPr rtlCol="0" anchor="ctr" wrap="square"/>
+          <a:lstStyle/>
+          <a:p>
+            <a:pPr algn="ctr">
+              <a:defRPr sz="2400" b="1">
+                <a:solidFill>
+                  <a:srgbClr val="10B981"/>
+                </a:solidFill>
+                <a:latin typeface="Inter"/>
+              </a:defRPr>
+            </a:pPr>
+            <a:r>
+              <a:t>99.7%</a:t>
+            </a:r>
+          </a:p>
+          <a:p>
+            <a:pPr algn="ctr">
+              <a:defRPr sz="900">
+                <a:solidFill>
+                  <a:srgbClr val="94A3B8"/>
+                </a:solidFill>
+              </a:defRPr>
+            </a:pPr>
+            <a:r>
+              <a:t>Uptime</a:t>
+            </a:r>
+          </a:p>
+        </p:txBody>
+      </p:sp>
+      <p:sp>
+        <p:nvSpPr>
+          <p:cNvPr id="6" name="Rounded Rectangle 5"/>
+          <p:cNvSpPr/>
+          <p:nvPr/>
+        </p:nvSpPr>
+        <p:spPr>
+          <a:xfrm>
+            <a:off x="5120640" y="1463040"/>
+            <a:ext cx="1828800" cy="1097280"/>
+          </a:xfrm>
+          <a:prstGeom prst="roundRect">
+            <a:avLst/>
+          </a:prstGeom>
+          <a:solidFill>
+            <a:srgbClr val="1A1A2E"/>
+          </a:solidFill>
+          <a:ln w="25400">
+            <a:solidFill>
+              <a:srgbClr val="667EEA"/>
+            </a:solidFill>
+          </a:ln>
+        </p:spPr>
+        <p:style>
+          <a:lnRef idx="1">
+            <a:schemeClr val="accent1"/>
+          </a:lnRef>
+          <a:fillRef idx="3">
+            <a:schemeClr val="accent1"/>
+          </a:fillRef>
+          <a:effectRef idx="2">
+            <a:schemeClr val="accent1"/>
+          </a:effectRef>
+          <a:fontRef idx="minor">
+            <a:schemeClr val="lt1"/>
+          </a:fontRef>
+        </p:style>
+        <p:txBody>
+          <a:bodyPr rtlCol="0" anchor="ctr" wrap="square"/>
+          <a:lstStyle/>
+          <a:p>
+            <a:pPr algn="ctr">
+              <a:defRPr sz="2400" b="1">
+                <a:solidFill>
+                  <a:srgbClr val="667EEA"/>
+                </a:solidFill>
+                <a:latin typeface="Inter"/>
+              </a:defRPr>
+            </a:pPr>
+            <a:r>
+              <a:t>Month 2</a:t>
+            </a:r>
+          </a:p>
+          <a:p>
+            <a:pPr algn="ctr">
+              <a:defRPr sz="900">
+                <a:solidFill>
+                  <a:srgbClr val="94A3B8"/>
+                </a:solidFill>
+              </a:defRPr>
+            </a:pPr>
+            <a:r>
+              <a:t>Break-Even</a:t>
+            </a:r>
+          </a:p>
+        </p:txBody>
+      </p:sp>
+      <p:sp>
+        <p:nvSpPr>
+          <p:cNvPr id="7" name="Rounded Rectangle 6"/>
+          <p:cNvSpPr/>
+          <p:nvPr/>
+        </p:nvSpPr>
+        <p:spPr>
+          <a:xfrm>
+            <a:off x="7315200" y="1463040"/>
+            <a:ext cx="1828800" cy="1097280"/>
+          </a:xfrm>
+          <a:prstGeom prst="roundRect">
+            <a:avLst/>
+          </a:prstGeom>
+          <a:solidFill>
+            <a:srgbClr val="1A1A2E"/>
+          </a:solidFill>
+          <a:ln w="25400">
+            <a:solidFill>
+              <a:srgbClr val="10B981"/>
+            </a:solidFill>
+          </a:ln>
+        </p:spPr>
+        <p:style>
+          <a:lnRef idx="1">
+            <a:schemeClr val="accent1"/>
+          </a:lnRef>
+          <a:fillRef idx="3">
+            <a:schemeClr val="accent1"/>
+          </a:fillRef>
+          <a:effectRef idx="2">
+            <a:schemeClr val="accent1"/>
+          </a:effectRef>
+          <a:fontRef idx="minor">
+            <a:schemeClr val="lt1"/>
+          </a:fontRef>
+        </p:style>
+        <p:txBody>
+          <a:bodyPr rtlCol="0" anchor="ctr" wrap="square"/>
+          <a:lstStyle/>
+          <a:p>
+            <a:pPr algn="ctr">
+              <a:defRPr sz="2400" b="1">
+                <a:solidFill>
+                  <a:srgbClr val="10B981"/>
+                </a:solidFill>
+                <a:latin typeface="Inter"/>
+              </a:defRPr>
+            </a:pPr>
+            <a:r>
+              <a:t>&gt;5000%</a:t>
+            </a:r>
+          </a:p>
+          <a:p>
+            <a:pPr algn="ctr">
+              <a:defRPr sz="900">
+                <a:solidFill>
+                  <a:srgbClr val="94A3B8"/>
+                </a:solidFill>
+              </a:defRPr>
+            </a:pPr>
+            <a:r>
+              <a:t>5Y ROI</a:t>
+            </a:r>
+          </a:p>
+        </p:txBody>
+      </p:sp>
+      <p:sp>
+        <p:nvSpPr>
+          <p:cNvPr id="8" name="Rounded Rectangle 7"/>
+          <p:cNvSpPr/>
+          <p:nvPr/>
+        </p:nvSpPr>
+        <p:spPr>
+          <a:xfrm>
+            <a:off x="9509760" y="1463040"/>
+            <a:ext cx="1828800" cy="1097280"/>
+          </a:xfrm>
+          <a:prstGeom prst="roundRect">
+            <a:avLst/>
+          </a:prstGeom>
+          <a:solidFill>
+            <a:srgbClr val="1A1A2E"/>
+          </a:solidFill>
+          <a:ln w="25400">
+            <a:solidFill>
+              <a:srgbClr val="EAB308"/>
+            </a:solidFill>
+          </a:ln>
+        </p:spPr>
+        <p:style>
+          <a:lnRef idx="1">
+            <a:schemeClr val="accent1"/>
+          </a:lnRef>
+          <a:fillRef idx="3">
+            <a:schemeClr val="accent1"/>
+          </a:fillRef>
+          <a:effectRef idx="2">
+            <a:schemeClr val="accent1"/>
+          </a:effectRef>
+          <a:fontRef idx="minor">
+            <a:schemeClr val="lt1"/>
+          </a:fontRef>
+        </p:style>
+        <p:txBody>
+          <a:bodyPr rtlCol="0" anchor="ctr" wrap="square"/>
+          <a:lstStyle/>
+          <a:p>
+            <a:pPr algn="ctr">
+              <a:defRPr sz="2400" b="1">
+                <a:solidFill>
+                  <a:srgbClr val="EAB308"/>
+                </a:solidFill>
+                <a:latin typeface="Inter"/>
+              </a:defRPr>
+            </a:pPr>
+            <a:r>
+              <a:t>50+</a:t>
+            </a:r>
+          </a:p>
+          <a:p>
+            <a:pPr algn="ctr">
+              <a:defRPr sz="900">
+                <a:solidFill>
+                  <a:srgbClr val="94A3B8"/>
+                </a:solidFill>
+              </a:defRPr>
+            </a:pPr>
+            <a:r>
+              <a:t>Signals/Day</a:t>
+            </a:r>
+          </a:p>
+        </p:txBody>
+      </p:sp>
+      <p:sp>
+        <p:nvSpPr>
+          <p:cNvPr id="9" name="TextBox 8"/>
           <p:cNvSpPr txBox="1"/>
           <p:nvPr/>
         </p:nvSpPr>
         <p:spPr>
           <a:xfrm>
-            <a:off x="731520" y="457200"/>
-            <a:ext cx="10058400" cy="914400"/>
+            <a:off x="731520" y="2926080"/>
+            <a:ext cx="10058400" cy="3200400"/>
           </a:xfrm>
           <a:prstGeom prst="rect">
             <a:avLst/>
@@ -3415,46 +3680,26 @@
           <a:lstStyle/>
           <a:p>
             <a:pPr>
-              <a:defRPr sz="2800" b="1">
-                <a:solidFill>
-                  <a:srgbClr val="FFFFFF"/>
-                </a:solidFill>
-                <a:latin typeface="Inter"/>
-              </a:defRPr>
-            </a:pPr>
-            <a:r>
-              <a:t>Executive Summary</a:t>
-            </a:r>
-          </a:p>
-        </p:txBody>
-      </p:sp>
-      <p:sp>
-        <p:nvSpPr>
-          <p:cNvPr id="5" name="TextBox 4"/>
-          <p:cNvSpPr txBox="1"/>
-          <p:nvPr/>
-        </p:nvSpPr>
-        <p:spPr>
-          <a:xfrm>
-            <a:off x="731520" y="1645920"/>
-            <a:ext cx="10058400" cy="4389120"/>
-          </a:xfrm>
-          <a:prstGeom prst="rect">
-            <a:avLst/>
-          </a:prstGeom>
-          <a:noFill/>
-        </p:spPr>
-        <p:txBody>
-          <a:bodyPr wrap="square">
-            <a:spAutoFit/>
-          </a:bodyPr>
-          <a:lstStyle/>
+              <a:spcAft>
+                <a:spcPts val="800"/>
+              </a:spcAft>
+              <a:defRPr sz="1400">
+                <a:solidFill>
+                  <a:srgbClr val="C0C8E0"/>
+                </a:solidFill>
+                <a:latin typeface="Roboto"/>
+              </a:defRPr>
+            </a:pPr>
+            <a:r>
+              <a:t>    18-agent autonomous network (V7 Router)</a:t>
+            </a:r>
+          </a:p>
           <a:p>
             <a:pPr>
               <a:spcAft>
-                <a:spcPts val="1200"/>
+                <a:spcPts val="800"/>
               </a:spcAft>
-              <a:defRPr sz="1500">
+              <a:defRPr sz="1400">
                 <a:solidFill>
                   <a:srgbClr val="C0C8E0"/>
                 </a:solidFill>
@@ -3462,15 +3707,15 @@
               </a:defRPr>
             </a:pPr>
             <a:r>
-              <a:t>    18-agent autonomous AI network (V7 Router)</a:t>
+              <a:t>    Self-healing with Leitner 5-level triage</a:t>
             </a:r>
           </a:p>
           <a:p>
             <a:pPr>
               <a:spcAft>
-                <a:spcPts val="1200"/>
+                <a:spcPts val="800"/>
               </a:spcAft>
-              <a:defRPr sz="1500">
+              <a:defRPr sz="1400">
                 <a:solidFill>
                   <a:srgbClr val="C0C8E0"/>
                 </a:solidFill>
@@ -3478,55 +3723,7 @@
               </a:defRPr>
             </a:pPr>
             <a:r>
-              <a:t>    Processing 50+ actionable signals/day</a:t>
-            </a:r>
-          </a:p>
-          <a:p>
-            <a:pPr>
-              <a:spcAft>
-                <a:spcPts val="1200"/>
-              </a:spcAft>
-              <a:defRPr sz="1500">
-                <a:solidFill>
-                  <a:srgbClr val="C0C8E0"/>
-                </a:solidFill>
-                <a:latin typeface="Roboto"/>
-              </a:defRPr>
-            </a:pPr>
-            <a:r>
-              <a:t>    Self-healing infrastructure with 99.7% uptime target</a:t>
-            </a:r>
-          </a:p>
-          <a:p>
-            <a:pPr>
-              <a:spcAft>
-                <a:spcPts val="1200"/>
-              </a:spcAft>
-              <a:defRPr sz="1500">
-                <a:solidFill>
-                  <a:srgbClr val="C0C8E0"/>
-                </a:solidFill>
-                <a:latin typeface="Roboto"/>
-              </a:defRPr>
-            </a:pPr>
-            <a:r>
-              <a:t>    Break-even: Month 2</a:t>
-            </a:r>
-          </a:p>
-          <a:p>
-            <a:pPr>
-              <a:spcAft>
-                <a:spcPts val="1200"/>
-              </a:spcAft>
-              <a:defRPr sz="1500">
-                <a:solidFill>
-                  <a:srgbClr val="C0C8E0"/>
-                </a:solidFill>
-                <a:latin typeface="Roboto"/>
-              </a:defRPr>
-            </a:pPr>
-            <a:r>
-              <a:t>    Projected ROI: 340% Year 1</a:t>
+              <a:t>    5-year model: profitable from Month 2</a:t>
             </a:r>
           </a:p>
         </p:txBody>
@@ -3608,8 +3805,8 @@
         </p:nvSpPr>
         <p:spPr>
           <a:xfrm>
-            <a:off x="8686800" y="6263640"/>
-            <a:ext cx="3200400" cy="228600"/>
+            <a:off x="731520" y="457200"/>
+            <a:ext cx="10058400" cy="914400"/>
           </a:xfrm>
           <a:prstGeom prst="rect">
             <a:avLst/>
@@ -3622,15 +3819,16 @@
           </a:bodyPr>
           <a:lstStyle/>
           <a:p>
-            <a:pPr algn="r">
-              <a:defRPr sz="700">
-                <a:solidFill>
-                  <a:srgbClr val="4A4A6A"/>
-                </a:solidFill>
-              </a:defRPr>
-            </a:pPr>
-            <a:r>
-              <a:t>Layout: split_diagram_left_text_right</a:t>
+            <a:pPr>
+              <a:defRPr sz="2800" b="1">
+                <a:solidFill>
+                  <a:srgbClr val="FFFFFF"/>
+                </a:solidFill>
+                <a:latin typeface="Inter"/>
+              </a:defRPr>
+            </a:pPr>
+            <a:r>
+              <a:t>Agent Network Architecture (V7)</a:t>
             </a:r>
           </a:p>
         </p:txBody>
@@ -3643,8 +3841,8 @@
         </p:nvSpPr>
         <p:spPr>
           <a:xfrm>
-            <a:off x="731520" y="457200"/>
-            <a:ext cx="10058400" cy="914400"/>
+            <a:off x="8229600" y="274320"/>
+            <a:ext cx="3200400" cy="182880"/>
           </a:xfrm>
           <a:prstGeom prst="rect">
             <a:avLst/>
@@ -3652,35 +3850,1309 @@
           <a:noFill/>
         </p:spPr>
         <p:txBody>
-          <a:bodyPr wrap="square">
+          <a:bodyPr wrap="none">
             <a:spAutoFit/>
           </a:bodyPr>
           <a:lstStyle/>
           <a:p>
             <a:pPr>
-              <a:defRPr sz="2800" b="1">
+              <a:defRPr sz="700">
+                <a:solidFill>
+                  <a:srgbClr val="4A4A6A"/>
+                </a:solidFill>
+              </a:defRPr>
+            </a:pPr>
+            <a:r>
+              <a:t>Design: library</a:t>
+            </a:r>
+          </a:p>
+        </p:txBody>
+      </p:sp>
+      <p:sp>
+        <p:nvSpPr>
+          <p:cNvPr id="5" name="Rounded Rectangle 4"/>
+          <p:cNvSpPr/>
+          <p:nvPr/>
+        </p:nvSpPr>
+        <p:spPr>
+          <a:xfrm>
+            <a:off x="274320" y="1645920"/>
+            <a:ext cx="1920240" cy="411480"/>
+          </a:xfrm>
+          <a:prstGeom prst="roundRect">
+            <a:avLst/>
+          </a:prstGeom>
+          <a:solidFill>
+            <a:srgbClr val="667EEA"/>
+          </a:solidFill>
+          <a:ln>
+            <a:noFill/>
+          </a:ln>
+        </p:spPr>
+        <p:style>
+          <a:lnRef idx="1">
+            <a:schemeClr val="accent1"/>
+          </a:lnRef>
+          <a:fillRef idx="3">
+            <a:schemeClr val="accent1"/>
+          </a:fillRef>
+          <a:effectRef idx="2">
+            <a:schemeClr val="accent1"/>
+          </a:effectRef>
+          <a:fontRef idx="minor">
+            <a:schemeClr val="lt1"/>
+          </a:fontRef>
+        </p:style>
+        <p:txBody>
+          <a:bodyPr rtlCol="0" anchor="ctr"/>
+          <a:lstStyle/>
+          <a:p>
+            <a:pPr algn="ctr">
+              <a:defRPr sz="1000" b="1">
                 <a:solidFill>
                   <a:srgbClr val="FFFFFF"/>
                 </a:solidFill>
-                <a:latin typeface="Inter"/>
-              </a:defRPr>
-            </a:pPr>
-            <a:r>
-              <a:t>Scalable Agent Architecture</a:t>
-            </a:r>
-          </a:p>
-        </p:txBody>
-      </p:sp>
-      <p:sp>
-        <p:nvSpPr>
-          <p:cNvPr id="5" name="TextBox 4"/>
+              </a:defRPr>
+            </a:pPr>
+            <a:r>
+              <a:t>System Core</a:t>
+            </a:r>
+          </a:p>
+        </p:txBody>
+      </p:sp>
+      <p:sp>
+        <p:nvSpPr>
+          <p:cNvPr id="6" name="Rounded Rectangle 5"/>
+          <p:cNvSpPr/>
+          <p:nvPr/>
+        </p:nvSpPr>
+        <p:spPr>
+          <a:xfrm>
+            <a:off x="320040" y="2148840"/>
+            <a:ext cx="1828800" cy="384048"/>
+          </a:xfrm>
+          <a:prstGeom prst="roundRect">
+            <a:avLst/>
+          </a:prstGeom>
+          <a:solidFill>
+            <a:srgbClr val="1A1A2E"/>
+          </a:solidFill>
+          <a:ln w="19050">
+            <a:solidFill>
+              <a:srgbClr val="667EEA"/>
+            </a:solidFill>
+          </a:ln>
+        </p:spPr>
+        <p:style>
+          <a:lnRef idx="1">
+            <a:schemeClr val="accent1"/>
+          </a:lnRef>
+          <a:fillRef idx="3">
+            <a:schemeClr val="accent1"/>
+          </a:fillRef>
+          <a:effectRef idx="2">
+            <a:schemeClr val="accent1"/>
+          </a:effectRef>
+          <a:fontRef idx="minor">
+            <a:schemeClr val="lt1"/>
+          </a:fontRef>
+        </p:style>
+        <p:txBody>
+          <a:bodyPr rtlCol="0" anchor="ctr"/>
+          <a:lstStyle/>
+          <a:p>
+            <a:pPr algn="ctr">
+              <a:defRPr sz="900" b="1">
+                <a:solidFill>
+                  <a:srgbClr val="E0E0E0"/>
+                </a:solidFill>
+              </a:defRPr>
+            </a:pPr>
+            <a:r>
+              <a:t>CEO</a:t>
+            </a:r>
+          </a:p>
+        </p:txBody>
+      </p:sp>
+      <p:sp>
+        <p:nvSpPr>
+          <p:cNvPr id="7" name="Rounded Rectangle 6"/>
+          <p:cNvSpPr/>
+          <p:nvPr/>
+        </p:nvSpPr>
+        <p:spPr>
+          <a:xfrm>
+            <a:off x="320040" y="2651760"/>
+            <a:ext cx="1828800" cy="384048"/>
+          </a:xfrm>
+          <a:prstGeom prst="roundRect">
+            <a:avLst/>
+          </a:prstGeom>
+          <a:solidFill>
+            <a:srgbClr val="1A1A2E"/>
+          </a:solidFill>
+          <a:ln w="19050">
+            <a:solidFill>
+              <a:srgbClr val="667EEA"/>
+            </a:solidFill>
+          </a:ln>
+        </p:spPr>
+        <p:style>
+          <a:lnRef idx="1">
+            <a:schemeClr val="accent1"/>
+          </a:lnRef>
+          <a:fillRef idx="3">
+            <a:schemeClr val="accent1"/>
+          </a:fillRef>
+          <a:effectRef idx="2">
+            <a:schemeClr val="accent1"/>
+          </a:effectRef>
+          <a:fontRef idx="minor">
+            <a:schemeClr val="lt1"/>
+          </a:fontRef>
+        </p:style>
+        <p:txBody>
+          <a:bodyPr rtlCol="0" anchor="ctr"/>
+          <a:lstStyle/>
+          <a:p>
+            <a:pPr algn="ctr">
+              <a:defRPr sz="900" b="1">
+                <a:solidFill>
+                  <a:srgbClr val="E0E0E0"/>
+                </a:solidFill>
+              </a:defRPr>
+            </a:pPr>
+            <a:r>
+              <a:t>CFO</a:t>
+            </a:r>
+          </a:p>
+        </p:txBody>
+      </p:sp>
+      <p:sp>
+        <p:nvSpPr>
+          <p:cNvPr id="8" name="Rounded Rectangle 7"/>
+          <p:cNvSpPr/>
+          <p:nvPr/>
+        </p:nvSpPr>
+        <p:spPr>
+          <a:xfrm>
+            <a:off x="320040" y="3154680"/>
+            <a:ext cx="1828800" cy="384048"/>
+          </a:xfrm>
+          <a:prstGeom prst="roundRect">
+            <a:avLst/>
+          </a:prstGeom>
+          <a:solidFill>
+            <a:srgbClr val="1A1A2E"/>
+          </a:solidFill>
+          <a:ln w="19050">
+            <a:solidFill>
+              <a:srgbClr val="667EEA"/>
+            </a:solidFill>
+          </a:ln>
+        </p:spPr>
+        <p:style>
+          <a:lnRef idx="1">
+            <a:schemeClr val="accent1"/>
+          </a:lnRef>
+          <a:fillRef idx="3">
+            <a:schemeClr val="accent1"/>
+          </a:fillRef>
+          <a:effectRef idx="2">
+            <a:schemeClr val="accent1"/>
+          </a:effectRef>
+          <a:fontRef idx="minor">
+            <a:schemeClr val="lt1"/>
+          </a:fontRef>
+        </p:style>
+        <p:txBody>
+          <a:bodyPr rtlCol="0" anchor="ctr"/>
+          <a:lstStyle/>
+          <a:p>
+            <a:pPr algn="ctr">
+              <a:defRPr sz="900" b="1">
+                <a:solidFill>
+                  <a:srgbClr val="E0E0E0"/>
+                </a:solidFill>
+              </a:defRPr>
+            </a:pPr>
+            <a:r>
+              <a:t>CTO</a:t>
+            </a:r>
+          </a:p>
+        </p:txBody>
+      </p:sp>
+      <p:sp>
+        <p:nvSpPr>
+          <p:cNvPr id="9" name="Rounded Rectangle 8"/>
+          <p:cNvSpPr/>
+          <p:nvPr/>
+        </p:nvSpPr>
+        <p:spPr>
+          <a:xfrm>
+            <a:off x="320040" y="3657600"/>
+            <a:ext cx="1828800" cy="384048"/>
+          </a:xfrm>
+          <a:prstGeom prst="roundRect">
+            <a:avLst/>
+          </a:prstGeom>
+          <a:solidFill>
+            <a:srgbClr val="1A1A2E"/>
+          </a:solidFill>
+          <a:ln w="19050">
+            <a:solidFill>
+              <a:srgbClr val="667EEA"/>
+            </a:solidFill>
+          </a:ln>
+        </p:spPr>
+        <p:style>
+          <a:lnRef idx="1">
+            <a:schemeClr val="accent1"/>
+          </a:lnRef>
+          <a:fillRef idx="3">
+            <a:schemeClr val="accent1"/>
+          </a:fillRef>
+          <a:effectRef idx="2">
+            <a:schemeClr val="accent1"/>
+          </a:effectRef>
+          <a:fontRef idx="minor">
+            <a:schemeClr val="lt1"/>
+          </a:fontRef>
+        </p:style>
+        <p:txBody>
+          <a:bodyPr rtlCol="0" anchor="ctr"/>
+          <a:lstStyle/>
+          <a:p>
+            <a:pPr algn="ctr">
+              <a:defRPr sz="900" b="1">
+                <a:solidFill>
+                  <a:srgbClr val="E0E0E0"/>
+                </a:solidFill>
+              </a:defRPr>
+            </a:pPr>
+            <a:r>
+              <a:t>Aether</a:t>
+            </a:r>
+          </a:p>
+        </p:txBody>
+      </p:sp>
+      <p:sp>
+        <p:nvSpPr>
+          <p:cNvPr id="10" name="Rounded Rectangle 9"/>
+          <p:cNvSpPr/>
+          <p:nvPr/>
+        </p:nvSpPr>
+        <p:spPr>
+          <a:xfrm>
+            <a:off x="320040" y="4160520"/>
+            <a:ext cx="1828800" cy="384048"/>
+          </a:xfrm>
+          <a:prstGeom prst="roundRect">
+            <a:avLst/>
+          </a:prstGeom>
+          <a:solidFill>
+            <a:srgbClr val="1A1A2E"/>
+          </a:solidFill>
+          <a:ln w="19050">
+            <a:solidFill>
+              <a:srgbClr val="667EEA"/>
+            </a:solidFill>
+          </a:ln>
+        </p:spPr>
+        <p:style>
+          <a:lnRef idx="1">
+            <a:schemeClr val="accent1"/>
+          </a:lnRef>
+          <a:fillRef idx="3">
+            <a:schemeClr val="accent1"/>
+          </a:fillRef>
+          <a:effectRef idx="2">
+            <a:schemeClr val="accent1"/>
+          </a:effectRef>
+          <a:fontRef idx="minor">
+            <a:schemeClr val="lt1"/>
+          </a:fontRef>
+        </p:style>
+        <p:txBody>
+          <a:bodyPr rtlCol="0" anchor="ctr"/>
+          <a:lstStyle/>
+          <a:p>
+            <a:pPr algn="ctr">
+              <a:defRPr sz="900" b="1">
+                <a:solidFill>
+                  <a:srgbClr val="E0E0E0"/>
+                </a:solidFill>
+              </a:defRPr>
+            </a:pPr>
+            <a:r>
+              <a:t>Delegate AI</a:t>
+            </a:r>
+          </a:p>
+        </p:txBody>
+      </p:sp>
+      <p:sp>
+        <p:nvSpPr>
+          <p:cNvPr id="11" name="Rounded Rectangle 10"/>
+          <p:cNvSpPr/>
+          <p:nvPr/>
+        </p:nvSpPr>
+        <p:spPr>
+          <a:xfrm>
+            <a:off x="320040" y="4663440"/>
+            <a:ext cx="1828800" cy="384048"/>
+          </a:xfrm>
+          <a:prstGeom prst="roundRect">
+            <a:avLst/>
+          </a:prstGeom>
+          <a:solidFill>
+            <a:srgbClr val="1A1A2E"/>
+          </a:solidFill>
+          <a:ln w="19050">
+            <a:solidFill>
+              <a:srgbClr val="667EEA"/>
+            </a:solidFill>
+          </a:ln>
+        </p:spPr>
+        <p:style>
+          <a:lnRef idx="1">
+            <a:schemeClr val="accent1"/>
+          </a:lnRef>
+          <a:fillRef idx="3">
+            <a:schemeClr val="accent1"/>
+          </a:fillRef>
+          <a:effectRef idx="2">
+            <a:schemeClr val="accent1"/>
+          </a:effectRef>
+          <a:fontRef idx="minor">
+            <a:schemeClr val="lt1"/>
+          </a:fontRef>
+        </p:style>
+        <p:txBody>
+          <a:bodyPr rtlCol="0" anchor="ctr"/>
+          <a:lstStyle/>
+          <a:p>
+            <a:pPr algn="ctr">
+              <a:defRPr sz="900" b="1">
+                <a:solidFill>
+                  <a:srgbClr val="E0E0E0"/>
+                </a:solidFill>
+              </a:defRPr>
+            </a:pPr>
+            <a:r>
+              <a:t>EQ Engine</a:t>
+            </a:r>
+          </a:p>
+        </p:txBody>
+      </p:sp>
+      <p:sp>
+        <p:nvSpPr>
+          <p:cNvPr id="12" name="Rounded Rectangle 11"/>
+          <p:cNvSpPr/>
+          <p:nvPr/>
+        </p:nvSpPr>
+        <p:spPr>
+          <a:xfrm>
+            <a:off x="2377440" y="1645920"/>
+            <a:ext cx="1920240" cy="411480"/>
+          </a:xfrm>
+          <a:prstGeom prst="roundRect">
+            <a:avLst/>
+          </a:prstGeom>
+          <a:solidFill>
+            <a:srgbClr val="10B981"/>
+          </a:solidFill>
+          <a:ln>
+            <a:noFill/>
+          </a:ln>
+        </p:spPr>
+        <p:style>
+          <a:lnRef idx="1">
+            <a:schemeClr val="accent1"/>
+          </a:lnRef>
+          <a:fillRef idx="3">
+            <a:schemeClr val="accent1"/>
+          </a:fillRef>
+          <a:effectRef idx="2">
+            <a:schemeClr val="accent1"/>
+          </a:effectRef>
+          <a:fontRef idx="minor">
+            <a:schemeClr val="lt1"/>
+          </a:fontRef>
+        </p:style>
+        <p:txBody>
+          <a:bodyPr rtlCol="0" anchor="ctr"/>
+          <a:lstStyle/>
+          <a:p>
+            <a:pPr algn="ctr">
+              <a:defRPr sz="1000" b="1">
+                <a:solidFill>
+                  <a:srgbClr val="FFFFFF"/>
+                </a:solidFill>
+              </a:defRPr>
+            </a:pPr>
+            <a:r>
+              <a:t>Intelligence</a:t>
+            </a:r>
+          </a:p>
+        </p:txBody>
+      </p:sp>
+      <p:sp>
+        <p:nvSpPr>
+          <p:cNvPr id="13" name="Rounded Rectangle 12"/>
+          <p:cNvSpPr/>
+          <p:nvPr/>
+        </p:nvSpPr>
+        <p:spPr>
+          <a:xfrm>
+            <a:off x="2423160" y="2148840"/>
+            <a:ext cx="1828800" cy="384048"/>
+          </a:xfrm>
+          <a:prstGeom prst="roundRect">
+            <a:avLst/>
+          </a:prstGeom>
+          <a:solidFill>
+            <a:srgbClr val="1A1A2E"/>
+          </a:solidFill>
+          <a:ln w="19050">
+            <a:solidFill>
+              <a:srgbClr val="10B981"/>
+            </a:solidFill>
+          </a:ln>
+        </p:spPr>
+        <p:style>
+          <a:lnRef idx="1">
+            <a:schemeClr val="accent1"/>
+          </a:lnRef>
+          <a:fillRef idx="3">
+            <a:schemeClr val="accent1"/>
+          </a:fillRef>
+          <a:effectRef idx="2">
+            <a:schemeClr val="accent1"/>
+          </a:effectRef>
+          <a:fontRef idx="minor">
+            <a:schemeClr val="lt1"/>
+          </a:fontRef>
+        </p:style>
+        <p:txBody>
+          <a:bodyPr rtlCol="0" anchor="ctr"/>
+          <a:lstStyle/>
+          <a:p>
+            <a:pPr algn="ctr">
+              <a:defRPr sz="900" b="1">
+                <a:solidFill>
+                  <a:srgbClr val="E0E0E0"/>
+                </a:solidFill>
+              </a:defRPr>
+            </a:pPr>
+            <a:r>
+              <a:t>GeoTalent</a:t>
+            </a:r>
+          </a:p>
+        </p:txBody>
+      </p:sp>
+      <p:sp>
+        <p:nvSpPr>
+          <p:cNvPr id="14" name="Rounded Rectangle 13"/>
+          <p:cNvSpPr/>
+          <p:nvPr/>
+        </p:nvSpPr>
+        <p:spPr>
+          <a:xfrm>
+            <a:off x="2423160" y="2651760"/>
+            <a:ext cx="1828800" cy="384048"/>
+          </a:xfrm>
+          <a:prstGeom prst="roundRect">
+            <a:avLst/>
+          </a:prstGeom>
+          <a:solidFill>
+            <a:srgbClr val="1A1A2E"/>
+          </a:solidFill>
+          <a:ln w="19050">
+            <a:solidFill>
+              <a:srgbClr val="10B981"/>
+            </a:solidFill>
+          </a:ln>
+        </p:spPr>
+        <p:style>
+          <a:lnRef idx="1">
+            <a:schemeClr val="accent1"/>
+          </a:lnRef>
+          <a:fillRef idx="3">
+            <a:schemeClr val="accent1"/>
+          </a:fillRef>
+          <a:effectRef idx="2">
+            <a:schemeClr val="accent1"/>
+          </a:effectRef>
+          <a:fontRef idx="minor">
+            <a:schemeClr val="lt1"/>
+          </a:fontRef>
+        </p:style>
+        <p:txBody>
+          <a:bodyPr rtlCol="0" anchor="ctr"/>
+          <a:lstStyle/>
+          <a:p>
+            <a:pPr algn="ctr">
+              <a:defRPr sz="900" b="1">
+                <a:solidFill>
+                  <a:srgbClr val="E0E0E0"/>
+                </a:solidFill>
+              </a:defRPr>
+            </a:pPr>
+            <a:r>
+              <a:t>News Bureau</a:t>
+            </a:r>
+          </a:p>
+        </p:txBody>
+      </p:sp>
+      <p:sp>
+        <p:nvSpPr>
+          <p:cNvPr id="15" name="Rounded Rectangle 14"/>
+          <p:cNvSpPr/>
+          <p:nvPr/>
+        </p:nvSpPr>
+        <p:spPr>
+          <a:xfrm>
+            <a:off x="2423160" y="3154680"/>
+            <a:ext cx="1828800" cy="384048"/>
+          </a:xfrm>
+          <a:prstGeom prst="roundRect">
+            <a:avLst/>
+          </a:prstGeom>
+          <a:solidFill>
+            <a:srgbClr val="1A1A2E"/>
+          </a:solidFill>
+          <a:ln w="19050">
+            <a:solidFill>
+              <a:srgbClr val="10B981"/>
+            </a:solidFill>
+          </a:ln>
+        </p:spPr>
+        <p:style>
+          <a:lnRef idx="1">
+            <a:schemeClr val="accent1"/>
+          </a:lnRef>
+          <a:fillRef idx="3">
+            <a:schemeClr val="accent1"/>
+          </a:fillRef>
+          <a:effectRef idx="2">
+            <a:schemeClr val="accent1"/>
+          </a:effectRef>
+          <a:fontRef idx="minor">
+            <a:schemeClr val="lt1"/>
+          </a:fontRef>
+        </p:style>
+        <p:txBody>
+          <a:bodyPr rtlCol="0" anchor="ctr"/>
+          <a:lstStyle/>
+          <a:p>
+            <a:pPr algn="ctr">
+              <a:defRPr sz="900" b="1">
+                <a:solidFill>
+                  <a:srgbClr val="E0E0E0"/>
+                </a:solidFill>
+              </a:defRPr>
+            </a:pPr>
+            <a:r>
+              <a:t>Deep Crawler</a:t>
+            </a:r>
+          </a:p>
+        </p:txBody>
+      </p:sp>
+      <p:sp>
+        <p:nvSpPr>
+          <p:cNvPr id="16" name="Rounded Rectangle 15"/>
+          <p:cNvSpPr/>
+          <p:nvPr/>
+        </p:nvSpPr>
+        <p:spPr>
+          <a:xfrm>
+            <a:off x="2423160" y="3657600"/>
+            <a:ext cx="1828800" cy="384048"/>
+          </a:xfrm>
+          <a:prstGeom prst="roundRect">
+            <a:avLst/>
+          </a:prstGeom>
+          <a:solidFill>
+            <a:srgbClr val="1A1A2E"/>
+          </a:solidFill>
+          <a:ln w="19050">
+            <a:solidFill>
+              <a:srgbClr val="10B981"/>
+            </a:solidFill>
+          </a:ln>
+        </p:spPr>
+        <p:style>
+          <a:lnRef idx="1">
+            <a:schemeClr val="accent1"/>
+          </a:lnRef>
+          <a:fillRef idx="3">
+            <a:schemeClr val="accent1"/>
+          </a:fillRef>
+          <a:effectRef idx="2">
+            <a:schemeClr val="accent1"/>
+          </a:effectRef>
+          <a:fontRef idx="minor">
+            <a:schemeClr val="lt1"/>
+          </a:fontRef>
+        </p:style>
+        <p:txBody>
+          <a:bodyPr rtlCol="0" anchor="ctr"/>
+          <a:lstStyle/>
+          <a:p>
+            <a:pPr algn="ctr">
+              <a:defRPr sz="900" b="1">
+                <a:solidFill>
+                  <a:srgbClr val="E0E0E0"/>
+                </a:solidFill>
+              </a:defRPr>
+            </a:pPr>
+            <a:r>
+              <a:t>Researcher</a:t>
+            </a:r>
+          </a:p>
+        </p:txBody>
+      </p:sp>
+      <p:sp>
+        <p:nvSpPr>
+          <p:cNvPr id="17" name="Rounded Rectangle 16"/>
+          <p:cNvSpPr/>
+          <p:nvPr/>
+        </p:nvSpPr>
+        <p:spPr>
+          <a:xfrm>
+            <a:off x="4480560" y="1645920"/>
+            <a:ext cx="1920240" cy="411480"/>
+          </a:xfrm>
+          <a:prstGeom prst="roundRect">
+            <a:avLst/>
+          </a:prstGeom>
+          <a:solidFill>
+            <a:srgbClr val="F97316"/>
+          </a:solidFill>
+          <a:ln>
+            <a:noFill/>
+          </a:ln>
+        </p:spPr>
+        <p:style>
+          <a:lnRef idx="1">
+            <a:schemeClr val="accent1"/>
+          </a:lnRef>
+          <a:fillRef idx="3">
+            <a:schemeClr val="accent1"/>
+          </a:fillRef>
+          <a:effectRef idx="2">
+            <a:schemeClr val="accent1"/>
+          </a:effectRef>
+          <a:fontRef idx="minor">
+            <a:schemeClr val="lt1"/>
+          </a:fontRef>
+        </p:style>
+        <p:txBody>
+          <a:bodyPr rtlCol="0" anchor="ctr"/>
+          <a:lstStyle/>
+          <a:p>
+            <a:pPr algn="ctr">
+              <a:defRPr sz="1000" b="1">
+                <a:solidFill>
+                  <a:srgbClr val="FFFFFF"/>
+                </a:solidFill>
+              </a:defRPr>
+            </a:pPr>
+            <a:r>
+              <a:t>Quality Gate</a:t>
+            </a:r>
+          </a:p>
+        </p:txBody>
+      </p:sp>
+      <p:sp>
+        <p:nvSpPr>
+          <p:cNvPr id="18" name="Rounded Rectangle 17"/>
+          <p:cNvSpPr/>
+          <p:nvPr/>
+        </p:nvSpPr>
+        <p:spPr>
+          <a:xfrm>
+            <a:off x="4526280" y="2148840"/>
+            <a:ext cx="1828800" cy="384048"/>
+          </a:xfrm>
+          <a:prstGeom prst="roundRect">
+            <a:avLst/>
+          </a:prstGeom>
+          <a:solidFill>
+            <a:srgbClr val="1A1A2E"/>
+          </a:solidFill>
+          <a:ln w="19050">
+            <a:solidFill>
+              <a:srgbClr val="F97316"/>
+            </a:solidFill>
+          </a:ln>
+        </p:spPr>
+        <p:style>
+          <a:lnRef idx="1">
+            <a:schemeClr val="accent1"/>
+          </a:lnRef>
+          <a:fillRef idx="3">
+            <a:schemeClr val="accent1"/>
+          </a:fillRef>
+          <a:effectRef idx="2">
+            <a:schemeClr val="accent1"/>
+          </a:effectRef>
+          <a:fontRef idx="minor">
+            <a:schemeClr val="lt1"/>
+          </a:fontRef>
+        </p:style>
+        <p:txBody>
+          <a:bodyPr rtlCol="0" anchor="ctr"/>
+          <a:lstStyle/>
+          <a:p>
+            <a:pPr algn="ctr">
+              <a:defRPr sz="900" b="1">
+                <a:solidFill>
+                  <a:srgbClr val="E0E0E0"/>
+                </a:solidFill>
+              </a:defRPr>
+            </a:pPr>
+            <a:r>
+              <a:t>Critic</a:t>
+            </a:r>
+          </a:p>
+        </p:txBody>
+      </p:sp>
+      <p:sp>
+        <p:nvSpPr>
+          <p:cNvPr id="19" name="Rounded Rectangle 18"/>
+          <p:cNvSpPr/>
+          <p:nvPr/>
+        </p:nvSpPr>
+        <p:spPr>
+          <a:xfrm>
+            <a:off x="4526280" y="2651760"/>
+            <a:ext cx="1828800" cy="384048"/>
+          </a:xfrm>
+          <a:prstGeom prst="roundRect">
+            <a:avLst/>
+          </a:prstGeom>
+          <a:solidFill>
+            <a:srgbClr val="1A1A2E"/>
+          </a:solidFill>
+          <a:ln w="19050">
+            <a:solidFill>
+              <a:srgbClr val="F97316"/>
+            </a:solidFill>
+          </a:ln>
+        </p:spPr>
+        <p:style>
+          <a:lnRef idx="1">
+            <a:schemeClr val="accent1"/>
+          </a:lnRef>
+          <a:fillRef idx="3">
+            <a:schemeClr val="accent1"/>
+          </a:fillRef>
+          <a:effectRef idx="2">
+            <a:schemeClr val="accent1"/>
+          </a:effectRef>
+          <a:fontRef idx="minor">
+            <a:schemeClr val="lt1"/>
+          </a:fontRef>
+        </p:style>
+        <p:txBody>
+          <a:bodyPr rtlCol="0" anchor="ctr"/>
+          <a:lstStyle/>
+          <a:p>
+            <a:pPr algn="ctr">
+              <a:defRPr sz="900" b="1">
+                <a:solidFill>
+                  <a:srgbClr val="E0E0E0"/>
+                </a:solidFill>
+              </a:defRPr>
+            </a:pPr>
+            <a:r>
+              <a:t>Compliance</a:t>
+            </a:r>
+          </a:p>
+        </p:txBody>
+      </p:sp>
+      <p:sp>
+        <p:nvSpPr>
+          <p:cNvPr id="20" name="Rounded Rectangle 19"/>
+          <p:cNvSpPr/>
+          <p:nvPr/>
+        </p:nvSpPr>
+        <p:spPr>
+          <a:xfrm>
+            <a:off x="4526280" y="3154680"/>
+            <a:ext cx="1828800" cy="384048"/>
+          </a:xfrm>
+          <a:prstGeom prst="roundRect">
+            <a:avLst/>
+          </a:prstGeom>
+          <a:solidFill>
+            <a:srgbClr val="1A1A2E"/>
+          </a:solidFill>
+          <a:ln w="19050">
+            <a:solidFill>
+              <a:srgbClr val="F97316"/>
+            </a:solidFill>
+          </a:ln>
+        </p:spPr>
+        <p:style>
+          <a:lnRef idx="1">
+            <a:schemeClr val="accent1"/>
+          </a:lnRef>
+          <a:fillRef idx="3">
+            <a:schemeClr val="accent1"/>
+          </a:fillRef>
+          <a:effectRef idx="2">
+            <a:schemeClr val="accent1"/>
+          </a:effectRef>
+          <a:fontRef idx="minor">
+            <a:schemeClr val="lt1"/>
+          </a:fontRef>
+        </p:style>
+        <p:txBody>
+          <a:bodyPr rtlCol="0" anchor="ctr"/>
+          <a:lstStyle/>
+          <a:p>
+            <a:pPr algn="ctr">
+              <a:defRPr sz="900" b="1">
+                <a:solidFill>
+                  <a:srgbClr val="E0E0E0"/>
+                </a:solidFill>
+              </a:defRPr>
+            </a:pPr>
+            <a:r>
+              <a:t>Librarian</a:t>
+            </a:r>
+          </a:p>
+        </p:txBody>
+      </p:sp>
+      <p:sp>
+        <p:nvSpPr>
+          <p:cNvPr id="21" name="Rounded Rectangle 20"/>
+          <p:cNvSpPr/>
+          <p:nvPr/>
+        </p:nvSpPr>
+        <p:spPr>
+          <a:xfrm>
+            <a:off x="6583680" y="1645920"/>
+            <a:ext cx="1920240" cy="411480"/>
+          </a:xfrm>
+          <a:prstGeom prst="roundRect">
+            <a:avLst/>
+          </a:prstGeom>
+          <a:solidFill>
+            <a:srgbClr val="764BA2"/>
+          </a:solidFill>
+          <a:ln>
+            <a:noFill/>
+          </a:ln>
+        </p:spPr>
+        <p:style>
+          <a:lnRef idx="1">
+            <a:schemeClr val="accent1"/>
+          </a:lnRef>
+          <a:fillRef idx="3">
+            <a:schemeClr val="accent1"/>
+          </a:fillRef>
+          <a:effectRef idx="2">
+            <a:schemeClr val="accent1"/>
+          </a:effectRef>
+          <a:fontRef idx="minor">
+            <a:schemeClr val="lt1"/>
+          </a:fontRef>
+        </p:style>
+        <p:txBody>
+          <a:bodyPr rtlCol="0" anchor="ctr"/>
+          <a:lstStyle/>
+          <a:p>
+            <a:pPr algn="ctr">
+              <a:defRPr sz="1000" b="1">
+                <a:solidFill>
+                  <a:srgbClr val="FFFFFF"/>
+                </a:solidFill>
+              </a:defRPr>
+            </a:pPr>
+            <a:r>
+              <a:t>Executive</a:t>
+            </a:r>
+          </a:p>
+        </p:txBody>
+      </p:sp>
+      <p:sp>
+        <p:nvSpPr>
+          <p:cNvPr id="22" name="Rounded Rectangle 21"/>
+          <p:cNvSpPr/>
+          <p:nvPr/>
+        </p:nvSpPr>
+        <p:spPr>
+          <a:xfrm>
+            <a:off x="6629400" y="2148840"/>
+            <a:ext cx="1828800" cy="384048"/>
+          </a:xfrm>
+          <a:prstGeom prst="roundRect">
+            <a:avLst/>
+          </a:prstGeom>
+          <a:solidFill>
+            <a:srgbClr val="1A1A2E"/>
+          </a:solidFill>
+          <a:ln w="19050">
+            <a:solidFill>
+              <a:srgbClr val="764BA2"/>
+            </a:solidFill>
+          </a:ln>
+        </p:spPr>
+        <p:style>
+          <a:lnRef idx="1">
+            <a:schemeClr val="accent1"/>
+          </a:lnRef>
+          <a:fillRef idx="3">
+            <a:schemeClr val="accent1"/>
+          </a:fillRef>
+          <a:effectRef idx="2">
+            <a:schemeClr val="accent1"/>
+          </a:effectRef>
+          <a:fontRef idx="minor">
+            <a:schemeClr val="lt1"/>
+          </a:fontRef>
+        </p:style>
+        <p:txBody>
+          <a:bodyPr rtlCol="0" anchor="ctr"/>
+          <a:lstStyle/>
+          <a:p>
+            <a:pPr algn="ctr">
+              <a:defRPr sz="900" b="1">
+                <a:solidFill>
+                  <a:srgbClr val="E0E0E0"/>
+                </a:solidFill>
+              </a:defRPr>
+            </a:pPr>
+            <a:r>
+              <a:t>Presentations</a:t>
+            </a:r>
+          </a:p>
+        </p:txBody>
+      </p:sp>
+      <p:sp>
+        <p:nvSpPr>
+          <p:cNvPr id="23" name="Rounded Rectangle 22"/>
+          <p:cNvSpPr/>
+          <p:nvPr/>
+        </p:nvSpPr>
+        <p:spPr>
+          <a:xfrm>
+            <a:off x="6629400" y="2651760"/>
+            <a:ext cx="1828800" cy="384048"/>
+          </a:xfrm>
+          <a:prstGeom prst="roundRect">
+            <a:avLst/>
+          </a:prstGeom>
+          <a:solidFill>
+            <a:srgbClr val="1A1A2E"/>
+          </a:solidFill>
+          <a:ln w="19050">
+            <a:solidFill>
+              <a:srgbClr val="764BA2"/>
+            </a:solidFill>
+          </a:ln>
+        </p:spPr>
+        <p:style>
+          <a:lnRef idx="1">
+            <a:schemeClr val="accent1"/>
+          </a:lnRef>
+          <a:fillRef idx="3">
+            <a:schemeClr val="accent1"/>
+          </a:fillRef>
+          <a:effectRef idx="2">
+            <a:schemeClr val="accent1"/>
+          </a:effectRef>
+          <a:fontRef idx="minor">
+            <a:schemeClr val="lt1"/>
+          </a:fontRef>
+        </p:style>
+        <p:txBody>
+          <a:bodyPr rtlCol="0" anchor="ctr"/>
+          <a:lstStyle/>
+          <a:p>
+            <a:pPr algn="ctr">
+              <a:defRPr sz="900" b="1">
+                <a:solidFill>
+                  <a:srgbClr val="E0E0E0"/>
+                </a:solidFill>
+              </a:defRPr>
+            </a:pPr>
+            <a:r>
+              <a:t>CX Strategist</a:t>
+            </a:r>
+          </a:p>
+        </p:txBody>
+      </p:sp>
+      <p:sp>
+        <p:nvSpPr>
+          <p:cNvPr id="24" name="Rounded Rectangle 23"/>
+          <p:cNvSpPr/>
+          <p:nvPr/>
+        </p:nvSpPr>
+        <p:spPr>
+          <a:xfrm>
+            <a:off x="6629400" y="3154680"/>
+            <a:ext cx="1828800" cy="384048"/>
+          </a:xfrm>
+          <a:prstGeom prst="roundRect">
+            <a:avLst/>
+          </a:prstGeom>
+          <a:solidFill>
+            <a:srgbClr val="1A1A2E"/>
+          </a:solidFill>
+          <a:ln w="19050">
+            <a:solidFill>
+              <a:srgbClr val="764BA2"/>
+            </a:solidFill>
+          </a:ln>
+        </p:spPr>
+        <p:style>
+          <a:lnRef idx="1">
+            <a:schemeClr val="accent1"/>
+          </a:lnRef>
+          <a:fillRef idx="3">
+            <a:schemeClr val="accent1"/>
+          </a:fillRef>
+          <a:effectRef idx="2">
+            <a:schemeClr val="accent1"/>
+          </a:effectRef>
+          <a:fontRef idx="minor">
+            <a:schemeClr val="lt1"/>
+          </a:fontRef>
+        </p:style>
+        <p:txBody>
+          <a:bodyPr rtlCol="0" anchor="ctr"/>
+          <a:lstStyle/>
+          <a:p>
+            <a:pPr algn="ctr">
+              <a:defRPr sz="900" b="1">
+                <a:solidFill>
+                  <a:srgbClr val="E0E0E0"/>
+                </a:solidFill>
+              </a:defRPr>
+            </a:pPr>
+            <a:r>
+              <a:t>CMO</a:t>
+            </a:r>
+          </a:p>
+        </p:txBody>
+      </p:sp>
+      <p:sp>
+        <p:nvSpPr>
+          <p:cNvPr id="25" name="Rounded Rectangle 24"/>
+          <p:cNvSpPr/>
+          <p:nvPr/>
+        </p:nvSpPr>
+        <p:spPr>
+          <a:xfrm>
+            <a:off x="8686800" y="1645920"/>
+            <a:ext cx="1920240" cy="411480"/>
+          </a:xfrm>
+          <a:prstGeom prst="roundRect">
+            <a:avLst/>
+          </a:prstGeom>
+          <a:solidFill>
+            <a:srgbClr val="EAB308"/>
+          </a:solidFill>
+          <a:ln>
+            <a:noFill/>
+          </a:ln>
+        </p:spPr>
+        <p:style>
+          <a:lnRef idx="1">
+            <a:schemeClr val="accent1"/>
+          </a:lnRef>
+          <a:fillRef idx="3">
+            <a:schemeClr val="accent1"/>
+          </a:fillRef>
+          <a:effectRef idx="2">
+            <a:schemeClr val="accent1"/>
+          </a:effectRef>
+          <a:fontRef idx="minor">
+            <a:schemeClr val="lt1"/>
+          </a:fontRef>
+        </p:style>
+        <p:txBody>
+          <a:bodyPr rtlCol="0" anchor="ctr"/>
+          <a:lstStyle/>
+          <a:p>
+            <a:pPr algn="ctr">
+              <a:defRPr sz="1000" b="1">
+                <a:solidFill>
+                  <a:srgbClr val="FFFFFF"/>
+                </a:solidFill>
+              </a:defRPr>
+            </a:pPr>
+            <a:r>
+              <a:t>Creative</a:t>
+            </a:r>
+          </a:p>
+        </p:txBody>
+      </p:sp>
+      <p:sp>
+        <p:nvSpPr>
+          <p:cNvPr id="26" name="Rounded Rectangle 25"/>
+          <p:cNvSpPr/>
+          <p:nvPr/>
+        </p:nvSpPr>
+        <p:spPr>
+          <a:xfrm>
+            <a:off x="8732520" y="2148840"/>
+            <a:ext cx="1828800" cy="384048"/>
+          </a:xfrm>
+          <a:prstGeom prst="roundRect">
+            <a:avLst/>
+          </a:prstGeom>
+          <a:solidFill>
+            <a:srgbClr val="1A1A2E"/>
+          </a:solidFill>
+          <a:ln w="19050">
+            <a:solidFill>
+              <a:srgbClr val="EAB308"/>
+            </a:solidFill>
+          </a:ln>
+        </p:spPr>
+        <p:style>
+          <a:lnRef idx="1">
+            <a:schemeClr val="accent1"/>
+          </a:lnRef>
+          <a:fillRef idx="3">
+            <a:schemeClr val="accent1"/>
+          </a:fillRef>
+          <a:effectRef idx="2">
+            <a:schemeClr val="accent1"/>
+          </a:effectRef>
+          <a:fontRef idx="minor">
+            <a:schemeClr val="lt1"/>
+          </a:fontRef>
+        </p:style>
+        <p:txBody>
+          <a:bodyPr rtlCol="0" anchor="ctr"/>
+          <a:lstStyle/>
+          <a:p>
+            <a:pPr algn="ctr">
+              <a:defRPr sz="900" b="1">
+                <a:solidFill>
+                  <a:srgbClr val="E0E0E0"/>
+                </a:solidFill>
+              </a:defRPr>
+            </a:pPr>
+            <a:r>
+              <a:t>Designer</a:t>
+            </a:r>
+          </a:p>
+        </p:txBody>
+      </p:sp>
+      <p:sp>
+        <p:nvSpPr>
+          <p:cNvPr id="27" name="Rounded Rectangle 26"/>
+          <p:cNvSpPr/>
+          <p:nvPr/>
+        </p:nvSpPr>
+        <p:spPr>
+          <a:xfrm>
+            <a:off x="8732520" y="2651760"/>
+            <a:ext cx="1828800" cy="384048"/>
+          </a:xfrm>
+          <a:prstGeom prst="roundRect">
+            <a:avLst/>
+          </a:prstGeom>
+          <a:solidFill>
+            <a:srgbClr val="1A1A2E"/>
+          </a:solidFill>
+          <a:ln w="19050">
+            <a:solidFill>
+              <a:srgbClr val="EAB308"/>
+            </a:solidFill>
+          </a:ln>
+        </p:spPr>
+        <p:style>
+          <a:lnRef idx="1">
+            <a:schemeClr val="accent1"/>
+          </a:lnRef>
+          <a:fillRef idx="3">
+            <a:schemeClr val="accent1"/>
+          </a:fillRef>
+          <a:effectRef idx="2">
+            <a:schemeClr val="accent1"/>
+          </a:effectRef>
+          <a:fontRef idx="minor">
+            <a:schemeClr val="lt1"/>
+          </a:fontRef>
+        </p:style>
+        <p:txBody>
+          <a:bodyPr rtlCol="0" anchor="ctr"/>
+          <a:lstStyle/>
+          <a:p>
+            <a:pPr algn="ctr">
+              <a:defRPr sz="900" b="1">
+                <a:solidFill>
+                  <a:srgbClr val="E0E0E0"/>
+                </a:solidFill>
+              </a:defRPr>
+            </a:pPr>
+            <a:r>
+              <a:t>Data Architect</a:t>
+            </a:r>
+          </a:p>
+        </p:txBody>
+      </p:sp>
+      <p:sp>
+        <p:nvSpPr>
+          <p:cNvPr id="28" name="Oval 27"/>
+          <p:cNvSpPr/>
+          <p:nvPr/>
+        </p:nvSpPr>
+        <p:spPr>
+          <a:xfrm>
+            <a:off x="457200" y="5760720"/>
+            <a:ext cx="137160" cy="137160"/>
+          </a:xfrm>
+          <a:prstGeom prst="ellipse">
+            <a:avLst/>
+          </a:prstGeom>
+          <a:solidFill>
+            <a:srgbClr val="667EEA"/>
+          </a:solidFill>
+          <a:ln>
+            <a:noFill/>
+          </a:ln>
+        </p:spPr>
+        <p:style>
+          <a:lnRef idx="1">
+            <a:schemeClr val="accent1"/>
+          </a:lnRef>
+          <a:fillRef idx="3">
+            <a:schemeClr val="accent1"/>
+          </a:fillRef>
+          <a:effectRef idx="2">
+            <a:schemeClr val="accent1"/>
+          </a:effectRef>
+          <a:fontRef idx="minor">
+            <a:schemeClr val="lt1"/>
+          </a:fontRef>
+        </p:style>
+        <p:txBody>
+          <a:bodyPr rtlCol="0" anchor="ctr"/>
+          <a:lstStyle/>
+          <a:p>
+            <a:pPr algn="ctr"/>
+          </a:p>
+        </p:txBody>
+      </p:sp>
+      <p:sp>
+        <p:nvSpPr>
+          <p:cNvPr id="29" name="TextBox 28"/>
           <p:cNvSpPr txBox="1"/>
           <p:nvPr/>
         </p:nvSpPr>
         <p:spPr>
           <a:xfrm>
-            <a:off x="731520" y="1645920"/>
-            <a:ext cx="10058400" cy="4389120"/>
+            <a:off x="640080" y="5742432"/>
+            <a:ext cx="1828800" cy="182880"/>
           </a:xfrm>
           <a:prstGeom prst="rect">
             <a:avLst/>
@@ -3688,88 +5160,332 @@
           <a:noFill/>
         </p:spPr>
         <p:txBody>
-          <a:bodyPr wrap="square">
+          <a:bodyPr wrap="none">
             <a:spAutoFit/>
           </a:bodyPr>
           <a:lstStyle/>
           <a:p>
             <a:pPr>
-              <a:spcAft>
-                <a:spcPts val="1200"/>
-              </a:spcAft>
-              <a:defRPr sz="1500">
-                <a:solidFill>
-                  <a:srgbClr val="C0C8E0"/>
-                </a:solidFill>
-                <a:latin typeface="Roboto"/>
-              </a:defRPr>
-            </a:pPr>
-            <a:r>
-              <a:t>    V7 Agent Skills Router -&gt; 18 specialist agents</a:t>
-            </a:r>
-          </a:p>
+              <a:defRPr sz="800">
+                <a:solidFill>
+                  <a:srgbClr val="94A3B8"/>
+                </a:solidFill>
+              </a:defRPr>
+            </a:pPr>
+            <a:r>
+              <a:t>System Core (6)</a:t>
+            </a:r>
+          </a:p>
+        </p:txBody>
+      </p:sp>
+      <p:sp>
+        <p:nvSpPr>
+          <p:cNvPr id="30" name="Oval 29"/>
+          <p:cNvSpPr/>
+          <p:nvPr/>
+        </p:nvSpPr>
+        <p:spPr>
+          <a:xfrm>
+            <a:off x="2651760" y="5760720"/>
+            <a:ext cx="137160" cy="137160"/>
+          </a:xfrm>
+          <a:prstGeom prst="ellipse">
+            <a:avLst/>
+          </a:prstGeom>
+          <a:solidFill>
+            <a:srgbClr val="10B981"/>
+          </a:solidFill>
+          <a:ln>
+            <a:noFill/>
+          </a:ln>
+        </p:spPr>
+        <p:style>
+          <a:lnRef idx="1">
+            <a:schemeClr val="accent1"/>
+          </a:lnRef>
+          <a:fillRef idx="3">
+            <a:schemeClr val="accent1"/>
+          </a:fillRef>
+          <a:effectRef idx="2">
+            <a:schemeClr val="accent1"/>
+          </a:effectRef>
+          <a:fontRef idx="minor">
+            <a:schemeClr val="lt1"/>
+          </a:fontRef>
+        </p:style>
+        <p:txBody>
+          <a:bodyPr rtlCol="0" anchor="ctr"/>
+          <a:lstStyle/>
+          <a:p>
+            <a:pPr algn="ctr"/>
+          </a:p>
+        </p:txBody>
+      </p:sp>
+      <p:sp>
+        <p:nvSpPr>
+          <p:cNvPr id="31" name="TextBox 30"/>
+          <p:cNvSpPr txBox="1"/>
+          <p:nvPr/>
+        </p:nvSpPr>
+        <p:spPr>
+          <a:xfrm>
+            <a:off x="2834640" y="5742432"/>
+            <a:ext cx="1828800" cy="182880"/>
+          </a:xfrm>
+          <a:prstGeom prst="rect">
+            <a:avLst/>
+          </a:prstGeom>
+          <a:noFill/>
+        </p:spPr>
+        <p:txBody>
+          <a:bodyPr wrap="none">
+            <a:spAutoFit/>
+          </a:bodyPr>
+          <a:lstStyle/>
           <a:p>
             <a:pPr>
-              <a:spcAft>
-                <a:spcPts val="1200"/>
-              </a:spcAft>
-              <a:defRPr sz="1500">
-                <a:solidFill>
-                  <a:srgbClr val="C0C8E0"/>
-                </a:solidFill>
-                <a:latin typeface="Roboto"/>
-              </a:defRPr>
-            </a:pPr>
-            <a:r>
-              <a:t>    Delegate AI Orchestrator for performance-based routing</a:t>
-            </a:r>
-          </a:p>
+              <a:defRPr sz="800">
+                <a:solidFill>
+                  <a:srgbClr val="94A3B8"/>
+                </a:solidFill>
+              </a:defRPr>
+            </a:pPr>
+            <a:r>
+              <a:t>Intelligence (4)</a:t>
+            </a:r>
+          </a:p>
+        </p:txBody>
+      </p:sp>
+      <p:sp>
+        <p:nvSpPr>
+          <p:cNvPr id="32" name="Oval 31"/>
+          <p:cNvSpPr/>
+          <p:nvPr/>
+        </p:nvSpPr>
+        <p:spPr>
+          <a:xfrm>
+            <a:off x="4846320" y="5760720"/>
+            <a:ext cx="137160" cy="137160"/>
+          </a:xfrm>
+          <a:prstGeom prst="ellipse">
+            <a:avLst/>
+          </a:prstGeom>
+          <a:solidFill>
+            <a:srgbClr val="F97316"/>
+          </a:solidFill>
+          <a:ln>
+            <a:noFill/>
+          </a:ln>
+        </p:spPr>
+        <p:style>
+          <a:lnRef idx="1">
+            <a:schemeClr val="accent1"/>
+          </a:lnRef>
+          <a:fillRef idx="3">
+            <a:schemeClr val="accent1"/>
+          </a:fillRef>
+          <a:effectRef idx="2">
+            <a:schemeClr val="accent1"/>
+          </a:effectRef>
+          <a:fontRef idx="minor">
+            <a:schemeClr val="lt1"/>
+          </a:fontRef>
+        </p:style>
+        <p:txBody>
+          <a:bodyPr rtlCol="0" anchor="ctr"/>
+          <a:lstStyle/>
+          <a:p>
+            <a:pPr algn="ctr"/>
+          </a:p>
+        </p:txBody>
+      </p:sp>
+      <p:sp>
+        <p:nvSpPr>
+          <p:cNvPr id="33" name="TextBox 32"/>
+          <p:cNvSpPr txBox="1"/>
+          <p:nvPr/>
+        </p:nvSpPr>
+        <p:spPr>
+          <a:xfrm>
+            <a:off x="5029200" y="5742432"/>
+            <a:ext cx="1828800" cy="182880"/>
+          </a:xfrm>
+          <a:prstGeom prst="rect">
+            <a:avLst/>
+          </a:prstGeom>
+          <a:noFill/>
+        </p:spPr>
+        <p:txBody>
+          <a:bodyPr wrap="none">
+            <a:spAutoFit/>
+          </a:bodyPr>
+          <a:lstStyle/>
           <a:p>
             <a:pPr>
-              <a:spcAft>
-                <a:spcPts val="1200"/>
-              </a:spcAft>
-              <a:defRPr sz="1500">
-                <a:solidFill>
-                  <a:srgbClr val="C0C8E0"/>
-                </a:solidFill>
-                <a:latin typeface="Roboto"/>
-              </a:defRPr>
-            </a:pPr>
-            <a:r>
-              <a:t>    Leitner spaced-repetition error memory (5-level triage)</a:t>
-            </a:r>
-          </a:p>
+              <a:defRPr sz="800">
+                <a:solidFill>
+                  <a:srgbClr val="94A3B8"/>
+                </a:solidFill>
+              </a:defRPr>
+            </a:pPr>
+            <a:r>
+              <a:t>Quality Gate (3)</a:t>
+            </a:r>
+          </a:p>
+        </p:txBody>
+      </p:sp>
+      <p:sp>
+        <p:nvSpPr>
+          <p:cNvPr id="34" name="Oval 33"/>
+          <p:cNvSpPr/>
+          <p:nvPr/>
+        </p:nvSpPr>
+        <p:spPr>
+          <a:xfrm>
+            <a:off x="7040879" y="5760720"/>
+            <a:ext cx="137160" cy="137160"/>
+          </a:xfrm>
+          <a:prstGeom prst="ellipse">
+            <a:avLst/>
+          </a:prstGeom>
+          <a:solidFill>
+            <a:srgbClr val="764BA2"/>
+          </a:solidFill>
+          <a:ln>
+            <a:noFill/>
+          </a:ln>
+        </p:spPr>
+        <p:style>
+          <a:lnRef idx="1">
+            <a:schemeClr val="accent1"/>
+          </a:lnRef>
+          <a:fillRef idx="3">
+            <a:schemeClr val="accent1"/>
+          </a:fillRef>
+          <a:effectRef idx="2">
+            <a:schemeClr val="accent1"/>
+          </a:effectRef>
+          <a:fontRef idx="minor">
+            <a:schemeClr val="lt1"/>
+          </a:fontRef>
+        </p:style>
+        <p:txBody>
+          <a:bodyPr rtlCol="0" anchor="ctr"/>
+          <a:lstStyle/>
+          <a:p>
+            <a:pPr algn="ctr"/>
+          </a:p>
+        </p:txBody>
+      </p:sp>
+      <p:sp>
+        <p:nvSpPr>
+          <p:cNvPr id="35" name="TextBox 34"/>
+          <p:cNvSpPr txBox="1"/>
+          <p:nvPr/>
+        </p:nvSpPr>
+        <p:spPr>
+          <a:xfrm>
+            <a:off x="7223759" y="5742432"/>
+            <a:ext cx="1828800" cy="182880"/>
+          </a:xfrm>
+          <a:prstGeom prst="rect">
+            <a:avLst/>
+          </a:prstGeom>
+          <a:noFill/>
+        </p:spPr>
+        <p:txBody>
+          <a:bodyPr wrap="none">
+            <a:spAutoFit/>
+          </a:bodyPr>
+          <a:lstStyle/>
           <a:p>
             <a:pPr>
-              <a:spcAft>
-                <a:spcPts val="1200"/>
-              </a:spcAft>
-              <a:defRPr sz="1500">
-                <a:solidFill>
-                  <a:srgbClr val="C0C8E0"/>
-                </a:solidFill>
-                <a:latin typeface="Roboto"/>
-              </a:defRPr>
-            </a:pPr>
-            <a:r>
-              <a:t>    DataValidationEngine: Signal Warnings on bad data</a:t>
-            </a:r>
-          </a:p>
+              <a:defRPr sz="800">
+                <a:solidFill>
+                  <a:srgbClr val="94A3B8"/>
+                </a:solidFill>
+              </a:defRPr>
+            </a:pPr>
+            <a:r>
+              <a:t>Executive (3)</a:t>
+            </a:r>
+          </a:p>
+        </p:txBody>
+      </p:sp>
+      <p:sp>
+        <p:nvSpPr>
+          <p:cNvPr id="36" name="Oval 35"/>
+          <p:cNvSpPr/>
+          <p:nvPr/>
+        </p:nvSpPr>
+        <p:spPr>
+          <a:xfrm>
+            <a:off x="9235440" y="5760720"/>
+            <a:ext cx="137160" cy="137160"/>
+          </a:xfrm>
+          <a:prstGeom prst="ellipse">
+            <a:avLst/>
+          </a:prstGeom>
+          <a:solidFill>
+            <a:srgbClr val="EAB308"/>
+          </a:solidFill>
+          <a:ln>
+            <a:noFill/>
+          </a:ln>
+        </p:spPr>
+        <p:style>
+          <a:lnRef idx="1">
+            <a:schemeClr val="accent1"/>
+          </a:lnRef>
+          <a:fillRef idx="3">
+            <a:schemeClr val="accent1"/>
+          </a:fillRef>
+          <a:effectRef idx="2">
+            <a:schemeClr val="accent1"/>
+          </a:effectRef>
+          <a:fontRef idx="minor">
+            <a:schemeClr val="lt1"/>
+          </a:fontRef>
+        </p:style>
+        <p:txBody>
+          <a:bodyPr rtlCol="0" anchor="ctr"/>
+          <a:lstStyle/>
+          <a:p>
+            <a:pPr algn="ctr"/>
+          </a:p>
+        </p:txBody>
+      </p:sp>
+      <p:sp>
+        <p:nvSpPr>
+          <p:cNvPr id="37" name="TextBox 36"/>
+          <p:cNvSpPr txBox="1"/>
+          <p:nvPr/>
+        </p:nvSpPr>
+        <p:spPr>
+          <a:xfrm>
+            <a:off x="9418319" y="5742432"/>
+            <a:ext cx="1828800" cy="182880"/>
+          </a:xfrm>
+          <a:prstGeom prst="rect">
+            <a:avLst/>
+          </a:prstGeom>
+          <a:noFill/>
+        </p:spPr>
+        <p:txBody>
+          <a:bodyPr wrap="none">
+            <a:spAutoFit/>
+          </a:bodyPr>
+          <a:lstStyle/>
           <a:p>
             <a:pPr>
-              <a:spcAft>
-                <a:spcPts val="1200"/>
-              </a:spcAft>
-              <a:defRPr sz="1500">
-                <a:solidFill>
-                  <a:srgbClr val="C0C8E0"/>
-                </a:solidFill>
-                <a:latin typeface="Roboto"/>
-              </a:defRPr>
-            </a:pPr>
-            <a:r>
-              <a:t>    News Bureau Chief: auto-triggered context refresh</a:t>
+              <a:defRPr sz="800">
+                <a:solidFill>
+                  <a:srgbClr val="94A3B8"/>
+                </a:solidFill>
+              </a:defRPr>
+            </a:pPr>
+            <a:r>
+              <a:t>Creative (2)</a:t>
             </a:r>
           </a:p>
         </p:txBody>
@@ -3851,8 +5567,8 @@
         </p:nvSpPr>
         <p:spPr>
           <a:xfrm>
-            <a:off x="8686800" y="6263640"/>
-            <a:ext cx="3200400" cy="228600"/>
+            <a:off x="731520" y="457200"/>
+            <a:ext cx="10058400" cy="914400"/>
           </a:xfrm>
           <a:prstGeom prst="rect">
             <a:avLst/>
@@ -3865,41 +5581,6 @@
           </a:bodyPr>
           <a:lstStyle/>
           <a:p>
-            <a:pPr algn="r">
-              <a:defRPr sz="700">
-                <a:solidFill>
-                  <a:srgbClr val="4A4A6A"/>
-                </a:solidFill>
-              </a:defRPr>
-            </a:pPr>
-            <a:r>
-              <a:t>Layout: full_canvas_diagram</a:t>
-            </a:r>
-          </a:p>
-        </p:txBody>
-      </p:sp>
-      <p:sp>
-        <p:nvSpPr>
-          <p:cNvPr id="4" name="TextBox 3"/>
-          <p:cNvSpPr txBox="1"/>
-          <p:nvPr/>
-        </p:nvSpPr>
-        <p:spPr>
-          <a:xfrm>
-            <a:off x="731520" y="457200"/>
-            <a:ext cx="10058400" cy="914400"/>
-          </a:xfrm>
-          <a:prstGeom prst="rect">
-            <a:avLst/>
-          </a:prstGeom>
-          <a:noFill/>
-        </p:spPr>
-        <p:txBody>
-          <a:bodyPr wrap="square">
-            <a:spAutoFit/>
-          </a:bodyPr>
-          <a:lstStyle/>
-          <a:p>
             <a:pPr>
               <a:defRPr sz="2800" b="1">
                 <a:solidFill>
@@ -3909,30 +5590,32 @@
               </a:defRPr>
             </a:pPr>
             <a:r>
-              <a:t>Agent Network Architecture (V7)</a:t>
-            </a:r>
-          </a:p>
-        </p:txBody>
-      </p:sp>
-      <p:sp>
-        <p:nvSpPr>
-          <p:cNvPr id="5" name="Rounded Rectangle 4"/>
+              <a:t>System Health — OmniDashboard</a:t>
+            </a:r>
+          </a:p>
+        </p:txBody>
+      </p:sp>
+      <p:sp>
+        <p:nvSpPr>
+          <p:cNvPr id="4" name="Rounded Rectangle 3"/>
           <p:cNvSpPr/>
           <p:nvPr/>
         </p:nvSpPr>
         <p:spPr>
           <a:xfrm>
-            <a:off x="274320" y="1645920"/>
-            <a:ext cx="1920240" cy="411480"/>
+            <a:off x="731520" y="1463040"/>
+            <a:ext cx="1828800" cy="1097280"/>
           </a:xfrm>
           <a:prstGeom prst="roundRect">
             <a:avLst/>
           </a:prstGeom>
           <a:solidFill>
-            <a:srgbClr val="667EEA"/>
-          </a:solidFill>
-          <a:ln>
-            <a:noFill/>
+            <a:srgbClr val="1A1A2E"/>
+          </a:solidFill>
+          <a:ln w="25400">
+            <a:solidFill>
+              <a:srgbClr val="10B981"/>
+            </a:solidFill>
           </a:ln>
         </p:spPr>
         <p:style>
@@ -3950,32 +5633,45 @@
           </a:fontRef>
         </p:style>
         <p:txBody>
-          <a:bodyPr rtlCol="0" anchor="ctr"/>
+          <a:bodyPr rtlCol="0" anchor="ctr" wrap="square"/>
           <a:lstStyle/>
           <a:p>
             <a:pPr algn="ctr">
-              <a:defRPr sz="1000" b="1">
-                <a:solidFill>
-                  <a:srgbClr val="FFFFFF"/>
-                </a:solidFill>
-              </a:defRPr>
-            </a:pPr>
-            <a:r>
-              <a:t>System Core</a:t>
-            </a:r>
-          </a:p>
-        </p:txBody>
-      </p:sp>
-      <p:sp>
-        <p:nvSpPr>
-          <p:cNvPr id="6" name="Rounded Rectangle 5"/>
+              <a:defRPr sz="2400" b="1">
+                <a:solidFill>
+                  <a:srgbClr val="10B981"/>
+                </a:solidFill>
+                <a:latin typeface="Inter"/>
+              </a:defRPr>
+            </a:pPr>
+            <a:r>
+              <a:t>16/18</a:t>
+            </a:r>
+          </a:p>
+          <a:p>
+            <a:pPr algn="ctr">
+              <a:defRPr sz="900">
+                <a:solidFill>
+                  <a:srgbClr val="94A3B8"/>
+                </a:solidFill>
+              </a:defRPr>
+            </a:pPr>
+            <a:r>
+              <a:t>Active</a:t>
+            </a:r>
+          </a:p>
+        </p:txBody>
+      </p:sp>
+      <p:sp>
+        <p:nvSpPr>
+          <p:cNvPr id="5" name="Rounded Rectangle 4"/>
           <p:cNvSpPr/>
           <p:nvPr/>
         </p:nvSpPr>
         <p:spPr>
           <a:xfrm>
-            <a:off x="320040" y="2148840"/>
-            <a:ext cx="1828800" cy="384048"/>
+            <a:off x="2926080" y="1463040"/>
+            <a:ext cx="1828800" cy="1097280"/>
           </a:xfrm>
           <a:prstGeom prst="roundRect">
             <a:avLst/>
@@ -3983,7 +5679,7 @@
           <a:solidFill>
             <a:srgbClr val="1A1A2E"/>
           </a:solidFill>
-          <a:ln w="19050">
+          <a:ln w="25400">
             <a:solidFill>
               <a:srgbClr val="667EEA"/>
             </a:solidFill>
@@ -4004,32 +5700,45 @@
           </a:fontRef>
         </p:style>
         <p:txBody>
-          <a:bodyPr rtlCol="0" anchor="ctr"/>
+          <a:bodyPr rtlCol="0" anchor="ctr" wrap="square"/>
           <a:lstStyle/>
           <a:p>
             <a:pPr algn="ctr">
-              <a:defRPr sz="900" b="1">
-                <a:solidFill>
-                  <a:srgbClr val="E0E0E0"/>
-                </a:solidFill>
-              </a:defRPr>
-            </a:pPr>
-            <a:r>
-              <a:t>CEO</a:t>
-            </a:r>
-          </a:p>
-        </p:txBody>
-      </p:sp>
-      <p:sp>
-        <p:nvSpPr>
-          <p:cNvPr id="7" name="Rounded Rectangle 6"/>
+              <a:defRPr sz="2400" b="1">
+                <a:solidFill>
+                  <a:srgbClr val="667EEA"/>
+                </a:solidFill>
+                <a:latin typeface="Inter"/>
+              </a:defRPr>
+            </a:pPr>
+            <a:r>
+              <a:t>3.2/10</a:t>
+            </a:r>
+          </a:p>
+          <a:p>
+            <a:pPr algn="ctr">
+              <a:defRPr sz="900">
+                <a:solidFill>
+                  <a:srgbClr val="94A3B8"/>
+                </a:solidFill>
+              </a:defRPr>
+            </a:pPr>
+            <a:r>
+              <a:t>EQ Stress</a:t>
+            </a:r>
+          </a:p>
+        </p:txBody>
+      </p:sp>
+      <p:sp>
+        <p:nvSpPr>
+          <p:cNvPr id="6" name="Rounded Rectangle 5"/>
           <p:cNvSpPr/>
           <p:nvPr/>
         </p:nvSpPr>
         <p:spPr>
           <a:xfrm>
-            <a:off x="320040" y="2651760"/>
-            <a:ext cx="1828800" cy="384048"/>
+            <a:off x="5120640" y="1463040"/>
+            <a:ext cx="1828800" cy="1097280"/>
           </a:xfrm>
           <a:prstGeom prst="roundRect">
             <a:avLst/>
@@ -4037,9 +5746,9 @@
           <a:solidFill>
             <a:srgbClr val="1A1A2E"/>
           </a:solidFill>
-          <a:ln w="19050">
+          <a:ln w="25400">
             <a:solidFill>
-              <a:srgbClr val="667EEA"/>
+              <a:srgbClr val="EAB308"/>
             </a:solidFill>
           </a:ln>
         </p:spPr>
@@ -4058,32 +5767,45 @@
           </a:fontRef>
         </p:style>
         <p:txBody>
-          <a:bodyPr rtlCol="0" anchor="ctr"/>
+          <a:bodyPr rtlCol="0" anchor="ctr" wrap="square"/>
           <a:lstStyle/>
           <a:p>
             <a:pPr algn="ctr">
-              <a:defRPr sz="900" b="1">
-                <a:solidFill>
-                  <a:srgbClr val="E0E0E0"/>
-                </a:solidFill>
-              </a:defRPr>
-            </a:pPr>
-            <a:r>
-              <a:t>CFO</a:t>
-            </a:r>
-          </a:p>
-        </p:txBody>
-      </p:sp>
-      <p:sp>
-        <p:nvSpPr>
-          <p:cNvPr id="8" name="Rounded Rectangle 7"/>
+              <a:defRPr sz="2400" b="1">
+                <a:solidFill>
+                  <a:srgbClr val="EAB308"/>
+                </a:solidFill>
+                <a:latin typeface="Inter"/>
+              </a:defRPr>
+            </a:pPr>
+            <a:r>
+              <a:t>5</a:t>
+            </a:r>
+          </a:p>
+          <a:p>
+            <a:pPr algn="ctr">
+              <a:defRPr sz="900">
+                <a:solidFill>
+                  <a:srgbClr val="94A3B8"/>
+                </a:solidFill>
+              </a:defRPr>
+            </a:pPr>
+            <a:r>
+              <a:t>Alerts</a:t>
+            </a:r>
+          </a:p>
+        </p:txBody>
+      </p:sp>
+      <p:sp>
+        <p:nvSpPr>
+          <p:cNvPr id="7" name="Rounded Rectangle 6"/>
           <p:cNvSpPr/>
           <p:nvPr/>
         </p:nvSpPr>
         <p:spPr>
           <a:xfrm>
-            <a:off x="320040" y="3154680"/>
-            <a:ext cx="1828800" cy="384048"/>
+            <a:off x="7315200" y="1463040"/>
+            <a:ext cx="1828800" cy="1097280"/>
           </a:xfrm>
           <a:prstGeom prst="roundRect">
             <a:avLst/>
@@ -4091,7 +5813,7 @@
           <a:solidFill>
             <a:srgbClr val="1A1A2E"/>
           </a:solidFill>
-          <a:ln w="19050">
+          <a:ln w="25400">
             <a:solidFill>
               <a:srgbClr val="667EEA"/>
             </a:solidFill>
@@ -4112,32 +5834,45 @@
           </a:fontRef>
         </p:style>
         <p:txBody>
-          <a:bodyPr rtlCol="0" anchor="ctr"/>
+          <a:bodyPr rtlCol="0" anchor="ctr" wrap="square"/>
           <a:lstStyle/>
           <a:p>
             <a:pPr algn="ctr">
-              <a:defRPr sz="900" b="1">
-                <a:solidFill>
-                  <a:srgbClr val="E0E0E0"/>
-                </a:solidFill>
-              </a:defRPr>
-            </a:pPr>
-            <a:r>
-              <a:t>CTO</a:t>
-            </a:r>
-          </a:p>
-        </p:txBody>
-      </p:sp>
-      <p:sp>
-        <p:nvSpPr>
-          <p:cNvPr id="9" name="Rounded Rectangle 8"/>
+              <a:defRPr sz="2400" b="1">
+                <a:solidFill>
+                  <a:srgbClr val="667EEA"/>
+                </a:solidFill>
+                <a:latin typeface="Inter"/>
+              </a:defRPr>
+            </a:pPr>
+            <a:r>
+              <a:t>12</a:t>
+            </a:r>
+          </a:p>
+          <a:p>
+            <a:pPr algn="ctr">
+              <a:defRPr sz="900">
+                <a:solidFill>
+                  <a:srgbClr val="94A3B8"/>
+                </a:solidFill>
+              </a:defRPr>
+            </a:pPr>
+            <a:r>
+              <a:t>Notifications</a:t>
+            </a:r>
+          </a:p>
+        </p:txBody>
+      </p:sp>
+      <p:sp>
+        <p:nvSpPr>
+          <p:cNvPr id="8" name="Rounded Rectangle 7"/>
           <p:cNvSpPr/>
           <p:nvPr/>
         </p:nvSpPr>
         <p:spPr>
           <a:xfrm>
-            <a:off x="320040" y="3657600"/>
-            <a:ext cx="1828800" cy="384048"/>
+            <a:off x="9509760" y="1463040"/>
+            <a:ext cx="1828800" cy="1097280"/>
           </a:xfrm>
           <a:prstGeom prst="roundRect">
             <a:avLst/>
@@ -4145,9 +5880,9 @@
           <a:solidFill>
             <a:srgbClr val="1A1A2E"/>
           </a:solidFill>
-          <a:ln w="19050">
+          <a:ln w="25400">
             <a:solidFill>
-              <a:srgbClr val="667EEA"/>
+              <a:srgbClr val="EF4444"/>
             </a:solidFill>
           </a:ln>
         </p:spPr>
@@ -4166,1039 +5901,45 @@
           </a:fontRef>
         </p:style>
         <p:txBody>
-          <a:bodyPr rtlCol="0" anchor="ctr"/>
+          <a:bodyPr rtlCol="0" anchor="ctr" wrap="square"/>
           <a:lstStyle/>
           <a:p>
             <a:pPr algn="ctr">
-              <a:defRPr sz="900" b="1">
-                <a:solidFill>
-                  <a:srgbClr val="E0E0E0"/>
-                </a:solidFill>
-              </a:defRPr>
-            </a:pPr>
-            <a:r>
-              <a:t>Aether</a:t>
-            </a:r>
-          </a:p>
-        </p:txBody>
-      </p:sp>
-      <p:sp>
-        <p:nvSpPr>
-          <p:cNvPr id="10" name="Rounded Rectangle 9"/>
-          <p:cNvSpPr/>
-          <p:nvPr/>
-        </p:nvSpPr>
-        <p:spPr>
-          <a:xfrm>
-            <a:off x="320040" y="4160520"/>
-            <a:ext cx="1828800" cy="384048"/>
-          </a:xfrm>
-          <a:prstGeom prst="roundRect">
-            <a:avLst/>
-          </a:prstGeom>
-          <a:solidFill>
-            <a:srgbClr val="1A1A2E"/>
-          </a:solidFill>
-          <a:ln w="19050">
-            <a:solidFill>
-              <a:srgbClr val="667EEA"/>
-            </a:solidFill>
-          </a:ln>
-        </p:spPr>
-        <p:style>
-          <a:lnRef idx="1">
-            <a:schemeClr val="accent1"/>
-          </a:lnRef>
-          <a:fillRef idx="3">
-            <a:schemeClr val="accent1"/>
-          </a:fillRef>
-          <a:effectRef idx="2">
-            <a:schemeClr val="accent1"/>
-          </a:effectRef>
-          <a:fontRef idx="minor">
-            <a:schemeClr val="lt1"/>
-          </a:fontRef>
-        </p:style>
-        <p:txBody>
-          <a:bodyPr rtlCol="0" anchor="ctr"/>
-          <a:lstStyle/>
+              <a:defRPr sz="2400" b="1">
+                <a:solidFill>
+                  <a:srgbClr val="EF4444"/>
+                </a:solidFill>
+                <a:latin typeface="Inter"/>
+              </a:defRPr>
+            </a:pPr>
+            <a:r>
+              <a:t>98.3%→12%</a:t>
+            </a:r>
+          </a:p>
           <a:p>
             <a:pPr algn="ctr">
-              <a:defRPr sz="900" b="1">
-                <a:solidFill>
-                  <a:srgbClr val="E0E0E0"/>
-                </a:solidFill>
-              </a:defRPr>
-            </a:pPr>
-            <a:r>
-              <a:t>Delegate AI</a:t>
-            </a:r>
-          </a:p>
-        </p:txBody>
-      </p:sp>
-      <p:sp>
-        <p:nvSpPr>
-          <p:cNvPr id="11" name="Rounded Rectangle 10"/>
-          <p:cNvSpPr/>
-          <p:nvPr/>
-        </p:nvSpPr>
-        <p:spPr>
-          <a:xfrm>
-            <a:off x="320040" y="4663440"/>
-            <a:ext cx="1828800" cy="384048"/>
-          </a:xfrm>
-          <a:prstGeom prst="roundRect">
-            <a:avLst/>
-          </a:prstGeom>
-          <a:solidFill>
-            <a:srgbClr val="1A1A2E"/>
-          </a:solidFill>
-          <a:ln w="19050">
-            <a:solidFill>
-              <a:srgbClr val="667EEA"/>
-            </a:solidFill>
-          </a:ln>
-        </p:spPr>
-        <p:style>
-          <a:lnRef idx="1">
-            <a:schemeClr val="accent1"/>
-          </a:lnRef>
-          <a:fillRef idx="3">
-            <a:schemeClr val="accent1"/>
-          </a:fillRef>
-          <a:effectRef idx="2">
-            <a:schemeClr val="accent1"/>
-          </a:effectRef>
-          <a:fontRef idx="minor">
-            <a:schemeClr val="lt1"/>
-          </a:fontRef>
-        </p:style>
-        <p:txBody>
-          <a:bodyPr rtlCol="0" anchor="ctr"/>
-          <a:lstStyle/>
-          <a:p>
-            <a:pPr algn="ctr">
-              <a:defRPr sz="900" b="1">
-                <a:solidFill>
-                  <a:srgbClr val="E0E0E0"/>
-                </a:solidFill>
-              </a:defRPr>
-            </a:pPr>
-            <a:r>
-              <a:t>EQ Engine</a:t>
-            </a:r>
-          </a:p>
-        </p:txBody>
-      </p:sp>
-      <p:sp>
-        <p:nvSpPr>
-          <p:cNvPr id="12" name="Rounded Rectangle 11"/>
-          <p:cNvSpPr/>
-          <p:nvPr/>
-        </p:nvSpPr>
-        <p:spPr>
-          <a:xfrm>
-            <a:off x="2377440" y="1645920"/>
-            <a:ext cx="1920240" cy="411480"/>
-          </a:xfrm>
-          <a:prstGeom prst="roundRect">
-            <a:avLst/>
-          </a:prstGeom>
-          <a:solidFill>
-            <a:srgbClr val="10B981"/>
-          </a:solidFill>
-          <a:ln>
-            <a:noFill/>
-          </a:ln>
-        </p:spPr>
-        <p:style>
-          <a:lnRef idx="1">
-            <a:schemeClr val="accent1"/>
-          </a:lnRef>
-          <a:fillRef idx="3">
-            <a:schemeClr val="accent1"/>
-          </a:fillRef>
-          <a:effectRef idx="2">
-            <a:schemeClr val="accent1"/>
-          </a:effectRef>
-          <a:fontRef idx="minor">
-            <a:schemeClr val="lt1"/>
-          </a:fontRef>
-        </p:style>
-        <p:txBody>
-          <a:bodyPr rtlCol="0" anchor="ctr"/>
-          <a:lstStyle/>
-          <a:p>
-            <a:pPr algn="ctr">
-              <a:defRPr sz="1000" b="1">
-                <a:solidFill>
-                  <a:srgbClr val="FFFFFF"/>
-                </a:solidFill>
-              </a:defRPr>
-            </a:pPr>
-            <a:r>
-              <a:t>Intelligence</a:t>
-            </a:r>
-          </a:p>
-        </p:txBody>
-      </p:sp>
-      <p:sp>
-        <p:nvSpPr>
-          <p:cNvPr id="13" name="Rounded Rectangle 12"/>
-          <p:cNvSpPr/>
-          <p:nvPr/>
-        </p:nvSpPr>
-        <p:spPr>
-          <a:xfrm>
-            <a:off x="2423160" y="2148840"/>
-            <a:ext cx="1828800" cy="384048"/>
-          </a:xfrm>
-          <a:prstGeom prst="roundRect">
-            <a:avLst/>
-          </a:prstGeom>
-          <a:solidFill>
-            <a:srgbClr val="1A1A2E"/>
-          </a:solidFill>
-          <a:ln w="19050">
-            <a:solidFill>
-              <a:srgbClr val="10B981"/>
-            </a:solidFill>
-          </a:ln>
-        </p:spPr>
-        <p:style>
-          <a:lnRef idx="1">
-            <a:schemeClr val="accent1"/>
-          </a:lnRef>
-          <a:fillRef idx="3">
-            <a:schemeClr val="accent1"/>
-          </a:fillRef>
-          <a:effectRef idx="2">
-            <a:schemeClr val="accent1"/>
-          </a:effectRef>
-          <a:fontRef idx="minor">
-            <a:schemeClr val="lt1"/>
-          </a:fontRef>
-        </p:style>
-        <p:txBody>
-          <a:bodyPr rtlCol="0" anchor="ctr"/>
-          <a:lstStyle/>
-          <a:p>
-            <a:pPr algn="ctr">
-              <a:defRPr sz="900" b="1">
-                <a:solidFill>
-                  <a:srgbClr val="E0E0E0"/>
-                </a:solidFill>
-              </a:defRPr>
-            </a:pPr>
-            <a:r>
-              <a:t>GeoTalent Scout</a:t>
-            </a:r>
-          </a:p>
-        </p:txBody>
-      </p:sp>
-      <p:sp>
-        <p:nvSpPr>
-          <p:cNvPr id="14" name="Rounded Rectangle 13"/>
-          <p:cNvSpPr/>
-          <p:nvPr/>
-        </p:nvSpPr>
-        <p:spPr>
-          <a:xfrm>
-            <a:off x="2423160" y="2651760"/>
-            <a:ext cx="1828800" cy="384048"/>
-          </a:xfrm>
-          <a:prstGeom prst="roundRect">
-            <a:avLst/>
-          </a:prstGeom>
-          <a:solidFill>
-            <a:srgbClr val="1A1A2E"/>
-          </a:solidFill>
-          <a:ln w="19050">
-            <a:solidFill>
-              <a:srgbClr val="10B981"/>
-            </a:solidFill>
-          </a:ln>
-        </p:spPr>
-        <p:style>
-          <a:lnRef idx="1">
-            <a:schemeClr val="accent1"/>
-          </a:lnRef>
-          <a:fillRef idx="3">
-            <a:schemeClr val="accent1"/>
-          </a:fillRef>
-          <a:effectRef idx="2">
-            <a:schemeClr val="accent1"/>
-          </a:effectRef>
-          <a:fontRef idx="minor">
-            <a:schemeClr val="lt1"/>
-          </a:fontRef>
-        </p:style>
-        <p:txBody>
-          <a:bodyPr rtlCol="0" anchor="ctr"/>
-          <a:lstStyle/>
-          <a:p>
-            <a:pPr algn="ctr">
-              <a:defRPr sz="900" b="1">
-                <a:solidFill>
-                  <a:srgbClr val="E0E0E0"/>
-                </a:solidFill>
-              </a:defRPr>
-            </a:pPr>
-            <a:r>
-              <a:t>News Bureau</a:t>
-            </a:r>
-          </a:p>
-        </p:txBody>
-      </p:sp>
-      <p:sp>
-        <p:nvSpPr>
-          <p:cNvPr id="15" name="Rounded Rectangle 14"/>
-          <p:cNvSpPr/>
-          <p:nvPr/>
-        </p:nvSpPr>
-        <p:spPr>
-          <a:xfrm>
-            <a:off x="2423160" y="3154680"/>
-            <a:ext cx="1828800" cy="384048"/>
-          </a:xfrm>
-          <a:prstGeom prst="roundRect">
-            <a:avLst/>
-          </a:prstGeom>
-          <a:solidFill>
-            <a:srgbClr val="1A1A2E"/>
-          </a:solidFill>
-          <a:ln w="19050">
-            <a:solidFill>
-              <a:srgbClr val="10B981"/>
-            </a:solidFill>
-          </a:ln>
-        </p:spPr>
-        <p:style>
-          <a:lnRef idx="1">
-            <a:schemeClr val="accent1"/>
-          </a:lnRef>
-          <a:fillRef idx="3">
-            <a:schemeClr val="accent1"/>
-          </a:fillRef>
-          <a:effectRef idx="2">
-            <a:schemeClr val="accent1"/>
-          </a:effectRef>
-          <a:fontRef idx="minor">
-            <a:schemeClr val="lt1"/>
-          </a:fontRef>
-        </p:style>
-        <p:txBody>
-          <a:bodyPr rtlCol="0" anchor="ctr"/>
-          <a:lstStyle/>
-          <a:p>
-            <a:pPr algn="ctr">
-              <a:defRPr sz="900" b="1">
-                <a:solidFill>
-                  <a:srgbClr val="E0E0E0"/>
-                </a:solidFill>
-              </a:defRPr>
-            </a:pPr>
-            <a:r>
-              <a:t>Deep Crawler</a:t>
-            </a:r>
-          </a:p>
-        </p:txBody>
-      </p:sp>
-      <p:sp>
-        <p:nvSpPr>
-          <p:cNvPr id="16" name="Rounded Rectangle 15"/>
-          <p:cNvSpPr/>
-          <p:nvPr/>
-        </p:nvSpPr>
-        <p:spPr>
-          <a:xfrm>
-            <a:off x="2423160" y="3657600"/>
-            <a:ext cx="1828800" cy="384048"/>
-          </a:xfrm>
-          <a:prstGeom prst="roundRect">
-            <a:avLst/>
-          </a:prstGeom>
-          <a:solidFill>
-            <a:srgbClr val="1A1A2E"/>
-          </a:solidFill>
-          <a:ln w="19050">
-            <a:solidFill>
-              <a:srgbClr val="10B981"/>
-            </a:solidFill>
-          </a:ln>
-        </p:spPr>
-        <p:style>
-          <a:lnRef idx="1">
-            <a:schemeClr val="accent1"/>
-          </a:lnRef>
-          <a:fillRef idx="3">
-            <a:schemeClr val="accent1"/>
-          </a:fillRef>
-          <a:effectRef idx="2">
-            <a:schemeClr val="accent1"/>
-          </a:effectRef>
-          <a:fontRef idx="minor">
-            <a:schemeClr val="lt1"/>
-          </a:fontRef>
-        </p:style>
-        <p:txBody>
-          <a:bodyPr rtlCol="0" anchor="ctr"/>
-          <a:lstStyle/>
-          <a:p>
-            <a:pPr algn="ctr">
-              <a:defRPr sz="900" b="1">
-                <a:solidFill>
-                  <a:srgbClr val="E0E0E0"/>
-                </a:solidFill>
-              </a:defRPr>
-            </a:pPr>
-            <a:r>
-              <a:t>Researcher</a:t>
-            </a:r>
-          </a:p>
-        </p:txBody>
-      </p:sp>
-      <p:sp>
-        <p:nvSpPr>
-          <p:cNvPr id="17" name="Rounded Rectangle 16"/>
-          <p:cNvSpPr/>
-          <p:nvPr/>
-        </p:nvSpPr>
-        <p:spPr>
-          <a:xfrm>
-            <a:off x="4480560" y="1645920"/>
-            <a:ext cx="1920240" cy="411480"/>
-          </a:xfrm>
-          <a:prstGeom prst="roundRect">
-            <a:avLst/>
-          </a:prstGeom>
-          <a:solidFill>
-            <a:srgbClr val="F97316"/>
-          </a:solidFill>
-          <a:ln>
-            <a:noFill/>
-          </a:ln>
-        </p:spPr>
-        <p:style>
-          <a:lnRef idx="1">
-            <a:schemeClr val="accent1"/>
-          </a:lnRef>
-          <a:fillRef idx="3">
-            <a:schemeClr val="accent1"/>
-          </a:fillRef>
-          <a:effectRef idx="2">
-            <a:schemeClr val="accent1"/>
-          </a:effectRef>
-          <a:fontRef idx="minor">
-            <a:schemeClr val="lt1"/>
-          </a:fontRef>
-        </p:style>
-        <p:txBody>
-          <a:bodyPr rtlCol="0" anchor="ctr"/>
-          <a:lstStyle/>
-          <a:p>
-            <a:pPr algn="ctr">
-              <a:defRPr sz="1000" b="1">
-                <a:solidFill>
-                  <a:srgbClr val="FFFFFF"/>
-                </a:solidFill>
-              </a:defRPr>
-            </a:pPr>
-            <a:r>
-              <a:t>Quality Gate</a:t>
-            </a:r>
-          </a:p>
-        </p:txBody>
-      </p:sp>
-      <p:sp>
-        <p:nvSpPr>
-          <p:cNvPr id="18" name="Rounded Rectangle 17"/>
-          <p:cNvSpPr/>
-          <p:nvPr/>
-        </p:nvSpPr>
-        <p:spPr>
-          <a:xfrm>
-            <a:off x="4526280" y="2148840"/>
-            <a:ext cx="1828800" cy="384048"/>
-          </a:xfrm>
-          <a:prstGeom prst="roundRect">
-            <a:avLst/>
-          </a:prstGeom>
-          <a:solidFill>
-            <a:srgbClr val="1A1A2E"/>
-          </a:solidFill>
-          <a:ln w="19050">
-            <a:solidFill>
-              <a:srgbClr val="F97316"/>
-            </a:solidFill>
-          </a:ln>
-        </p:spPr>
-        <p:style>
-          <a:lnRef idx="1">
-            <a:schemeClr val="accent1"/>
-          </a:lnRef>
-          <a:fillRef idx="3">
-            <a:schemeClr val="accent1"/>
-          </a:fillRef>
-          <a:effectRef idx="2">
-            <a:schemeClr val="accent1"/>
-          </a:effectRef>
-          <a:fontRef idx="minor">
-            <a:schemeClr val="lt1"/>
-          </a:fontRef>
-        </p:style>
-        <p:txBody>
-          <a:bodyPr rtlCol="0" anchor="ctr"/>
-          <a:lstStyle/>
-          <a:p>
-            <a:pPr algn="ctr">
-              <a:defRPr sz="900" b="1">
-                <a:solidFill>
-                  <a:srgbClr val="E0E0E0"/>
-                </a:solidFill>
-              </a:defRPr>
-            </a:pPr>
-            <a:r>
-              <a:t>The Critic</a:t>
-            </a:r>
-          </a:p>
-        </p:txBody>
-      </p:sp>
-      <p:sp>
-        <p:nvSpPr>
-          <p:cNvPr id="19" name="Rounded Rectangle 18"/>
-          <p:cNvSpPr/>
-          <p:nvPr/>
-        </p:nvSpPr>
-        <p:spPr>
-          <a:xfrm>
-            <a:off x="4526280" y="2651760"/>
-            <a:ext cx="1828800" cy="384048"/>
-          </a:xfrm>
-          <a:prstGeom prst="roundRect">
-            <a:avLst/>
-          </a:prstGeom>
-          <a:solidFill>
-            <a:srgbClr val="1A1A2E"/>
-          </a:solidFill>
-          <a:ln w="19050">
-            <a:solidFill>
-              <a:srgbClr val="F97316"/>
-            </a:solidFill>
-          </a:ln>
-        </p:spPr>
-        <p:style>
-          <a:lnRef idx="1">
-            <a:schemeClr val="accent1"/>
-          </a:lnRef>
-          <a:fillRef idx="3">
-            <a:schemeClr val="accent1"/>
-          </a:fillRef>
-          <a:effectRef idx="2">
-            <a:schemeClr val="accent1"/>
-          </a:effectRef>
-          <a:fontRef idx="minor">
-            <a:schemeClr val="lt1"/>
-          </a:fontRef>
-        </p:style>
-        <p:txBody>
-          <a:bodyPr rtlCol="0" anchor="ctr"/>
-          <a:lstStyle/>
-          <a:p>
-            <a:pPr algn="ctr">
-              <a:defRPr sz="900" b="1">
-                <a:solidFill>
-                  <a:srgbClr val="E0E0E0"/>
-                </a:solidFill>
-              </a:defRPr>
-            </a:pPr>
-            <a:r>
-              <a:t>Compliance</a:t>
-            </a:r>
-          </a:p>
-        </p:txBody>
-      </p:sp>
-      <p:sp>
-        <p:nvSpPr>
-          <p:cNvPr id="20" name="Rounded Rectangle 19"/>
-          <p:cNvSpPr/>
-          <p:nvPr/>
-        </p:nvSpPr>
-        <p:spPr>
-          <a:xfrm>
-            <a:off x="4526280" y="3154680"/>
-            <a:ext cx="1828800" cy="384048"/>
-          </a:xfrm>
-          <a:prstGeom prst="roundRect">
-            <a:avLst/>
-          </a:prstGeom>
-          <a:solidFill>
-            <a:srgbClr val="1A1A2E"/>
-          </a:solidFill>
-          <a:ln w="19050">
-            <a:solidFill>
-              <a:srgbClr val="F97316"/>
-            </a:solidFill>
-          </a:ln>
-        </p:spPr>
-        <p:style>
-          <a:lnRef idx="1">
-            <a:schemeClr val="accent1"/>
-          </a:lnRef>
-          <a:fillRef idx="3">
-            <a:schemeClr val="accent1"/>
-          </a:fillRef>
-          <a:effectRef idx="2">
-            <a:schemeClr val="accent1"/>
-          </a:effectRef>
-          <a:fontRef idx="minor">
-            <a:schemeClr val="lt1"/>
-          </a:fontRef>
-        </p:style>
-        <p:txBody>
-          <a:bodyPr rtlCol="0" anchor="ctr"/>
-          <a:lstStyle/>
-          <a:p>
-            <a:pPr algn="ctr">
-              <a:defRPr sz="900" b="1">
-                <a:solidFill>
-                  <a:srgbClr val="E0E0E0"/>
-                </a:solidFill>
-              </a:defRPr>
-            </a:pPr>
-            <a:r>
-              <a:t>The Librarian</a:t>
-            </a:r>
-          </a:p>
-        </p:txBody>
-      </p:sp>
-      <p:sp>
-        <p:nvSpPr>
-          <p:cNvPr id="21" name="Rounded Rectangle 20"/>
-          <p:cNvSpPr/>
-          <p:nvPr/>
-        </p:nvSpPr>
-        <p:spPr>
-          <a:xfrm>
-            <a:off x="6583680" y="1645920"/>
-            <a:ext cx="1920240" cy="411480"/>
-          </a:xfrm>
-          <a:prstGeom prst="roundRect">
-            <a:avLst/>
-          </a:prstGeom>
-          <a:solidFill>
-            <a:srgbClr val="764BA2"/>
-          </a:solidFill>
-          <a:ln>
-            <a:noFill/>
-          </a:ln>
-        </p:spPr>
-        <p:style>
-          <a:lnRef idx="1">
-            <a:schemeClr val="accent1"/>
-          </a:lnRef>
-          <a:fillRef idx="3">
-            <a:schemeClr val="accent1"/>
-          </a:fillRef>
-          <a:effectRef idx="2">
-            <a:schemeClr val="accent1"/>
-          </a:effectRef>
-          <a:fontRef idx="minor">
-            <a:schemeClr val="lt1"/>
-          </a:fontRef>
-        </p:style>
-        <p:txBody>
-          <a:bodyPr rtlCol="0" anchor="ctr"/>
-          <a:lstStyle/>
-          <a:p>
-            <a:pPr algn="ctr">
-              <a:defRPr sz="1000" b="1">
-                <a:solidFill>
-                  <a:srgbClr val="FFFFFF"/>
-                </a:solidFill>
-              </a:defRPr>
-            </a:pPr>
-            <a:r>
-              <a:t>Executive</a:t>
-            </a:r>
-          </a:p>
-        </p:txBody>
-      </p:sp>
-      <p:sp>
-        <p:nvSpPr>
-          <p:cNvPr id="22" name="Rounded Rectangle 21"/>
-          <p:cNvSpPr/>
-          <p:nvPr/>
-        </p:nvSpPr>
-        <p:spPr>
-          <a:xfrm>
-            <a:off x="6629400" y="2148840"/>
-            <a:ext cx="1828800" cy="384048"/>
-          </a:xfrm>
-          <a:prstGeom prst="roundRect">
-            <a:avLst/>
-          </a:prstGeom>
-          <a:solidFill>
-            <a:srgbClr val="1A1A2E"/>
-          </a:solidFill>
-          <a:ln w="19050">
-            <a:solidFill>
-              <a:srgbClr val="764BA2"/>
-            </a:solidFill>
-          </a:ln>
-        </p:spPr>
-        <p:style>
-          <a:lnRef idx="1">
-            <a:schemeClr val="accent1"/>
-          </a:lnRef>
-          <a:fillRef idx="3">
-            <a:schemeClr val="accent1"/>
-          </a:fillRef>
-          <a:effectRef idx="2">
-            <a:schemeClr val="accent1"/>
-          </a:effectRef>
-          <a:fontRef idx="minor">
-            <a:schemeClr val="lt1"/>
-          </a:fontRef>
-        </p:style>
-        <p:txBody>
-          <a:bodyPr rtlCol="0" anchor="ctr"/>
-          <a:lstStyle/>
-          <a:p>
-            <a:pPr algn="ctr">
-              <a:defRPr sz="900" b="1">
-                <a:solidFill>
-                  <a:srgbClr val="E0E0E0"/>
-                </a:solidFill>
-              </a:defRPr>
-            </a:pPr>
-            <a:r>
-              <a:t>Presentations</a:t>
-            </a:r>
-          </a:p>
-        </p:txBody>
-      </p:sp>
-      <p:sp>
-        <p:nvSpPr>
-          <p:cNvPr id="23" name="Rounded Rectangle 22"/>
-          <p:cNvSpPr/>
-          <p:nvPr/>
-        </p:nvSpPr>
-        <p:spPr>
-          <a:xfrm>
-            <a:off x="6629400" y="2651760"/>
-            <a:ext cx="1828800" cy="384048"/>
-          </a:xfrm>
-          <a:prstGeom prst="roundRect">
-            <a:avLst/>
-          </a:prstGeom>
-          <a:solidFill>
-            <a:srgbClr val="1A1A2E"/>
-          </a:solidFill>
-          <a:ln w="19050">
-            <a:solidFill>
-              <a:srgbClr val="764BA2"/>
-            </a:solidFill>
-          </a:ln>
-        </p:spPr>
-        <p:style>
-          <a:lnRef idx="1">
-            <a:schemeClr val="accent1"/>
-          </a:lnRef>
-          <a:fillRef idx="3">
-            <a:schemeClr val="accent1"/>
-          </a:fillRef>
-          <a:effectRef idx="2">
-            <a:schemeClr val="accent1"/>
-          </a:effectRef>
-          <a:fontRef idx="minor">
-            <a:schemeClr val="lt1"/>
-          </a:fontRef>
-        </p:style>
-        <p:txBody>
-          <a:bodyPr rtlCol="0" anchor="ctr"/>
-          <a:lstStyle/>
-          <a:p>
-            <a:pPr algn="ctr">
-              <a:defRPr sz="900" b="1">
-                <a:solidFill>
-                  <a:srgbClr val="E0E0E0"/>
-                </a:solidFill>
-              </a:defRPr>
-            </a:pPr>
-            <a:r>
-              <a:t>CX Strategist</a:t>
-            </a:r>
-          </a:p>
-        </p:txBody>
-      </p:sp>
-      <p:sp>
-        <p:nvSpPr>
-          <p:cNvPr id="24" name="Rounded Rectangle 23"/>
-          <p:cNvSpPr/>
-          <p:nvPr/>
-        </p:nvSpPr>
-        <p:spPr>
-          <a:xfrm>
-            <a:off x="6629400" y="3154680"/>
-            <a:ext cx="1828800" cy="384048"/>
-          </a:xfrm>
-          <a:prstGeom prst="roundRect">
-            <a:avLst/>
-          </a:prstGeom>
-          <a:solidFill>
-            <a:srgbClr val="1A1A2E"/>
-          </a:solidFill>
-          <a:ln w="19050">
-            <a:solidFill>
-              <a:srgbClr val="764BA2"/>
-            </a:solidFill>
-          </a:ln>
-        </p:spPr>
-        <p:style>
-          <a:lnRef idx="1">
-            <a:schemeClr val="accent1"/>
-          </a:lnRef>
-          <a:fillRef idx="3">
-            <a:schemeClr val="accent1"/>
-          </a:fillRef>
-          <a:effectRef idx="2">
-            <a:schemeClr val="accent1"/>
-          </a:effectRef>
-          <a:fontRef idx="minor">
-            <a:schemeClr val="lt1"/>
-          </a:fontRef>
-        </p:style>
-        <p:txBody>
-          <a:bodyPr rtlCol="0" anchor="ctr"/>
-          <a:lstStyle/>
-          <a:p>
-            <a:pPr algn="ctr">
-              <a:defRPr sz="900" b="1">
-                <a:solidFill>
-                  <a:srgbClr val="E0E0E0"/>
-                </a:solidFill>
-              </a:defRPr>
-            </a:pPr>
-            <a:r>
-              <a:t>CMO</a:t>
-            </a:r>
-          </a:p>
-        </p:txBody>
-      </p:sp>
-      <p:sp>
-        <p:nvSpPr>
-          <p:cNvPr id="25" name="Rounded Rectangle 24"/>
-          <p:cNvSpPr/>
-          <p:nvPr/>
-        </p:nvSpPr>
-        <p:spPr>
-          <a:xfrm>
-            <a:off x="8686800" y="1645920"/>
-            <a:ext cx="1920240" cy="411480"/>
-          </a:xfrm>
-          <a:prstGeom prst="roundRect">
-            <a:avLst/>
-          </a:prstGeom>
-          <a:solidFill>
-            <a:srgbClr val="EAB308"/>
-          </a:solidFill>
-          <a:ln>
-            <a:noFill/>
-          </a:ln>
-        </p:spPr>
-        <p:style>
-          <a:lnRef idx="1">
-            <a:schemeClr val="accent1"/>
-          </a:lnRef>
-          <a:fillRef idx="3">
-            <a:schemeClr val="accent1"/>
-          </a:fillRef>
-          <a:effectRef idx="2">
-            <a:schemeClr val="accent1"/>
-          </a:effectRef>
-          <a:fontRef idx="minor">
-            <a:schemeClr val="lt1"/>
-          </a:fontRef>
-        </p:style>
-        <p:txBody>
-          <a:bodyPr rtlCol="0" anchor="ctr"/>
-          <a:lstStyle/>
-          <a:p>
-            <a:pPr algn="ctr">
-              <a:defRPr sz="1000" b="1">
-                <a:solidFill>
-                  <a:srgbClr val="FFFFFF"/>
-                </a:solidFill>
-              </a:defRPr>
-            </a:pPr>
-            <a:r>
-              <a:t>Creative</a:t>
-            </a:r>
-          </a:p>
-        </p:txBody>
-      </p:sp>
-      <p:sp>
-        <p:nvSpPr>
-          <p:cNvPr id="26" name="Rounded Rectangle 25"/>
-          <p:cNvSpPr/>
-          <p:nvPr/>
-        </p:nvSpPr>
-        <p:spPr>
-          <a:xfrm>
-            <a:off x="8732520" y="2148840"/>
-            <a:ext cx="1828800" cy="384048"/>
-          </a:xfrm>
-          <a:prstGeom prst="roundRect">
-            <a:avLst/>
-          </a:prstGeom>
-          <a:solidFill>
-            <a:srgbClr val="1A1A2E"/>
-          </a:solidFill>
-          <a:ln w="19050">
-            <a:solidFill>
-              <a:srgbClr val="EAB308"/>
-            </a:solidFill>
-          </a:ln>
-        </p:spPr>
-        <p:style>
-          <a:lnRef idx="1">
-            <a:schemeClr val="accent1"/>
-          </a:lnRef>
-          <a:fillRef idx="3">
-            <a:schemeClr val="accent1"/>
-          </a:fillRef>
-          <a:effectRef idx="2">
-            <a:schemeClr val="accent1"/>
-          </a:effectRef>
-          <a:fontRef idx="minor">
-            <a:schemeClr val="lt1"/>
-          </a:fontRef>
-        </p:style>
-        <p:txBody>
-          <a:bodyPr rtlCol="0" anchor="ctr"/>
-          <a:lstStyle/>
-          <a:p>
-            <a:pPr algn="ctr">
-              <a:defRPr sz="900" b="1">
-                <a:solidFill>
-                  <a:srgbClr val="E0E0E0"/>
-                </a:solidFill>
-              </a:defRPr>
-            </a:pPr>
-            <a:r>
-              <a:t>Designer</a:t>
-            </a:r>
-          </a:p>
-        </p:txBody>
-      </p:sp>
-      <p:sp>
-        <p:nvSpPr>
-          <p:cNvPr id="27" name="Rounded Rectangle 26"/>
-          <p:cNvSpPr/>
-          <p:nvPr/>
-        </p:nvSpPr>
-        <p:spPr>
-          <a:xfrm>
-            <a:off x="8732520" y="2651760"/>
-            <a:ext cx="1828800" cy="384048"/>
-          </a:xfrm>
-          <a:prstGeom prst="roundRect">
-            <a:avLst/>
-          </a:prstGeom>
-          <a:solidFill>
-            <a:srgbClr val="1A1A2E"/>
-          </a:solidFill>
-          <a:ln w="19050">
-            <a:solidFill>
-              <a:srgbClr val="EAB308"/>
-            </a:solidFill>
-          </a:ln>
-        </p:spPr>
-        <p:style>
-          <a:lnRef idx="1">
-            <a:schemeClr val="accent1"/>
-          </a:lnRef>
-          <a:fillRef idx="3">
-            <a:schemeClr val="accent1"/>
-          </a:fillRef>
-          <a:effectRef idx="2">
-            <a:schemeClr val="accent1"/>
-          </a:effectRef>
-          <a:fontRef idx="minor">
-            <a:schemeClr val="lt1"/>
-          </a:fontRef>
-        </p:style>
-        <p:txBody>
-          <a:bodyPr rtlCol="0" anchor="ctr"/>
-          <a:lstStyle/>
-          <a:p>
-            <a:pPr algn="ctr">
-              <a:defRPr sz="900" b="1">
-                <a:solidFill>
-                  <a:srgbClr val="E0E0E0"/>
-                </a:solidFill>
-              </a:defRPr>
-            </a:pPr>
-            <a:r>
-              <a:t>Data Architect</a:t>
-            </a:r>
-          </a:p>
-        </p:txBody>
-      </p:sp>
-      <p:sp>
-        <p:nvSpPr>
-          <p:cNvPr id="28" name="Oval 27"/>
-          <p:cNvSpPr/>
-          <p:nvPr/>
-        </p:nvSpPr>
-        <p:spPr>
-          <a:xfrm>
-            <a:off x="457200" y="5669280"/>
-            <a:ext cx="137160" cy="137160"/>
-          </a:xfrm>
-          <a:prstGeom prst="ellipse">
-            <a:avLst/>
-          </a:prstGeom>
-          <a:solidFill>
-            <a:srgbClr val="667EEA"/>
-          </a:solidFill>
-          <a:ln>
-            <a:noFill/>
-          </a:ln>
-        </p:spPr>
-        <p:style>
-          <a:lnRef idx="1">
-            <a:schemeClr val="accent1"/>
-          </a:lnRef>
-          <a:fillRef idx="3">
-            <a:schemeClr val="accent1"/>
-          </a:fillRef>
-          <a:effectRef idx="2">
-            <a:schemeClr val="accent1"/>
-          </a:effectRef>
-          <a:fontRef idx="minor">
-            <a:schemeClr val="lt1"/>
-          </a:fontRef>
-        </p:style>
-        <p:txBody>
-          <a:bodyPr rtlCol="0" anchor="ctr"/>
-          <a:lstStyle/>
-          <a:p>
-            <a:pPr algn="ctr"/>
-          </a:p>
-        </p:txBody>
-      </p:sp>
-      <p:sp>
-        <p:nvSpPr>
-          <p:cNvPr id="29" name="TextBox 28"/>
+              <a:defRPr sz="900">
+                <a:solidFill>
+                  <a:srgbClr val="94A3B8"/>
+                </a:solidFill>
+              </a:defRPr>
+            </a:pPr>
+            <a:r>
+              <a:t>n8n Failure</a:t>
+            </a:r>
+          </a:p>
+        </p:txBody>
+      </p:sp>
+      <p:sp>
+        <p:nvSpPr>
+          <p:cNvPr id="9" name="TextBox 8"/>
           <p:cNvSpPr txBox="1"/>
           <p:nvPr/>
         </p:nvSpPr>
         <p:spPr>
           <a:xfrm>
-            <a:off x="640080" y="5650992"/>
-            <a:ext cx="1828800" cy="182880"/>
+            <a:off x="731520" y="2926080"/>
+            <a:ext cx="10058400" cy="3200400"/>
           </a:xfrm>
           <a:prstGeom prst="rect">
             <a:avLst/>
@@ -5206,332 +5947,72 @@
           <a:noFill/>
         </p:spPr>
         <p:txBody>
-          <a:bodyPr wrap="none">
+          <a:bodyPr wrap="square">
             <a:spAutoFit/>
           </a:bodyPr>
           <a:lstStyle/>
           <a:p>
             <a:pPr>
-              <a:defRPr sz="800">
-                <a:solidFill>
-                  <a:srgbClr val="94A3B8"/>
-                </a:solidFill>
-              </a:defRPr>
-            </a:pPr>
-            <a:r>
-              <a:t>System Core (6)</a:t>
-            </a:r>
-          </a:p>
-        </p:txBody>
-      </p:sp>
-      <p:sp>
-        <p:nvSpPr>
-          <p:cNvPr id="30" name="Oval 29"/>
-          <p:cNvSpPr/>
-          <p:nvPr/>
-        </p:nvSpPr>
-        <p:spPr>
-          <a:xfrm>
-            <a:off x="2651760" y="5669280"/>
-            <a:ext cx="137160" cy="137160"/>
-          </a:xfrm>
-          <a:prstGeom prst="ellipse">
-            <a:avLst/>
-          </a:prstGeom>
-          <a:solidFill>
-            <a:srgbClr val="10B981"/>
-          </a:solidFill>
-          <a:ln>
-            <a:noFill/>
-          </a:ln>
-        </p:spPr>
-        <p:style>
-          <a:lnRef idx="1">
-            <a:schemeClr val="accent1"/>
-          </a:lnRef>
-          <a:fillRef idx="3">
-            <a:schemeClr val="accent1"/>
-          </a:fillRef>
-          <a:effectRef idx="2">
-            <a:schemeClr val="accent1"/>
-          </a:effectRef>
-          <a:fontRef idx="minor">
-            <a:schemeClr val="lt1"/>
-          </a:fontRef>
-        </p:style>
-        <p:txBody>
-          <a:bodyPr rtlCol="0" anchor="ctr"/>
-          <a:lstStyle/>
-          <a:p>
-            <a:pPr algn="ctr"/>
-          </a:p>
-        </p:txBody>
-      </p:sp>
-      <p:sp>
-        <p:nvSpPr>
-          <p:cNvPr id="31" name="TextBox 30"/>
-          <p:cNvSpPr txBox="1"/>
-          <p:nvPr/>
-        </p:nvSpPr>
-        <p:spPr>
-          <a:xfrm>
-            <a:off x="2834640" y="5650992"/>
-            <a:ext cx="1828800" cy="182880"/>
-          </a:xfrm>
-          <a:prstGeom prst="rect">
-            <a:avLst/>
-          </a:prstGeom>
-          <a:noFill/>
-        </p:spPr>
-        <p:txBody>
-          <a:bodyPr wrap="none">
-            <a:spAutoFit/>
-          </a:bodyPr>
-          <a:lstStyle/>
+              <a:spcAft>
+                <a:spcPts val="800"/>
+              </a:spcAft>
+              <a:defRPr sz="1400">
+                <a:solidFill>
+                  <a:srgbClr val="C0C8E0"/>
+                </a:solidFill>
+                <a:latin typeface="Roboto"/>
+              </a:defRPr>
+            </a:pPr>
+            <a:r>
+              <a:t>    n8n Auto-Heal: EXECUTIONS_DATA_PRUNE=true, MAX_AGE=48h</a:t>
+            </a:r>
+          </a:p>
           <a:p>
             <a:pPr>
-              <a:defRPr sz="800">
-                <a:solidFill>
-                  <a:srgbClr val="94A3B8"/>
-                </a:solidFill>
-              </a:defRPr>
-            </a:pPr>
-            <a:r>
-              <a:t>Intelligence (4)</a:t>
-            </a:r>
-          </a:p>
-        </p:txBody>
-      </p:sp>
-      <p:sp>
-        <p:nvSpPr>
-          <p:cNvPr id="32" name="Oval 31"/>
-          <p:cNvSpPr/>
-          <p:nvPr/>
-        </p:nvSpPr>
-        <p:spPr>
-          <a:xfrm>
-            <a:off x="4846320" y="5669280"/>
-            <a:ext cx="137160" cy="137160"/>
-          </a:xfrm>
-          <a:prstGeom prst="ellipse">
-            <a:avLst/>
-          </a:prstGeom>
-          <a:solidFill>
-            <a:srgbClr val="F97316"/>
-          </a:solidFill>
-          <a:ln>
-            <a:noFill/>
-          </a:ln>
-        </p:spPr>
-        <p:style>
-          <a:lnRef idx="1">
-            <a:schemeClr val="accent1"/>
-          </a:lnRef>
-          <a:fillRef idx="3">
-            <a:schemeClr val="accent1"/>
-          </a:fillRef>
-          <a:effectRef idx="2">
-            <a:schemeClr val="accent1"/>
-          </a:effectRef>
-          <a:fontRef idx="minor">
-            <a:schemeClr val="lt1"/>
-          </a:fontRef>
-        </p:style>
-        <p:txBody>
-          <a:bodyPr rtlCol="0" anchor="ctr"/>
-          <a:lstStyle/>
-          <a:p>
-            <a:pPr algn="ctr"/>
-          </a:p>
-        </p:txBody>
-      </p:sp>
-      <p:sp>
-        <p:nvSpPr>
-          <p:cNvPr id="33" name="TextBox 32"/>
-          <p:cNvSpPr txBox="1"/>
-          <p:nvPr/>
-        </p:nvSpPr>
-        <p:spPr>
-          <a:xfrm>
-            <a:off x="5029200" y="5650992"/>
-            <a:ext cx="1828800" cy="182880"/>
-          </a:xfrm>
-          <a:prstGeom prst="rect">
-            <a:avLst/>
-          </a:prstGeom>
-          <a:noFill/>
-        </p:spPr>
-        <p:txBody>
-          <a:bodyPr wrap="none">
-            <a:spAutoFit/>
-          </a:bodyPr>
-          <a:lstStyle/>
+              <a:spcAft>
+                <a:spcPts val="800"/>
+              </a:spcAft>
+              <a:defRPr sz="1400">
+                <a:solidFill>
+                  <a:srgbClr val="C0C8E0"/>
+                </a:solidFill>
+                <a:latin typeface="Roboto"/>
+              </a:defRPr>
+            </a:pPr>
+            <a:r>
+              <a:t>    Resonance Orchestrator: Split In Batches (50) injected</a:t>
+            </a:r>
+          </a:p>
           <a:p>
             <a:pPr>
-              <a:defRPr sz="800">
-                <a:solidFill>
-                  <a:srgbClr val="94A3B8"/>
-                </a:solidFill>
-              </a:defRPr>
-            </a:pPr>
-            <a:r>
-              <a:t>Quality Gate (3)</a:t>
-            </a:r>
-          </a:p>
-        </p:txBody>
-      </p:sp>
-      <p:sp>
-        <p:nvSpPr>
-          <p:cNvPr id="34" name="Oval 33"/>
-          <p:cNvSpPr/>
-          <p:nvPr/>
-        </p:nvSpPr>
-        <p:spPr>
-          <a:xfrm>
-            <a:off x="7040879" y="5669280"/>
-            <a:ext cx="137160" cy="137160"/>
-          </a:xfrm>
-          <a:prstGeom prst="ellipse">
-            <a:avLst/>
-          </a:prstGeom>
-          <a:solidFill>
-            <a:srgbClr val="764BA2"/>
-          </a:solidFill>
-          <a:ln>
-            <a:noFill/>
-          </a:ln>
-        </p:spPr>
-        <p:style>
-          <a:lnRef idx="1">
-            <a:schemeClr val="accent1"/>
-          </a:lnRef>
-          <a:fillRef idx="3">
-            <a:schemeClr val="accent1"/>
-          </a:fillRef>
-          <a:effectRef idx="2">
-            <a:schemeClr val="accent1"/>
-          </a:effectRef>
-          <a:fontRef idx="minor">
-            <a:schemeClr val="lt1"/>
-          </a:fontRef>
-        </p:style>
-        <p:txBody>
-          <a:bodyPr rtlCol="0" anchor="ctr"/>
-          <a:lstStyle/>
-          <a:p>
-            <a:pPr algn="ctr"/>
-          </a:p>
-        </p:txBody>
-      </p:sp>
-      <p:sp>
-        <p:nvSpPr>
-          <p:cNvPr id="35" name="TextBox 34"/>
-          <p:cNvSpPr txBox="1"/>
-          <p:nvPr/>
-        </p:nvSpPr>
-        <p:spPr>
-          <a:xfrm>
-            <a:off x="7223759" y="5650992"/>
-            <a:ext cx="1828800" cy="182880"/>
-          </a:xfrm>
-          <a:prstGeom prst="rect">
-            <a:avLst/>
-          </a:prstGeom>
-          <a:noFill/>
-        </p:spPr>
-        <p:txBody>
-          <a:bodyPr wrap="none">
-            <a:spAutoFit/>
-          </a:bodyPr>
-          <a:lstStyle/>
+              <a:spcAft>
+                <a:spcPts val="800"/>
+              </a:spcAft>
+              <a:defRPr sz="1400">
+                <a:solidFill>
+                  <a:srgbClr val="C0C8E0"/>
+                </a:solidFill>
+                <a:latin typeface="Roboto"/>
+              </a:defRPr>
+            </a:pPr>
+            <a:r>
+              <a:t>    Projected failure rate drop: 98.3% → ~12%</a:t>
+            </a:r>
+          </a:p>
           <a:p>
             <a:pPr>
-              <a:defRPr sz="800">
-                <a:solidFill>
-                  <a:srgbClr val="94A3B8"/>
-                </a:solidFill>
-              </a:defRPr>
-            </a:pPr>
-            <a:r>
-              <a:t>Executive (3)</a:t>
-            </a:r>
-          </a:p>
-        </p:txBody>
-      </p:sp>
-      <p:sp>
-        <p:nvSpPr>
-          <p:cNvPr id="36" name="Oval 35"/>
-          <p:cNvSpPr/>
-          <p:nvPr/>
-        </p:nvSpPr>
-        <p:spPr>
-          <a:xfrm>
-            <a:off x="9235440" y="5669280"/>
-            <a:ext cx="137160" cy="137160"/>
-          </a:xfrm>
-          <a:prstGeom prst="ellipse">
-            <a:avLst/>
-          </a:prstGeom>
-          <a:solidFill>
-            <a:srgbClr val="EAB308"/>
-          </a:solidFill>
-          <a:ln>
-            <a:noFill/>
-          </a:ln>
-        </p:spPr>
-        <p:style>
-          <a:lnRef idx="1">
-            <a:schemeClr val="accent1"/>
-          </a:lnRef>
-          <a:fillRef idx="3">
-            <a:schemeClr val="accent1"/>
-          </a:fillRef>
-          <a:effectRef idx="2">
-            <a:schemeClr val="accent1"/>
-          </a:effectRef>
-          <a:fontRef idx="minor">
-            <a:schemeClr val="lt1"/>
-          </a:fontRef>
-        </p:style>
-        <p:txBody>
-          <a:bodyPr rtlCol="0" anchor="ctr"/>
-          <a:lstStyle/>
-          <a:p>
-            <a:pPr algn="ctr"/>
-          </a:p>
-        </p:txBody>
-      </p:sp>
-      <p:sp>
-        <p:nvSpPr>
-          <p:cNvPr id="37" name="TextBox 36"/>
-          <p:cNvSpPr txBox="1"/>
-          <p:nvPr/>
-        </p:nvSpPr>
-        <p:spPr>
-          <a:xfrm>
-            <a:off x="9418319" y="5650992"/>
-            <a:ext cx="1828800" cy="182880"/>
-          </a:xfrm>
-          <a:prstGeom prst="rect">
-            <a:avLst/>
-          </a:prstGeom>
-          <a:noFill/>
-        </p:spPr>
-        <p:txBody>
-          <a:bodyPr wrap="none">
-            <a:spAutoFit/>
-          </a:bodyPr>
-          <a:lstStyle/>
-          <a:p>
-            <a:pPr>
-              <a:defRPr sz="800">
-                <a:solidFill>
-                  <a:srgbClr val="94A3B8"/>
-                </a:solidFill>
-              </a:defRPr>
-            </a:pPr>
-            <a:r>
-              <a:t>Creative (2)</a:t>
+              <a:spcAft>
+                <a:spcPts val="800"/>
+              </a:spcAft>
+              <a:defRPr sz="1400">
+                <a:solidFill>
+                  <a:srgbClr val="C0C8E0"/>
+                </a:solidFill>
+                <a:latin typeface="Roboto"/>
+              </a:defRPr>
+            </a:pPr>
+            <a:r>
+              <a:t>    Self-heal pipeline engaged via Sentinel Protocol</a:t>
             </a:r>
           </a:p>
         </p:txBody>
@@ -5613,8 +6094,8 @@
         </p:nvSpPr>
         <p:spPr>
           <a:xfrm>
-            <a:off x="8686800" y="6263640"/>
-            <a:ext cx="3200400" cy="228600"/>
+            <a:off x="731520" y="457200"/>
+            <a:ext cx="10058400" cy="914400"/>
           </a:xfrm>
           <a:prstGeom prst="rect">
             <a:avLst/>
@@ -5627,15 +6108,16 @@
           </a:bodyPr>
           <a:lstStyle/>
           <a:p>
-            <a:pPr algn="r">
-              <a:defRPr sz="700">
-                <a:solidFill>
-                  <a:srgbClr val="4A4A6A"/>
-                </a:solidFill>
-              </a:defRPr>
-            </a:pPr>
-            <a:r>
-              <a:t>Layout: chart_left_bullets_right</a:t>
+            <a:pPr>
+              <a:defRPr sz="2800" b="1">
+                <a:solidFill>
+                  <a:srgbClr val="FFFFFF"/>
+                </a:solidFill>
+                <a:latin typeface="Inter"/>
+              </a:defRPr>
+            </a:pPr>
+            <a:r>
+              <a:t>Financial Projections (5-Year)</a:t>
             </a:r>
           </a:p>
         </p:txBody>
@@ -5648,8 +6130,432 @@
         </p:nvSpPr>
         <p:spPr>
           <a:xfrm>
-            <a:off x="731520" y="457200"/>
-            <a:ext cx="10058400" cy="914400"/>
+            <a:off x="8229600" y="274320"/>
+            <a:ext cx="3200400" cy="182880"/>
+          </a:xfrm>
+          <a:prstGeom prst="rect">
+            <a:avLst/>
+          </a:prstGeom>
+          <a:noFill/>
+        </p:spPr>
+        <p:txBody>
+          <a:bodyPr wrap="none">
+            <a:spAutoFit/>
+          </a:bodyPr>
+          <a:lstStyle/>
+          <a:p>
+            <a:pPr>
+              <a:defRPr sz="700">
+                <a:solidFill>
+                  <a:srgbClr val="4A4A6A"/>
+                </a:solidFill>
+              </a:defRPr>
+            </a:pPr>
+            <a:r>
+              <a:t>Design: library</a:t>
+            </a:r>
+          </a:p>
+        </p:txBody>
+      </p:sp>
+      <p:sp>
+        <p:nvSpPr>
+          <p:cNvPr id="5" name="Rounded Rectangle 4"/>
+          <p:cNvSpPr/>
+          <p:nvPr/>
+        </p:nvSpPr>
+        <p:spPr>
+          <a:xfrm>
+            <a:off x="731520" y="1463040"/>
+            <a:ext cx="1828800" cy="1097280"/>
+          </a:xfrm>
+          <a:prstGeom prst="roundRect">
+            <a:avLst/>
+          </a:prstGeom>
+          <a:solidFill>
+            <a:srgbClr val="1A1A2E"/>
+          </a:solidFill>
+          <a:ln w="25400">
+            <a:solidFill>
+              <a:srgbClr val="10B981"/>
+            </a:solidFill>
+          </a:ln>
+        </p:spPr>
+        <p:style>
+          <a:lnRef idx="1">
+            <a:schemeClr val="accent1"/>
+          </a:lnRef>
+          <a:fillRef idx="3">
+            <a:schemeClr val="accent1"/>
+          </a:fillRef>
+          <a:effectRef idx="2">
+            <a:schemeClr val="accent1"/>
+          </a:effectRef>
+          <a:fontRef idx="minor">
+            <a:schemeClr val="lt1"/>
+          </a:fontRef>
+        </p:style>
+        <p:txBody>
+          <a:bodyPr rtlCol="0" anchor="ctr" wrap="square"/>
+          <a:lstStyle/>
+          <a:p>
+            <a:pPr algn="ctr">
+              <a:defRPr sz="2400" b="1">
+                <a:solidFill>
+                  <a:srgbClr val="10B981"/>
+                </a:solidFill>
+                <a:latin typeface="Inter"/>
+              </a:defRPr>
+            </a:pPr>
+            <a:r>
+              <a:t>Month 2</a:t>
+            </a:r>
+          </a:p>
+          <a:p>
+            <a:pPr algn="ctr">
+              <a:defRPr sz="900">
+                <a:solidFill>
+                  <a:srgbClr val="94A3B8"/>
+                </a:solidFill>
+              </a:defRPr>
+            </a:pPr>
+            <a:r>
+              <a:t>Break-Even</a:t>
+            </a:r>
+          </a:p>
+        </p:txBody>
+      </p:sp>
+      <p:sp>
+        <p:nvSpPr>
+          <p:cNvPr id="6" name="Rounded Rectangle 5"/>
+          <p:cNvSpPr/>
+          <p:nvPr/>
+        </p:nvSpPr>
+        <p:spPr>
+          <a:xfrm>
+            <a:off x="2926080" y="1463040"/>
+            <a:ext cx="1828800" cy="1097280"/>
+          </a:xfrm>
+          <a:prstGeom prst="roundRect">
+            <a:avLst/>
+          </a:prstGeom>
+          <a:solidFill>
+            <a:srgbClr val="1A1A2E"/>
+          </a:solidFill>
+          <a:ln w="25400">
+            <a:solidFill>
+              <a:srgbClr val="667EEA"/>
+            </a:solidFill>
+          </a:ln>
+        </p:spPr>
+        <p:style>
+          <a:lnRef idx="1">
+            <a:schemeClr val="accent1"/>
+          </a:lnRef>
+          <a:fillRef idx="3">
+            <a:schemeClr val="accent1"/>
+          </a:fillRef>
+          <a:effectRef idx="2">
+            <a:schemeClr val="accent1"/>
+          </a:effectRef>
+          <a:fontRef idx="minor">
+            <a:schemeClr val="lt1"/>
+          </a:fontRef>
+        </p:style>
+        <p:txBody>
+          <a:bodyPr rtlCol="0" anchor="ctr" wrap="square"/>
+          <a:lstStyle/>
+          <a:p>
+            <a:pPr algn="ctr">
+              <a:defRPr sz="2400" b="1">
+                <a:solidFill>
+                  <a:srgbClr val="667EEA"/>
+                </a:solidFill>
+                <a:latin typeface="Inter"/>
+              </a:defRPr>
+            </a:pPr>
+            <a:r>
+              <a:t>$1.2M</a:t>
+            </a:r>
+          </a:p>
+          <a:p>
+            <a:pPr algn="ctr">
+              <a:defRPr sz="900">
+                <a:solidFill>
+                  <a:srgbClr val="94A3B8"/>
+                </a:solidFill>
+              </a:defRPr>
+            </a:pPr>
+            <a:r>
+              <a:t>Y1 Revenue</a:t>
+            </a:r>
+          </a:p>
+        </p:txBody>
+      </p:sp>
+      <p:sp>
+        <p:nvSpPr>
+          <p:cNvPr id="7" name="Rounded Rectangle 6"/>
+          <p:cNvSpPr/>
+          <p:nvPr/>
+        </p:nvSpPr>
+        <p:spPr>
+          <a:xfrm>
+            <a:off x="5120640" y="1463040"/>
+            <a:ext cx="1828800" cy="1097280"/>
+          </a:xfrm>
+          <a:prstGeom prst="roundRect">
+            <a:avLst/>
+          </a:prstGeom>
+          <a:solidFill>
+            <a:srgbClr val="1A1A2E"/>
+          </a:solidFill>
+          <a:ln w="25400">
+            <a:solidFill>
+              <a:srgbClr val="10B981"/>
+            </a:solidFill>
+          </a:ln>
+        </p:spPr>
+        <p:style>
+          <a:lnRef idx="1">
+            <a:schemeClr val="accent1"/>
+          </a:lnRef>
+          <a:fillRef idx="3">
+            <a:schemeClr val="accent1"/>
+          </a:fillRef>
+          <a:effectRef idx="2">
+            <a:schemeClr val="accent1"/>
+          </a:effectRef>
+          <a:fontRef idx="minor">
+            <a:schemeClr val="lt1"/>
+          </a:fontRef>
+        </p:style>
+        <p:txBody>
+          <a:bodyPr rtlCol="0" anchor="ctr" wrap="square"/>
+          <a:lstStyle/>
+          <a:p>
+            <a:pPr algn="ctr">
+              <a:defRPr sz="2400" b="1">
+                <a:solidFill>
+                  <a:srgbClr val="10B981"/>
+                </a:solidFill>
+                <a:latin typeface="Inter"/>
+              </a:defRPr>
+            </a:pPr>
+            <a:r>
+              <a:t>$58M+</a:t>
+            </a:r>
+          </a:p>
+          <a:p>
+            <a:pPr algn="ctr">
+              <a:defRPr sz="900">
+                <a:solidFill>
+                  <a:srgbClr val="94A3B8"/>
+                </a:solidFill>
+              </a:defRPr>
+            </a:pPr>
+            <a:r>
+              <a:t>Y5 Revenue</a:t>
+            </a:r>
+          </a:p>
+        </p:txBody>
+      </p:sp>
+      <p:sp>
+        <p:nvSpPr>
+          <p:cNvPr id="8" name="Rounded Rectangle 7"/>
+          <p:cNvSpPr/>
+          <p:nvPr/>
+        </p:nvSpPr>
+        <p:spPr>
+          <a:xfrm>
+            <a:off x="7315200" y="1463040"/>
+            <a:ext cx="1828800" cy="1097280"/>
+          </a:xfrm>
+          <a:prstGeom prst="roundRect">
+            <a:avLst/>
+          </a:prstGeom>
+          <a:solidFill>
+            <a:srgbClr val="1A1A2E"/>
+          </a:solidFill>
+          <a:ln w="25400">
+            <a:solidFill>
+              <a:srgbClr val="667EEA"/>
+            </a:solidFill>
+          </a:ln>
+        </p:spPr>
+        <p:style>
+          <a:lnRef idx="1">
+            <a:schemeClr val="accent1"/>
+          </a:lnRef>
+          <a:fillRef idx="3">
+            <a:schemeClr val="accent1"/>
+          </a:fillRef>
+          <a:effectRef idx="2">
+            <a:schemeClr val="accent1"/>
+          </a:effectRef>
+          <a:fontRef idx="minor">
+            <a:schemeClr val="lt1"/>
+          </a:fontRef>
+        </p:style>
+        <p:txBody>
+          <a:bodyPr rtlCol="0" anchor="ctr" wrap="square"/>
+          <a:lstStyle/>
+          <a:p>
+            <a:pPr algn="ctr">
+              <a:defRPr sz="2400" b="1">
+                <a:solidFill>
+                  <a:srgbClr val="667EEA"/>
+                </a:solidFill>
+                <a:latin typeface="Inter"/>
+              </a:defRPr>
+            </a:pPr>
+            <a:r>
+              <a:t>&gt;5000%</a:t>
+            </a:r>
+          </a:p>
+          <a:p>
+            <a:pPr algn="ctr">
+              <a:defRPr sz="900">
+                <a:solidFill>
+                  <a:srgbClr val="94A3B8"/>
+                </a:solidFill>
+              </a:defRPr>
+            </a:pPr>
+            <a:r>
+              <a:t>5Y ROI</a:t>
+            </a:r>
+          </a:p>
+        </p:txBody>
+      </p:sp>
+      <p:sp>
+        <p:nvSpPr>
+          <p:cNvPr id="9" name="Rounded Rectangle 8"/>
+          <p:cNvSpPr/>
+          <p:nvPr/>
+        </p:nvSpPr>
+        <p:spPr>
+          <a:xfrm>
+            <a:off x="9509760" y="1463040"/>
+            <a:ext cx="1828800" cy="1097280"/>
+          </a:xfrm>
+          <a:prstGeom prst="roundRect">
+            <a:avLst/>
+          </a:prstGeom>
+          <a:solidFill>
+            <a:srgbClr val="1A1A2E"/>
+          </a:solidFill>
+          <a:ln w="25400">
+            <a:solidFill>
+              <a:srgbClr val="EAB308"/>
+            </a:solidFill>
+          </a:ln>
+        </p:spPr>
+        <p:style>
+          <a:lnRef idx="1">
+            <a:schemeClr val="accent1"/>
+          </a:lnRef>
+          <a:fillRef idx="3">
+            <a:schemeClr val="accent1"/>
+          </a:fillRef>
+          <a:effectRef idx="2">
+            <a:schemeClr val="accent1"/>
+          </a:effectRef>
+          <a:fontRef idx="minor">
+            <a:schemeClr val="lt1"/>
+          </a:fontRef>
+        </p:style>
+        <p:txBody>
+          <a:bodyPr rtlCol="0" anchor="ctr" wrap="square"/>
+          <a:lstStyle/>
+          <a:p>
+            <a:pPr algn="ctr">
+              <a:defRPr sz="2400" b="1">
+                <a:solidFill>
+                  <a:srgbClr val="EAB308"/>
+                </a:solidFill>
+                <a:latin typeface="Inter"/>
+              </a:defRPr>
+            </a:pPr>
+            <a:r>
+              <a:t>74.9%</a:t>
+            </a:r>
+          </a:p>
+          <a:p>
+            <a:pPr algn="ctr">
+              <a:defRPr sz="900">
+                <a:solidFill>
+                  <a:srgbClr val="94A3B8"/>
+                </a:solidFill>
+              </a:defRPr>
+            </a:pPr>
+            <a:r>
+              <a:t>Margin</a:t>
+            </a:r>
+          </a:p>
+        </p:txBody>
+      </p:sp>
+      <p:sp>
+        <p:nvSpPr>
+          <p:cNvPr id="10" name="Rounded Rectangle 9"/>
+          <p:cNvSpPr/>
+          <p:nvPr/>
+        </p:nvSpPr>
+        <p:spPr>
+          <a:xfrm>
+            <a:off x="731520" y="2926080"/>
+            <a:ext cx="10058400" cy="457200"/>
+          </a:xfrm>
+          <a:prstGeom prst="roundRect">
+            <a:avLst/>
+          </a:prstGeom>
+          <a:solidFill>
+            <a:srgbClr val="1A1A2E"/>
+          </a:solidFill>
+          <a:ln w="12700">
+            <a:solidFill>
+              <a:srgbClr val="10B981"/>
+            </a:solidFill>
+          </a:ln>
+        </p:spPr>
+        <p:style>
+          <a:lnRef idx="1">
+            <a:schemeClr val="accent1"/>
+          </a:lnRef>
+          <a:fillRef idx="3">
+            <a:schemeClr val="accent1"/>
+          </a:fillRef>
+          <a:effectRef idx="2">
+            <a:schemeClr val="accent1"/>
+          </a:effectRef>
+          <a:fontRef idx="minor">
+            <a:schemeClr val="lt1"/>
+          </a:fontRef>
+        </p:style>
+        <p:txBody>
+          <a:bodyPr rtlCol="0" anchor="ctr"/>
+          <a:lstStyle/>
+          <a:p>
+            <a:pPr algn="ctr">
+              <a:defRPr sz="1000" i="1">
+                <a:solidFill>
+                  <a:srgbClr val="10B981"/>
+                </a:solidFill>
+              </a:defRPr>
+            </a:pPr>
+            <a:r>
+              <a:t>Charts: Delegate_AI_V3_Projections.xlsx → 5-Year Break-Even + Market Share</a:t>
+            </a:r>
+          </a:p>
+        </p:txBody>
+      </p:sp>
+      <p:sp>
+        <p:nvSpPr>
+          <p:cNvPr id="11" name="TextBox 10"/>
+          <p:cNvSpPr txBox="1"/>
+          <p:nvPr/>
+        </p:nvSpPr>
+        <p:spPr>
+          <a:xfrm>
+            <a:off x="731520" y="3657600"/>
+            <a:ext cx="10058400" cy="3200400"/>
           </a:xfrm>
           <a:prstGeom prst="rect">
             <a:avLst/>
@@ -5663,46 +6569,26 @@
           <a:lstStyle/>
           <a:p>
             <a:pPr>
-              <a:defRPr sz="2800" b="1">
-                <a:solidFill>
-                  <a:srgbClr val="FFFFFF"/>
-                </a:solidFill>
-                <a:latin typeface="Inter"/>
-              </a:defRPr>
-            </a:pPr>
-            <a:r>
-              <a:t>Financial Projections</a:t>
-            </a:r>
-          </a:p>
-        </p:txBody>
-      </p:sp>
-      <p:sp>
-        <p:nvSpPr>
-          <p:cNvPr id="5" name="TextBox 4"/>
-          <p:cNvSpPr txBox="1"/>
-          <p:nvPr/>
-        </p:nvSpPr>
-        <p:spPr>
-          <a:xfrm>
-            <a:off x="731520" y="1645920"/>
-            <a:ext cx="10058400" cy="4389120"/>
-          </a:xfrm>
-          <a:prstGeom prst="rect">
-            <a:avLst/>
-          </a:prstGeom>
-          <a:noFill/>
-        </p:spPr>
-        <p:txBody>
-          <a:bodyPr wrap="square">
-            <a:spAutoFit/>
-          </a:bodyPr>
-          <a:lstStyle/>
+              <a:spcAft>
+                <a:spcPts val="800"/>
+              </a:spcAft>
+              <a:defRPr sz="1400">
+                <a:solidFill>
+                  <a:srgbClr val="C0C8E0"/>
+                </a:solidFill>
+                <a:latin typeface="Roboto"/>
+              </a:defRPr>
+            </a:pPr>
+            <a:r>
+              <a:t>    60-month P&amp;L, 100% formula-driven from 'Inputs &amp; Assumptions'</a:t>
+            </a:r>
+          </a:p>
           <a:p>
             <a:pPr>
               <a:spcAft>
-                <a:spcPts val="1200"/>
+                <a:spcPts val="800"/>
               </a:spcAft>
-              <a:defRPr sz="1500">
+              <a:defRPr sz="1400">
                 <a:solidFill>
                   <a:srgbClr val="C0C8E0"/>
                 </a:solidFill>
@@ -5710,15 +6596,15 @@
               </a:defRPr>
             </a:pPr>
             <a:r>
-              <a:t>    Break-even: Month 2</a:t>
+              <a:t>    Change Agent Cost → entire 5-year ROI recalculates</a:t>
             </a:r>
           </a:p>
           <a:p>
             <a:pPr>
               <a:spcAft>
-                <a:spcPts val="1200"/>
+                <a:spcPts val="800"/>
               </a:spcAft>
-              <a:defRPr sz="1500">
+              <a:defRPr sz="1400">
                 <a:solidFill>
                   <a:srgbClr val="C0C8E0"/>
                 </a:solidFill>
@@ -5726,67 +6612,7 @@
               </a:defRPr>
             </a:pPr>
             <a:r>
-              <a:t>    Year 1 Revenue: $1.2M</a:t>
-            </a:r>
-          </a:p>
-          <a:p>
-            <a:pPr>
-              <a:spcAft>
-                <a:spcPts val="1200"/>
-              </a:spcAft>
-              <a:defRPr sz="1500">
-                <a:solidFill>
-                  <a:srgbClr val="C0C8E0"/>
-                </a:solidFill>
-                <a:latin typeface="Roboto"/>
-              </a:defRPr>
-            </a:pPr>
-            <a:r>
-              <a:t>    Gross Margin: 68%</a:t>
-            </a:r>
-          </a:p>
-          <a:p>
-            <a:pPr>
-              <a:spcAft>
-                <a:spcPts val="1200"/>
-              </a:spcAft>
-              <a:defRPr sz="1500">
-                <a:solidFill>
-                  <a:srgbClr val="C0C8E0"/>
-                </a:solidFill>
-                <a:latin typeface="Roboto"/>
-              </a:defRPr>
-            </a:pPr>
-            <a:r>
-              <a:t>    Cost per agent: $0.02/decision (token-efficient)</a:t>
-            </a:r>
-          </a:p>
-          <a:p>
-            <a:pPr>
-              <a:spcAft>
-                <a:spcPts val="1200"/>
-              </a:spcAft>
-              <a:defRPr sz="1500">
-                <a:solidFill>
-                  <a:srgbClr val="C0C8E0"/>
-                </a:solidFill>
-                <a:latin typeface="Roboto"/>
-              </a:defRPr>
-            </a:pPr>
-            <a:r>
-              <a:t>    See attached XLSX: 12-month P&amp;L + Charts</a:t>
-            </a:r>
-          </a:p>
-          <a:p>
-            <a:pPr>
-              <a:defRPr sz="1000" i="1">
-                <a:solidFill>
-                  <a:srgbClr val="10B981"/>
-                </a:solidFill>
-              </a:defRPr>
-            </a:pPr>
-            <a:r>
-              <a:t>    Chart linked: Delegate_AI_2026_Projections_V2.xlsx</a:t>
+              <a:t>    Sensitivity: profitable even at costs doubled</a:t>
             </a:r>
           </a:p>
         </p:txBody>
@@ -5868,8 +6694,8 @@
         </p:nvSpPr>
         <p:spPr>
           <a:xfrm>
-            <a:off x="8686800" y="6263640"/>
-            <a:ext cx="3200400" cy="228600"/>
+            <a:off x="731520" y="457200"/>
+            <a:ext cx="10058400" cy="914400"/>
           </a:xfrm>
           <a:prstGeom prst="rect">
             <a:avLst/>
@@ -5882,29 +6708,298 @@
           </a:bodyPr>
           <a:lstStyle/>
           <a:p>
-            <a:pPr algn="r">
-              <a:defRPr sz="700">
-                <a:solidFill>
-                  <a:srgbClr val="4A4A6A"/>
-                </a:solidFill>
-              </a:defRPr>
-            </a:pPr>
-            <a:r>
-              <a:t>Layout: table_centered</a:t>
-            </a:r>
-          </a:p>
-        </p:txBody>
-      </p:sp>
-      <p:sp>
-        <p:nvSpPr>
-          <p:cNvPr id="4" name="TextBox 3"/>
+            <a:pPr>
+              <a:defRPr sz="2800" b="1">
+                <a:solidFill>
+                  <a:srgbClr val="FFFFFF"/>
+                </a:solidFill>
+                <a:latin typeface="Inter"/>
+              </a:defRPr>
+            </a:pPr>
+            <a:r>
+              <a:t>Sensitivity Analysis</a:t>
+            </a:r>
+          </a:p>
+        </p:txBody>
+      </p:sp>
+      <p:sp>
+        <p:nvSpPr>
+          <p:cNvPr id="4" name="Rounded Rectangle 3"/>
+          <p:cNvSpPr/>
+          <p:nvPr/>
+        </p:nvSpPr>
+        <p:spPr>
+          <a:xfrm>
+            <a:off x="731520" y="1463040"/>
+            <a:ext cx="1828800" cy="1097280"/>
+          </a:xfrm>
+          <a:prstGeom prst="roundRect">
+            <a:avLst/>
+          </a:prstGeom>
+          <a:solidFill>
+            <a:srgbClr val="1A1A2E"/>
+          </a:solidFill>
+          <a:ln w="25400">
+            <a:solidFill>
+              <a:srgbClr val="10B981"/>
+            </a:solidFill>
+          </a:ln>
+        </p:spPr>
+        <p:style>
+          <a:lnRef idx="1">
+            <a:schemeClr val="accent1"/>
+          </a:lnRef>
+          <a:fillRef idx="3">
+            <a:schemeClr val="accent1"/>
+          </a:fillRef>
+          <a:effectRef idx="2">
+            <a:schemeClr val="accent1"/>
+          </a:effectRef>
+          <a:fontRef idx="minor">
+            <a:schemeClr val="lt1"/>
+          </a:fontRef>
+        </p:style>
+        <p:txBody>
+          <a:bodyPr rtlCol="0" anchor="ctr" wrap="square"/>
+          <a:lstStyle/>
+          <a:p>
+            <a:pPr algn="ctr">
+              <a:defRPr sz="2400" b="1">
+                <a:solidFill>
+                  <a:srgbClr val="10B981"/>
+                </a:solidFill>
+                <a:latin typeface="Inter"/>
+              </a:defRPr>
+            </a:pPr>
+            <a:r>
+              <a:t>74.9%</a:t>
+            </a:r>
+          </a:p>
+          <a:p>
+            <a:pPr algn="ctr">
+              <a:defRPr sz="900">
+                <a:solidFill>
+                  <a:srgbClr val="94A3B8"/>
+                </a:solidFill>
+              </a:defRPr>
+            </a:pPr>
+            <a:r>
+              <a:t>Base</a:t>
+            </a:r>
+          </a:p>
+        </p:txBody>
+      </p:sp>
+      <p:sp>
+        <p:nvSpPr>
+          <p:cNvPr id="5" name="Rounded Rectangle 4"/>
+          <p:cNvSpPr/>
+          <p:nvPr/>
+        </p:nvSpPr>
+        <p:spPr>
+          <a:xfrm>
+            <a:off x="3291839" y="1463040"/>
+            <a:ext cx="1828800" cy="1097280"/>
+          </a:xfrm>
+          <a:prstGeom prst="roundRect">
+            <a:avLst/>
+          </a:prstGeom>
+          <a:solidFill>
+            <a:srgbClr val="1A1A2E"/>
+          </a:solidFill>
+          <a:ln w="25400">
+            <a:solidFill>
+              <a:srgbClr val="667EEA"/>
+            </a:solidFill>
+          </a:ln>
+        </p:spPr>
+        <p:style>
+          <a:lnRef idx="1">
+            <a:schemeClr val="accent1"/>
+          </a:lnRef>
+          <a:fillRef idx="3">
+            <a:schemeClr val="accent1"/>
+          </a:fillRef>
+          <a:effectRef idx="2">
+            <a:schemeClr val="accent1"/>
+          </a:effectRef>
+          <a:fontRef idx="minor">
+            <a:schemeClr val="lt1"/>
+          </a:fontRef>
+        </p:style>
+        <p:txBody>
+          <a:bodyPr rtlCol="0" anchor="ctr" wrap="square"/>
+          <a:lstStyle/>
+          <a:p>
+            <a:pPr algn="ctr">
+              <a:defRPr sz="2400" b="1">
+                <a:solidFill>
+                  <a:srgbClr val="667EEA"/>
+                </a:solidFill>
+                <a:latin typeface="Inter"/>
+              </a:defRPr>
+            </a:pPr>
+            <a:r>
+              <a:t>~62%</a:t>
+            </a:r>
+          </a:p>
+          <a:p>
+            <a:pPr algn="ctr">
+              <a:defRPr sz="900">
+                <a:solidFill>
+                  <a:srgbClr val="94A3B8"/>
+                </a:solidFill>
+              </a:defRPr>
+            </a:pPr>
+            <a:r>
+              <a:t>+50%</a:t>
+            </a:r>
+          </a:p>
+        </p:txBody>
+      </p:sp>
+      <p:sp>
+        <p:nvSpPr>
+          <p:cNvPr id="6" name="Rounded Rectangle 5"/>
+          <p:cNvSpPr/>
+          <p:nvPr/>
+        </p:nvSpPr>
+        <p:spPr>
+          <a:xfrm>
+            <a:off x="5852159" y="1463040"/>
+            <a:ext cx="1828800" cy="1097280"/>
+          </a:xfrm>
+          <a:prstGeom prst="roundRect">
+            <a:avLst/>
+          </a:prstGeom>
+          <a:solidFill>
+            <a:srgbClr val="1A1A2E"/>
+          </a:solidFill>
+          <a:ln w="25400">
+            <a:solidFill>
+              <a:srgbClr val="EAB308"/>
+            </a:solidFill>
+          </a:ln>
+        </p:spPr>
+        <p:style>
+          <a:lnRef idx="1">
+            <a:schemeClr val="accent1"/>
+          </a:lnRef>
+          <a:fillRef idx="3">
+            <a:schemeClr val="accent1"/>
+          </a:fillRef>
+          <a:effectRef idx="2">
+            <a:schemeClr val="accent1"/>
+          </a:effectRef>
+          <a:fontRef idx="minor">
+            <a:schemeClr val="lt1"/>
+          </a:fontRef>
+        </p:style>
+        <p:txBody>
+          <a:bodyPr rtlCol="0" anchor="ctr" wrap="square"/>
+          <a:lstStyle/>
+          <a:p>
+            <a:pPr algn="ctr">
+              <a:defRPr sz="2400" b="1">
+                <a:solidFill>
+                  <a:srgbClr val="EAB308"/>
+                </a:solidFill>
+                <a:latin typeface="Inter"/>
+              </a:defRPr>
+            </a:pPr>
+            <a:r>
+              <a:t>~49%</a:t>
+            </a:r>
+          </a:p>
+          <a:p>
+            <a:pPr algn="ctr">
+              <a:defRPr sz="900">
+                <a:solidFill>
+                  <a:srgbClr val="94A3B8"/>
+                </a:solidFill>
+              </a:defRPr>
+            </a:pPr>
+            <a:r>
+              <a:t>Doubled</a:t>
+            </a:r>
+          </a:p>
+        </p:txBody>
+      </p:sp>
+      <p:sp>
+        <p:nvSpPr>
+          <p:cNvPr id="7" name="Rounded Rectangle 6"/>
+          <p:cNvSpPr/>
+          <p:nvPr/>
+        </p:nvSpPr>
+        <p:spPr>
+          <a:xfrm>
+            <a:off x="8412480" y="1463040"/>
+            <a:ext cx="1828800" cy="1097280"/>
+          </a:xfrm>
+          <a:prstGeom prst="roundRect">
+            <a:avLst/>
+          </a:prstGeom>
+          <a:solidFill>
+            <a:srgbClr val="1A1A2E"/>
+          </a:solidFill>
+          <a:ln w="25400">
+            <a:solidFill>
+              <a:srgbClr val="EF4444"/>
+            </a:solidFill>
+          </a:ln>
+        </p:spPr>
+        <p:style>
+          <a:lnRef idx="1">
+            <a:schemeClr val="accent1"/>
+          </a:lnRef>
+          <a:fillRef idx="3">
+            <a:schemeClr val="accent1"/>
+          </a:fillRef>
+          <a:effectRef idx="2">
+            <a:schemeClr val="accent1"/>
+          </a:effectRef>
+          <a:fontRef idx="minor">
+            <a:schemeClr val="lt1"/>
+          </a:fontRef>
+        </p:style>
+        <p:txBody>
+          <a:bodyPr rtlCol="0" anchor="ctr" wrap="square"/>
+          <a:lstStyle/>
+          <a:p>
+            <a:pPr algn="ctr">
+              <a:defRPr sz="2400" b="1">
+                <a:solidFill>
+                  <a:srgbClr val="EF4444"/>
+                </a:solidFill>
+                <a:latin typeface="Inter"/>
+              </a:defRPr>
+            </a:pPr>
+            <a:r>
+              <a:t>~24%</a:t>
+            </a:r>
+          </a:p>
+          <a:p>
+            <a:pPr algn="ctr">
+              <a:defRPr sz="900">
+                <a:solidFill>
+                  <a:srgbClr val="94A3B8"/>
+                </a:solidFill>
+              </a:defRPr>
+            </a:pPr>
+            <a:r>
+              <a:t>Tripled</a:t>
+            </a:r>
+          </a:p>
+        </p:txBody>
+      </p:sp>
+      <p:sp>
+        <p:nvSpPr>
+          <p:cNvPr id="8" name="TextBox 7"/>
           <p:cNvSpPr txBox="1"/>
           <p:nvPr/>
         </p:nvSpPr>
         <p:spPr>
           <a:xfrm>
-            <a:off x="731520" y="457200"/>
-            <a:ext cx="10058400" cy="914400"/>
+            <a:off x="731520" y="2926080"/>
+            <a:ext cx="10058400" cy="3200400"/>
           </a:xfrm>
           <a:prstGeom prst="rect">
             <a:avLst/>
@@ -5918,46 +7013,26 @@
           <a:lstStyle/>
           <a:p>
             <a:pPr>
-              <a:defRPr sz="2800" b="1">
-                <a:solidFill>
-                  <a:srgbClr val="FFFFFF"/>
-                </a:solidFill>
-                <a:latin typeface="Inter"/>
-              </a:defRPr>
-            </a:pPr>
-            <a:r>
-              <a:t>Sensitivity Analysis</a:t>
-            </a:r>
-          </a:p>
-        </p:txBody>
-      </p:sp>
-      <p:sp>
-        <p:nvSpPr>
-          <p:cNvPr id="5" name="TextBox 4"/>
-          <p:cNvSpPr txBox="1"/>
-          <p:nvPr/>
-        </p:nvSpPr>
-        <p:spPr>
-          <a:xfrm>
-            <a:off x="731520" y="1645920"/>
-            <a:ext cx="10058400" cy="4389120"/>
-          </a:xfrm>
-          <a:prstGeom prst="rect">
-            <a:avLst/>
-          </a:prstGeom>
-          <a:noFill/>
-        </p:spPr>
-        <p:txBody>
-          <a:bodyPr wrap="square">
-            <a:spAutoFit/>
-          </a:bodyPr>
-          <a:lstStyle/>
+              <a:spcAft>
+                <a:spcPts val="800"/>
+              </a:spcAft>
+              <a:defRPr sz="1400">
+                <a:solidFill>
+                  <a:srgbClr val="C0C8E0"/>
+                </a:solidFill>
+                <a:latin typeface="Roboto"/>
+              </a:defRPr>
+            </a:pPr>
+            <a:r>
+              <a:t>    Profitable in all cost scenarios through Year 5</a:t>
+            </a:r>
+          </a:p>
           <a:p>
             <a:pPr>
               <a:spcAft>
-                <a:spcPts val="1200"/>
+                <a:spcPts val="800"/>
               </a:spcAft>
-              <a:defRPr sz="1500">
+              <a:defRPr sz="1400">
                 <a:solidFill>
                   <a:srgbClr val="C0C8E0"/>
                 </a:solidFill>
@@ -5965,15 +7040,15 @@
               </a:defRPr>
             </a:pPr>
             <a:r>
-              <a:t>    Base Case: 74.9% margin, Month 2 break-even</a:t>
+              <a:t>    Revenue -20%: margin compressed but sustainable</a:t>
             </a:r>
           </a:p>
           <a:p>
             <a:pPr>
               <a:spcAft>
-                <a:spcPts val="1200"/>
+                <a:spcPts val="800"/>
               </a:spcAft>
-              <a:defRPr sz="1500">
+              <a:defRPr sz="1400">
                 <a:solidFill>
                   <a:srgbClr val="C0C8E0"/>
                 </a:solidFill>
@@ -5981,55 +7056,7 @@
               </a:defRPr>
             </a:pPr>
             <a:r>
-              <a:t>    Costs +50%: Margin shrinks but remains profitable</a:t>
-            </a:r>
-          </a:p>
-          <a:p>
-            <a:pPr>
-              <a:spcAft>
-                <a:spcPts val="1200"/>
-              </a:spcAft>
-              <a:defRPr sz="1500">
-                <a:solidFill>
-                  <a:srgbClr val="C0C8E0"/>
-                </a:solidFill>
-                <a:latin typeface="Roboto"/>
-              </a:defRPr>
-            </a:pPr>
-            <a:r>
-              <a:t>    Costs Doubled: Still positive annual net profit</a:t>
-            </a:r>
-          </a:p>
-          <a:p>
-            <a:pPr>
-              <a:spcAft>
-                <a:spcPts val="1200"/>
-              </a:spcAft>
-              <a:defRPr sz="1500">
-                <a:solidFill>
-                  <a:srgbClr val="C0C8E0"/>
-                </a:solidFill>
-                <a:latin typeface="Roboto"/>
-              </a:defRPr>
-            </a:pPr>
-            <a:r>
-              <a:t>    Revenue -20%: Margin compressed, breakeven delayed</a:t>
-            </a:r>
-          </a:p>
-          <a:p>
-            <a:pPr>
-              <a:spcAft>
-                <a:spcPts val="1200"/>
-              </a:spcAft>
-              <a:defRPr sz="1500">
-                <a:solidFill>
-                  <a:srgbClr val="C0C8E0"/>
-                </a:solidFill>
-                <a:latin typeface="Roboto"/>
-              </a:defRPr>
-            </a:pPr>
-            <a:r>
-              <a:t>    Full scenario modeling in attached spreadsheet</a:t>
+              <a:t>    All scenarios formula-driven from Inputs &amp; Assumptions</a:t>
             </a:r>
           </a:p>
         </p:txBody>
@@ -6111,8 +7138,8 @@
         </p:nvSpPr>
         <p:spPr>
           <a:xfrm>
-            <a:off x="8686800" y="6263640"/>
-            <a:ext cx="3200400" cy="228600"/>
+            <a:off x="731520" y="457200"/>
+            <a:ext cx="10058400" cy="914400"/>
           </a:xfrm>
           <a:prstGeom prst="rect">
             <a:avLst/>
@@ -6125,29 +7152,73 @@
           </a:bodyPr>
           <a:lstStyle/>
           <a:p>
-            <a:pPr algn="r">
-              <a:defRPr sz="700">
-                <a:solidFill>
-                  <a:srgbClr val="4A4A6A"/>
-                </a:solidFill>
-              </a:defRPr>
-            </a:pPr>
-            <a:r>
-              <a:t>Layout: horizontal_timeline</a:t>
-            </a:r>
-          </a:p>
-        </p:txBody>
-      </p:sp>
-      <p:sp>
-        <p:nvSpPr>
-          <p:cNvPr id="4" name="TextBox 3"/>
+            <a:pPr>
+              <a:defRPr sz="2800" b="1">
+                <a:solidFill>
+                  <a:srgbClr val="FFFFFF"/>
+                </a:solidFill>
+                <a:latin typeface="Inter"/>
+              </a:defRPr>
+            </a:pPr>
+            <a:r>
+              <a:t>Growth Roadmap</a:t>
+            </a:r>
+          </a:p>
+        </p:txBody>
+      </p:sp>
+      <p:sp>
+        <p:nvSpPr>
+          <p:cNvPr id="4" name="Oval 3"/>
+          <p:cNvSpPr/>
+          <p:nvPr/>
+        </p:nvSpPr>
+        <p:spPr>
+          <a:xfrm>
+            <a:off x="1097280" y="1828800"/>
+            <a:ext cx="274320" cy="274320"/>
+          </a:xfrm>
+          <a:prstGeom prst="ellipse">
+            <a:avLst/>
+          </a:prstGeom>
+          <a:solidFill>
+            <a:srgbClr val="10B981"/>
+          </a:solidFill>
+          <a:ln>
+            <a:noFill/>
+          </a:ln>
+        </p:spPr>
+        <p:style>
+          <a:lnRef idx="1">
+            <a:schemeClr val="accent1"/>
+          </a:lnRef>
+          <a:fillRef idx="3">
+            <a:schemeClr val="accent1"/>
+          </a:fillRef>
+          <a:effectRef idx="2">
+            <a:schemeClr val="accent1"/>
+          </a:effectRef>
+          <a:fontRef idx="minor">
+            <a:schemeClr val="lt1"/>
+          </a:fontRef>
+        </p:style>
+        <p:txBody>
+          <a:bodyPr rtlCol="0" anchor="ctr"/>
+          <a:lstStyle/>
+          <a:p>
+            <a:pPr algn="ctr"/>
+          </a:p>
+        </p:txBody>
+      </p:sp>
+      <p:sp>
+        <p:nvSpPr>
+          <p:cNvPr id="5" name="TextBox 4"/>
           <p:cNvSpPr txBox="1"/>
           <p:nvPr/>
         </p:nvSpPr>
         <p:spPr>
           <a:xfrm>
-            <a:off x="731520" y="457200"/>
-            <a:ext cx="10058400" cy="914400"/>
+            <a:off x="457200" y="2194560"/>
+            <a:ext cx="2011680" cy="274320"/>
           </a:xfrm>
           <a:prstGeom prst="rect">
             <a:avLst/>
@@ -6155,35 +7226,34 @@
           <a:noFill/>
         </p:spPr>
         <p:txBody>
-          <a:bodyPr wrap="square">
+          <a:bodyPr wrap="none">
             <a:spAutoFit/>
           </a:bodyPr>
           <a:lstStyle/>
           <a:p>
-            <a:pPr>
-              <a:defRPr sz="2800" b="1">
-                <a:solidFill>
-                  <a:srgbClr val="FFFFFF"/>
-                </a:solidFill>
-                <a:latin typeface="Inter"/>
-              </a:defRPr>
-            </a:pPr>
-            <a:r>
-              <a:t>Growth Roadmap</a:t>
-            </a:r>
-          </a:p>
-        </p:txBody>
-      </p:sp>
-      <p:sp>
-        <p:nvSpPr>
-          <p:cNvPr id="5" name="TextBox 4"/>
+            <a:pPr algn="ctr">
+              <a:defRPr sz="1200" b="1">
+                <a:solidFill>
+                  <a:srgbClr val="10B981"/>
+                </a:solidFill>
+              </a:defRPr>
+            </a:pPr>
+            <a:r>
+              <a:t>Q2 2026</a:t>
+            </a:r>
+          </a:p>
+        </p:txBody>
+      </p:sp>
+      <p:sp>
+        <p:nvSpPr>
+          <p:cNvPr id="6" name="TextBox 5"/>
           <p:cNvSpPr txBox="1"/>
           <p:nvPr/>
         </p:nvSpPr>
         <p:spPr>
           <a:xfrm>
-            <a:off x="731520" y="1645920"/>
-            <a:ext cx="10058400" cy="4389120"/>
+            <a:off x="457200" y="2560320"/>
+            <a:ext cx="2011680" cy="274320"/>
           </a:xfrm>
           <a:prstGeom prst="rect">
             <a:avLst/>
@@ -6191,72 +7261,425 @@
           <a:noFill/>
         </p:spPr>
         <p:txBody>
-          <a:bodyPr wrap="square">
+          <a:bodyPr wrap="none">
             <a:spAutoFit/>
           </a:bodyPr>
           <a:lstStyle/>
           <a:p>
-            <a:pPr>
-              <a:spcAft>
-                <a:spcPts val="1200"/>
-              </a:spcAft>
-              <a:defRPr sz="1500">
+            <a:pPr algn="ctr">
+              <a:defRPr sz="1000">
                 <a:solidFill>
                   <a:srgbClr val="C0C8E0"/>
                 </a:solidFill>
-                <a:latin typeface="Roboto"/>
-              </a:defRPr>
-            </a:pPr>
-            <a:r>
-              <a:t>    Q2 2026: Multi-tenant SaaS deployment</a:t>
-            </a:r>
-          </a:p>
-          <a:p>
-            <a:pPr>
-              <a:spcAft>
-                <a:spcPts val="1200"/>
-              </a:spcAft>
-              <a:defRPr sz="1500">
+              </a:defRPr>
+            </a:pPr>
+            <a:r>
+              <a:t>Multi-tenant SaaS</a:t>
+            </a:r>
+          </a:p>
+        </p:txBody>
+      </p:sp>
+      <p:sp>
+        <p:nvSpPr>
+          <p:cNvPr id="7" name="Oval 6"/>
+          <p:cNvSpPr/>
+          <p:nvPr/>
+        </p:nvSpPr>
+        <p:spPr>
+          <a:xfrm>
+            <a:off x="3840480" y="1828800"/>
+            <a:ext cx="274320" cy="274320"/>
+          </a:xfrm>
+          <a:prstGeom prst="ellipse">
+            <a:avLst/>
+          </a:prstGeom>
+          <a:solidFill>
+            <a:srgbClr val="667EEA"/>
+          </a:solidFill>
+          <a:ln>
+            <a:noFill/>
+          </a:ln>
+        </p:spPr>
+        <p:style>
+          <a:lnRef idx="1">
+            <a:schemeClr val="accent1"/>
+          </a:lnRef>
+          <a:fillRef idx="3">
+            <a:schemeClr val="accent1"/>
+          </a:fillRef>
+          <a:effectRef idx="2">
+            <a:schemeClr val="accent1"/>
+          </a:effectRef>
+          <a:fontRef idx="minor">
+            <a:schemeClr val="lt1"/>
+          </a:fontRef>
+        </p:style>
+        <p:txBody>
+          <a:bodyPr rtlCol="0" anchor="ctr"/>
+          <a:lstStyle/>
+          <a:p>
+            <a:pPr algn="ctr"/>
+          </a:p>
+        </p:txBody>
+      </p:sp>
+      <p:sp>
+        <p:nvSpPr>
+          <p:cNvPr id="8" name="TextBox 7"/>
+          <p:cNvSpPr txBox="1"/>
+          <p:nvPr/>
+        </p:nvSpPr>
+        <p:spPr>
+          <a:xfrm>
+            <a:off x="3200400" y="2194560"/>
+            <a:ext cx="2011680" cy="274320"/>
+          </a:xfrm>
+          <a:prstGeom prst="rect">
+            <a:avLst/>
+          </a:prstGeom>
+          <a:noFill/>
+        </p:spPr>
+        <p:txBody>
+          <a:bodyPr wrap="none">
+            <a:spAutoFit/>
+          </a:bodyPr>
+          <a:lstStyle/>
+          <a:p>
+            <a:pPr algn="ctr">
+              <a:defRPr sz="1200" b="1">
+                <a:solidFill>
+                  <a:srgbClr val="667EEA"/>
+                </a:solidFill>
+              </a:defRPr>
+            </a:pPr>
+            <a:r>
+              <a:t>Q3 2026</a:t>
+            </a:r>
+          </a:p>
+        </p:txBody>
+      </p:sp>
+      <p:sp>
+        <p:nvSpPr>
+          <p:cNvPr id="9" name="TextBox 8"/>
+          <p:cNvSpPr txBox="1"/>
+          <p:nvPr/>
+        </p:nvSpPr>
+        <p:spPr>
+          <a:xfrm>
+            <a:off x="3200400" y="2560320"/>
+            <a:ext cx="2011680" cy="274320"/>
+          </a:xfrm>
+          <a:prstGeom prst="rect">
+            <a:avLst/>
+          </a:prstGeom>
+          <a:noFill/>
+        </p:spPr>
+        <p:txBody>
+          <a:bodyPr wrap="none">
+            <a:spAutoFit/>
+          </a:bodyPr>
+          <a:lstStyle/>
+          <a:p>
+            <a:pPr algn="ctr">
+              <a:defRPr sz="1000">
                 <a:solidFill>
                   <a:srgbClr val="C0C8E0"/>
                 </a:solidFill>
-                <a:latin typeface="Roboto"/>
-              </a:defRPr>
-            </a:pPr>
-            <a:r>
-              <a:t>    Q3 2026: API marketplace for agent skills</a:t>
-            </a:r>
-          </a:p>
-          <a:p>
-            <a:pPr>
-              <a:spcAft>
-                <a:spcPts val="1200"/>
-              </a:spcAft>
-              <a:defRPr sz="1500">
+              </a:defRPr>
+            </a:pPr>
+            <a:r>
+              <a:t>API Marketplace</a:t>
+            </a:r>
+          </a:p>
+        </p:txBody>
+      </p:sp>
+      <p:sp>
+        <p:nvSpPr>
+          <p:cNvPr id="10" name="Oval 9"/>
+          <p:cNvSpPr/>
+          <p:nvPr/>
+        </p:nvSpPr>
+        <p:spPr>
+          <a:xfrm>
+            <a:off x="6583680" y="1828800"/>
+            <a:ext cx="274320" cy="274320"/>
+          </a:xfrm>
+          <a:prstGeom prst="ellipse">
+            <a:avLst/>
+          </a:prstGeom>
+          <a:solidFill>
+            <a:srgbClr val="EAB308"/>
+          </a:solidFill>
+          <a:ln>
+            <a:noFill/>
+          </a:ln>
+        </p:spPr>
+        <p:style>
+          <a:lnRef idx="1">
+            <a:schemeClr val="accent1"/>
+          </a:lnRef>
+          <a:fillRef idx="3">
+            <a:schemeClr val="accent1"/>
+          </a:fillRef>
+          <a:effectRef idx="2">
+            <a:schemeClr val="accent1"/>
+          </a:effectRef>
+          <a:fontRef idx="minor">
+            <a:schemeClr val="lt1"/>
+          </a:fontRef>
+        </p:style>
+        <p:txBody>
+          <a:bodyPr rtlCol="0" anchor="ctr"/>
+          <a:lstStyle/>
+          <a:p>
+            <a:pPr algn="ctr"/>
+          </a:p>
+        </p:txBody>
+      </p:sp>
+      <p:sp>
+        <p:nvSpPr>
+          <p:cNvPr id="11" name="TextBox 10"/>
+          <p:cNvSpPr txBox="1"/>
+          <p:nvPr/>
+        </p:nvSpPr>
+        <p:spPr>
+          <a:xfrm>
+            <a:off x="5943600" y="2194560"/>
+            <a:ext cx="2011680" cy="274320"/>
+          </a:xfrm>
+          <a:prstGeom prst="rect">
+            <a:avLst/>
+          </a:prstGeom>
+          <a:noFill/>
+        </p:spPr>
+        <p:txBody>
+          <a:bodyPr wrap="none">
+            <a:spAutoFit/>
+          </a:bodyPr>
+          <a:lstStyle/>
+          <a:p>
+            <a:pPr algn="ctr">
+              <a:defRPr sz="1200" b="1">
+                <a:solidFill>
+                  <a:srgbClr val="EAB308"/>
+                </a:solidFill>
+              </a:defRPr>
+            </a:pPr>
+            <a:r>
+              <a:t>Q4 2026</a:t>
+            </a:r>
+          </a:p>
+        </p:txBody>
+      </p:sp>
+      <p:sp>
+        <p:nvSpPr>
+          <p:cNvPr id="12" name="TextBox 11"/>
+          <p:cNvSpPr txBox="1"/>
+          <p:nvPr/>
+        </p:nvSpPr>
+        <p:spPr>
+          <a:xfrm>
+            <a:off x="5943600" y="2560320"/>
+            <a:ext cx="2011680" cy="274320"/>
+          </a:xfrm>
+          <a:prstGeom prst="rect">
+            <a:avLst/>
+          </a:prstGeom>
+          <a:noFill/>
+        </p:spPr>
+        <p:txBody>
+          <a:bodyPr wrap="none">
+            <a:spAutoFit/>
+          </a:bodyPr>
+          <a:lstStyle/>
+          <a:p>
+            <a:pPr algn="ctr">
+              <a:defRPr sz="1000">
                 <a:solidFill>
                   <a:srgbClr val="C0C8E0"/>
                 </a:solidFill>
-                <a:latin typeface="Roboto"/>
-              </a:defRPr>
-            </a:pPr>
-            <a:r>
-              <a:t>    Q4 2026: Enterprise compliance certification</a:t>
-            </a:r>
-          </a:p>
-          <a:p>
-            <a:pPr>
-              <a:spcAft>
-                <a:spcPts val="1200"/>
-              </a:spcAft>
-              <a:defRPr sz="1500">
+              </a:defRPr>
+            </a:pPr>
+            <a:r>
+              <a:t>Enterprise Cert</a:t>
+            </a:r>
+          </a:p>
+        </p:txBody>
+      </p:sp>
+      <p:sp>
+        <p:nvSpPr>
+          <p:cNvPr id="13" name="Oval 12"/>
+          <p:cNvSpPr/>
+          <p:nvPr/>
+        </p:nvSpPr>
+        <p:spPr>
+          <a:xfrm>
+            <a:off x="9326880" y="1828800"/>
+            <a:ext cx="274320" cy="274320"/>
+          </a:xfrm>
+          <a:prstGeom prst="ellipse">
+            <a:avLst/>
+          </a:prstGeom>
+          <a:solidFill>
+            <a:srgbClr val="667EEA"/>
+          </a:solidFill>
+          <a:ln>
+            <a:noFill/>
+          </a:ln>
+        </p:spPr>
+        <p:style>
+          <a:lnRef idx="1">
+            <a:schemeClr val="accent1"/>
+          </a:lnRef>
+          <a:fillRef idx="3">
+            <a:schemeClr val="accent1"/>
+          </a:fillRef>
+          <a:effectRef idx="2">
+            <a:schemeClr val="accent1"/>
+          </a:effectRef>
+          <a:fontRef idx="minor">
+            <a:schemeClr val="lt1"/>
+          </a:fontRef>
+        </p:style>
+        <p:txBody>
+          <a:bodyPr rtlCol="0" anchor="ctr"/>
+          <a:lstStyle/>
+          <a:p>
+            <a:pPr algn="ctr"/>
+          </a:p>
+        </p:txBody>
+      </p:sp>
+      <p:sp>
+        <p:nvSpPr>
+          <p:cNvPr id="14" name="TextBox 13"/>
+          <p:cNvSpPr txBox="1"/>
+          <p:nvPr/>
+        </p:nvSpPr>
+        <p:spPr>
+          <a:xfrm>
+            <a:off x="8686800" y="2194560"/>
+            <a:ext cx="2011680" cy="274320"/>
+          </a:xfrm>
+          <a:prstGeom prst="rect">
+            <a:avLst/>
+          </a:prstGeom>
+          <a:noFill/>
+        </p:spPr>
+        <p:txBody>
+          <a:bodyPr wrap="none">
+            <a:spAutoFit/>
+          </a:bodyPr>
+          <a:lstStyle/>
+          <a:p>
+            <a:pPr algn="ctr">
+              <a:defRPr sz="1200" b="1">
+                <a:solidFill>
+                  <a:srgbClr val="667EEA"/>
+                </a:solidFill>
+              </a:defRPr>
+            </a:pPr>
+            <a:r>
+              <a:t>2027</a:t>
+            </a:r>
+          </a:p>
+        </p:txBody>
+      </p:sp>
+      <p:sp>
+        <p:nvSpPr>
+          <p:cNvPr id="15" name="TextBox 14"/>
+          <p:cNvSpPr txBox="1"/>
+          <p:nvPr/>
+        </p:nvSpPr>
+        <p:spPr>
+          <a:xfrm>
+            <a:off x="8686800" y="2560320"/>
+            <a:ext cx="2011680" cy="274320"/>
+          </a:xfrm>
+          <a:prstGeom prst="rect">
+            <a:avLst/>
+          </a:prstGeom>
+          <a:noFill/>
+        </p:spPr>
+        <p:txBody>
+          <a:bodyPr wrap="none">
+            <a:spAutoFit/>
+          </a:bodyPr>
+          <a:lstStyle/>
+          <a:p>
+            <a:pPr algn="ctr">
+              <a:defRPr sz="1000">
                 <a:solidFill>
                   <a:srgbClr val="C0C8E0"/>
                 </a:solidFill>
-                <a:latin typeface="Roboto"/>
-              </a:defRPr>
-            </a:pPr>
-            <a:r>
-              <a:t>    2027: International expansion</a:t>
+              </a:defRPr>
+            </a:pPr>
+            <a:r>
+              <a:t>International</a:t>
+            </a:r>
+          </a:p>
+        </p:txBody>
+      </p:sp>
+      <p:sp>
+        <p:nvSpPr>
+          <p:cNvPr id="16" name="Rounded Rectangle 15"/>
+          <p:cNvSpPr/>
+          <p:nvPr/>
+        </p:nvSpPr>
+        <p:spPr>
+          <a:xfrm>
+            <a:off x="731520" y="3474720"/>
+            <a:ext cx="10058400" cy="1097280"/>
+          </a:xfrm>
+          <a:prstGeom prst="roundRect">
+            <a:avLst/>
+          </a:prstGeom>
+          <a:solidFill>
+            <a:srgbClr val="2D0A0A"/>
+          </a:solidFill>
+          <a:ln w="25400">
+            <a:solidFill>
+              <a:srgbClr val="EF4444"/>
+            </a:solidFill>
+          </a:ln>
+        </p:spPr>
+        <p:style>
+          <a:lnRef idx="1">
+            <a:schemeClr val="accent1"/>
+          </a:lnRef>
+          <a:fillRef idx="3">
+            <a:schemeClr val="accent1"/>
+          </a:fillRef>
+          <a:effectRef idx="2">
+            <a:schemeClr val="accent1"/>
+          </a:effectRef>
+          <a:fontRef idx="minor">
+            <a:schemeClr val="lt1"/>
+          </a:fontRef>
+        </p:style>
+        <p:txBody>
+          <a:bodyPr rtlCol="0" anchor="ctr"/>
+          <a:lstStyle/>
+          <a:p>
+            <a:pPr algn="ctr">
+              <a:defRPr sz="1400" b="1">
+                <a:solidFill>
+                  <a:srgbClr val="EF4444"/>
+                </a:solidFill>
+              </a:defRPr>
+            </a:pPr>
+            <a:r>
+              <a:t>HIGH-PRIORITY: n8n Reliability Upgrade</a:t>
+            </a:r>
+          </a:p>
+          <a:p>
+            <a:pPr algn="ctr">
+              <a:defRPr sz="1100">
+                <a:solidFill>
+                  <a:srgbClr val="FCA5A5"/>
+                </a:solidFill>
+              </a:defRPr>
+            </a:pPr>
+            <a:r>
+              <a:t>Auto-Heal applied: Prune 48h + Batch 50 → Projected 98.3% → 12% failure rate</a:t>
             </a:r>
           </a:p>
         </p:txBody>
@@ -6338,8 +7761,8 @@
         </p:nvSpPr>
         <p:spPr>
           <a:xfrm>
-            <a:off x="8686800" y="6263640"/>
-            <a:ext cx="3200400" cy="228600"/>
+            <a:off x="731520" y="2286000"/>
+            <a:ext cx="10058400" cy="914400"/>
           </a:xfrm>
           <a:prstGeom prst="rect">
             <a:avLst/>
@@ -6352,15 +7775,16 @@
           </a:bodyPr>
           <a:lstStyle/>
           <a:p>
-            <a:pPr algn="r">
-              <a:defRPr sz="700">
-                <a:solidFill>
-                  <a:srgbClr val="4A4A6A"/>
-                </a:solidFill>
-              </a:defRPr>
-            </a:pPr>
-            <a:r>
-              <a:t>Layout: center_minimal</a:t>
+            <a:pPr>
+              <a:defRPr sz="3600" b="1">
+                <a:solidFill>
+                  <a:srgbClr val="FFFFFF"/>
+                </a:solidFill>
+                <a:latin typeface="Inter"/>
+              </a:defRPr>
+            </a:pPr>
+            <a:r>
+              <a:t>Thank You</a:t>
             </a:r>
           </a:p>
         </p:txBody>
@@ -6373,43 +7797,7 @@
         </p:nvSpPr>
         <p:spPr>
           <a:xfrm>
-            <a:off x="731520" y="457200"/>
-            <a:ext cx="10058400" cy="914400"/>
-          </a:xfrm>
-          <a:prstGeom prst="rect">
-            <a:avLst/>
-          </a:prstGeom>
-          <a:noFill/>
-        </p:spPr>
-        <p:txBody>
-          <a:bodyPr wrap="square">
-            <a:spAutoFit/>
-          </a:bodyPr>
-          <a:lstStyle/>
-          <a:p>
-            <a:pPr>
-              <a:defRPr sz="2800" b="1">
-                <a:solidFill>
-                  <a:srgbClr val="FFFFFF"/>
-                </a:solidFill>
-                <a:latin typeface="Inter"/>
-              </a:defRPr>
-            </a:pPr>
-            <a:r>
-              <a:t>Thank You</a:t>
-            </a:r>
-          </a:p>
-        </p:txBody>
-      </p:sp>
-      <p:sp>
-        <p:nvSpPr>
-          <p:cNvPr id="5" name="TextBox 4"/>
-          <p:cNvSpPr txBox="1"/>
-          <p:nvPr/>
-        </p:nvSpPr>
-        <p:spPr>
-          <a:xfrm>
-            <a:off x="731520" y="1554480"/>
+            <a:off x="731520" y="3200400"/>
             <a:ext cx="10058400" cy="548640"/>
           </a:xfrm>
           <a:prstGeom prst="rect">
@@ -6423,12 +7811,11 @@
           </a:bodyPr>
           <a:lstStyle/>
           <a:p>
-            <a:pPr>
+            <a:pPr algn="ctr">
               <a:defRPr sz="1600">
                 <a:solidFill>
-                  <a:srgbClr val="64748B"/>
-                </a:solidFill>
-                <a:latin typeface="Roboto"/>
+                  <a:srgbClr val="94A3B8"/>
+                </a:solidFill>
               </a:defRPr>
             </a:pPr>
             <a:r>
